--- a/day2-deck/decks/Metric Explainers - Review.pptx
+++ b/day2-deck/decks/Metric Explainers - Review.pptx
@@ -2099,7 +2099,7 @@
         <p:spPr>
           <a:xfrm>
             <a:off x="457200" y="2340864"/>
-            <a:ext cx="4343400" cy="3511296"/>
+            <a:ext cx="4343400" cy="3648456"/>
           </a:xfrm>
           <a:prstGeom prst="rect">
             <a:avLst/>
@@ -2119,7 +2119,7 @@
         <p:spPr>
           <a:xfrm>
             <a:off x="4937760" y="2340864"/>
-            <a:ext cx="6793992" cy="3511296"/>
+            <a:ext cx="6793992" cy="3648456"/>
           </a:xfrm>
           <a:prstGeom prst="rect">
             <a:avLst/>
@@ -2217,7 +2217,7 @@
         <p:spPr>
           <a:xfrm>
             <a:off x="658368" y="2843784"/>
-            <a:ext cx="3977640" cy="2871216"/>
+            <a:ext cx="3977640" cy="3008376"/>
           </a:xfrm>
           <a:prstGeom prst="rect">
             <a:avLst/>
@@ -2302,7 +2302,7 @@
         <p:spPr>
           <a:xfrm>
             <a:off x="5138928" y="2843784"/>
-            <a:ext cx="45720" cy="862584"/>
+            <a:ext cx="45720" cy="908304"/>
           </a:xfrm>
           <a:prstGeom prst="rect">
             <a:avLst/>
@@ -2322,7 +2322,7 @@
         <p:spPr>
           <a:xfrm>
             <a:off x="5266944" y="2843784"/>
-            <a:ext cx="2962656" cy="862584"/>
+            <a:ext cx="2962656" cy="908304"/>
           </a:xfrm>
           <a:prstGeom prst="rect">
             <a:avLst/>
@@ -2378,7 +2378,7 @@
         <p:spPr>
           <a:xfrm>
             <a:off x="8394192" y="2843784"/>
-            <a:ext cx="45720" cy="862584"/>
+            <a:ext cx="45720" cy="908304"/>
           </a:xfrm>
           <a:prstGeom prst="rect">
             <a:avLst/>
@@ -2398,7 +2398,7 @@
         <p:spPr>
           <a:xfrm>
             <a:off x="8522208" y="2843784"/>
-            <a:ext cx="2962656" cy="862584"/>
+            <a:ext cx="2962656" cy="908304"/>
           </a:xfrm>
           <a:prstGeom prst="rect">
             <a:avLst/>
@@ -2453,8 +2453,8 @@
         </p:nvSpPr>
         <p:spPr>
           <a:xfrm>
-            <a:off x="5138928" y="3816096"/>
-            <a:ext cx="45720" cy="862584"/>
+            <a:off x="5138928" y="3861816"/>
+            <a:ext cx="45720" cy="908304"/>
           </a:xfrm>
           <a:prstGeom prst="rect">
             <a:avLst/>
@@ -2473,8 +2473,8 @@
         </p:nvSpPr>
         <p:spPr>
           <a:xfrm>
-            <a:off x="5266944" y="3816096"/>
-            <a:ext cx="2962656" cy="862584"/>
+            <a:off x="5266944" y="3861816"/>
+            <a:ext cx="2962656" cy="908304"/>
           </a:xfrm>
           <a:prstGeom prst="rect">
             <a:avLst/>
@@ -2529,8 +2529,8 @@
         </p:nvSpPr>
         <p:spPr>
           <a:xfrm>
-            <a:off x="8394192" y="3816096"/>
-            <a:ext cx="45720" cy="862584"/>
+            <a:off x="8394192" y="3861816"/>
+            <a:ext cx="45720" cy="908304"/>
           </a:xfrm>
           <a:prstGeom prst="rect">
             <a:avLst/>
@@ -2549,8 +2549,8 @@
         </p:nvSpPr>
         <p:spPr>
           <a:xfrm>
-            <a:off x="8522208" y="3816096"/>
-            <a:ext cx="2962656" cy="862584"/>
+            <a:off x="8522208" y="3861816"/>
+            <a:ext cx="2962656" cy="908304"/>
           </a:xfrm>
           <a:prstGeom prst="rect">
             <a:avLst/>
@@ -2605,8 +2605,8 @@
         </p:nvSpPr>
         <p:spPr>
           <a:xfrm>
-            <a:off x="5138928" y="4788408"/>
-            <a:ext cx="45720" cy="862584"/>
+            <a:off x="5138928" y="4879848"/>
+            <a:ext cx="45720" cy="908304"/>
           </a:xfrm>
           <a:prstGeom prst="rect">
             <a:avLst/>
@@ -2625,8 +2625,8 @@
         </p:nvSpPr>
         <p:spPr>
           <a:xfrm>
-            <a:off x="5266944" y="4788408"/>
-            <a:ext cx="2962656" cy="862584"/>
+            <a:off x="5266944" y="4879848"/>
+            <a:ext cx="2962656" cy="908304"/>
           </a:xfrm>
           <a:prstGeom prst="rect">
             <a:avLst/>
@@ -2681,8 +2681,8 @@
         </p:nvSpPr>
         <p:spPr>
           <a:xfrm>
-            <a:off x="8394192" y="4788408"/>
-            <a:ext cx="45720" cy="862584"/>
+            <a:off x="8394192" y="4879848"/>
+            <a:ext cx="45720" cy="908304"/>
           </a:xfrm>
           <a:prstGeom prst="rect">
             <a:avLst/>
@@ -2701,8 +2701,8 @@
         </p:nvSpPr>
         <p:spPr>
           <a:xfrm>
-            <a:off x="8522208" y="4788408"/>
-            <a:ext cx="2962656" cy="862584"/>
+            <a:off x="8522208" y="4879848"/>
+            <a:ext cx="2962656" cy="908304"/>
           </a:xfrm>
           <a:prstGeom prst="rect">
             <a:avLst/>
@@ -2757,8 +2757,8 @@
         </p:nvSpPr>
         <p:spPr>
           <a:xfrm>
-            <a:off x="457200" y="5961888"/>
-            <a:ext cx="11274552" cy="548640"/>
+            <a:off x="457200" y="6126480"/>
+            <a:ext cx="11274552" cy="371856"/>
           </a:xfrm>
           <a:prstGeom prst="rect">
             <a:avLst/>
@@ -2777,8 +2777,8 @@
         </p:nvSpPr>
         <p:spPr>
           <a:xfrm>
-            <a:off x="658368" y="5980176"/>
-            <a:ext cx="10927080" cy="512064"/>
+            <a:off x="658368" y="6144768"/>
+            <a:ext cx="10927080" cy="335280"/>
           </a:xfrm>
           <a:prstGeom prst="rect">
             <a:avLst/>
@@ -3462,7 +3462,7 @@
         <p:spPr>
           <a:xfrm>
             <a:off x="457200" y="2907792"/>
-            <a:ext cx="4343400" cy="2944368"/>
+            <a:ext cx="4343400" cy="3081528"/>
           </a:xfrm>
           <a:prstGeom prst="rect">
             <a:avLst/>
@@ -3482,7 +3482,7 @@
         <p:spPr>
           <a:xfrm>
             <a:off x="4937760" y="2907792"/>
-            <a:ext cx="6793992" cy="2944368"/>
+            <a:ext cx="6793992" cy="3081528"/>
           </a:xfrm>
           <a:prstGeom prst="rect">
             <a:avLst/>
@@ -3580,7 +3580,7 @@
         <p:spPr>
           <a:xfrm>
             <a:off x="658368" y="3410712"/>
-            <a:ext cx="3977640" cy="2304288"/>
+            <a:ext cx="3977640" cy="2441448"/>
           </a:xfrm>
           <a:prstGeom prst="rect">
             <a:avLst/>
@@ -3665,7 +3665,7 @@
         <p:spPr>
           <a:xfrm>
             <a:off x="5138928" y="3410712"/>
-            <a:ext cx="45720" cy="1065276"/>
+            <a:ext cx="45720" cy="1133856"/>
           </a:xfrm>
           <a:prstGeom prst="rect">
             <a:avLst/>
@@ -3685,7 +3685,7 @@
         <p:spPr>
           <a:xfrm>
             <a:off x="5266944" y="3410712"/>
-            <a:ext cx="2962656" cy="1065276"/>
+            <a:ext cx="2962656" cy="1133856"/>
           </a:xfrm>
           <a:prstGeom prst="rect">
             <a:avLst/>
@@ -3741,7 +3741,7 @@
         <p:spPr>
           <a:xfrm>
             <a:off x="8394192" y="3410712"/>
-            <a:ext cx="45720" cy="1065276"/>
+            <a:ext cx="45720" cy="1133856"/>
           </a:xfrm>
           <a:prstGeom prst="rect">
             <a:avLst/>
@@ -3761,7 +3761,7 @@
         <p:spPr>
           <a:xfrm>
             <a:off x="8522208" y="3410712"/>
-            <a:ext cx="2962656" cy="1065276"/>
+            <a:ext cx="2962656" cy="1133856"/>
           </a:xfrm>
           <a:prstGeom prst="rect">
             <a:avLst/>
@@ -3816,8 +3816,8 @@
         </p:nvSpPr>
         <p:spPr>
           <a:xfrm>
-            <a:off x="5138928" y="4585716"/>
-            <a:ext cx="45720" cy="1065276"/>
+            <a:off x="5138928" y="4654296"/>
+            <a:ext cx="45720" cy="1133856"/>
           </a:xfrm>
           <a:prstGeom prst="rect">
             <a:avLst/>
@@ -3836,8 +3836,8 @@
         </p:nvSpPr>
         <p:spPr>
           <a:xfrm>
-            <a:off x="5266944" y="4585716"/>
-            <a:ext cx="2962656" cy="1065276"/>
+            <a:off x="5266944" y="4654296"/>
+            <a:ext cx="2962656" cy="1133856"/>
           </a:xfrm>
           <a:prstGeom prst="rect">
             <a:avLst/>
@@ -3892,8 +3892,8 @@
         </p:nvSpPr>
         <p:spPr>
           <a:xfrm>
-            <a:off x="8394192" y="4585716"/>
-            <a:ext cx="45720" cy="1065276"/>
+            <a:off x="8394192" y="4654296"/>
+            <a:ext cx="45720" cy="1133856"/>
           </a:xfrm>
           <a:prstGeom prst="rect">
             <a:avLst/>
@@ -3912,8 +3912,8 @@
         </p:nvSpPr>
         <p:spPr>
           <a:xfrm>
-            <a:off x="8522208" y="4585716"/>
-            <a:ext cx="2962656" cy="1065276"/>
+            <a:off x="8522208" y="4654296"/>
+            <a:ext cx="2962656" cy="1133856"/>
           </a:xfrm>
           <a:prstGeom prst="rect">
             <a:avLst/>
@@ -3968,8 +3968,8 @@
         </p:nvSpPr>
         <p:spPr>
           <a:xfrm>
-            <a:off x="457200" y="5961888"/>
-            <a:ext cx="11274552" cy="548640"/>
+            <a:off x="457200" y="6126480"/>
+            <a:ext cx="11274552" cy="348996"/>
           </a:xfrm>
           <a:prstGeom prst="rect">
             <a:avLst/>
@@ -3988,8 +3988,8 @@
         </p:nvSpPr>
         <p:spPr>
           <a:xfrm>
-            <a:off x="658368" y="5980176"/>
-            <a:ext cx="10927080" cy="512064"/>
+            <a:off x="658368" y="6144768"/>
+            <a:ext cx="10927080" cy="312420"/>
           </a:xfrm>
           <a:prstGeom prst="rect">
             <a:avLst/>
@@ -4005,7 +4005,7 @@
               <a:buNone/>
             </a:pPr>
             <a:r>
-              <a:rPr lang="en-US" sz="1600" b="1" dirty="0">
+              <a:rPr lang="en-US" sz="1450" b="1" dirty="0">
                 <a:solidFill>
                   <a:srgbClr val="0B2C4A"/>
                 </a:solidFill>
@@ -4015,7 +4015,7 @@
               </a:rPr>
               <a:t>All four rose 1.2-1.4 pts and beat 2025 every month. Balance is furthest off, at 8.3%: 18,493 short of 15%.</a:t>
             </a:r>
-            <a:endParaRPr lang="en-US" sz="1600" dirty="0"/>
+            <a:endParaRPr lang="en-US" sz="1450" dirty="0"/>
           </a:p>
         </p:txBody>
       </p:sp>
@@ -4593,7 +4593,7 @@
         <p:spPr>
           <a:xfrm>
             <a:off x="457200" y="2907792"/>
-            <a:ext cx="4343400" cy="2944368"/>
+            <a:ext cx="4343400" cy="3081528"/>
           </a:xfrm>
           <a:prstGeom prst="rect">
             <a:avLst/>
@@ -4613,7 +4613,7 @@
         <p:spPr>
           <a:xfrm>
             <a:off x="4937760" y="2907792"/>
-            <a:ext cx="6793992" cy="2944368"/>
+            <a:ext cx="6793992" cy="3081528"/>
           </a:xfrm>
           <a:prstGeom prst="rect">
             <a:avLst/>
@@ -4711,7 +4711,7 @@
         <p:spPr>
           <a:xfrm>
             <a:off x="658368" y="3410712"/>
-            <a:ext cx="3977640" cy="2304288"/>
+            <a:ext cx="3977640" cy="2441448"/>
           </a:xfrm>
           <a:prstGeom prst="rect">
             <a:avLst/>
@@ -4796,7 +4796,7 @@
         <p:spPr>
           <a:xfrm>
             <a:off x="5138928" y="3410712"/>
-            <a:ext cx="45720" cy="1065276"/>
+            <a:ext cx="45720" cy="1133856"/>
           </a:xfrm>
           <a:prstGeom prst="rect">
             <a:avLst/>
@@ -4816,7 +4816,7 @@
         <p:spPr>
           <a:xfrm>
             <a:off x="5266944" y="3410712"/>
-            <a:ext cx="1877568" cy="1065276"/>
+            <a:ext cx="1877568" cy="1133856"/>
           </a:xfrm>
           <a:prstGeom prst="rect">
             <a:avLst/>
@@ -4872,7 +4872,7 @@
         <p:spPr>
           <a:xfrm>
             <a:off x="7309104" y="3410712"/>
-            <a:ext cx="45720" cy="1065276"/>
+            <a:ext cx="45720" cy="1133856"/>
           </a:xfrm>
           <a:prstGeom prst="rect">
             <a:avLst/>
@@ -4892,7 +4892,7 @@
         <p:spPr>
           <a:xfrm>
             <a:off x="7437120" y="3410712"/>
-            <a:ext cx="1877568" cy="1065276"/>
+            <a:ext cx="1877568" cy="1133856"/>
           </a:xfrm>
           <a:prstGeom prst="rect">
             <a:avLst/>
@@ -4948,7 +4948,7 @@
         <p:spPr>
           <a:xfrm>
             <a:off x="9479280" y="3410712"/>
-            <a:ext cx="45720" cy="1065276"/>
+            <a:ext cx="45720" cy="1133856"/>
           </a:xfrm>
           <a:prstGeom prst="rect">
             <a:avLst/>
@@ -4968,7 +4968,7 @@
         <p:spPr>
           <a:xfrm>
             <a:off x="9607296" y="3410712"/>
-            <a:ext cx="1877568" cy="1065276"/>
+            <a:ext cx="1877568" cy="1133856"/>
           </a:xfrm>
           <a:prstGeom prst="rect">
             <a:avLst/>
@@ -5023,8 +5023,8 @@
         </p:nvSpPr>
         <p:spPr>
           <a:xfrm>
-            <a:off x="5138928" y="4585716"/>
-            <a:ext cx="45720" cy="1065276"/>
+            <a:off x="5138928" y="4654296"/>
+            <a:ext cx="45720" cy="1133856"/>
           </a:xfrm>
           <a:prstGeom prst="rect">
             <a:avLst/>
@@ -5043,8 +5043,8 @@
         </p:nvSpPr>
         <p:spPr>
           <a:xfrm>
-            <a:off x="5266944" y="4585716"/>
-            <a:ext cx="1877568" cy="1065276"/>
+            <a:off x="5266944" y="4654296"/>
+            <a:ext cx="1877568" cy="1133856"/>
           </a:xfrm>
           <a:prstGeom prst="rect">
             <a:avLst/>
@@ -5099,8 +5099,8 @@
         </p:nvSpPr>
         <p:spPr>
           <a:xfrm>
-            <a:off x="7309104" y="4585716"/>
-            <a:ext cx="45720" cy="1065276"/>
+            <a:off x="7309104" y="4654296"/>
+            <a:ext cx="45720" cy="1133856"/>
           </a:xfrm>
           <a:prstGeom prst="rect">
             <a:avLst/>
@@ -5119,8 +5119,8 @@
         </p:nvSpPr>
         <p:spPr>
           <a:xfrm>
-            <a:off x="7437120" y="4585716"/>
-            <a:ext cx="1877568" cy="1065276"/>
+            <a:off x="7437120" y="4654296"/>
+            <a:ext cx="1877568" cy="1133856"/>
           </a:xfrm>
           <a:prstGeom prst="rect">
             <a:avLst/>
@@ -5175,8 +5175,8 @@
         </p:nvSpPr>
         <p:spPr>
           <a:xfrm>
-            <a:off x="9479280" y="4585716"/>
-            <a:ext cx="45720" cy="1065276"/>
+            <a:off x="9479280" y="4654296"/>
+            <a:ext cx="45720" cy="1133856"/>
           </a:xfrm>
           <a:prstGeom prst="rect">
             <a:avLst/>
@@ -5195,8 +5195,8 @@
         </p:nvSpPr>
         <p:spPr>
           <a:xfrm>
-            <a:off x="9607296" y="4585716"/>
-            <a:ext cx="1877568" cy="1065276"/>
+            <a:off x="9607296" y="4654296"/>
+            <a:ext cx="1877568" cy="1133856"/>
           </a:xfrm>
           <a:prstGeom prst="rect">
             <a:avLst/>
@@ -5251,8 +5251,8 @@
         </p:nvSpPr>
         <p:spPr>
           <a:xfrm>
-            <a:off x="457200" y="5961888"/>
-            <a:ext cx="11274552" cy="548640"/>
+            <a:off x="457200" y="6126480"/>
+            <a:ext cx="11274552" cy="371856"/>
           </a:xfrm>
           <a:prstGeom prst="rect">
             <a:avLst/>
@@ -5271,8 +5271,8 @@
         </p:nvSpPr>
         <p:spPr>
           <a:xfrm>
-            <a:off x="658368" y="5980176"/>
-            <a:ext cx="10927080" cy="512064"/>
+            <a:off x="658368" y="6144768"/>
+            <a:ext cx="10927080" cy="335280"/>
           </a:xfrm>
           <a:prstGeom prst="rect">
             <a:avLst/>
@@ -5569,7 +5569,7 @@
         <p:spPr>
           <a:xfrm>
             <a:off x="457200" y="2340864"/>
-            <a:ext cx="4343400" cy="3511296"/>
+            <a:ext cx="4343400" cy="3648456"/>
           </a:xfrm>
           <a:prstGeom prst="rect">
             <a:avLst/>
@@ -5589,7 +5589,7 @@
         <p:spPr>
           <a:xfrm>
             <a:off x="4937760" y="2340864"/>
-            <a:ext cx="6793992" cy="3511296"/>
+            <a:ext cx="6793992" cy="3648456"/>
           </a:xfrm>
           <a:prstGeom prst="rect">
             <a:avLst/>
@@ -5687,7 +5687,7 @@
         <p:spPr>
           <a:xfrm>
             <a:off x="658368" y="2843784"/>
-            <a:ext cx="3977640" cy="2871216"/>
+            <a:ext cx="3977640" cy="3008376"/>
           </a:xfrm>
           <a:prstGeom prst="rect">
             <a:avLst/>
@@ -5772,7 +5772,7 @@
         <p:spPr>
           <a:xfrm>
             <a:off x="5138928" y="2843784"/>
-            <a:ext cx="45720" cy="862584"/>
+            <a:ext cx="45720" cy="908304"/>
           </a:xfrm>
           <a:prstGeom prst="rect">
             <a:avLst/>
@@ -5792,7 +5792,7 @@
         <p:spPr>
           <a:xfrm>
             <a:off x="5266944" y="2843784"/>
-            <a:ext cx="2962656" cy="862584"/>
+            <a:ext cx="2962656" cy="908304"/>
           </a:xfrm>
           <a:prstGeom prst="rect">
             <a:avLst/>
@@ -5848,7 +5848,7 @@
         <p:spPr>
           <a:xfrm>
             <a:off x="8394192" y="2843784"/>
-            <a:ext cx="45720" cy="862584"/>
+            <a:ext cx="45720" cy="908304"/>
           </a:xfrm>
           <a:prstGeom prst="rect">
             <a:avLst/>
@@ -5868,7 +5868,7 @@
         <p:spPr>
           <a:xfrm>
             <a:off x="8522208" y="2843784"/>
-            <a:ext cx="2962656" cy="862584"/>
+            <a:ext cx="2962656" cy="908304"/>
           </a:xfrm>
           <a:prstGeom prst="rect">
             <a:avLst/>
@@ -5923,8 +5923,8 @@
         </p:nvSpPr>
         <p:spPr>
           <a:xfrm>
-            <a:off x="5138928" y="3816096"/>
-            <a:ext cx="45720" cy="862584"/>
+            <a:off x="5138928" y="3861816"/>
+            <a:ext cx="45720" cy="908304"/>
           </a:xfrm>
           <a:prstGeom prst="rect">
             <a:avLst/>
@@ -5943,8 +5943,8 @@
         </p:nvSpPr>
         <p:spPr>
           <a:xfrm>
-            <a:off x="5266944" y="3816096"/>
-            <a:ext cx="2962656" cy="862584"/>
+            <a:off x="5266944" y="3861816"/>
+            <a:ext cx="2962656" cy="908304"/>
           </a:xfrm>
           <a:prstGeom prst="rect">
             <a:avLst/>
@@ -5999,8 +5999,8 @@
         </p:nvSpPr>
         <p:spPr>
           <a:xfrm>
-            <a:off x="8394192" y="3816096"/>
-            <a:ext cx="45720" cy="862584"/>
+            <a:off x="8394192" y="3861816"/>
+            <a:ext cx="45720" cy="908304"/>
           </a:xfrm>
           <a:prstGeom prst="rect">
             <a:avLst/>
@@ -6019,8 +6019,8 @@
         </p:nvSpPr>
         <p:spPr>
           <a:xfrm>
-            <a:off x="8522208" y="3816096"/>
-            <a:ext cx="2962656" cy="862584"/>
+            <a:off x="8522208" y="3861816"/>
+            <a:ext cx="2962656" cy="908304"/>
           </a:xfrm>
           <a:prstGeom prst="rect">
             <a:avLst/>
@@ -6075,8 +6075,8 @@
         </p:nvSpPr>
         <p:spPr>
           <a:xfrm>
-            <a:off x="5138928" y="4788408"/>
-            <a:ext cx="45720" cy="862584"/>
+            <a:off x="5138928" y="4879848"/>
+            <a:ext cx="45720" cy="908304"/>
           </a:xfrm>
           <a:prstGeom prst="rect">
             <a:avLst/>
@@ -6095,8 +6095,8 @@
         </p:nvSpPr>
         <p:spPr>
           <a:xfrm>
-            <a:off x="5266944" y="4788408"/>
-            <a:ext cx="2962656" cy="862584"/>
+            <a:off x="5266944" y="4879848"/>
+            <a:ext cx="2962656" cy="908304"/>
           </a:xfrm>
           <a:prstGeom prst="rect">
             <a:avLst/>
@@ -6151,8 +6151,8 @@
         </p:nvSpPr>
         <p:spPr>
           <a:xfrm>
-            <a:off x="8394192" y="4788408"/>
-            <a:ext cx="45720" cy="862584"/>
+            <a:off x="8394192" y="4879848"/>
+            <a:ext cx="45720" cy="908304"/>
           </a:xfrm>
           <a:prstGeom prst="rect">
             <a:avLst/>
@@ -6171,8 +6171,8 @@
         </p:nvSpPr>
         <p:spPr>
           <a:xfrm>
-            <a:off x="8522208" y="4788408"/>
-            <a:ext cx="2962656" cy="862584"/>
+            <a:off x="8522208" y="4879848"/>
+            <a:ext cx="2962656" cy="908304"/>
           </a:xfrm>
           <a:prstGeom prst="rect">
             <a:avLst/>
@@ -6227,8 +6227,8 @@
         </p:nvSpPr>
         <p:spPr>
           <a:xfrm>
-            <a:off x="457200" y="5961888"/>
-            <a:ext cx="11274552" cy="548640"/>
+            <a:off x="457200" y="6126480"/>
+            <a:ext cx="11274552" cy="356616"/>
           </a:xfrm>
           <a:prstGeom prst="rect">
             <a:avLst/>
@@ -6247,8 +6247,8 @@
         </p:nvSpPr>
         <p:spPr>
           <a:xfrm>
-            <a:off x="658368" y="5980176"/>
-            <a:ext cx="10927080" cy="512064"/>
+            <a:off x="658368" y="6144768"/>
+            <a:ext cx="10927080" cy="320040"/>
           </a:xfrm>
           <a:prstGeom prst="rect">
             <a:avLst/>
@@ -6264,7 +6264,7 @@
               <a:buNone/>
             </a:pPr>
             <a:r>
-              <a:rPr lang="en-US" sz="1600" b="1" dirty="0">
+              <a:rPr lang="en-US" sz="1500" b="1" dirty="0">
                 <a:solidFill>
                   <a:srgbClr val="0B2C4A"/>
                 </a:solidFill>
@@ -6274,7 +6274,7 @@
               </a:rPr>
               <a:t>The rules keep non-tech time and data errors out of the numbers, and every store is measured the same way.</a:t>
             </a:r>
-            <a:endParaRPr lang="en-US" sz="1600" dirty="0"/>
+            <a:endParaRPr lang="en-US" sz="1500" dirty="0"/>
           </a:p>
         </p:txBody>
       </p:sp>
@@ -6772,7 +6772,7 @@
         <p:spPr>
           <a:xfrm>
             <a:off x="457200" y="2907792"/>
-            <a:ext cx="4343400" cy="2944368"/>
+            <a:ext cx="4343400" cy="3081528"/>
           </a:xfrm>
           <a:prstGeom prst="rect">
             <a:avLst/>
@@ -6792,7 +6792,7 @@
         <p:spPr>
           <a:xfrm>
             <a:off x="4937760" y="2907792"/>
-            <a:ext cx="6793992" cy="2944368"/>
+            <a:ext cx="6793992" cy="3081528"/>
           </a:xfrm>
           <a:prstGeom prst="rect">
             <a:avLst/>
@@ -6890,7 +6890,7 @@
         <p:spPr>
           <a:xfrm>
             <a:off x="658368" y="3410712"/>
-            <a:ext cx="3977640" cy="2304288"/>
+            <a:ext cx="3977640" cy="2441448"/>
           </a:xfrm>
           <a:prstGeom prst="rect">
             <a:avLst/>
@@ -6975,7 +6975,7 @@
         <p:spPr>
           <a:xfrm>
             <a:off x="5138928" y="3410712"/>
-            <a:ext cx="45720" cy="1065276"/>
+            <a:ext cx="45720" cy="1133856"/>
           </a:xfrm>
           <a:prstGeom prst="rect">
             <a:avLst/>
@@ -6995,7 +6995,7 @@
         <p:spPr>
           <a:xfrm>
             <a:off x="5266944" y="3410712"/>
-            <a:ext cx="1877568" cy="1065276"/>
+            <a:ext cx="1877568" cy="1133856"/>
           </a:xfrm>
           <a:prstGeom prst="rect">
             <a:avLst/>
@@ -7051,7 +7051,7 @@
         <p:spPr>
           <a:xfrm>
             <a:off x="7309104" y="3410712"/>
-            <a:ext cx="45720" cy="1065276"/>
+            <a:ext cx="45720" cy="1133856"/>
           </a:xfrm>
           <a:prstGeom prst="rect">
             <a:avLst/>
@@ -7071,7 +7071,7 @@
         <p:spPr>
           <a:xfrm>
             <a:off x="7437120" y="3410712"/>
-            <a:ext cx="1877568" cy="1065276"/>
+            <a:ext cx="1877568" cy="1133856"/>
           </a:xfrm>
           <a:prstGeom prst="rect">
             <a:avLst/>
@@ -7127,7 +7127,7 @@
         <p:spPr>
           <a:xfrm>
             <a:off x="9479280" y="3410712"/>
-            <a:ext cx="45720" cy="1065276"/>
+            <a:ext cx="45720" cy="1133856"/>
           </a:xfrm>
           <a:prstGeom prst="rect">
             <a:avLst/>
@@ -7147,7 +7147,7 @@
         <p:spPr>
           <a:xfrm>
             <a:off x="9607296" y="3410712"/>
-            <a:ext cx="1877568" cy="1065276"/>
+            <a:ext cx="1877568" cy="1133856"/>
           </a:xfrm>
           <a:prstGeom prst="rect">
             <a:avLst/>
@@ -7202,8 +7202,8 @@
         </p:nvSpPr>
         <p:spPr>
           <a:xfrm>
-            <a:off x="5138928" y="4585716"/>
-            <a:ext cx="45720" cy="1065276"/>
+            <a:off x="5138928" y="4654296"/>
+            <a:ext cx="45720" cy="1133856"/>
           </a:xfrm>
           <a:prstGeom prst="rect">
             <a:avLst/>
@@ -7222,8 +7222,8 @@
         </p:nvSpPr>
         <p:spPr>
           <a:xfrm>
-            <a:off x="5266944" y="4585716"/>
-            <a:ext cx="1877568" cy="1065276"/>
+            <a:off x="5266944" y="4654296"/>
+            <a:ext cx="1877568" cy="1133856"/>
           </a:xfrm>
           <a:prstGeom prst="rect">
             <a:avLst/>
@@ -7278,8 +7278,8 @@
         </p:nvSpPr>
         <p:spPr>
           <a:xfrm>
-            <a:off x="7309104" y="4585716"/>
-            <a:ext cx="45720" cy="1065276"/>
+            <a:off x="7309104" y="4654296"/>
+            <a:ext cx="45720" cy="1133856"/>
           </a:xfrm>
           <a:prstGeom prst="rect">
             <a:avLst/>
@@ -7298,8 +7298,8 @@
         </p:nvSpPr>
         <p:spPr>
           <a:xfrm>
-            <a:off x="7437120" y="4585716"/>
-            <a:ext cx="1877568" cy="1065276"/>
+            <a:off x="7437120" y="4654296"/>
+            <a:ext cx="1877568" cy="1133856"/>
           </a:xfrm>
           <a:prstGeom prst="rect">
             <a:avLst/>
@@ -7354,8 +7354,8 @@
         </p:nvSpPr>
         <p:spPr>
           <a:xfrm>
-            <a:off x="9479280" y="4585716"/>
-            <a:ext cx="45720" cy="1065276"/>
+            <a:off x="9479280" y="4654296"/>
+            <a:ext cx="45720" cy="1133856"/>
           </a:xfrm>
           <a:prstGeom prst="rect">
             <a:avLst/>
@@ -7374,8 +7374,8 @@
         </p:nvSpPr>
         <p:spPr>
           <a:xfrm>
-            <a:off x="9607296" y="4585716"/>
-            <a:ext cx="1877568" cy="1065276"/>
+            <a:off x="9607296" y="4654296"/>
+            <a:ext cx="1877568" cy="1133856"/>
           </a:xfrm>
           <a:prstGeom prst="rect">
             <a:avLst/>
@@ -7430,8 +7430,8 @@
         </p:nvSpPr>
         <p:spPr>
           <a:xfrm>
-            <a:off x="457200" y="5961888"/>
-            <a:ext cx="11274552" cy="548640"/>
+            <a:off x="457200" y="6126480"/>
+            <a:ext cx="11274552" cy="371856"/>
           </a:xfrm>
           <a:prstGeom prst="rect">
             <a:avLst/>
@@ -7450,8 +7450,8 @@
         </p:nvSpPr>
         <p:spPr>
           <a:xfrm>
-            <a:off x="658368" y="5980176"/>
-            <a:ext cx="10927080" cy="512064"/>
+            <a:off x="658368" y="6144768"/>
+            <a:ext cx="10927080" cy="335280"/>
           </a:xfrm>
           <a:prstGeom prst="rect">
             <a:avLst/>
@@ -8215,7 +8215,7 @@
         <p:spPr>
           <a:xfrm>
             <a:off x="457200" y="2907792"/>
-            <a:ext cx="4343400" cy="2944368"/>
+            <a:ext cx="4343400" cy="3081528"/>
           </a:xfrm>
           <a:prstGeom prst="rect">
             <a:avLst/>
@@ -8235,7 +8235,7 @@
         <p:spPr>
           <a:xfrm>
             <a:off x="4937760" y="2907792"/>
-            <a:ext cx="6793992" cy="2944368"/>
+            <a:ext cx="6793992" cy="3081528"/>
           </a:xfrm>
           <a:prstGeom prst="rect">
             <a:avLst/>
@@ -8333,7 +8333,7 @@
         <p:spPr>
           <a:xfrm>
             <a:off x="658368" y="3410712"/>
-            <a:ext cx="3977640" cy="2304288"/>
+            <a:ext cx="3977640" cy="2441448"/>
           </a:xfrm>
           <a:prstGeom prst="rect">
             <a:avLst/>
@@ -8418,7 +8418,7 @@
         <p:spPr>
           <a:xfrm>
             <a:off x="5138928" y="3410712"/>
-            <a:ext cx="45720" cy="1065276"/>
+            <a:ext cx="45720" cy="1133856"/>
           </a:xfrm>
           <a:prstGeom prst="rect">
             <a:avLst/>
@@ -8438,7 +8438,7 @@
         <p:spPr>
           <a:xfrm>
             <a:off x="5266944" y="3410712"/>
-            <a:ext cx="1877568" cy="1065276"/>
+            <a:ext cx="1877568" cy="1133856"/>
           </a:xfrm>
           <a:prstGeom prst="rect">
             <a:avLst/>
@@ -8494,7 +8494,7 @@
         <p:spPr>
           <a:xfrm>
             <a:off x="7309104" y="3410712"/>
-            <a:ext cx="45720" cy="1065276"/>
+            <a:ext cx="45720" cy="1133856"/>
           </a:xfrm>
           <a:prstGeom prst="rect">
             <a:avLst/>
@@ -8514,7 +8514,7 @@
         <p:spPr>
           <a:xfrm>
             <a:off x="7437120" y="3410712"/>
-            <a:ext cx="1877568" cy="1065276"/>
+            <a:ext cx="1877568" cy="1133856"/>
           </a:xfrm>
           <a:prstGeom prst="rect">
             <a:avLst/>
@@ -8570,7 +8570,7 @@
         <p:spPr>
           <a:xfrm>
             <a:off x="9479280" y="3410712"/>
-            <a:ext cx="45720" cy="1065276"/>
+            <a:ext cx="45720" cy="1133856"/>
           </a:xfrm>
           <a:prstGeom prst="rect">
             <a:avLst/>
@@ -8590,7 +8590,7 @@
         <p:spPr>
           <a:xfrm>
             <a:off x="9607296" y="3410712"/>
-            <a:ext cx="1877568" cy="1065276"/>
+            <a:ext cx="1877568" cy="1133856"/>
           </a:xfrm>
           <a:prstGeom prst="rect">
             <a:avLst/>
@@ -8645,8 +8645,8 @@
         </p:nvSpPr>
         <p:spPr>
           <a:xfrm>
-            <a:off x="5138928" y="4585716"/>
-            <a:ext cx="45720" cy="1065276"/>
+            <a:off x="5138928" y="4654296"/>
+            <a:ext cx="45720" cy="1133856"/>
           </a:xfrm>
           <a:prstGeom prst="rect">
             <a:avLst/>
@@ -8665,8 +8665,8 @@
         </p:nvSpPr>
         <p:spPr>
           <a:xfrm>
-            <a:off x="5266944" y="4585716"/>
-            <a:ext cx="1877568" cy="1065276"/>
+            <a:off x="5266944" y="4654296"/>
+            <a:ext cx="1877568" cy="1133856"/>
           </a:xfrm>
           <a:prstGeom prst="rect">
             <a:avLst/>
@@ -8721,8 +8721,8 @@
         </p:nvSpPr>
         <p:spPr>
           <a:xfrm>
-            <a:off x="7309104" y="4585716"/>
-            <a:ext cx="45720" cy="1065276"/>
+            <a:off x="7309104" y="4654296"/>
+            <a:ext cx="45720" cy="1133856"/>
           </a:xfrm>
           <a:prstGeom prst="rect">
             <a:avLst/>
@@ -8741,8 +8741,8 @@
         </p:nvSpPr>
         <p:spPr>
           <a:xfrm>
-            <a:off x="7437120" y="4585716"/>
-            <a:ext cx="1877568" cy="1065276"/>
+            <a:off x="7437120" y="4654296"/>
+            <a:ext cx="1877568" cy="1133856"/>
           </a:xfrm>
           <a:prstGeom prst="rect">
             <a:avLst/>
@@ -8797,8 +8797,8 @@
         </p:nvSpPr>
         <p:spPr>
           <a:xfrm>
-            <a:off x="9479280" y="4585716"/>
-            <a:ext cx="45720" cy="1065276"/>
+            <a:off x="9479280" y="4654296"/>
+            <a:ext cx="45720" cy="1133856"/>
           </a:xfrm>
           <a:prstGeom prst="rect">
             <a:avLst/>
@@ -8817,8 +8817,8 @@
         </p:nvSpPr>
         <p:spPr>
           <a:xfrm>
-            <a:off x="9607296" y="4585716"/>
-            <a:ext cx="1877568" cy="1065276"/>
+            <a:off x="9607296" y="4654296"/>
+            <a:ext cx="1877568" cy="1133856"/>
           </a:xfrm>
           <a:prstGeom prst="rect">
             <a:avLst/>
@@ -8873,8 +8873,8 @@
         </p:nvSpPr>
         <p:spPr>
           <a:xfrm>
-            <a:off x="457200" y="5961888"/>
-            <a:ext cx="11274552" cy="548640"/>
+            <a:off x="457200" y="6126480"/>
+            <a:ext cx="11274552" cy="364236"/>
           </a:xfrm>
           <a:prstGeom prst="rect">
             <a:avLst/>
@@ -8893,8 +8893,8 @@
         </p:nvSpPr>
         <p:spPr>
           <a:xfrm>
-            <a:off x="658368" y="5980176"/>
-            <a:ext cx="10927080" cy="512064"/>
+            <a:off x="658368" y="6144768"/>
+            <a:ext cx="10927080" cy="327660"/>
           </a:xfrm>
           <a:prstGeom prst="rect">
             <a:avLst/>
@@ -8910,7 +8910,7 @@
               <a:buNone/>
             </a:pPr>
             <a:r>
-              <a:rPr lang="en-US" sz="1600" b="1" dirty="0">
+              <a:rPr lang="en-US" sz="1550" b="1" dirty="0">
                 <a:solidFill>
                   <a:srgbClr val="0B7A4A"/>
                 </a:solidFill>
@@ -8920,7 +8920,7 @@
               </a:rPr>
               <a:t>Group: $162.42 CP ELR, up $3.56. Jul-Sep it ran 74.7% of door rate; 25 of 33 stores at or above 70%.</a:t>
             </a:r>
-            <a:endParaRPr lang="en-US" sz="1600" dirty="0"/>
+            <a:endParaRPr lang="en-US" sz="1550" dirty="0"/>
           </a:p>
         </p:txBody>
       </p:sp>
@@ -9418,7 +9418,7 @@
         <p:spPr>
           <a:xfrm>
             <a:off x="457200" y="2907792"/>
-            <a:ext cx="4343400" cy="2944368"/>
+            <a:ext cx="4343400" cy="3081528"/>
           </a:xfrm>
           <a:prstGeom prst="rect">
             <a:avLst/>
@@ -9438,7 +9438,7 @@
         <p:spPr>
           <a:xfrm>
             <a:off x="4937760" y="2907792"/>
-            <a:ext cx="6793992" cy="2944368"/>
+            <a:ext cx="6793992" cy="3081528"/>
           </a:xfrm>
           <a:prstGeom prst="rect">
             <a:avLst/>
@@ -9536,7 +9536,7 @@
         <p:spPr>
           <a:xfrm>
             <a:off x="658368" y="3410712"/>
-            <a:ext cx="3977640" cy="2304288"/>
+            <a:ext cx="3977640" cy="2441448"/>
           </a:xfrm>
           <a:prstGeom prst="rect">
             <a:avLst/>
@@ -9621,7 +9621,7 @@
         <p:spPr>
           <a:xfrm>
             <a:off x="5138928" y="3410712"/>
-            <a:ext cx="45720" cy="1065276"/>
+            <a:ext cx="45720" cy="1133856"/>
           </a:xfrm>
           <a:prstGeom prst="rect">
             <a:avLst/>
@@ -9641,7 +9641,7 @@
         <p:spPr>
           <a:xfrm>
             <a:off x="5266944" y="3410712"/>
-            <a:ext cx="2962656" cy="1065276"/>
+            <a:ext cx="2962656" cy="1133856"/>
           </a:xfrm>
           <a:prstGeom prst="rect">
             <a:avLst/>
@@ -9697,7 +9697,7 @@
         <p:spPr>
           <a:xfrm>
             <a:off x="8394192" y="3410712"/>
-            <a:ext cx="45720" cy="1065276"/>
+            <a:ext cx="45720" cy="1133856"/>
           </a:xfrm>
           <a:prstGeom prst="rect">
             <a:avLst/>
@@ -9717,7 +9717,7 @@
         <p:spPr>
           <a:xfrm>
             <a:off x="8522208" y="3410712"/>
-            <a:ext cx="2962656" cy="1065276"/>
+            <a:ext cx="2962656" cy="1133856"/>
           </a:xfrm>
           <a:prstGeom prst="rect">
             <a:avLst/>
@@ -9772,8 +9772,8 @@
         </p:nvSpPr>
         <p:spPr>
           <a:xfrm>
-            <a:off x="5138928" y="4585716"/>
-            <a:ext cx="45720" cy="1065276"/>
+            <a:off x="5138928" y="4654296"/>
+            <a:ext cx="45720" cy="1133856"/>
           </a:xfrm>
           <a:prstGeom prst="rect">
             <a:avLst/>
@@ -9792,8 +9792,8 @@
         </p:nvSpPr>
         <p:spPr>
           <a:xfrm>
-            <a:off x="5266944" y="4585716"/>
-            <a:ext cx="2962656" cy="1065276"/>
+            <a:off x="5266944" y="4654296"/>
+            <a:ext cx="2962656" cy="1133856"/>
           </a:xfrm>
           <a:prstGeom prst="rect">
             <a:avLst/>
@@ -9848,8 +9848,8 @@
         </p:nvSpPr>
         <p:spPr>
           <a:xfrm>
-            <a:off x="8394192" y="4585716"/>
-            <a:ext cx="45720" cy="1065276"/>
+            <a:off x="8394192" y="4654296"/>
+            <a:ext cx="45720" cy="1133856"/>
           </a:xfrm>
           <a:prstGeom prst="rect">
             <a:avLst/>
@@ -9868,8 +9868,8 @@
         </p:nvSpPr>
         <p:spPr>
           <a:xfrm>
-            <a:off x="8522208" y="4585716"/>
-            <a:ext cx="2962656" cy="1065276"/>
+            <a:off x="8522208" y="4654296"/>
+            <a:ext cx="2962656" cy="1133856"/>
           </a:xfrm>
           <a:prstGeom prst="rect">
             <a:avLst/>
@@ -9924,8 +9924,8 @@
         </p:nvSpPr>
         <p:spPr>
           <a:xfrm>
-            <a:off x="457200" y="5961888"/>
-            <a:ext cx="11274552" cy="548640"/>
+            <a:off x="457200" y="6126480"/>
+            <a:ext cx="11274552" cy="341376"/>
           </a:xfrm>
           <a:prstGeom prst="rect">
             <a:avLst/>
@@ -9944,8 +9944,8 @@
         </p:nvSpPr>
         <p:spPr>
           <a:xfrm>
-            <a:off x="658368" y="5980176"/>
-            <a:ext cx="10927080" cy="512064"/>
+            <a:off x="658368" y="6144768"/>
+            <a:ext cx="10927080" cy="304800"/>
           </a:xfrm>
           <a:prstGeom prst="rect">
             <a:avLst/>
@@ -9961,7 +9961,7 @@
               <a:buNone/>
             </a:pPr>
             <a:r>
-              <a:rPr lang="en-US" sz="1600" b="1" dirty="0">
+              <a:rPr lang="en-US" sz="1400" b="1" dirty="0">
                 <a:solidFill>
                   <a:srgbClr val="0B7A4A"/>
                 </a:solidFill>
@@ -9971,7 +9971,7 @@
               </a:rPr>
               <a:t>Group: $304 CP labor per RO, up $17. With ROs flat, the $4,899,376 labor gain came from selling more per visit.</a:t>
             </a:r>
-            <a:endParaRPr lang="en-US" sz="1600" dirty="0"/>
+            <a:endParaRPr lang="en-US" sz="1400" dirty="0"/>
           </a:p>
         </p:txBody>
       </p:sp>
@@ -10270,7 +10270,7 @@
         <p:spPr>
           <a:xfrm>
             <a:off x="457200" y="2340864"/>
-            <a:ext cx="4343400" cy="3511296"/>
+            <a:ext cx="4343400" cy="3648456"/>
           </a:xfrm>
           <a:prstGeom prst="rect">
             <a:avLst/>
@@ -10290,7 +10290,7 @@
         <p:spPr>
           <a:xfrm>
             <a:off x="4937760" y="2340864"/>
-            <a:ext cx="6793992" cy="3511296"/>
+            <a:ext cx="6793992" cy="3648456"/>
           </a:xfrm>
           <a:prstGeom prst="rect">
             <a:avLst/>
@@ -10388,7 +10388,7 @@
         <p:spPr>
           <a:xfrm>
             <a:off x="658368" y="2843784"/>
-            <a:ext cx="3977640" cy="2871216"/>
+            <a:ext cx="3977640" cy="3008376"/>
           </a:xfrm>
           <a:prstGeom prst="rect">
             <a:avLst/>
@@ -10473,7 +10473,7 @@
         <p:spPr>
           <a:xfrm>
             <a:off x="5138928" y="2843784"/>
-            <a:ext cx="45720" cy="1348740"/>
+            <a:ext cx="45720" cy="1417320"/>
           </a:xfrm>
           <a:prstGeom prst="rect">
             <a:avLst/>
@@ -10493,7 +10493,7 @@
         <p:spPr>
           <a:xfrm>
             <a:off x="5266944" y="2843784"/>
-            <a:ext cx="2962656" cy="1348740"/>
+            <a:ext cx="2962656" cy="1417320"/>
           </a:xfrm>
           <a:prstGeom prst="rect">
             <a:avLst/>
@@ -10549,7 +10549,7 @@
         <p:spPr>
           <a:xfrm>
             <a:off x="8394192" y="2843784"/>
-            <a:ext cx="45720" cy="1348740"/>
+            <a:ext cx="45720" cy="1417320"/>
           </a:xfrm>
           <a:prstGeom prst="rect">
             <a:avLst/>
@@ -10569,7 +10569,7 @@
         <p:spPr>
           <a:xfrm>
             <a:off x="8522208" y="2843784"/>
-            <a:ext cx="2962656" cy="1348740"/>
+            <a:ext cx="2962656" cy="1417320"/>
           </a:xfrm>
           <a:prstGeom prst="rect">
             <a:avLst/>
@@ -10624,8 +10624,8 @@
         </p:nvSpPr>
         <p:spPr>
           <a:xfrm>
-            <a:off x="5138928" y="4302252"/>
-            <a:ext cx="45720" cy="1348740"/>
+            <a:off x="5138928" y="4370832"/>
+            <a:ext cx="45720" cy="1417320"/>
           </a:xfrm>
           <a:prstGeom prst="rect">
             <a:avLst/>
@@ -10644,8 +10644,8 @@
         </p:nvSpPr>
         <p:spPr>
           <a:xfrm>
-            <a:off x="5266944" y="4302252"/>
-            <a:ext cx="2962656" cy="1348740"/>
+            <a:off x="5266944" y="4370832"/>
+            <a:ext cx="2962656" cy="1417320"/>
           </a:xfrm>
           <a:prstGeom prst="rect">
             <a:avLst/>
@@ -10700,8 +10700,8 @@
         </p:nvSpPr>
         <p:spPr>
           <a:xfrm>
-            <a:off x="8394192" y="4302252"/>
-            <a:ext cx="45720" cy="1348740"/>
+            <a:off x="8394192" y="4370832"/>
+            <a:ext cx="45720" cy="1417320"/>
           </a:xfrm>
           <a:prstGeom prst="rect">
             <a:avLst/>
@@ -10720,8 +10720,8 @@
         </p:nvSpPr>
         <p:spPr>
           <a:xfrm>
-            <a:off x="8522208" y="4302252"/>
-            <a:ext cx="2962656" cy="1348740"/>
+            <a:off x="8522208" y="4370832"/>
+            <a:ext cx="2962656" cy="1417320"/>
           </a:xfrm>
           <a:prstGeom prst="rect">
             <a:avLst/>
@@ -10776,8 +10776,8 @@
         </p:nvSpPr>
         <p:spPr>
           <a:xfrm>
-            <a:off x="457200" y="5961888"/>
-            <a:ext cx="11274552" cy="548640"/>
+            <a:off x="457200" y="6126480"/>
+            <a:ext cx="11274552" cy="371856"/>
           </a:xfrm>
           <a:prstGeom prst="rect">
             <a:avLst/>
@@ -10796,8 +10796,8 @@
         </p:nvSpPr>
         <p:spPr>
           <a:xfrm>
-            <a:off x="658368" y="5980176"/>
-            <a:ext cx="10927080" cy="512064"/>
+            <a:off x="658368" y="6144768"/>
+            <a:ext cx="10927080" cy="335280"/>
           </a:xfrm>
           <a:prstGeom prst="rect">
             <a:avLst/>
@@ -11589,7 +11589,7 @@
         <p:spPr>
           <a:xfrm>
             <a:off x="457200" y="2907792"/>
-            <a:ext cx="4343400" cy="2944368"/>
+            <a:ext cx="4343400" cy="3081528"/>
           </a:xfrm>
           <a:prstGeom prst="rect">
             <a:avLst/>
@@ -11609,7 +11609,7 @@
         <p:spPr>
           <a:xfrm>
             <a:off x="4937760" y="2907792"/>
-            <a:ext cx="6793992" cy="2944368"/>
+            <a:ext cx="6793992" cy="3081528"/>
           </a:xfrm>
           <a:prstGeom prst="rect">
             <a:avLst/>
@@ -11707,7 +11707,7 @@
         <p:spPr>
           <a:xfrm>
             <a:off x="658368" y="3410712"/>
-            <a:ext cx="3977640" cy="2304288"/>
+            <a:ext cx="3977640" cy="2441448"/>
           </a:xfrm>
           <a:prstGeom prst="rect">
             <a:avLst/>
@@ -11792,7 +11792,7 @@
         <p:spPr>
           <a:xfrm>
             <a:off x="5138928" y="3410712"/>
-            <a:ext cx="45720" cy="1065276"/>
+            <a:ext cx="45720" cy="1133856"/>
           </a:xfrm>
           <a:prstGeom prst="rect">
             <a:avLst/>
@@ -11812,7 +11812,7 @@
         <p:spPr>
           <a:xfrm>
             <a:off x="5266944" y="3410712"/>
-            <a:ext cx="1877568" cy="1065276"/>
+            <a:ext cx="1877568" cy="1133856"/>
           </a:xfrm>
           <a:prstGeom prst="rect">
             <a:avLst/>
@@ -11868,7 +11868,7 @@
         <p:spPr>
           <a:xfrm>
             <a:off x="7309104" y="3410712"/>
-            <a:ext cx="45720" cy="1065276"/>
+            <a:ext cx="45720" cy="1133856"/>
           </a:xfrm>
           <a:prstGeom prst="rect">
             <a:avLst/>
@@ -11888,7 +11888,7 @@
         <p:spPr>
           <a:xfrm>
             <a:off x="7437120" y="3410712"/>
-            <a:ext cx="1877568" cy="1065276"/>
+            <a:ext cx="1877568" cy="1133856"/>
           </a:xfrm>
           <a:prstGeom prst="rect">
             <a:avLst/>
@@ -11944,7 +11944,7 @@
         <p:spPr>
           <a:xfrm>
             <a:off x="9479280" y="3410712"/>
-            <a:ext cx="45720" cy="1065276"/>
+            <a:ext cx="45720" cy="1133856"/>
           </a:xfrm>
           <a:prstGeom prst="rect">
             <a:avLst/>
@@ -11964,7 +11964,7 @@
         <p:spPr>
           <a:xfrm>
             <a:off x="9607296" y="3410712"/>
-            <a:ext cx="1877568" cy="1065276"/>
+            <a:ext cx="1877568" cy="1133856"/>
           </a:xfrm>
           <a:prstGeom prst="rect">
             <a:avLst/>
@@ -12019,8 +12019,8 @@
         </p:nvSpPr>
         <p:spPr>
           <a:xfrm>
-            <a:off x="5138928" y="4585716"/>
-            <a:ext cx="45720" cy="1065276"/>
+            <a:off x="5138928" y="4654296"/>
+            <a:ext cx="45720" cy="1133856"/>
           </a:xfrm>
           <a:prstGeom prst="rect">
             <a:avLst/>
@@ -12039,8 +12039,8 @@
         </p:nvSpPr>
         <p:spPr>
           <a:xfrm>
-            <a:off x="5266944" y="4585716"/>
-            <a:ext cx="1877568" cy="1065276"/>
+            <a:off x="5266944" y="4654296"/>
+            <a:ext cx="1877568" cy="1133856"/>
           </a:xfrm>
           <a:prstGeom prst="rect">
             <a:avLst/>
@@ -12095,8 +12095,8 @@
         </p:nvSpPr>
         <p:spPr>
           <a:xfrm>
-            <a:off x="7309104" y="4585716"/>
-            <a:ext cx="45720" cy="1065276"/>
+            <a:off x="7309104" y="4654296"/>
+            <a:ext cx="45720" cy="1133856"/>
           </a:xfrm>
           <a:prstGeom prst="rect">
             <a:avLst/>
@@ -12115,8 +12115,8 @@
         </p:nvSpPr>
         <p:spPr>
           <a:xfrm>
-            <a:off x="7437120" y="4585716"/>
-            <a:ext cx="1877568" cy="1065276"/>
+            <a:off x="7437120" y="4654296"/>
+            <a:ext cx="1877568" cy="1133856"/>
           </a:xfrm>
           <a:prstGeom prst="rect">
             <a:avLst/>
@@ -12171,8 +12171,8 @@
         </p:nvSpPr>
         <p:spPr>
           <a:xfrm>
-            <a:off x="457200" y="5961888"/>
-            <a:ext cx="11274552" cy="548640"/>
+            <a:off x="457200" y="6126480"/>
+            <a:ext cx="11274552" cy="371856"/>
           </a:xfrm>
           <a:prstGeom prst="rect">
             <a:avLst/>
@@ -12191,8 +12191,8 @@
         </p:nvSpPr>
         <p:spPr>
           <a:xfrm>
-            <a:off x="658368" y="5980176"/>
-            <a:ext cx="10927080" cy="512064"/>
+            <a:off x="658368" y="6144768"/>
+            <a:ext cx="10927080" cy="335280"/>
           </a:xfrm>
           <a:prstGeom prst="rect">
             <a:avLst/>
@@ -12545,7 +12545,7 @@
         <p:spPr>
           <a:xfrm>
             <a:off x="457200" y="2340864"/>
-            <a:ext cx="4343400" cy="3511296"/>
+            <a:ext cx="4343400" cy="3648456"/>
           </a:xfrm>
           <a:prstGeom prst="rect">
             <a:avLst/>
@@ -12565,7 +12565,7 @@
         <p:spPr>
           <a:xfrm>
             <a:off x="4937760" y="2340864"/>
-            <a:ext cx="6793992" cy="3511296"/>
+            <a:ext cx="6793992" cy="3648456"/>
           </a:xfrm>
           <a:prstGeom prst="rect">
             <a:avLst/>
@@ -12663,7 +12663,7 @@
         <p:spPr>
           <a:xfrm>
             <a:off x="658368" y="2843784"/>
-            <a:ext cx="3977640" cy="2871216"/>
+            <a:ext cx="3977640" cy="3008376"/>
           </a:xfrm>
           <a:prstGeom prst="rect">
             <a:avLst/>
@@ -12748,7 +12748,7 @@
         <p:spPr>
           <a:xfrm>
             <a:off x="5138928" y="2843784"/>
-            <a:ext cx="45720" cy="1348740"/>
+            <a:ext cx="45720" cy="1417320"/>
           </a:xfrm>
           <a:prstGeom prst="rect">
             <a:avLst/>
@@ -12768,7 +12768,7 @@
         <p:spPr>
           <a:xfrm>
             <a:off x="5266944" y="2843784"/>
-            <a:ext cx="2962656" cy="1348740"/>
+            <a:ext cx="2962656" cy="1417320"/>
           </a:xfrm>
           <a:prstGeom prst="rect">
             <a:avLst/>
@@ -12824,7 +12824,7 @@
         <p:spPr>
           <a:xfrm>
             <a:off x="8394192" y="2843784"/>
-            <a:ext cx="45720" cy="1348740"/>
+            <a:ext cx="45720" cy="1417320"/>
           </a:xfrm>
           <a:prstGeom prst="rect">
             <a:avLst/>
@@ -12844,7 +12844,7 @@
         <p:spPr>
           <a:xfrm>
             <a:off x="8522208" y="2843784"/>
-            <a:ext cx="2962656" cy="1348740"/>
+            <a:ext cx="2962656" cy="1417320"/>
           </a:xfrm>
           <a:prstGeom prst="rect">
             <a:avLst/>
@@ -12899,8 +12899,8 @@
         </p:nvSpPr>
         <p:spPr>
           <a:xfrm>
-            <a:off x="5138928" y="4302252"/>
-            <a:ext cx="45720" cy="1348740"/>
+            <a:off x="5138928" y="4370832"/>
+            <a:ext cx="45720" cy="1417320"/>
           </a:xfrm>
           <a:prstGeom prst="rect">
             <a:avLst/>
@@ -12919,8 +12919,8 @@
         </p:nvSpPr>
         <p:spPr>
           <a:xfrm>
-            <a:off x="5266944" y="4302252"/>
-            <a:ext cx="2962656" cy="1348740"/>
+            <a:off x="5266944" y="4370832"/>
+            <a:ext cx="2962656" cy="1417320"/>
           </a:xfrm>
           <a:prstGeom prst="rect">
             <a:avLst/>
@@ -12975,8 +12975,8 @@
         </p:nvSpPr>
         <p:spPr>
           <a:xfrm>
-            <a:off x="8394192" y="4302252"/>
-            <a:ext cx="45720" cy="1348740"/>
+            <a:off x="8394192" y="4370832"/>
+            <a:ext cx="45720" cy="1417320"/>
           </a:xfrm>
           <a:prstGeom prst="rect">
             <a:avLst/>
@@ -12995,8 +12995,8 @@
         </p:nvSpPr>
         <p:spPr>
           <a:xfrm>
-            <a:off x="8522208" y="4302252"/>
-            <a:ext cx="2962656" cy="1348740"/>
+            <a:off x="8522208" y="4370832"/>
+            <a:ext cx="2962656" cy="1417320"/>
           </a:xfrm>
           <a:prstGeom prst="rect">
             <a:avLst/>
@@ -13051,8 +13051,8 @@
         </p:nvSpPr>
         <p:spPr>
           <a:xfrm>
-            <a:off x="457200" y="5961888"/>
-            <a:ext cx="11274552" cy="548640"/>
+            <a:off x="457200" y="6126480"/>
+            <a:ext cx="11274552" cy="371856"/>
           </a:xfrm>
           <a:prstGeom prst="rect">
             <a:avLst/>
@@ -13071,8 +13071,8 @@
         </p:nvSpPr>
         <p:spPr>
           <a:xfrm>
-            <a:off x="658368" y="5980176"/>
-            <a:ext cx="10927080" cy="512064"/>
+            <a:off x="658368" y="6144768"/>
+            <a:ext cx="10927080" cy="335280"/>
           </a:xfrm>
           <a:prstGeom prst="rect">
             <a:avLst/>
@@ -13596,7 +13596,7 @@
         <p:spPr>
           <a:xfrm>
             <a:off x="457200" y="2907792"/>
-            <a:ext cx="4343400" cy="2944368"/>
+            <a:ext cx="4343400" cy="3081528"/>
           </a:xfrm>
           <a:prstGeom prst="rect">
             <a:avLst/>
@@ -13616,7 +13616,7 @@
         <p:spPr>
           <a:xfrm>
             <a:off x="4937760" y="2907792"/>
-            <a:ext cx="6793992" cy="2944368"/>
+            <a:ext cx="6793992" cy="3081528"/>
           </a:xfrm>
           <a:prstGeom prst="rect">
             <a:avLst/>
@@ -13714,7 +13714,7 @@
         <p:spPr>
           <a:xfrm>
             <a:off x="658368" y="3410712"/>
-            <a:ext cx="3977640" cy="2304288"/>
+            <a:ext cx="3977640" cy="2441448"/>
           </a:xfrm>
           <a:prstGeom prst="rect">
             <a:avLst/>
@@ -13799,7 +13799,7 @@
         <p:spPr>
           <a:xfrm>
             <a:off x="5138928" y="3410712"/>
-            <a:ext cx="45720" cy="1065276"/>
+            <a:ext cx="45720" cy="1133856"/>
           </a:xfrm>
           <a:prstGeom prst="rect">
             <a:avLst/>
@@ -13819,7 +13819,7 @@
         <p:spPr>
           <a:xfrm>
             <a:off x="5266944" y="3410712"/>
-            <a:ext cx="2962656" cy="1065276"/>
+            <a:ext cx="2962656" cy="1133856"/>
           </a:xfrm>
           <a:prstGeom prst="rect">
             <a:avLst/>
@@ -13875,7 +13875,7 @@
         <p:spPr>
           <a:xfrm>
             <a:off x="8394192" y="3410712"/>
-            <a:ext cx="45720" cy="1065276"/>
+            <a:ext cx="45720" cy="1133856"/>
           </a:xfrm>
           <a:prstGeom prst="rect">
             <a:avLst/>
@@ -13895,7 +13895,7 @@
         <p:spPr>
           <a:xfrm>
             <a:off x="8522208" y="3410712"/>
-            <a:ext cx="2962656" cy="1065276"/>
+            <a:ext cx="2962656" cy="1133856"/>
           </a:xfrm>
           <a:prstGeom prst="rect">
             <a:avLst/>
@@ -13950,8 +13950,8 @@
         </p:nvSpPr>
         <p:spPr>
           <a:xfrm>
-            <a:off x="5138928" y="4585716"/>
-            <a:ext cx="45720" cy="1065276"/>
+            <a:off x="5138928" y="4654296"/>
+            <a:ext cx="45720" cy="1133856"/>
           </a:xfrm>
           <a:prstGeom prst="rect">
             <a:avLst/>
@@ -13970,8 +13970,8 @@
         </p:nvSpPr>
         <p:spPr>
           <a:xfrm>
-            <a:off x="5266944" y="4585716"/>
-            <a:ext cx="2962656" cy="1065276"/>
+            <a:off x="5266944" y="4654296"/>
+            <a:ext cx="2962656" cy="1133856"/>
           </a:xfrm>
           <a:prstGeom prst="rect">
             <a:avLst/>
@@ -14026,8 +14026,8 @@
         </p:nvSpPr>
         <p:spPr>
           <a:xfrm>
-            <a:off x="8394192" y="4585716"/>
-            <a:ext cx="45720" cy="1065276"/>
+            <a:off x="8394192" y="4654296"/>
+            <a:ext cx="45720" cy="1133856"/>
           </a:xfrm>
           <a:prstGeom prst="rect">
             <a:avLst/>
@@ -14046,8 +14046,8 @@
         </p:nvSpPr>
         <p:spPr>
           <a:xfrm>
-            <a:off x="8522208" y="4585716"/>
-            <a:ext cx="2962656" cy="1065276"/>
+            <a:off x="8522208" y="4654296"/>
+            <a:ext cx="2962656" cy="1133856"/>
           </a:xfrm>
           <a:prstGeom prst="rect">
             <a:avLst/>
@@ -14102,8 +14102,8 @@
         </p:nvSpPr>
         <p:spPr>
           <a:xfrm>
-            <a:off x="457200" y="5961888"/>
-            <a:ext cx="11274552" cy="548640"/>
+            <a:off x="457200" y="6126480"/>
+            <a:ext cx="11274552" cy="371856"/>
           </a:xfrm>
           <a:prstGeom prst="rect">
             <a:avLst/>
@@ -14122,8 +14122,8 @@
         </p:nvSpPr>
         <p:spPr>
           <a:xfrm>
-            <a:off x="658368" y="5980176"/>
-            <a:ext cx="10927080" cy="512064"/>
+            <a:off x="658368" y="6144768"/>
+            <a:ext cx="10927080" cy="335280"/>
           </a:xfrm>
           <a:prstGeom prst="rect">
             <a:avLst/>
@@ -14448,7 +14448,7 @@
         <p:spPr>
           <a:xfrm>
             <a:off x="457200" y="2340864"/>
-            <a:ext cx="4343400" cy="3511296"/>
+            <a:ext cx="4343400" cy="3648456"/>
           </a:xfrm>
           <a:prstGeom prst="rect">
             <a:avLst/>
@@ -14468,7 +14468,7 @@
         <p:spPr>
           <a:xfrm>
             <a:off x="4937760" y="2340864"/>
-            <a:ext cx="6793992" cy="3511296"/>
+            <a:ext cx="6793992" cy="3648456"/>
           </a:xfrm>
           <a:prstGeom prst="rect">
             <a:avLst/>
@@ -14566,7 +14566,7 @@
         <p:spPr>
           <a:xfrm>
             <a:off x="658368" y="2843784"/>
-            <a:ext cx="3977640" cy="2871216"/>
+            <a:ext cx="3977640" cy="3008376"/>
           </a:xfrm>
           <a:prstGeom prst="rect">
             <a:avLst/>
@@ -14651,7 +14651,7 @@
         <p:spPr>
           <a:xfrm>
             <a:off x="5138928" y="2843784"/>
-            <a:ext cx="45720" cy="1348740"/>
+            <a:ext cx="45720" cy="1417320"/>
           </a:xfrm>
           <a:prstGeom prst="rect">
             <a:avLst/>
@@ -14671,7 +14671,7 @@
         <p:spPr>
           <a:xfrm>
             <a:off x="5266944" y="2843784"/>
-            <a:ext cx="2962656" cy="1348740"/>
+            <a:ext cx="2962656" cy="1417320"/>
           </a:xfrm>
           <a:prstGeom prst="rect">
             <a:avLst/>
@@ -14727,7 +14727,7 @@
         <p:spPr>
           <a:xfrm>
             <a:off x="8394192" y="2843784"/>
-            <a:ext cx="45720" cy="1348740"/>
+            <a:ext cx="45720" cy="1417320"/>
           </a:xfrm>
           <a:prstGeom prst="rect">
             <a:avLst/>
@@ -14747,7 +14747,7 @@
         <p:spPr>
           <a:xfrm>
             <a:off x="8522208" y="2843784"/>
-            <a:ext cx="2962656" cy="1348740"/>
+            <a:ext cx="2962656" cy="1417320"/>
           </a:xfrm>
           <a:prstGeom prst="rect">
             <a:avLst/>
@@ -14802,8 +14802,8 @@
         </p:nvSpPr>
         <p:spPr>
           <a:xfrm>
-            <a:off x="5138928" y="4302252"/>
-            <a:ext cx="45720" cy="1348740"/>
+            <a:off x="5138928" y="4370832"/>
+            <a:ext cx="45720" cy="1417320"/>
           </a:xfrm>
           <a:prstGeom prst="rect">
             <a:avLst/>
@@ -14822,8 +14822,8 @@
         </p:nvSpPr>
         <p:spPr>
           <a:xfrm>
-            <a:off x="5266944" y="4302252"/>
-            <a:ext cx="2962656" cy="1348740"/>
+            <a:off x="5266944" y="4370832"/>
+            <a:ext cx="2962656" cy="1417320"/>
           </a:xfrm>
           <a:prstGeom prst="rect">
             <a:avLst/>
@@ -14878,8 +14878,8 @@
         </p:nvSpPr>
         <p:spPr>
           <a:xfrm>
-            <a:off x="8394192" y="4302252"/>
-            <a:ext cx="45720" cy="1348740"/>
+            <a:off x="8394192" y="4370832"/>
+            <a:ext cx="45720" cy="1417320"/>
           </a:xfrm>
           <a:prstGeom prst="rect">
             <a:avLst/>
@@ -14898,8 +14898,8 @@
         </p:nvSpPr>
         <p:spPr>
           <a:xfrm>
-            <a:off x="8522208" y="4302252"/>
-            <a:ext cx="2962656" cy="1348740"/>
+            <a:off x="8522208" y="4370832"/>
+            <a:ext cx="2962656" cy="1417320"/>
           </a:xfrm>
           <a:prstGeom prst="rect">
             <a:avLst/>
@@ -14954,8 +14954,8 @@
         </p:nvSpPr>
         <p:spPr>
           <a:xfrm>
-            <a:off x="457200" y="5961888"/>
-            <a:ext cx="11274552" cy="548640"/>
+            <a:off x="457200" y="6126480"/>
+            <a:ext cx="11274552" cy="371856"/>
           </a:xfrm>
           <a:prstGeom prst="rect">
             <a:avLst/>
@@ -14974,8 +14974,8 @@
         </p:nvSpPr>
         <p:spPr>
           <a:xfrm>
-            <a:off x="658368" y="5980176"/>
-            <a:ext cx="10927080" cy="512064"/>
+            <a:off x="658368" y="6144768"/>
+            <a:ext cx="10927080" cy="335280"/>
           </a:xfrm>
           <a:prstGeom prst="rect">
             <a:avLst/>

--- a/day2-deck/decks/Metric Explainers - Review.pptx
+++ b/day2-deck/decks/Metric Explainers - Review.pptx
@@ -959,7 +959,7 @@
             <a:r>
               <a:rPr lang="en-US" dirty="0"/>
               <a:t>Source: Definitions match the data slides: Qlik - Closed Repair Orders (all customer-pay ROs, by close month), Profit &amp; Loss and Productivity apps, Jan-Sep 2026 vs 2025, same-store, 33 stores. Worked example: Service Manager Roundtable, Nov 15, 2024, slide 21.PLACE: CP Engine, in front of CP ELR (and ahead of the door-rate slides).
-Example: Roundtable slide 21 table: same $25 tech rate, very different ELR by job; the seven jobs total 8.1 hours and $1,056 = $130/hr.</a:t>
+Roundtable worked example removed from the slide (Noah, Oct 21).</a:t>
             </a:r>
             <a:endParaRPr lang="en-US" dirty="0"/>
           </a:p>
@@ -7769,42 +7769,23 @@
       </p:sp>
       <p:sp>
         <p:nvSpPr>
-          <p:cNvPr id="8" name="Text 6"/>
-          <p:cNvSpPr txBox="1"/>
+          <p:cNvPr id="8" name="Shape 6"/>
+          <p:cNvSpPr/>
           <p:nvPr/>
         </p:nvSpPr>
         <p:spPr>
           <a:xfrm>
             <a:off x="457200" y="2340864"/>
-            <a:ext cx="1828800" cy="457200"/>
-          </a:xfrm>
-          <a:prstGeom prst="rect">
-            <a:avLst/>
-          </a:prstGeom>
-          <a:noFill/>
-          <a:ln/>
-        </p:spPr>
-        <p:txBody>
-          <a:bodyPr wrap="square" lIns="0" tIns="0" rIns="0" bIns="0" rtlCol="0" anchor="ctr"/>
-          <a:lstStyle/>
-          <a:p>
-            <a:pPr indent="0" marL="0">
-              <a:buNone/>
-            </a:pPr>
-            <a:r>
-              <a:rPr lang="en-US" sz="1400" b="1" spc="80" kern="0" dirty="0">
-                <a:solidFill>
-                  <a:srgbClr val="595959"/>
-                </a:solidFill>
-                <a:latin typeface="Inter" pitchFamily="34" charset="0"/>
-                <a:ea typeface="Inter" pitchFamily="34" charset="-122"/>
-                <a:cs typeface="Inter" pitchFamily="34" charset="-120"/>
-              </a:rPr>
-              <a:t>Roundtable example</a:t>
-            </a:r>
-            <a:endParaRPr lang="en-US" sz="1400" dirty="0"/>
-          </a:p>
-        </p:txBody>
+            <a:ext cx="4343400" cy="3648456"/>
+          </a:xfrm>
+          <a:prstGeom prst="rect">
+            <a:avLst/>
+          </a:prstGeom>
+          <a:solidFill>
+            <a:srgbClr val="FFFFFF"/>
+          </a:solidFill>
+          <a:ln/>
+        </p:spPr>
       </p:sp>
       <p:sp>
         <p:nvSpPr>
@@ -7814,8 +7795,8 @@
         </p:nvSpPr>
         <p:spPr>
           <a:xfrm>
-            <a:off x="2286000" y="2340864"/>
-            <a:ext cx="1801368" cy="457200"/>
+            <a:off x="4937760" y="2340864"/>
+            <a:ext cx="6793992" cy="3648456"/>
           </a:xfrm>
           <a:prstGeom prst="rect">
             <a:avLst/>
@@ -7823,12 +7804,7 @@
           <a:solidFill>
             <a:srgbClr val="FFFFFF"/>
           </a:solidFill>
-          <a:ln w="9525">
-            <a:solidFill>
-              <a:srgbClr val="D9D9D9"/>
-            </a:solidFill>
-            <a:prstDash val="solid"/>
-          </a:ln>
+          <a:ln/>
         </p:spPr>
       </p:sp>
       <p:sp>
@@ -7839,40 +7815,24 @@
         </p:nvSpPr>
         <p:spPr>
           <a:xfrm>
-            <a:off x="2359152" y="2340864"/>
-            <a:ext cx="1655064" cy="457200"/>
-          </a:xfrm>
-          <a:prstGeom prst="rect">
-            <a:avLst/>
-          </a:prstGeom>
-          <a:noFill/>
-          <a:ln/>
-        </p:spPr>
-        <p:txBody>
-          <a:bodyPr wrap="square" lIns="0" tIns="0" rIns="0" bIns="0" rtlCol="0" anchor="ctr">
-            <a:normAutofit/>
-          </a:bodyPr>
-          <a:lstStyle/>
-          <a:p>
-            <a:pPr algn="ctr" indent="0" marL="0">
-              <a:buNone/>
-            </a:pPr>
-            <a:r>
-              <a:rPr lang="en-US" sz="1400" dirty="0">
-                <a:solidFill>
-                  <a:srgbClr val="1A1A1A"/>
-                </a:solidFill>
-                <a:latin typeface="Inter" pitchFamily="34" charset="0"/>
-                <a:ea typeface="Inter" pitchFamily="34" charset="-122"/>
-                <a:cs typeface="Inter" pitchFamily="34" charset="-120"/>
-              </a:rPr>
-              <a:t>Tire rotation  </a:t>
-            </a:r>
-            <a:pPr algn="ctr" indent="0" marL="0">
-              <a:buNone/>
-            </a:pPr>
-            <a:r>
-              <a:rPr lang="en-US" sz="1400" b="1" dirty="0">
+            <a:off x="658368" y="2468880"/>
+            <a:ext cx="3931920" cy="292608"/>
+          </a:xfrm>
+          <a:prstGeom prst="rect">
+            <a:avLst/>
+          </a:prstGeom>
+          <a:noFill/>
+          <a:ln/>
+        </p:spPr>
+        <p:txBody>
+          <a:bodyPr wrap="square" lIns="0" tIns="0" rIns="0" bIns="0" rtlCol="0" anchor="ctr"/>
+          <a:lstStyle/>
+          <a:p>
+            <a:pPr indent="0" marL="0">
+              <a:buNone/>
+            </a:pPr>
+            <a:r>
+              <a:rPr lang="en-US" sz="1400" b="1" spc="100" kern="0" dirty="0">
                 <a:solidFill>
                   <a:srgbClr val="0B2C4A"/>
                 </a:solidFill>
@@ -7880,36 +7840,50 @@
                 <a:ea typeface="Inter" pitchFamily="34" charset="-122"/>
                 <a:cs typeface="Inter" pitchFamily="34" charset="-120"/>
               </a:rPr>
-              <a:t>$67/hr</a:t>
-            </a:r>
-            <a:endParaRPr lang="en-US" sz="1400" dirty="0"/>
-          </a:p>
-        </p:txBody>
-      </p:sp>
-      <p:sp>
-        <p:nvSpPr>
-          <p:cNvPr id="11" name="Shape 9"/>
-          <p:cNvSpPr/>
-          <p:nvPr/>
-        </p:nvSpPr>
-        <p:spPr>
-          <a:xfrm>
-            <a:off x="4197096" y="2340864"/>
-            <a:ext cx="1801368" cy="457200"/>
-          </a:xfrm>
-          <a:prstGeom prst="rect">
-            <a:avLst/>
-          </a:prstGeom>
-          <a:solidFill>
-            <a:srgbClr val="FFFFFF"/>
-          </a:solidFill>
-          <a:ln w="9525">
-            <a:solidFill>
-              <a:srgbClr val="D9D9D9"/>
-            </a:solidFill>
-            <a:prstDash val="solid"/>
-          </a:ln>
-        </p:spPr>
+              <a:t>WHY IT MATTERS</a:t>
+            </a:r>
+            <a:endParaRPr lang="en-US" sz="1400" dirty="0"/>
+          </a:p>
+        </p:txBody>
+      </p:sp>
+      <p:sp>
+        <p:nvSpPr>
+          <p:cNvPr id="11" name="Text 9"/>
+          <p:cNvSpPr txBox="1"/>
+          <p:nvPr/>
+        </p:nvSpPr>
+        <p:spPr>
+          <a:xfrm>
+            <a:off x="5138928" y="2468880"/>
+            <a:ext cx="6400800" cy="292608"/>
+          </a:xfrm>
+          <a:prstGeom prst="rect">
+            <a:avLst/>
+          </a:prstGeom>
+          <a:noFill/>
+          <a:ln/>
+        </p:spPr>
+        <p:txBody>
+          <a:bodyPr wrap="square" lIns="0" tIns="0" rIns="0" bIns="0" rtlCol="0" anchor="ctr"/>
+          <a:lstStyle/>
+          <a:p>
+            <a:pPr indent="0" marL="0">
+              <a:buNone/>
+            </a:pPr>
+            <a:r>
+              <a:rPr lang="en-US" sz="1400" b="1" spc="100" kern="0" dirty="0">
+                <a:solidFill>
+                  <a:srgbClr val="0B2C4A"/>
+                </a:solidFill>
+                <a:latin typeface="Inter" pitchFamily="34" charset="0"/>
+                <a:ea typeface="Inter" pitchFamily="34" charset="-122"/>
+                <a:cs typeface="Inter" pitchFamily="34" charset="-120"/>
+              </a:rPr>
+              <a:t>WHAT MOVES IT</a:t>
+            </a:r>
+            <a:endParaRPr lang="en-US" sz="1400" dirty="0"/>
+          </a:p>
+        </p:txBody>
       </p:sp>
       <p:sp>
         <p:nvSpPr>
@@ -7919,421 +7893,8 @@
         </p:nvSpPr>
         <p:spPr>
           <a:xfrm>
-            <a:off x="4270248" y="2340864"/>
-            <a:ext cx="1655064" cy="457200"/>
-          </a:xfrm>
-          <a:prstGeom prst="rect">
-            <a:avLst/>
-          </a:prstGeom>
-          <a:noFill/>
-          <a:ln/>
-        </p:spPr>
-        <p:txBody>
-          <a:bodyPr wrap="square" lIns="0" tIns="0" rIns="0" bIns="0" rtlCol="0" anchor="ctr">
-            <a:normAutofit/>
-          </a:bodyPr>
-          <a:lstStyle/>
-          <a:p>
-            <a:pPr algn="ctr" indent="0" marL="0">
-              <a:buNone/>
-            </a:pPr>
-            <a:r>
-              <a:rPr lang="en-US" sz="1400" dirty="0">
-                <a:solidFill>
-                  <a:srgbClr val="1A1A1A"/>
-                </a:solidFill>
-                <a:latin typeface="Inter" pitchFamily="34" charset="0"/>
-                <a:ea typeface="Inter" pitchFamily="34" charset="-122"/>
-                <a:cs typeface="Inter" pitchFamily="34" charset="-120"/>
-              </a:rPr>
-              <a:t>Oil change  </a:t>
-            </a:r>
-            <a:pPr algn="ctr" indent="0" marL="0">
-              <a:buNone/>
-            </a:pPr>
-            <a:r>
-              <a:rPr lang="en-US" sz="1400" b="1" dirty="0">
-                <a:solidFill>
-                  <a:srgbClr val="0B2C4A"/>
-                </a:solidFill>
-                <a:latin typeface="Inter" pitchFamily="34" charset="0"/>
-                <a:ea typeface="Inter" pitchFamily="34" charset="-122"/>
-                <a:cs typeface="Inter" pitchFamily="34" charset="-120"/>
-              </a:rPr>
-              <a:t>$80/hr</a:t>
-            </a:r>
-            <a:endParaRPr lang="en-US" sz="1400" dirty="0"/>
-          </a:p>
-        </p:txBody>
-      </p:sp>
-      <p:sp>
-        <p:nvSpPr>
-          <p:cNvPr id="13" name="Shape 11"/>
-          <p:cNvSpPr/>
-          <p:nvPr/>
-        </p:nvSpPr>
-        <p:spPr>
-          <a:xfrm>
-            <a:off x="6108192" y="2340864"/>
-            <a:ext cx="1801368" cy="457200"/>
-          </a:xfrm>
-          <a:prstGeom prst="rect">
-            <a:avLst/>
-          </a:prstGeom>
-          <a:solidFill>
-            <a:srgbClr val="FFFFFF"/>
-          </a:solidFill>
-          <a:ln w="9525">
-            <a:solidFill>
-              <a:srgbClr val="D9D9D9"/>
-            </a:solidFill>
-            <a:prstDash val="solid"/>
-          </a:ln>
-        </p:spPr>
-      </p:sp>
-      <p:sp>
-        <p:nvSpPr>
-          <p:cNvPr id="14" name="Text 12"/>
-          <p:cNvSpPr txBox="1"/>
-          <p:nvPr/>
-        </p:nvSpPr>
-        <p:spPr>
-          <a:xfrm>
-            <a:off x="6181344" y="2340864"/>
-            <a:ext cx="1655064" cy="457200"/>
-          </a:xfrm>
-          <a:prstGeom prst="rect">
-            <a:avLst/>
-          </a:prstGeom>
-          <a:noFill/>
-          <a:ln/>
-        </p:spPr>
-        <p:txBody>
-          <a:bodyPr wrap="square" lIns="0" tIns="0" rIns="0" bIns="0" rtlCol="0" anchor="ctr">
-            <a:normAutofit/>
-          </a:bodyPr>
-          <a:lstStyle/>
-          <a:p>
-            <a:pPr algn="ctr" indent="0" marL="0">
-              <a:buNone/>
-            </a:pPr>
-            <a:r>
-              <a:rPr lang="en-US" sz="1400" dirty="0">
-                <a:solidFill>
-                  <a:srgbClr val="1A1A1A"/>
-                </a:solidFill>
-                <a:latin typeface="Inter" pitchFamily="34" charset="0"/>
-                <a:ea typeface="Inter" pitchFamily="34" charset="-122"/>
-                <a:cs typeface="Inter" pitchFamily="34" charset="-120"/>
-              </a:rPr>
-              <a:t>Alignment  </a:t>
-            </a:r>
-            <a:pPr algn="ctr" indent="0" marL="0">
-              <a:buNone/>
-            </a:pPr>
-            <a:r>
-              <a:rPr lang="en-US" sz="1400" b="1" dirty="0">
-                <a:solidFill>
-                  <a:srgbClr val="0B2C4A"/>
-                </a:solidFill>
-                <a:latin typeface="Inter" pitchFamily="34" charset="0"/>
-                <a:ea typeface="Inter" pitchFamily="34" charset="-122"/>
-                <a:cs typeface="Inter" pitchFamily="34" charset="-120"/>
-              </a:rPr>
-              <a:t>$117/hr</a:t>
-            </a:r>
-            <a:endParaRPr lang="en-US" sz="1400" dirty="0"/>
-          </a:p>
-        </p:txBody>
-      </p:sp>
-      <p:sp>
-        <p:nvSpPr>
-          <p:cNvPr id="15" name="Shape 13"/>
-          <p:cNvSpPr/>
-          <p:nvPr/>
-        </p:nvSpPr>
-        <p:spPr>
-          <a:xfrm>
-            <a:off x="8019288" y="2340864"/>
-            <a:ext cx="1801368" cy="457200"/>
-          </a:xfrm>
-          <a:prstGeom prst="rect">
-            <a:avLst/>
-          </a:prstGeom>
-          <a:solidFill>
-            <a:srgbClr val="FFFFFF"/>
-          </a:solidFill>
-          <a:ln w="9525">
-            <a:solidFill>
-              <a:srgbClr val="D9D9D9"/>
-            </a:solidFill>
-            <a:prstDash val="solid"/>
-          </a:ln>
-        </p:spPr>
-      </p:sp>
-      <p:sp>
-        <p:nvSpPr>
-          <p:cNvPr id="16" name="Text 14"/>
-          <p:cNvSpPr txBox="1"/>
-          <p:nvPr/>
-        </p:nvSpPr>
-        <p:spPr>
-          <a:xfrm>
-            <a:off x="8092440" y="2340864"/>
-            <a:ext cx="1655064" cy="457200"/>
-          </a:xfrm>
-          <a:prstGeom prst="rect">
-            <a:avLst/>
-          </a:prstGeom>
-          <a:noFill/>
-          <a:ln/>
-        </p:spPr>
-        <p:txBody>
-          <a:bodyPr wrap="square" lIns="0" tIns="0" rIns="0" bIns="0" rtlCol="0" anchor="ctr">
-            <a:normAutofit/>
-          </a:bodyPr>
-          <a:lstStyle/>
-          <a:p>
-            <a:pPr algn="ctr" indent="0" marL="0">
-              <a:buNone/>
-            </a:pPr>
-            <a:r>
-              <a:rPr lang="en-US" sz="1400" dirty="0">
-                <a:solidFill>
-                  <a:srgbClr val="1A1A1A"/>
-                </a:solidFill>
-                <a:latin typeface="Inter" pitchFamily="34" charset="0"/>
-                <a:ea typeface="Inter" pitchFamily="34" charset="-122"/>
-                <a:cs typeface="Inter" pitchFamily="34" charset="-120"/>
-              </a:rPr>
-              <a:t>Steering rack  </a:t>
-            </a:r>
-            <a:pPr algn="ctr" indent="0" marL="0">
-              <a:buNone/>
-            </a:pPr>
-            <a:r>
-              <a:rPr lang="en-US" sz="1400" b="1" dirty="0">
-                <a:solidFill>
-                  <a:srgbClr val="0B2C4A"/>
-                </a:solidFill>
-                <a:latin typeface="Inter" pitchFamily="34" charset="0"/>
-                <a:ea typeface="Inter" pitchFamily="34" charset="-122"/>
-                <a:cs typeface="Inter" pitchFamily="34" charset="-120"/>
-              </a:rPr>
-              <a:t>$160/hr</a:t>
-            </a:r>
-            <a:endParaRPr lang="en-US" sz="1400" dirty="0"/>
-          </a:p>
-        </p:txBody>
-      </p:sp>
-      <p:sp>
-        <p:nvSpPr>
-          <p:cNvPr id="17" name="Shape 15"/>
-          <p:cNvSpPr/>
-          <p:nvPr/>
-        </p:nvSpPr>
-        <p:spPr>
-          <a:xfrm>
-            <a:off x="9930384" y="2340864"/>
-            <a:ext cx="1801368" cy="457200"/>
-          </a:xfrm>
-          <a:prstGeom prst="rect">
-            <a:avLst/>
-          </a:prstGeom>
-          <a:solidFill>
-            <a:srgbClr val="FFFFFF"/>
-          </a:solidFill>
-          <a:ln w="9525">
-            <a:solidFill>
-              <a:srgbClr val="D9D9D9"/>
-            </a:solidFill>
-            <a:prstDash val="solid"/>
-          </a:ln>
-        </p:spPr>
-      </p:sp>
-      <p:sp>
-        <p:nvSpPr>
-          <p:cNvPr id="18" name="Text 16"/>
-          <p:cNvSpPr txBox="1"/>
-          <p:nvPr/>
-        </p:nvSpPr>
-        <p:spPr>
-          <a:xfrm>
-            <a:off x="10003536" y="2340864"/>
-            <a:ext cx="1655064" cy="457200"/>
-          </a:xfrm>
-          <a:prstGeom prst="rect">
-            <a:avLst/>
-          </a:prstGeom>
-          <a:noFill/>
-          <a:ln/>
-        </p:spPr>
-        <p:txBody>
-          <a:bodyPr wrap="square" lIns="0" tIns="0" rIns="0" bIns="0" rtlCol="0" anchor="ctr">
-            <a:normAutofit/>
-          </a:bodyPr>
-          <a:lstStyle/>
-          <a:p>
-            <a:pPr algn="ctr" indent="0" marL="0">
-              <a:buNone/>
-            </a:pPr>
-            <a:r>
-              <a:rPr lang="en-US" sz="1400" dirty="0">
-                <a:solidFill>
-                  <a:srgbClr val="1A1A1A"/>
-                </a:solidFill>
-                <a:latin typeface="Inter" pitchFamily="34" charset="0"/>
-                <a:ea typeface="Inter" pitchFamily="34" charset="-122"/>
-                <a:cs typeface="Inter" pitchFamily="34" charset="-120"/>
-              </a:rPr>
-              <a:t>All 7 jobs  </a:t>
-            </a:r>
-            <a:pPr algn="ctr" indent="0" marL="0">
-              <a:buNone/>
-            </a:pPr>
-            <a:r>
-              <a:rPr lang="en-US" sz="1400" b="1" dirty="0">
-                <a:solidFill>
-                  <a:srgbClr val="0B2C4A"/>
-                </a:solidFill>
-                <a:latin typeface="Inter" pitchFamily="34" charset="0"/>
-                <a:ea typeface="Inter" pitchFamily="34" charset="-122"/>
-                <a:cs typeface="Inter" pitchFamily="34" charset="-120"/>
-              </a:rPr>
-              <a:t>$130/hr</a:t>
-            </a:r>
-            <a:endParaRPr lang="en-US" sz="1400" dirty="0"/>
-          </a:p>
-        </p:txBody>
-      </p:sp>
-      <p:sp>
-        <p:nvSpPr>
-          <p:cNvPr id="19" name="Shape 17"/>
-          <p:cNvSpPr/>
-          <p:nvPr/>
-        </p:nvSpPr>
-        <p:spPr>
-          <a:xfrm>
-            <a:off x="457200" y="2907792"/>
-            <a:ext cx="4343400" cy="3081528"/>
-          </a:xfrm>
-          <a:prstGeom prst="rect">
-            <a:avLst/>
-          </a:prstGeom>
-          <a:solidFill>
-            <a:srgbClr val="FFFFFF"/>
-          </a:solidFill>
-          <a:ln/>
-        </p:spPr>
-      </p:sp>
-      <p:sp>
-        <p:nvSpPr>
-          <p:cNvPr id="20" name="Shape 18"/>
-          <p:cNvSpPr/>
-          <p:nvPr/>
-        </p:nvSpPr>
-        <p:spPr>
-          <a:xfrm>
-            <a:off x="4937760" y="2907792"/>
-            <a:ext cx="6793992" cy="3081528"/>
-          </a:xfrm>
-          <a:prstGeom prst="rect">
-            <a:avLst/>
-          </a:prstGeom>
-          <a:solidFill>
-            <a:srgbClr val="FFFFFF"/>
-          </a:solidFill>
-          <a:ln/>
-        </p:spPr>
-      </p:sp>
-      <p:sp>
-        <p:nvSpPr>
-          <p:cNvPr id="21" name="Text 19"/>
-          <p:cNvSpPr txBox="1"/>
-          <p:nvPr/>
-        </p:nvSpPr>
-        <p:spPr>
-          <a:xfrm>
-            <a:off x="658368" y="3035808"/>
-            <a:ext cx="3931920" cy="292608"/>
-          </a:xfrm>
-          <a:prstGeom prst="rect">
-            <a:avLst/>
-          </a:prstGeom>
-          <a:noFill/>
-          <a:ln/>
-        </p:spPr>
-        <p:txBody>
-          <a:bodyPr wrap="square" lIns="0" tIns="0" rIns="0" bIns="0" rtlCol="0" anchor="ctr"/>
-          <a:lstStyle/>
-          <a:p>
-            <a:pPr indent="0" marL="0">
-              <a:buNone/>
-            </a:pPr>
-            <a:r>
-              <a:rPr lang="en-US" sz="1400" b="1" spc="100" kern="0" dirty="0">
-                <a:solidFill>
-                  <a:srgbClr val="0B2C4A"/>
-                </a:solidFill>
-                <a:latin typeface="Inter" pitchFamily="34" charset="0"/>
-                <a:ea typeface="Inter" pitchFamily="34" charset="-122"/>
-                <a:cs typeface="Inter" pitchFamily="34" charset="-120"/>
-              </a:rPr>
-              <a:t>WHY IT MATTERS</a:t>
-            </a:r>
-            <a:endParaRPr lang="en-US" sz="1400" dirty="0"/>
-          </a:p>
-        </p:txBody>
-      </p:sp>
-      <p:sp>
-        <p:nvSpPr>
-          <p:cNvPr id="22" name="Text 20"/>
-          <p:cNvSpPr txBox="1"/>
-          <p:nvPr/>
-        </p:nvSpPr>
-        <p:spPr>
-          <a:xfrm>
-            <a:off x="5138928" y="3035808"/>
-            <a:ext cx="6400800" cy="292608"/>
-          </a:xfrm>
-          <a:prstGeom prst="rect">
-            <a:avLst/>
-          </a:prstGeom>
-          <a:noFill/>
-          <a:ln/>
-        </p:spPr>
-        <p:txBody>
-          <a:bodyPr wrap="square" lIns="0" tIns="0" rIns="0" bIns="0" rtlCol="0" anchor="ctr"/>
-          <a:lstStyle/>
-          <a:p>
-            <a:pPr indent="0" marL="0">
-              <a:buNone/>
-            </a:pPr>
-            <a:r>
-              <a:rPr lang="en-US" sz="1400" b="1" spc="100" kern="0" dirty="0">
-                <a:solidFill>
-                  <a:srgbClr val="0B2C4A"/>
-                </a:solidFill>
-                <a:latin typeface="Inter" pitchFamily="34" charset="0"/>
-                <a:ea typeface="Inter" pitchFamily="34" charset="-122"/>
-                <a:cs typeface="Inter" pitchFamily="34" charset="-120"/>
-              </a:rPr>
-              <a:t>WHAT MOVES IT</a:t>
-            </a:r>
-            <a:endParaRPr lang="en-US" sz="1400" dirty="0"/>
-          </a:p>
-        </p:txBody>
-      </p:sp>
-      <p:sp>
-        <p:nvSpPr>
-          <p:cNvPr id="23" name="Text 21"/>
-          <p:cNvSpPr txBox="1"/>
-          <p:nvPr/>
-        </p:nvSpPr>
-        <p:spPr>
-          <a:xfrm>
-            <a:off x="658368" y="3410712"/>
-            <a:ext cx="3977640" cy="2441448"/>
+            <a:off x="658368" y="2843784"/>
+            <a:ext cx="3977640" cy="3008376"/>
           </a:xfrm>
           <a:prstGeom prst="rect">
             <a:avLst/>
@@ -8353,7 +7914,7 @@
               <a:buChar char="•"/>
             </a:pPr>
             <a:r>
-              <a:rPr lang="en-US" sz="1500" dirty="0">
+              <a:rPr lang="en-US" sz="1600" dirty="0">
                 <a:solidFill>
                   <a:srgbClr val="1A1A1A"/>
                 </a:solidFill>
@@ -8363,7 +7924,7 @@
               </a:rPr>
               <a:t>Every hour sold is worth the ELR, so it sets the value of the whole shop.</a:t>
             </a:r>
-            <a:endParaRPr lang="en-US" sz="1500" dirty="0"/>
+            <a:endParaRPr lang="en-US" sz="1600" dirty="0"/>
           </a:p>
           <a:p>
             <a:pPr marL="203200" indent="-203200">
@@ -8374,7 +7935,7 @@
               <a:buChar char="•"/>
             </a:pPr>
             <a:r>
-              <a:rPr lang="en-US" sz="1500" dirty="0">
+              <a:rPr lang="en-US" sz="1600" dirty="0">
                 <a:solidFill>
                   <a:srgbClr val="1A1A1A"/>
                 </a:solidFill>
@@ -8384,7 +7945,7 @@
               </a:rPr>
               <a:t>The gap to door rate is money given away. Our benchmark: CP ELR at least 70% of door rate.</a:t>
             </a:r>
-            <a:endParaRPr lang="en-US" sz="1500" dirty="0"/>
+            <a:endParaRPr lang="en-US" sz="1600" dirty="0"/>
           </a:p>
           <a:p>
             <a:pPr marL="203200" indent="-203200">
@@ -8395,7 +7956,7 @@
               <a:buChar char="•"/>
             </a:pPr>
             <a:r>
-              <a:rPr lang="en-US" sz="1500" dirty="0">
+              <a:rPr lang="en-US" sz="1600" dirty="0">
                 <a:solidFill>
                   <a:srgbClr val="1A1A1A"/>
                 </a:solidFill>
@@ -8405,20 +7966,20 @@
               </a:rPr>
               <a:t>It shows whether pricing, discounting and mix are under control.</a:t>
             </a:r>
-            <a:endParaRPr lang="en-US" sz="1500" dirty="0"/>
-          </a:p>
-        </p:txBody>
-      </p:sp>
-      <p:sp>
-        <p:nvSpPr>
-          <p:cNvPr id="24" name="Shape 22"/>
+            <a:endParaRPr lang="en-US" sz="1600" dirty="0"/>
+          </a:p>
+        </p:txBody>
+      </p:sp>
+      <p:sp>
+        <p:nvSpPr>
+          <p:cNvPr id="13" name="Shape 11"/>
           <p:cNvSpPr/>
           <p:nvPr/>
         </p:nvSpPr>
         <p:spPr>
           <a:xfrm>
-            <a:off x="5138928" y="3410712"/>
-            <a:ext cx="45720" cy="1133856"/>
+            <a:off x="5138928" y="2843784"/>
+            <a:ext cx="45720" cy="908304"/>
           </a:xfrm>
           <a:prstGeom prst="rect">
             <a:avLst/>
@@ -8431,14 +7992,14 @@
       </p:sp>
       <p:sp>
         <p:nvSpPr>
-          <p:cNvPr id="25" name="Text 23"/>
-          <p:cNvSpPr txBox="1"/>
-          <p:nvPr/>
-        </p:nvSpPr>
-        <p:spPr>
-          <a:xfrm>
-            <a:off x="5266944" y="3410712"/>
-            <a:ext cx="1877568" cy="1133856"/>
+          <p:cNvPr id="14" name="Text 12"/>
+          <p:cNvSpPr txBox="1"/>
+          <p:nvPr/>
+        </p:nvSpPr>
+        <p:spPr>
+          <a:xfrm>
+            <a:off x="5266944" y="2843784"/>
+            <a:ext cx="2962656" cy="908304"/>
           </a:xfrm>
           <a:prstGeom prst="rect">
             <a:avLst/>
@@ -8487,14 +8048,14 @@
       </p:sp>
       <p:sp>
         <p:nvSpPr>
-          <p:cNvPr id="26" name="Shape 24"/>
+          <p:cNvPr id="15" name="Shape 13"/>
           <p:cNvSpPr/>
           <p:nvPr/>
         </p:nvSpPr>
         <p:spPr>
           <a:xfrm>
-            <a:off x="7309104" y="3410712"/>
-            <a:ext cx="45720" cy="1133856"/>
+            <a:off x="8394192" y="2843784"/>
+            <a:ext cx="45720" cy="908304"/>
           </a:xfrm>
           <a:prstGeom prst="rect">
             <a:avLst/>
@@ -8507,14 +8068,14 @@
       </p:sp>
       <p:sp>
         <p:nvSpPr>
-          <p:cNvPr id="27" name="Text 25"/>
-          <p:cNvSpPr txBox="1"/>
-          <p:nvPr/>
-        </p:nvSpPr>
-        <p:spPr>
-          <a:xfrm>
-            <a:off x="7437120" y="3410712"/>
-            <a:ext cx="1877568" cy="1133856"/>
+          <p:cNvPr id="16" name="Text 14"/>
+          <p:cNvSpPr txBox="1"/>
+          <p:nvPr/>
+        </p:nvSpPr>
+        <p:spPr>
+          <a:xfrm>
+            <a:off x="8522208" y="2843784"/>
+            <a:ext cx="2962656" cy="908304"/>
           </a:xfrm>
           <a:prstGeom prst="rect">
             <a:avLst/>
@@ -8563,14 +8124,14 @@
       </p:sp>
       <p:sp>
         <p:nvSpPr>
-          <p:cNvPr id="28" name="Shape 26"/>
+          <p:cNvPr id="17" name="Shape 15"/>
           <p:cNvSpPr/>
           <p:nvPr/>
         </p:nvSpPr>
         <p:spPr>
           <a:xfrm>
-            <a:off x="9479280" y="3410712"/>
-            <a:ext cx="45720" cy="1133856"/>
+            <a:off x="5138928" y="3861816"/>
+            <a:ext cx="45720" cy="908304"/>
           </a:xfrm>
           <a:prstGeom prst="rect">
             <a:avLst/>
@@ -8583,14 +8144,14 @@
       </p:sp>
       <p:sp>
         <p:nvSpPr>
-          <p:cNvPr id="29" name="Text 27"/>
-          <p:cNvSpPr txBox="1"/>
-          <p:nvPr/>
-        </p:nvSpPr>
-        <p:spPr>
-          <a:xfrm>
-            <a:off x="9607296" y="3410712"/>
-            <a:ext cx="1877568" cy="1133856"/>
+          <p:cNvPr id="18" name="Text 16"/>
+          <p:cNvSpPr txBox="1"/>
+          <p:nvPr/>
+        </p:nvSpPr>
+        <p:spPr>
+          <a:xfrm>
+            <a:off x="5266944" y="3861816"/>
+            <a:ext cx="2962656" cy="908304"/>
           </a:xfrm>
           <a:prstGeom prst="rect">
             <a:avLst/>
@@ -8639,14 +8200,14 @@
       </p:sp>
       <p:sp>
         <p:nvSpPr>
-          <p:cNvPr id="30" name="Shape 28"/>
+          <p:cNvPr id="19" name="Shape 17"/>
           <p:cNvSpPr/>
           <p:nvPr/>
         </p:nvSpPr>
         <p:spPr>
           <a:xfrm>
-            <a:off x="5138928" y="4654296"/>
-            <a:ext cx="45720" cy="1133856"/>
+            <a:off x="8394192" y="3861816"/>
+            <a:ext cx="45720" cy="908304"/>
           </a:xfrm>
           <a:prstGeom prst="rect">
             <a:avLst/>
@@ -8659,14 +8220,14 @@
       </p:sp>
       <p:sp>
         <p:nvSpPr>
-          <p:cNvPr id="31" name="Text 29"/>
-          <p:cNvSpPr txBox="1"/>
-          <p:nvPr/>
-        </p:nvSpPr>
-        <p:spPr>
-          <a:xfrm>
-            <a:off x="5266944" y="4654296"/>
-            <a:ext cx="1877568" cy="1133856"/>
+          <p:cNvPr id="20" name="Text 18"/>
+          <p:cNvSpPr txBox="1"/>
+          <p:nvPr/>
+        </p:nvSpPr>
+        <p:spPr>
+          <a:xfrm>
+            <a:off x="8522208" y="3861816"/>
+            <a:ext cx="2962656" cy="908304"/>
           </a:xfrm>
           <a:prstGeom prst="rect">
             <a:avLst/>
@@ -8715,14 +8276,14 @@
       </p:sp>
       <p:sp>
         <p:nvSpPr>
-          <p:cNvPr id="32" name="Shape 30"/>
+          <p:cNvPr id="21" name="Shape 19"/>
           <p:cNvSpPr/>
           <p:nvPr/>
         </p:nvSpPr>
         <p:spPr>
           <a:xfrm>
-            <a:off x="7309104" y="4654296"/>
-            <a:ext cx="45720" cy="1133856"/>
+            <a:off x="5138928" y="4879848"/>
+            <a:ext cx="45720" cy="908304"/>
           </a:xfrm>
           <a:prstGeom prst="rect">
             <a:avLst/>
@@ -8735,14 +8296,14 @@
       </p:sp>
       <p:sp>
         <p:nvSpPr>
-          <p:cNvPr id="33" name="Text 31"/>
-          <p:cNvSpPr txBox="1"/>
-          <p:nvPr/>
-        </p:nvSpPr>
-        <p:spPr>
-          <a:xfrm>
-            <a:off x="7437120" y="4654296"/>
-            <a:ext cx="1877568" cy="1133856"/>
+          <p:cNvPr id="22" name="Text 20"/>
+          <p:cNvSpPr txBox="1"/>
+          <p:nvPr/>
+        </p:nvSpPr>
+        <p:spPr>
+          <a:xfrm>
+            <a:off x="5266944" y="4879848"/>
+            <a:ext cx="2962656" cy="908304"/>
           </a:xfrm>
           <a:prstGeom prst="rect">
             <a:avLst/>
@@ -8791,14 +8352,14 @@
       </p:sp>
       <p:sp>
         <p:nvSpPr>
-          <p:cNvPr id="34" name="Shape 32"/>
+          <p:cNvPr id="23" name="Shape 21"/>
           <p:cNvSpPr/>
           <p:nvPr/>
         </p:nvSpPr>
         <p:spPr>
           <a:xfrm>
-            <a:off x="9479280" y="4654296"/>
-            <a:ext cx="45720" cy="1133856"/>
+            <a:off x="8394192" y="4879848"/>
+            <a:ext cx="45720" cy="908304"/>
           </a:xfrm>
           <a:prstGeom prst="rect">
             <a:avLst/>
@@ -8811,14 +8372,14 @@
       </p:sp>
       <p:sp>
         <p:nvSpPr>
-          <p:cNvPr id="35" name="Text 33"/>
-          <p:cNvSpPr txBox="1"/>
-          <p:nvPr/>
-        </p:nvSpPr>
-        <p:spPr>
-          <a:xfrm>
-            <a:off x="9607296" y="4654296"/>
-            <a:ext cx="1877568" cy="1133856"/>
+          <p:cNvPr id="24" name="Text 22"/>
+          <p:cNvSpPr txBox="1"/>
+          <p:nvPr/>
+        </p:nvSpPr>
+        <p:spPr>
+          <a:xfrm>
+            <a:off x="8522208" y="4879848"/>
+            <a:ext cx="2962656" cy="908304"/>
           </a:xfrm>
           <a:prstGeom prst="rect">
             <a:avLst/>
@@ -8867,7 +8428,7 @@
       </p:sp>
       <p:sp>
         <p:nvSpPr>
-          <p:cNvPr id="36" name="Shape 34"/>
+          <p:cNvPr id="25" name="Shape 23"/>
           <p:cNvSpPr/>
           <p:nvPr/>
         </p:nvSpPr>
@@ -8887,7 +8448,7 @@
       </p:sp>
       <p:sp>
         <p:nvSpPr>
-          <p:cNvPr id="37" name="Text 35"/>
+          <p:cNvPr id="26" name="Text 24"/>
           <p:cNvSpPr txBox="1"/>
           <p:nvPr/>
         </p:nvSpPr>
@@ -13382,7 +12943,7 @@
                 <a:ea typeface="Inter" pitchFamily="34" charset="-122"/>
                 <a:cs typeface="Inter" pitchFamily="34" charset="-120"/>
               </a:rPr>
-              <a:t>How much of the store's fixed expenses service and parts gross pays for. P&amp;L line 254 divided by line 258.</a:t>
+              <a:t>How much of the store's fixed expenses service and parts gross pays for.</a:t>
             </a:r>
             <a:endParaRPr lang="en-US" sz="1500" dirty="0"/>
           </a:p>

--- a/day2-deck/decks/Metric Explainers - Review.pptx
+++ b/day2-deck/decks/Metric Explainers - Review.pptx
@@ -9125,7 +9125,7 @@
                 <a:ea typeface="Inter" pitchFamily="34" charset="-122"/>
                 <a:cs typeface="Inter" pitchFamily="34" charset="-120"/>
               </a:rPr>
-              <a:t>"Total money in beats ELR, gross %, hours, anything else. It's what we sell." (Roundtable)</a:t>
+              <a:t>Total dollars per RO matters more than any single measure. It's what we sell.</a:t>
             </a:r>
             <a:endParaRPr lang="en-US" sz="1500" dirty="0"/>
           </a:p>

--- a/day2-deck/decks/Metric Explainers - Review.pptx
+++ b/day2-deck/decks/Metric Explainers - Review.pptx
@@ -692,7 +692,7 @@
             <a:r>
               <a:rPr lang="en-US" dirty="0"/>
               <a:t>Source: Definitions match the data slides: Qlik - Closed Repair Orders (all customer-pay ROs, by close month), Profit &amp; Loss and Productivity apps, Jan-Sep 2026 vs 2025, same-store, 33 stores. Worked example: Service Manager Roundtable, Nov 15, 2024, slide 21.PLACE: Technician Proficiency, after the section break, in front of the store ranker.
-Proficiency uses ADP paid hours (regular + overtime), so it includes time not on an RO. Efficiency would use DMS time punched on jobs, which this data does not have.</a:t>
+Proficiency uses ADP worked hours (regular + overtime), so it includes time not on an RO. Efficiency would use DMS time punched on jobs, which this data does not have.</a:t>
             </a:r>
             <a:endParaRPr lang="en-US" dirty="0"/>
           </a:p>
@@ -4260,7 +4260,7 @@
                 <a:ea typeface="Inter" pitchFamily="34" charset="-122"/>
                 <a:cs typeface="Inter" pitchFamily="34" charset="-120"/>
               </a:rPr>
-              <a:t>hours paid (clocked)</a:t>
+              <a:t>hours worked (clocked)</a:t>
             </a:r>
             <a:endParaRPr lang="en-US" sz="2400" dirty="0"/>
           </a:p>
@@ -4404,7 +4404,7 @@
                 <a:ea typeface="Inter" pitchFamily="34" charset="-122"/>
                 <a:cs typeface="Inter" pitchFamily="34" charset="-120"/>
               </a:rPr>
-              <a:t>Paid 40 hours  </a:t>
+              <a:t>Works 40 hours  </a:t>
             </a:r>
             <a:pPr algn="ctr" indent="0" marL="0">
               <a:buNone/>
@@ -5237,7 +5237,7 @@
                 <a:ea typeface="Inter" pitchFamily="34" charset="-122"/>
                 <a:cs typeface="Inter" pitchFamily="34" charset="-120"/>
               </a:rPr>
-              <a:t>Efficiency divides by time clocked on ROs, not all paid time</a:t>
+              <a:t>Efficiency divides by time clocked on ROs, not all hours worked</a:t>
             </a:r>
             <a:endParaRPr lang="en-US" sz="1400" dirty="0"/>
           </a:p>
@@ -5515,7 +5515,7 @@
                 <a:ea typeface="Inter" pitchFamily="34" charset="-122"/>
                 <a:cs typeface="Inter" pitchFamily="34" charset="-120"/>
               </a:rPr>
-              <a:t>paid hours (ADP, regular + overtime)</a:t>
+              <a:t>worked hours (ADP, regular + overtime)</a:t>
             </a:r>
             <a:endParaRPr lang="en-US" sz="2200" dirty="0"/>
           </a:p>
@@ -5554,7 +5554,7 @@
                 <a:ea typeface="Inter" pitchFamily="34" charset="-122"/>
                 <a:cs typeface="Inter" pitchFamily="34" charset="-120"/>
               </a:rPr>
-              <a:t>Matched by tech number, all pay types, Dec 25, 2025 to Oct 9, 2026. Store = total sold hours / total paid hours.</a:t>
+              <a:t>Matched by tech number, all pay types, Dec 25, 2025 to Oct 9, 2026. Store = total sold hours / total worked hours.</a:t>
             </a:r>
             <a:endParaRPr lang="en-US" sz="1500" dirty="0"/>
           </a:p>
@@ -5715,7 +5715,7 @@
                 <a:ea typeface="Inter" pitchFamily="34" charset="-122"/>
                 <a:cs typeface="Inter" pitchFamily="34" charset="-120"/>
               </a:rPr>
-              <a:t>Service techs, express techs, team leaders and shop foremen</a:t>
+              <a:t>Service technicians, express technicians, service team leaders and shop foremen: everyone whose job is to flag hours on the line</a:t>
             </a:r>
             <a:endParaRPr lang="en-US" sz="1600" dirty="0"/>
           </a:p>
@@ -5740,27 +5740,6 @@
             </a:r>
             <a:endParaRPr lang="en-US" sz="1600" dirty="0"/>
           </a:p>
-          <a:p>
-            <a:pPr marL="203200" indent="-203200">
-              <a:spcAft>
-                <a:spcPts val="600"/>
-              </a:spcAft>
-              <a:buSzPct val="100000"/>
-              <a:buChar char="•"/>
-            </a:pPr>
-            <a:r>
-              <a:rPr lang="en-US" sz="1600" dirty="0">
-                <a:solidFill>
-                  <a:srgbClr val="1A1A1A"/>
-                </a:solidFill>
-                <a:latin typeface="Inter" pitchFamily="34" charset="0"/>
-                <a:ea typeface="Inter" pitchFamily="34" charset="-122"/>
-                <a:cs typeface="Inter" pitchFamily="34" charset="-120"/>
-              </a:rPr>
-              <a:t>Same-store: INEOS excluded</a:t>
-            </a:r>
-            <a:endParaRPr lang="en-US" sz="1600" dirty="0"/>
-          </a:p>
         </p:txBody>
       </p:sp>
       <p:sp>
@@ -5985,7 +5964,7 @@
                 <a:ea typeface="Inter" pitchFamily="34" charset="-122"/>
                 <a:cs typeface="Inter" pitchFamily="34" charset="-120"/>
               </a:rPr>
-              <a:t>Paid hours trimmed to the months a tech actually flagged</a:t>
+              <a:t>Worked hours trimmed to the months a tech actually flagged</a:t>
             </a:r>
             <a:endParaRPr lang="en-US" sz="1400" dirty="0"/>
           </a:p>
@@ -6213,7 +6192,7 @@
                 <a:ea typeface="Inter" pitchFamily="34" charset="-122"/>
                 <a:cs typeface="Inter" pitchFamily="34" charset="-120"/>
               </a:rPr>
-              <a:t>Each tech under 85% raised to 85% of their own paid hours</a:t>
+              <a:t>Each tech under 85% raised to 85% of their own worked hours</a:t>
             </a:r>
             <a:endParaRPr lang="en-US" sz="1400" dirty="0"/>
           </a:p>

--- a/day2-deck/decks/Metric Explainers - Review.pptx
+++ b/day2-deck/decks/Metric Explainers - Review.pptx
@@ -17,9 +17,10 @@
     <p:sldId id="265" r:id="rId11"/>
     <p:sldId id="266" r:id="rId12"/>
     <p:sldId id="267" r:id="rId13"/>
+    <p:sldId id="268" r:id="rId14"/>
   </p:sldIdLst>
   <p:notesMasterIdLst>
-    <p:notesMasterId r:id="rId14"/>
+    <p:notesMasterId r:id="rId15"/>
   </p:notesMasterIdLst>
   <p:sldSz cx="12192000" cy="6858000"/>
   <p:notesSz cx="6858000" cy="12192000"/>
@@ -823,6 +824,95 @@
 </p:notes>
 </file>
 
+<file path=ppt/notesSlides/notesSlide13.xml><?xml version="1.0" encoding="utf-8"?>
+<p:notes xmlns:a="http://schemas.openxmlformats.org/drawingml/2006/main" xmlns:r="http://schemas.openxmlformats.org/officeDocument/2006/relationships" xmlns:p="http://schemas.openxmlformats.org/presentationml/2006/main">
+  <p:cSld>
+    <p:spTree>
+      <p:nvGrpSpPr>
+        <p:cNvPr id="1" name=""/>
+        <p:cNvGrpSpPr/>
+        <p:nvPr/>
+      </p:nvGrpSpPr>
+      <p:grpSpPr>
+        <a:xfrm>
+          <a:off x="0" y="0"/>
+          <a:ext cx="0" cy="0"/>
+          <a:chOff x="0" y="0"/>
+          <a:chExt cx="0" cy="0"/>
+        </a:xfrm>
+      </p:grpSpPr>
+      <p:sp>
+        <p:nvSpPr>
+          <p:cNvPr id="2" name="Slide Image Placeholder 1"/>
+          <p:cNvSpPr>
+            <a:spLocks noGrp="1" noRot="1" noChangeAspect="1"/>
+          </p:cNvSpPr>
+          <p:nvPr>
+            <p:ph type="sldImg"/>
+          </p:nvPr>
+        </p:nvSpPr>
+        <p:spPr/>
+      </p:sp>
+      <p:sp>
+        <p:nvSpPr>
+          <p:cNvPr id="3" name="Notes Placeholder 2"/>
+          <p:cNvSpPr>
+            <a:spLocks noGrp="1"/>
+          </p:cNvSpPr>
+          <p:nvPr>
+            <p:ph type="body" idx="1"/>
+          </p:nvPr>
+        </p:nvSpPr>
+        <p:spPr/>
+        <p:txBody>
+          <a:bodyPr/>
+          <a:lstStyle/>
+          <a:p>
+            <a:r>
+              <a:rPr lang="en-US" dirty="0"/>
+              <a:t>Source: Definitions match the data slides: Qlik - Closed Repair Orders (all customer-pay ROs, by close month), Profit &amp; Loss and Productivity apps, Jan-Sep 2026 vs 2025, same-store, 33 stores. Worked example: Service Manager Roundtable, Nov 15, 2024, slide 21.PLACE: Gross section, after Service Is Sales 2.0 and in front of Total Gross Profit - Fixed Ops.
+Source: Qlik Profit &amp; Loss, Total Gross Profit - Service and Total Gross Profit - Parts, same-store, INEOS excluded, GMC Prescott body shop gross excluded (as on the gross slides). Guarantees and bonuses paid off the RO post as unapplied labor, a cost-of-sale adjustment against service gross.</a:t>
+            </a:r>
+            <a:endParaRPr lang="en-US" dirty="0"/>
+          </a:p>
+        </p:txBody>
+      </p:sp>
+      <p:sp>
+        <p:nvSpPr>
+          <p:cNvPr id="4" name="Slide Number Placeholder 3"/>
+          <p:cNvSpPr>
+            <a:spLocks noGrp="1"/>
+          </p:cNvSpPr>
+          <p:nvPr>
+            <p:ph type="sldNum" sz="quarter" idx="10"/>
+          </p:nvPr>
+        </p:nvSpPr>
+        <p:spPr/>
+        <p:txBody>
+          <a:bodyPr/>
+          <a:lstStyle/>
+          <a:p>
+            <a:fld id="{F7021451-1387-4CA6-816F-3879F97B5CBC}" type="slidenum">
+              <a:rPr lang="en-US"/>
+              <a:t>13</a:t>
+            </a:fld>
+            <a:endParaRPr lang="en-US"/>
+          </a:p>
+        </p:txBody>
+      </p:sp>
+    </p:spTree>
+    <p:extLst>
+      <p:ext uri="{BB962C8B-B14F-4D97-AF65-F5344CB8AC3E}">
+        <p14:creationId xmlns:p14="http://schemas.microsoft.com/office/powerpoint/2010/main" val="1024086991"/>
+      </p:ext>
+    </p:extLst>
+  </p:cSld>
+  <p:clrMapOvr>
+    <a:masterClrMapping/>
+  </p:clrMapOvr>
+</p:notes>
+</file>
+
 <file path=ppt/notesSlides/notesSlide2.xml><?xml version="1.0" encoding="utf-8"?>
 <p:notes xmlns:a="http://schemas.openxmlformats.org/drawingml/2006/main" xmlns:r="http://schemas.openxmlformats.org/officeDocument/2006/relationships" xmlns:p="http://schemas.openxmlformats.org/presentationml/2006/main">
   <p:cSld>
@@ -6254,6 +6344,1137 @@
               <a:t>The rules keep non-tech time and data errors out of the numbers, and every store is measured the same way.</a:t>
             </a:r>
             <a:endParaRPr lang="en-US" sz="1500" dirty="0"/>
+          </a:p>
+        </p:txBody>
+      </p:sp>
+    </p:spTree>
+  </p:cSld>
+  <p:clrMapOvr>
+    <a:masterClrMapping/>
+  </p:clrMapOvr>
+</p:sld>
+</file>
+
+<file path=ppt/slides/slide13.xml><?xml version="1.0" encoding="utf-8"?>
+<p:sld xmlns:a="http://schemas.openxmlformats.org/drawingml/2006/main" xmlns:r="http://schemas.openxmlformats.org/officeDocument/2006/relationships" xmlns:p="http://schemas.openxmlformats.org/presentationml/2006/main">
+  <p:cSld name="Slide 13">
+    <p:bg>
+      <p:bgPr>
+        <a:solidFill>
+          <a:srgbClr val="EDEDED"/>
+        </a:solidFill>
+      </p:bgPr>
+    </p:bg>
+    <p:spTree>
+      <p:nvGrpSpPr>
+        <p:cNvPr id="1" name=""/>
+        <p:cNvGrpSpPr/>
+        <p:nvPr/>
+      </p:nvGrpSpPr>
+      <p:grpSpPr>
+        <a:xfrm>
+          <a:off x="0" y="0"/>
+          <a:ext cx="0" cy="0"/>
+          <a:chOff x="0" y="0"/>
+          <a:chExt cx="0" cy="0"/>
+        </a:xfrm>
+      </p:grpSpPr>
+      <p:sp>
+        <p:nvSpPr>
+          <p:cNvPr id="2" name="Shape 0"/>
+          <p:cNvSpPr/>
+          <p:nvPr/>
+        </p:nvSpPr>
+        <p:spPr>
+          <a:xfrm>
+            <a:off x="457200" y="402336"/>
+            <a:ext cx="50292" cy="192024"/>
+          </a:xfrm>
+          <a:prstGeom prst="rect">
+            <a:avLst/>
+          </a:prstGeom>
+          <a:solidFill>
+            <a:srgbClr val="2587C5"/>
+          </a:solidFill>
+          <a:ln/>
+        </p:spPr>
+      </p:sp>
+      <p:sp>
+        <p:nvSpPr>
+          <p:cNvPr id="3" name="Text 1"/>
+          <p:cNvSpPr txBox="1"/>
+          <p:nvPr/>
+        </p:nvSpPr>
+        <p:spPr>
+          <a:xfrm>
+            <a:off x="621792" y="338328"/>
+            <a:ext cx="8229600" cy="274320"/>
+          </a:xfrm>
+          <a:prstGeom prst="rect">
+            <a:avLst/>
+          </a:prstGeom>
+          <a:noFill/>
+          <a:ln/>
+        </p:spPr>
+        <p:txBody>
+          <a:bodyPr wrap="square" lIns="0" tIns="0" rIns="0" bIns="0" rtlCol="0" anchor="ctr"/>
+          <a:lstStyle/>
+          <a:p>
+            <a:pPr indent="0" marL="0">
+              <a:buNone/>
+            </a:pPr>
+            <a:r>
+              <a:rPr lang="en-US" sz="1400" b="1" spc="110" kern="0" dirty="0">
+                <a:solidFill>
+                  <a:srgbClr val="595959"/>
+                </a:solidFill>
+                <a:latin typeface="Inter" pitchFamily="34" charset="0"/>
+                <a:ea typeface="Inter" pitchFamily="34" charset="-122"/>
+                <a:cs typeface="Inter" pitchFamily="34" charset="-120"/>
+              </a:rPr>
+              <a:t>FIXED OPS GROSS</a:t>
+            </a:r>
+            <a:endParaRPr lang="en-US" sz="1400" dirty="0"/>
+          </a:p>
+        </p:txBody>
+      </p:sp>
+      <p:sp>
+        <p:nvSpPr>
+          <p:cNvPr id="4" name="Text 2"/>
+          <p:cNvSpPr txBox="1"/>
+          <p:nvPr/>
+        </p:nvSpPr>
+        <p:spPr>
+          <a:xfrm>
+            <a:off x="457200" y="640080"/>
+            <a:ext cx="11338560" cy="502920"/>
+          </a:xfrm>
+          <a:prstGeom prst="rect">
+            <a:avLst/>
+          </a:prstGeom>
+          <a:noFill/>
+          <a:ln/>
+        </p:spPr>
+        <p:txBody>
+          <a:bodyPr wrap="square" lIns="0" tIns="0" rIns="0" bIns="0" rtlCol="0" anchor="ctr"/>
+          <a:lstStyle/>
+          <a:p>
+            <a:pPr indent="0" marL="0">
+              <a:buNone/>
+            </a:pPr>
+            <a:r>
+              <a:rPr lang="en-US" sz="2800" dirty="0">
+                <a:solidFill>
+                  <a:srgbClr val="1A1A1A"/>
+                </a:solidFill>
+                <a:latin typeface="Inter" pitchFamily="34" charset="0"/>
+                <a:ea typeface="Inter" pitchFamily="34" charset="-122"/>
+                <a:cs typeface="Inter" pitchFamily="34" charset="-120"/>
+              </a:rPr>
+              <a:t>What Is Fixed Ops Gross?</a:t>
+            </a:r>
+            <a:endParaRPr lang="en-US" sz="2800" dirty="0"/>
+          </a:p>
+        </p:txBody>
+      </p:sp>
+      <p:sp>
+        <p:nvSpPr>
+          <p:cNvPr id="5" name="Shape 3"/>
+          <p:cNvSpPr/>
+          <p:nvPr/>
+        </p:nvSpPr>
+        <p:spPr>
+          <a:xfrm>
+            <a:off x="457200" y="1207008"/>
+            <a:ext cx="11274552" cy="1024128"/>
+          </a:xfrm>
+          <a:prstGeom prst="rect">
+            <a:avLst/>
+          </a:prstGeom>
+          <a:solidFill>
+            <a:srgbClr val="EDF4FA"/>
+          </a:solidFill>
+          <a:ln/>
+        </p:spPr>
+      </p:sp>
+      <p:sp>
+        <p:nvSpPr>
+          <p:cNvPr id="6" name="Text 4"/>
+          <p:cNvSpPr txBox="1"/>
+          <p:nvPr/>
+        </p:nvSpPr>
+        <p:spPr>
+          <a:xfrm>
+            <a:off x="685800" y="1243584"/>
+            <a:ext cx="10835640" cy="566928"/>
+          </a:xfrm>
+          <a:prstGeom prst="rect">
+            <a:avLst/>
+          </a:prstGeom>
+          <a:noFill/>
+          <a:ln/>
+        </p:spPr>
+        <p:txBody>
+          <a:bodyPr wrap="square" lIns="0" tIns="0" rIns="0" bIns="0" rtlCol="0" anchor="ctr">
+            <a:normAutofit/>
+          </a:bodyPr>
+          <a:lstStyle/>
+          <a:p>
+            <a:pPr indent="0" marL="0">
+              <a:buNone/>
+            </a:pPr>
+            <a:r>
+              <a:rPr lang="en-US" sz="2400" b="1" dirty="0">
+                <a:solidFill>
+                  <a:srgbClr val="0B2C4A"/>
+                </a:solidFill>
+                <a:latin typeface="Inter" pitchFamily="34" charset="0"/>
+                <a:ea typeface="Inter" pitchFamily="34" charset="-122"/>
+                <a:cs typeface="Inter" pitchFamily="34" charset="-120"/>
+              </a:rPr>
+              <a:t>Fixed ops gross  </a:t>
+            </a:r>
+            <a:pPr indent="0" marL="0">
+              <a:buNone/>
+            </a:pPr>
+            <a:r>
+              <a:rPr lang="en-US" sz="2400" b="1" dirty="0">
+                <a:solidFill>
+                  <a:srgbClr val="2587C5"/>
+                </a:solidFill>
+                <a:latin typeface="Inter" pitchFamily="34" charset="0"/>
+                <a:ea typeface="Inter" pitchFamily="34" charset="-122"/>
+                <a:cs typeface="Inter" pitchFamily="34" charset="-120"/>
+              </a:rPr>
+              <a:t>=  </a:t>
+            </a:r>
+            <a:pPr indent="0" marL="0">
+              <a:buNone/>
+            </a:pPr>
+            <a:r>
+              <a:rPr lang="en-US" sz="2400" b="1" dirty="0">
+                <a:solidFill>
+                  <a:srgbClr val="0B2C4A"/>
+                </a:solidFill>
+                <a:latin typeface="Inter" pitchFamily="34" charset="0"/>
+                <a:ea typeface="Inter" pitchFamily="34" charset="-122"/>
+                <a:cs typeface="Inter" pitchFamily="34" charset="-120"/>
+              </a:rPr>
+              <a:t>service gross  </a:t>
+            </a:r>
+            <a:pPr indent="0" marL="0">
+              <a:buNone/>
+            </a:pPr>
+            <a:r>
+              <a:rPr lang="en-US" sz="2400" b="1" dirty="0">
+                <a:solidFill>
+                  <a:srgbClr val="2587C5"/>
+                </a:solidFill>
+                <a:latin typeface="Inter" pitchFamily="34" charset="0"/>
+                <a:ea typeface="Inter" pitchFamily="34" charset="-122"/>
+                <a:cs typeface="Inter" pitchFamily="34" charset="-120"/>
+              </a:rPr>
+              <a:t>+  </a:t>
+            </a:r>
+            <a:pPr indent="0" marL="0">
+              <a:buNone/>
+            </a:pPr>
+            <a:r>
+              <a:rPr lang="en-US" sz="2400" b="1" dirty="0">
+                <a:solidFill>
+                  <a:srgbClr val="0B2C4A"/>
+                </a:solidFill>
+                <a:latin typeface="Inter" pitchFamily="34" charset="0"/>
+                <a:ea typeface="Inter" pitchFamily="34" charset="-122"/>
+                <a:cs typeface="Inter" pitchFamily="34" charset="-120"/>
+              </a:rPr>
+              <a:t>parts gross</a:t>
+            </a:r>
+            <a:endParaRPr lang="en-US" sz="2400" dirty="0"/>
+          </a:p>
+        </p:txBody>
+      </p:sp>
+      <p:sp>
+        <p:nvSpPr>
+          <p:cNvPr id="7" name="Text 5"/>
+          <p:cNvSpPr txBox="1"/>
+          <p:nvPr/>
+        </p:nvSpPr>
+        <p:spPr>
+          <a:xfrm>
+            <a:off x="685800" y="1783080"/>
+            <a:ext cx="10835640" cy="420624"/>
+          </a:xfrm>
+          <a:prstGeom prst="rect">
+            <a:avLst/>
+          </a:prstGeom>
+          <a:noFill/>
+          <a:ln/>
+        </p:spPr>
+        <p:txBody>
+          <a:bodyPr wrap="square" lIns="0" tIns="0" rIns="0" bIns="0" rtlCol="0" anchor="ctr"/>
+          <a:lstStyle/>
+          <a:p>
+            <a:pPr indent="0" marL="0">
+              <a:buNone/>
+            </a:pPr>
+            <a:r>
+              <a:rPr lang="en-US" sz="1400" dirty="0">
+                <a:solidFill>
+                  <a:srgbClr val="595959"/>
+                </a:solidFill>
+                <a:latin typeface="Inter" pitchFamily="34" charset="0"/>
+                <a:ea typeface="Inter" pitchFamily="34" charset="-122"/>
+                <a:cs typeface="Inter" pitchFamily="34" charset="-120"/>
+              </a:rPr>
+              <a:t>What each department keeps after the cost of what it sold: labor sale less technician cost, parts sale less parts cost.</a:t>
+            </a:r>
+            <a:endParaRPr lang="en-US" sz="1400" dirty="0"/>
+          </a:p>
+        </p:txBody>
+      </p:sp>
+      <p:sp>
+        <p:nvSpPr>
+          <p:cNvPr id="8" name="Text 6"/>
+          <p:cNvSpPr txBox="1"/>
+          <p:nvPr/>
+        </p:nvSpPr>
+        <p:spPr>
+          <a:xfrm>
+            <a:off x="457200" y="2340864"/>
+            <a:ext cx="1828800" cy="457200"/>
+          </a:xfrm>
+          <a:prstGeom prst="rect">
+            <a:avLst/>
+          </a:prstGeom>
+          <a:noFill/>
+          <a:ln/>
+        </p:spPr>
+        <p:txBody>
+          <a:bodyPr wrap="square" lIns="0" tIns="0" rIns="0" bIns="0" rtlCol="0" anchor="ctr"/>
+          <a:lstStyle/>
+          <a:p>
+            <a:pPr indent="0" marL="0">
+              <a:buNone/>
+            </a:pPr>
+            <a:r>
+              <a:rPr lang="en-US" sz="1400" b="1" spc="80" kern="0" dirty="0">
+                <a:solidFill>
+                  <a:srgbClr val="595959"/>
+                </a:solidFill>
+                <a:latin typeface="Inter" pitchFamily="34" charset="0"/>
+                <a:ea typeface="Inter" pitchFamily="34" charset="-122"/>
+                <a:cs typeface="Inter" pitchFamily="34" charset="-120"/>
+              </a:rPr>
+              <a:t>JAN–SEP 2026</a:t>
+            </a:r>
+            <a:endParaRPr lang="en-US" sz="1400" dirty="0"/>
+          </a:p>
+        </p:txBody>
+      </p:sp>
+      <p:sp>
+        <p:nvSpPr>
+          <p:cNvPr id="9" name="Shape 7"/>
+          <p:cNvSpPr/>
+          <p:nvPr/>
+        </p:nvSpPr>
+        <p:spPr>
+          <a:xfrm>
+            <a:off x="2286000" y="2340864"/>
+            <a:ext cx="3075432" cy="457200"/>
+          </a:xfrm>
+          <a:prstGeom prst="rect">
+            <a:avLst/>
+          </a:prstGeom>
+          <a:solidFill>
+            <a:srgbClr val="FFFFFF"/>
+          </a:solidFill>
+          <a:ln w="9525">
+            <a:solidFill>
+              <a:srgbClr val="D9D9D9"/>
+            </a:solidFill>
+            <a:prstDash val="solid"/>
+          </a:ln>
+        </p:spPr>
+      </p:sp>
+      <p:sp>
+        <p:nvSpPr>
+          <p:cNvPr id="10" name="Text 8"/>
+          <p:cNvSpPr txBox="1"/>
+          <p:nvPr/>
+        </p:nvSpPr>
+        <p:spPr>
+          <a:xfrm>
+            <a:off x="2359152" y="2340864"/>
+            <a:ext cx="2929128" cy="457200"/>
+          </a:xfrm>
+          <a:prstGeom prst="rect">
+            <a:avLst/>
+          </a:prstGeom>
+          <a:noFill/>
+          <a:ln/>
+        </p:spPr>
+        <p:txBody>
+          <a:bodyPr wrap="square" lIns="0" tIns="0" rIns="0" bIns="0" rtlCol="0" anchor="ctr">
+            <a:normAutofit/>
+          </a:bodyPr>
+          <a:lstStyle/>
+          <a:p>
+            <a:pPr algn="ctr" indent="0" marL="0">
+              <a:buNone/>
+            </a:pPr>
+            <a:r>
+              <a:rPr lang="en-US" sz="1400" dirty="0">
+                <a:solidFill>
+                  <a:srgbClr val="1A1A1A"/>
+                </a:solidFill>
+                <a:latin typeface="Inter" pitchFamily="34" charset="0"/>
+                <a:ea typeface="Inter" pitchFamily="34" charset="-122"/>
+                <a:cs typeface="Inter" pitchFamily="34" charset="-120"/>
+              </a:rPr>
+              <a:t>Service  </a:t>
+            </a:r>
+            <a:pPr algn="ctr" indent="0" marL="0">
+              <a:buNone/>
+            </a:pPr>
+            <a:r>
+              <a:rPr lang="en-US" sz="1400" b="1" dirty="0">
+                <a:solidFill>
+                  <a:srgbClr val="0B2C4A"/>
+                </a:solidFill>
+                <a:latin typeface="Inter" pitchFamily="34" charset="0"/>
+                <a:ea typeface="Inter" pitchFamily="34" charset="-122"/>
+                <a:cs typeface="Inter" pitchFamily="34" charset="-120"/>
+              </a:rPr>
+              <a:t>$126.87M</a:t>
+            </a:r>
+            <a:endParaRPr lang="en-US" sz="1400" dirty="0"/>
+          </a:p>
+        </p:txBody>
+      </p:sp>
+      <p:sp>
+        <p:nvSpPr>
+          <p:cNvPr id="11" name="Shape 9"/>
+          <p:cNvSpPr/>
+          <p:nvPr/>
+        </p:nvSpPr>
+        <p:spPr>
+          <a:xfrm>
+            <a:off x="5471160" y="2340864"/>
+            <a:ext cx="3075432" cy="457200"/>
+          </a:xfrm>
+          <a:prstGeom prst="rect">
+            <a:avLst/>
+          </a:prstGeom>
+          <a:solidFill>
+            <a:srgbClr val="FFFFFF"/>
+          </a:solidFill>
+          <a:ln w="9525">
+            <a:solidFill>
+              <a:srgbClr val="D9D9D9"/>
+            </a:solidFill>
+            <a:prstDash val="solid"/>
+          </a:ln>
+        </p:spPr>
+      </p:sp>
+      <p:sp>
+        <p:nvSpPr>
+          <p:cNvPr id="12" name="Text 10"/>
+          <p:cNvSpPr txBox="1"/>
+          <p:nvPr/>
+        </p:nvSpPr>
+        <p:spPr>
+          <a:xfrm>
+            <a:off x="5544312" y="2340864"/>
+            <a:ext cx="2929128" cy="457200"/>
+          </a:xfrm>
+          <a:prstGeom prst="rect">
+            <a:avLst/>
+          </a:prstGeom>
+          <a:noFill/>
+          <a:ln/>
+        </p:spPr>
+        <p:txBody>
+          <a:bodyPr wrap="square" lIns="0" tIns="0" rIns="0" bIns="0" rtlCol="0" anchor="ctr">
+            <a:normAutofit/>
+          </a:bodyPr>
+          <a:lstStyle/>
+          <a:p>
+            <a:pPr algn="ctr" indent="0" marL="0">
+              <a:buNone/>
+            </a:pPr>
+            <a:r>
+              <a:rPr lang="en-US" sz="1400" dirty="0">
+                <a:solidFill>
+                  <a:srgbClr val="1A1A1A"/>
+                </a:solidFill>
+                <a:latin typeface="Inter" pitchFamily="34" charset="0"/>
+                <a:ea typeface="Inter" pitchFamily="34" charset="-122"/>
+                <a:cs typeface="Inter" pitchFamily="34" charset="-120"/>
+              </a:rPr>
+              <a:t>Parts  </a:t>
+            </a:r>
+            <a:pPr algn="ctr" indent="0" marL="0">
+              <a:buNone/>
+            </a:pPr>
+            <a:r>
+              <a:rPr lang="en-US" sz="1400" b="1" dirty="0">
+                <a:solidFill>
+                  <a:srgbClr val="0B2C4A"/>
+                </a:solidFill>
+                <a:latin typeface="Inter" pitchFamily="34" charset="0"/>
+                <a:ea typeface="Inter" pitchFamily="34" charset="-122"/>
+                <a:cs typeface="Inter" pitchFamily="34" charset="-120"/>
+              </a:rPr>
+              <a:t>$61.93M</a:t>
+            </a:r>
+            <a:endParaRPr lang="en-US" sz="1400" dirty="0"/>
+          </a:p>
+        </p:txBody>
+      </p:sp>
+      <p:sp>
+        <p:nvSpPr>
+          <p:cNvPr id="13" name="Shape 11"/>
+          <p:cNvSpPr/>
+          <p:nvPr/>
+        </p:nvSpPr>
+        <p:spPr>
+          <a:xfrm>
+            <a:off x="8656320" y="2340864"/>
+            <a:ext cx="3075432" cy="457200"/>
+          </a:xfrm>
+          <a:prstGeom prst="rect">
+            <a:avLst/>
+          </a:prstGeom>
+          <a:solidFill>
+            <a:srgbClr val="FFFFFF"/>
+          </a:solidFill>
+          <a:ln w="9525">
+            <a:solidFill>
+              <a:srgbClr val="D9D9D9"/>
+            </a:solidFill>
+            <a:prstDash val="solid"/>
+          </a:ln>
+        </p:spPr>
+      </p:sp>
+      <p:sp>
+        <p:nvSpPr>
+          <p:cNvPr id="14" name="Text 12"/>
+          <p:cNvSpPr txBox="1"/>
+          <p:nvPr/>
+        </p:nvSpPr>
+        <p:spPr>
+          <a:xfrm>
+            <a:off x="8729472" y="2340864"/>
+            <a:ext cx="2929128" cy="457200"/>
+          </a:xfrm>
+          <a:prstGeom prst="rect">
+            <a:avLst/>
+          </a:prstGeom>
+          <a:noFill/>
+          <a:ln/>
+        </p:spPr>
+        <p:txBody>
+          <a:bodyPr wrap="square" lIns="0" tIns="0" rIns="0" bIns="0" rtlCol="0" anchor="ctr">
+            <a:normAutofit/>
+          </a:bodyPr>
+          <a:lstStyle/>
+          <a:p>
+            <a:pPr algn="ctr" indent="0" marL="0">
+              <a:buNone/>
+            </a:pPr>
+            <a:r>
+              <a:rPr lang="en-US" sz="1400" dirty="0">
+                <a:solidFill>
+                  <a:srgbClr val="1A1A1A"/>
+                </a:solidFill>
+                <a:latin typeface="Inter" pitchFamily="34" charset="0"/>
+                <a:ea typeface="Inter" pitchFamily="34" charset="-122"/>
+                <a:cs typeface="Inter" pitchFamily="34" charset="-120"/>
+              </a:rPr>
+              <a:t>Fixed ops  </a:t>
+            </a:r>
+            <a:pPr algn="ctr" indent="0" marL="0">
+              <a:buNone/>
+            </a:pPr>
+            <a:r>
+              <a:rPr lang="en-US" sz="1400" b="1" dirty="0">
+                <a:solidFill>
+                  <a:srgbClr val="0B2C4A"/>
+                </a:solidFill>
+                <a:latin typeface="Inter" pitchFamily="34" charset="0"/>
+                <a:ea typeface="Inter" pitchFamily="34" charset="-122"/>
+                <a:cs typeface="Inter" pitchFamily="34" charset="-120"/>
+              </a:rPr>
+              <a:t>$188.80M</a:t>
+            </a:r>
+            <a:endParaRPr lang="en-US" sz="1400" dirty="0"/>
+          </a:p>
+        </p:txBody>
+      </p:sp>
+      <p:sp>
+        <p:nvSpPr>
+          <p:cNvPr id="15" name="Shape 13"/>
+          <p:cNvSpPr/>
+          <p:nvPr/>
+        </p:nvSpPr>
+        <p:spPr>
+          <a:xfrm>
+            <a:off x="457200" y="2907792"/>
+            <a:ext cx="4343400" cy="3081528"/>
+          </a:xfrm>
+          <a:prstGeom prst="rect">
+            <a:avLst/>
+          </a:prstGeom>
+          <a:solidFill>
+            <a:srgbClr val="FFFFFF"/>
+          </a:solidFill>
+          <a:ln/>
+        </p:spPr>
+      </p:sp>
+      <p:sp>
+        <p:nvSpPr>
+          <p:cNvPr id="16" name="Shape 14"/>
+          <p:cNvSpPr/>
+          <p:nvPr/>
+        </p:nvSpPr>
+        <p:spPr>
+          <a:xfrm>
+            <a:off x="4937760" y="2907792"/>
+            <a:ext cx="6793992" cy="3081528"/>
+          </a:xfrm>
+          <a:prstGeom prst="rect">
+            <a:avLst/>
+          </a:prstGeom>
+          <a:solidFill>
+            <a:srgbClr val="FFFFFF"/>
+          </a:solidFill>
+          <a:ln/>
+        </p:spPr>
+      </p:sp>
+      <p:sp>
+        <p:nvSpPr>
+          <p:cNvPr id="17" name="Text 15"/>
+          <p:cNvSpPr txBox="1"/>
+          <p:nvPr/>
+        </p:nvSpPr>
+        <p:spPr>
+          <a:xfrm>
+            <a:off x="658368" y="3035808"/>
+            <a:ext cx="3931920" cy="292608"/>
+          </a:xfrm>
+          <a:prstGeom prst="rect">
+            <a:avLst/>
+          </a:prstGeom>
+          <a:noFill/>
+          <a:ln/>
+        </p:spPr>
+        <p:txBody>
+          <a:bodyPr wrap="square" lIns="0" tIns="0" rIns="0" bIns="0" rtlCol="0" anchor="ctr"/>
+          <a:lstStyle/>
+          <a:p>
+            <a:pPr indent="0" marL="0">
+              <a:buNone/>
+            </a:pPr>
+            <a:r>
+              <a:rPr lang="en-US" sz="1400" b="1" spc="100" kern="0" dirty="0">
+                <a:solidFill>
+                  <a:srgbClr val="0B2C4A"/>
+                </a:solidFill>
+                <a:latin typeface="Inter" pitchFamily="34" charset="0"/>
+                <a:ea typeface="Inter" pitchFamily="34" charset="-122"/>
+                <a:cs typeface="Inter" pitchFamily="34" charset="-120"/>
+              </a:rPr>
+              <a:t>HOW EACH IS BUILT</a:t>
+            </a:r>
+            <a:endParaRPr lang="en-US" sz="1400" dirty="0"/>
+          </a:p>
+        </p:txBody>
+      </p:sp>
+      <p:sp>
+        <p:nvSpPr>
+          <p:cNvPr id="18" name="Text 16"/>
+          <p:cNvSpPr txBox="1"/>
+          <p:nvPr/>
+        </p:nvSpPr>
+        <p:spPr>
+          <a:xfrm>
+            <a:off x="5138928" y="3035808"/>
+            <a:ext cx="6400800" cy="292608"/>
+          </a:xfrm>
+          <a:prstGeom prst="rect">
+            <a:avLst/>
+          </a:prstGeom>
+          <a:noFill/>
+          <a:ln/>
+        </p:spPr>
+        <p:txBody>
+          <a:bodyPr wrap="square" lIns="0" tIns="0" rIns="0" bIns="0" rtlCol="0" anchor="ctr"/>
+          <a:lstStyle/>
+          <a:p>
+            <a:pPr indent="0" marL="0">
+              <a:buNone/>
+            </a:pPr>
+            <a:r>
+              <a:rPr lang="en-US" sz="1400" b="1" spc="100" kern="0" dirty="0">
+                <a:solidFill>
+                  <a:srgbClr val="0B2C4A"/>
+                </a:solidFill>
+                <a:latin typeface="Inter" pitchFamily="34" charset="0"/>
+                <a:ea typeface="Inter" pitchFamily="34" charset="-122"/>
+                <a:cs typeface="Inter" pitchFamily="34" charset="-120"/>
+              </a:rPr>
+              <a:t>WHAT MOVES IT</a:t>
+            </a:r>
+            <a:endParaRPr lang="en-US" sz="1400" dirty="0"/>
+          </a:p>
+        </p:txBody>
+      </p:sp>
+      <p:sp>
+        <p:nvSpPr>
+          <p:cNvPr id="19" name="Text 17"/>
+          <p:cNvSpPr txBox="1"/>
+          <p:nvPr/>
+        </p:nvSpPr>
+        <p:spPr>
+          <a:xfrm>
+            <a:off x="658368" y="3410712"/>
+            <a:ext cx="3977640" cy="2441448"/>
+          </a:xfrm>
+          <a:prstGeom prst="rect">
+            <a:avLst/>
+          </a:prstGeom>
+          <a:noFill/>
+          <a:ln/>
+        </p:spPr>
+        <p:txBody>
+          <a:bodyPr wrap="square" lIns="0" tIns="0" rIns="0" bIns="0" rtlCol="0" anchor="t"/>
+          <a:lstStyle/>
+          <a:p>
+            <a:pPr marL="203200" indent="-203200">
+              <a:spcAft>
+                <a:spcPts val="600"/>
+              </a:spcAft>
+              <a:buSzPct val="100000"/>
+              <a:buChar char="•"/>
+            </a:pPr>
+            <a:r>
+              <a:rPr lang="en-US" sz="1500" dirty="0">
+                <a:solidFill>
+                  <a:srgbClr val="1A1A1A"/>
+                </a:solidFill>
+                <a:latin typeface="Inter" pitchFamily="34" charset="0"/>
+                <a:ea typeface="Inter" pitchFamily="34" charset="-122"/>
+                <a:cs typeface="Inter" pitchFamily="34" charset="-120"/>
+              </a:rPr>
+              <a:t>Service earns only on labor hours sold: the labor sale less what the technician is paid for the job.</a:t>
+            </a:r>
+            <a:endParaRPr lang="en-US" sz="1500" dirty="0"/>
+          </a:p>
+          <a:p>
+            <a:pPr marL="203200" indent="-203200">
+              <a:spcAft>
+                <a:spcPts val="600"/>
+              </a:spcAft>
+              <a:buSzPct val="100000"/>
+              <a:buChar char="•"/>
+            </a:pPr>
+            <a:r>
+              <a:rPr lang="en-US" sz="1500" dirty="0">
+                <a:solidFill>
+                  <a:srgbClr val="1A1A1A"/>
+                </a:solidFill>
+                <a:latin typeface="Inter" pitchFamily="34" charset="0"/>
+                <a:ea typeface="Inter" pitchFamily="34" charset="-122"/>
+                <a:cs typeface="Inter" pitchFamily="34" charset="-120"/>
+              </a:rPr>
+              <a:t>Parts sold on a service RO are parts gross, not service gross, even when an advisor sells them.</a:t>
+            </a:r>
+            <a:endParaRPr lang="en-US" sz="1500" dirty="0"/>
+          </a:p>
+          <a:p>
+            <a:pPr marL="203200" indent="-203200">
+              <a:spcAft>
+                <a:spcPts val="600"/>
+              </a:spcAft>
+              <a:buSzPct val="100000"/>
+              <a:buChar char="•"/>
+            </a:pPr>
+            <a:r>
+              <a:rPr lang="en-US" sz="1500" dirty="0">
+                <a:solidFill>
+                  <a:srgbClr val="1A1A1A"/>
+                </a:solidFill>
+                <a:latin typeface="Inter" pitchFamily="34" charset="0"/>
+                <a:ea typeface="Inter" pitchFamily="34" charset="-122"/>
+                <a:cs typeface="Inter" pitchFamily="34" charset="-120"/>
+              </a:rPr>
+              <a:t>Both include customer pay, warranty and internal work.</a:t>
+            </a:r>
+            <a:endParaRPr lang="en-US" sz="1500" dirty="0"/>
+          </a:p>
+        </p:txBody>
+      </p:sp>
+      <p:sp>
+        <p:nvSpPr>
+          <p:cNvPr id="20" name="Shape 18"/>
+          <p:cNvSpPr/>
+          <p:nvPr/>
+        </p:nvSpPr>
+        <p:spPr>
+          <a:xfrm>
+            <a:off x="5138928" y="3410712"/>
+            <a:ext cx="45720" cy="1133856"/>
+          </a:xfrm>
+          <a:prstGeom prst="rect">
+            <a:avLst/>
+          </a:prstGeom>
+          <a:solidFill>
+            <a:srgbClr val="2587C5"/>
+          </a:solidFill>
+          <a:ln/>
+        </p:spPr>
+      </p:sp>
+      <p:sp>
+        <p:nvSpPr>
+          <p:cNvPr id="21" name="Text 19"/>
+          <p:cNvSpPr txBox="1"/>
+          <p:nvPr/>
+        </p:nvSpPr>
+        <p:spPr>
+          <a:xfrm>
+            <a:off x="5266944" y="3410712"/>
+            <a:ext cx="2962656" cy="1133856"/>
+          </a:xfrm>
+          <a:prstGeom prst="rect">
+            <a:avLst/>
+          </a:prstGeom>
+          <a:noFill/>
+          <a:ln/>
+        </p:spPr>
+        <p:txBody>
+          <a:bodyPr wrap="square" lIns="0" tIns="0" rIns="0" bIns="0" rtlCol="0" anchor="t"/>
+          <a:lstStyle/>
+          <a:p>
+            <a:pPr indent="0" marL="0">
+              <a:buNone/>
+            </a:pPr>
+            <a:r>
+              <a:rPr lang="en-US" sz="1400" b="1" dirty="0">
+                <a:solidFill>
+                  <a:srgbClr val="1A1A1A"/>
+                </a:solidFill>
+                <a:latin typeface="Inter" pitchFamily="34" charset="0"/>
+                <a:ea typeface="Inter" pitchFamily="34" charset="-122"/>
+                <a:cs typeface="Inter" pitchFamily="34" charset="-120"/>
+              </a:rPr>
+              <a:t>Service: labor sale</a:t>
+            </a:r>
+            <a:endParaRPr lang="en-US" sz="1400" dirty="0"/>
+          </a:p>
+          <a:p>
+            <a:pPr indent="0" marL="0">
+              <a:buNone/>
+            </a:pPr>
+            <a:r>
+              <a:rPr lang="en-US" sz="1400" dirty="0">
+                <a:solidFill>
+                  <a:srgbClr val="595959"/>
+                </a:solidFill>
+                <a:latin typeface="Inter" pitchFamily="34" charset="0"/>
+                <a:ea typeface="Inter" pitchFamily="34" charset="-122"/>
+                <a:cs typeface="Inter" pitchFamily="34" charset="-120"/>
+              </a:rPr>
+              <a:t>Hours sold times the rate collected (ELR)</a:t>
+            </a:r>
+            <a:endParaRPr lang="en-US" sz="1400" dirty="0"/>
+          </a:p>
+        </p:txBody>
+      </p:sp>
+      <p:sp>
+        <p:nvSpPr>
+          <p:cNvPr id="22" name="Shape 20"/>
+          <p:cNvSpPr/>
+          <p:nvPr/>
+        </p:nvSpPr>
+        <p:spPr>
+          <a:xfrm>
+            <a:off x="8394192" y="3410712"/>
+            <a:ext cx="45720" cy="1133856"/>
+          </a:xfrm>
+          <a:prstGeom prst="rect">
+            <a:avLst/>
+          </a:prstGeom>
+          <a:solidFill>
+            <a:srgbClr val="2587C5"/>
+          </a:solidFill>
+          <a:ln/>
+        </p:spPr>
+      </p:sp>
+      <p:sp>
+        <p:nvSpPr>
+          <p:cNvPr id="23" name="Text 21"/>
+          <p:cNvSpPr txBox="1"/>
+          <p:nvPr/>
+        </p:nvSpPr>
+        <p:spPr>
+          <a:xfrm>
+            <a:off x="8522208" y="3410712"/>
+            <a:ext cx="2962656" cy="1133856"/>
+          </a:xfrm>
+          <a:prstGeom prst="rect">
+            <a:avLst/>
+          </a:prstGeom>
+          <a:noFill/>
+          <a:ln/>
+        </p:spPr>
+        <p:txBody>
+          <a:bodyPr wrap="square" lIns="0" tIns="0" rIns="0" bIns="0" rtlCol="0" anchor="t"/>
+          <a:lstStyle/>
+          <a:p>
+            <a:pPr indent="0" marL="0">
+              <a:buNone/>
+            </a:pPr>
+            <a:r>
+              <a:rPr lang="en-US" sz="1400" b="1" dirty="0">
+                <a:solidFill>
+                  <a:srgbClr val="1A1A1A"/>
+                </a:solidFill>
+                <a:latin typeface="Inter" pitchFamily="34" charset="0"/>
+                <a:ea typeface="Inter" pitchFamily="34" charset="-122"/>
+                <a:cs typeface="Inter" pitchFamily="34" charset="-120"/>
+              </a:rPr>
+              <a:t>Service: technician cost</a:t>
+            </a:r>
+            <a:endParaRPr lang="en-US" sz="1400" dirty="0"/>
+          </a:p>
+          <a:p>
+            <a:pPr indent="0" marL="0">
+              <a:buNone/>
+            </a:pPr>
+            <a:r>
+              <a:rPr lang="en-US" sz="1400" dirty="0">
+                <a:solidFill>
+                  <a:srgbClr val="595959"/>
+                </a:solidFill>
+                <a:latin typeface="Inter" pitchFamily="34" charset="0"/>
+                <a:ea typeface="Inter" pitchFamily="34" charset="-122"/>
+                <a:cs typeface="Inter" pitchFamily="34" charset="-120"/>
+              </a:rPr>
+              <a:t>Pay on the RO; guarantees and bonuses paid off the RO come out of gross too</a:t>
+            </a:r>
+            <a:endParaRPr lang="en-US" sz="1400" dirty="0"/>
+          </a:p>
+        </p:txBody>
+      </p:sp>
+      <p:sp>
+        <p:nvSpPr>
+          <p:cNvPr id="24" name="Shape 22"/>
+          <p:cNvSpPr/>
+          <p:nvPr/>
+        </p:nvSpPr>
+        <p:spPr>
+          <a:xfrm>
+            <a:off x="5138928" y="4654296"/>
+            <a:ext cx="45720" cy="1133856"/>
+          </a:xfrm>
+          <a:prstGeom prst="rect">
+            <a:avLst/>
+          </a:prstGeom>
+          <a:solidFill>
+            <a:srgbClr val="2587C5"/>
+          </a:solidFill>
+          <a:ln/>
+        </p:spPr>
+      </p:sp>
+      <p:sp>
+        <p:nvSpPr>
+          <p:cNvPr id="25" name="Text 23"/>
+          <p:cNvSpPr txBox="1"/>
+          <p:nvPr/>
+        </p:nvSpPr>
+        <p:spPr>
+          <a:xfrm>
+            <a:off x="5266944" y="4654296"/>
+            <a:ext cx="2962656" cy="1133856"/>
+          </a:xfrm>
+          <a:prstGeom prst="rect">
+            <a:avLst/>
+          </a:prstGeom>
+          <a:noFill/>
+          <a:ln/>
+        </p:spPr>
+        <p:txBody>
+          <a:bodyPr wrap="square" lIns="0" tIns="0" rIns="0" bIns="0" rtlCol="0" anchor="t"/>
+          <a:lstStyle/>
+          <a:p>
+            <a:pPr indent="0" marL="0">
+              <a:buNone/>
+            </a:pPr>
+            <a:r>
+              <a:rPr lang="en-US" sz="1400" b="1" dirty="0">
+                <a:solidFill>
+                  <a:srgbClr val="1A1A1A"/>
+                </a:solidFill>
+                <a:latin typeface="Inter" pitchFamily="34" charset="0"/>
+                <a:ea typeface="Inter" pitchFamily="34" charset="-122"/>
+                <a:cs typeface="Inter" pitchFamily="34" charset="-120"/>
+              </a:rPr>
+              <a:t>Parts: on the RO</a:t>
+            </a:r>
+            <a:endParaRPr lang="en-US" sz="1400" dirty="0"/>
+          </a:p>
+          <a:p>
+            <a:pPr indent="0" marL="0">
+              <a:buNone/>
+            </a:pPr>
+            <a:r>
+              <a:rPr lang="en-US" sz="1400" dirty="0">
+                <a:solidFill>
+                  <a:srgbClr val="595959"/>
+                </a:solidFill>
+                <a:latin typeface="Inter" pitchFamily="34" charset="0"/>
+                <a:ea typeface="Inter" pitchFamily="34" charset="-122"/>
+                <a:cs typeface="Inter" pitchFamily="34" charset="-120"/>
+              </a:rPr>
+              <a:t>Customer pay, warranty and internal parts sold through service</a:t>
+            </a:r>
+            <a:endParaRPr lang="en-US" sz="1400" dirty="0"/>
+          </a:p>
+        </p:txBody>
+      </p:sp>
+      <p:sp>
+        <p:nvSpPr>
+          <p:cNvPr id="26" name="Shape 24"/>
+          <p:cNvSpPr/>
+          <p:nvPr/>
+        </p:nvSpPr>
+        <p:spPr>
+          <a:xfrm>
+            <a:off x="8394192" y="4654296"/>
+            <a:ext cx="45720" cy="1133856"/>
+          </a:xfrm>
+          <a:prstGeom prst="rect">
+            <a:avLst/>
+          </a:prstGeom>
+          <a:solidFill>
+            <a:srgbClr val="2587C5"/>
+          </a:solidFill>
+          <a:ln/>
+        </p:spPr>
+      </p:sp>
+      <p:sp>
+        <p:nvSpPr>
+          <p:cNvPr id="27" name="Text 25"/>
+          <p:cNvSpPr txBox="1"/>
+          <p:nvPr/>
+        </p:nvSpPr>
+        <p:spPr>
+          <a:xfrm>
+            <a:off x="8522208" y="4654296"/>
+            <a:ext cx="2962656" cy="1133856"/>
+          </a:xfrm>
+          <a:prstGeom prst="rect">
+            <a:avLst/>
+          </a:prstGeom>
+          <a:noFill/>
+          <a:ln/>
+        </p:spPr>
+        <p:txBody>
+          <a:bodyPr wrap="square" lIns="0" tIns="0" rIns="0" bIns="0" rtlCol="0" anchor="t"/>
+          <a:lstStyle/>
+          <a:p>
+            <a:pPr indent="0" marL="0">
+              <a:buNone/>
+            </a:pPr>
+            <a:r>
+              <a:rPr lang="en-US" sz="1400" b="1" dirty="0">
+                <a:solidFill>
+                  <a:srgbClr val="1A1A1A"/>
+                </a:solidFill>
+                <a:latin typeface="Inter" pitchFamily="34" charset="0"/>
+                <a:ea typeface="Inter" pitchFamily="34" charset="-122"/>
+                <a:cs typeface="Inter" pitchFamily="34" charset="-120"/>
+              </a:rPr>
+              <a:t>Parts: over the counter</a:t>
+            </a:r>
+            <a:endParaRPr lang="en-US" sz="1400" dirty="0"/>
+          </a:p>
+          <a:p>
+            <a:pPr indent="0" marL="0">
+              <a:buNone/>
+            </a:pPr>
+            <a:r>
+              <a:rPr lang="en-US" sz="1400" dirty="0">
+                <a:solidFill>
+                  <a:srgbClr val="595959"/>
+                </a:solidFill>
+                <a:latin typeface="Inter" pitchFamily="34" charset="0"/>
+                <a:ea typeface="Inter" pitchFamily="34" charset="-122"/>
+                <a:cs typeface="Inter" pitchFamily="34" charset="-120"/>
+              </a:rPr>
+              <a:t>Counter retail, wholesale, tires and oil</a:t>
+            </a:r>
+            <a:endParaRPr lang="en-US" sz="1400" dirty="0"/>
+          </a:p>
+        </p:txBody>
+      </p:sp>
+      <p:sp>
+        <p:nvSpPr>
+          <p:cNvPr id="28" name="Shape 26"/>
+          <p:cNvSpPr/>
+          <p:nvPr/>
+        </p:nvSpPr>
+        <p:spPr>
+          <a:xfrm>
+            <a:off x="457200" y="6126480"/>
+            <a:ext cx="11274552" cy="371856"/>
+          </a:xfrm>
+          <a:prstGeom prst="rect">
+            <a:avLst/>
+          </a:prstGeom>
+          <a:solidFill>
+            <a:srgbClr val="E6F6EE"/>
+          </a:solidFill>
+          <a:ln/>
+        </p:spPr>
+      </p:sp>
+      <p:sp>
+        <p:nvSpPr>
+          <p:cNvPr id="29" name="Text 27"/>
+          <p:cNvSpPr txBox="1"/>
+          <p:nvPr/>
+        </p:nvSpPr>
+        <p:spPr>
+          <a:xfrm>
+            <a:off x="658368" y="6144768"/>
+            <a:ext cx="10927080" cy="335280"/>
+          </a:xfrm>
+          <a:prstGeom prst="rect">
+            <a:avLst/>
+          </a:prstGeom>
+          <a:noFill/>
+          <a:ln/>
+        </p:spPr>
+        <p:txBody>
+          <a:bodyPr wrap="square" lIns="0" tIns="0" rIns="0" bIns="0" rtlCol="0" anchor="ctr"/>
+          <a:lstStyle/>
+          <a:p>
+            <a:pPr indent="0" marL="0">
+              <a:buNone/>
+            </a:pPr>
+            <a:r>
+              <a:rPr lang="en-US" sz="1600" b="1" dirty="0">
+                <a:solidFill>
+                  <a:srgbClr val="0B7A4A"/>
+                </a:solidFill>
+                <a:latin typeface="Inter" pitchFamily="34" charset="0"/>
+                <a:ea typeface="Inter" pitchFamily="34" charset="-122"/>
+                <a:cs typeface="Inter" pitchFamily="34" charset="-120"/>
+              </a:rPr>
+              <a:t>Group: $188.80M fixed ops gross Jan–Sep 2026, up $7.47M (4.1%): service +$6.30M, parts +$1.17M.</a:t>
+            </a:r>
+            <a:endParaRPr lang="en-US" sz="1600" dirty="0"/>
           </a:p>
         </p:txBody>
       </p:sp>

--- a/day2-deck/decks/Metric Explainers - Review.pptx
+++ b/day2-deck/decks/Metric Explainers - Review.pptx
@@ -2007,7 +2007,7 @@
                 <a:ea typeface="Inter" pitchFamily="34" charset="-122"/>
                 <a:cs typeface="Inter" pitchFamily="34" charset="-120"/>
               </a:rPr>
-              <a:t>THE CP ENGINE</a:t>
+              <a:t>CUSTOMER PAY</a:t>
             </a:r>
             <a:endParaRPr lang="en-US" sz="1400" dirty="0"/>
           </a:p>
@@ -2166,7 +2166,7 @@
               <a:buNone/>
             </a:pPr>
             <a:r>
-              <a:rPr lang="en-US" sz="1400" dirty="0">
+              <a:rPr lang="en-US" sz="1500" dirty="0">
                 <a:solidFill>
                   <a:srgbClr val="595959"/>
                 </a:solidFill>
@@ -2174,9 +2174,9 @@
                 <a:ea typeface="Inter" pitchFamily="34" charset="-122"/>
                 <a:cs typeface="Inter" pitchFamily="34" charset="-120"/>
               </a:rPr>
-              <a:t>Every RO with a customer-pay line, whether or not labor was charged on it. One RO counts once, however many lines it has.</a:t>
-            </a:r>
-            <a:endParaRPr lang="en-US" sz="1400" dirty="0"/>
+              <a:t>Every RO with a customer-pay line. One RO counts once, however many lines it has.</a:t>
+            </a:r>
+            <a:endParaRPr lang="en-US" sz="1500" dirty="0"/>
           </a:p>
         </p:txBody>
       </p:sp>
@@ -2335,7 +2335,7 @@
                 <a:ea typeface="Inter" pitchFamily="34" charset="-122"/>
                 <a:cs typeface="Inter" pitchFamily="34" charset="-120"/>
               </a:rPr>
-              <a:t>It is the top of the engine. Hours, ELR and $ per RO all multiply off it.</a:t>
+              <a:t>Everything else starts here: hours, ELR and $ per RO all multiply off the RO count.</a:t>
             </a:r>
             <a:endParaRPr lang="en-US" sz="1600" dirty="0"/>
           </a:p>
@@ -7563,7 +7563,7 @@
                 <a:ea typeface="Inter" pitchFamily="34" charset="-122"/>
                 <a:cs typeface="Inter" pitchFamily="34" charset="-120"/>
               </a:rPr>
-              <a:t>THE CP ENGINE</a:t>
+              <a:t>CUSTOMER PAY</a:t>
             </a:r>
             <a:endParaRPr lang="en-US" sz="1400" dirty="0"/>
           </a:p>
@@ -8766,7 +8766,7 @@
                 <a:ea typeface="Inter" pitchFamily="34" charset="-122"/>
                 <a:cs typeface="Inter" pitchFamily="34" charset="-120"/>
               </a:rPr>
-              <a:t>THE CP ENGINE</a:t>
+              <a:t>CUSTOMER PAY</a:t>
             </a:r>
             <a:endParaRPr lang="en-US" sz="1400" dirty="0"/>
           </a:p>
@@ -9770,7 +9770,7 @@
                 <a:ea typeface="Inter" pitchFamily="34" charset="-122"/>
                 <a:cs typeface="Inter" pitchFamily="34" charset="-120"/>
               </a:rPr>
-              <a:t>THE CP ENGINE</a:t>
+              <a:t>CUSTOMER PAY</a:t>
             </a:r>
             <a:endParaRPr lang="en-US" sz="1400" dirty="0"/>
           </a:p>
@@ -10821,7 +10821,7 @@
                 <a:ea typeface="Inter" pitchFamily="34" charset="-122"/>
                 <a:cs typeface="Inter" pitchFamily="34" charset="-120"/>
               </a:rPr>
-              <a:t>THE CP ENGINE</a:t>
+              <a:t>CUSTOMER PAY</a:t>
             </a:r>
             <a:endParaRPr lang="en-US" sz="1400" dirty="0"/>
           </a:p>
@@ -11673,7 +11673,7 @@
                 <a:ea typeface="Inter" pitchFamily="34" charset="-122"/>
                 <a:cs typeface="Inter" pitchFamily="34" charset="-120"/>
               </a:rPr>
-              <a:t>THE CP ENGINE</a:t>
+              <a:t>CUSTOMER PAY</a:t>
             </a:r>
             <a:endParaRPr lang="en-US" sz="1400" dirty="0"/>
           </a:p>
@@ -13068,7 +13068,7 @@
                 <a:ea typeface="Inter" pitchFamily="34" charset="-122"/>
                 <a:cs typeface="Inter" pitchFamily="34" charset="-120"/>
               </a:rPr>
-              <a:t>THE CP ENGINE</a:t>
+              <a:t>CUSTOMER PAY</a:t>
             </a:r>
             <a:endParaRPr lang="en-US" sz="1400" dirty="0"/>
           </a:p>
@@ -14104,7 +14104,7 @@
                 <a:ea typeface="Inter" pitchFamily="34" charset="-122"/>
                 <a:cs typeface="Inter" pitchFamily="34" charset="-120"/>
               </a:rPr>
-              <a:t>fixed expenses</a:t>
+              <a:t>total store fixed expenses</a:t>
             </a:r>
             <a:endParaRPr lang="en-US" sz="2400" dirty="0"/>
           </a:p>
@@ -14135,7 +14135,7 @@
               <a:buNone/>
             </a:pPr>
             <a:r>
-              <a:rPr lang="en-US" sz="1500" dirty="0">
+              <a:rPr lang="en-US" sz="1400" dirty="0">
                 <a:solidFill>
                   <a:srgbClr val="595959"/>
                 </a:solidFill>
@@ -14143,9 +14143,9 @@
                 <a:ea typeface="Inter" pitchFamily="34" charset="-122"/>
                 <a:cs typeface="Inter" pitchFamily="34" charset="-120"/>
               </a:rPr>
-              <a:t>How much of the store's fixed expenses service and parts gross pays for.</a:t>
-            </a:r>
-            <a:endParaRPr lang="en-US" sz="1500" dirty="0"/>
+              <a:t>How much of the whole store's fixed expenses, not just service and parts expenses, the service and parts gross pays for.</a:t>
+            </a:r>
+            <a:endParaRPr lang="en-US" sz="1400" dirty="0"/>
           </a:p>
         </p:txBody>
       </p:sp>
@@ -14621,7 +14621,7 @@
                 <a:ea typeface="Inter" pitchFamily="34" charset="-122"/>
                 <a:cs typeface="Inter" pitchFamily="34" charset="-120"/>
               </a:rPr>
-              <a:t>Everything on the CP engine slides: ROs, hours, ELR, margin</a:t>
+              <a:t>Everything on the customer-pay slides: ROs, hours, ELR, margin</a:t>
             </a:r>
             <a:endParaRPr lang="en-US" sz="1400" dirty="0"/>
           </a:p>
@@ -14680,7 +14680,7 @@
                 <a:ea typeface="Inter" pitchFamily="34" charset="-122"/>
                 <a:cs typeface="Inter" pitchFamily="34" charset="-120"/>
               </a:rPr>
-              <a:t>Fixed expenses</a:t>
+              <a:t>Store fixed expenses</a:t>
             </a:r>
             <a:endParaRPr lang="en-US" sz="1400" dirty="0"/>
           </a:p>
@@ -14697,7 +14697,7 @@
                 <a:ea typeface="Inter" pitchFamily="34" charset="-122"/>
                 <a:cs typeface="Inter" pitchFamily="34" charset="-120"/>
               </a:rPr>
-              <a:t>Rent, facility and the other fixed costs on the P&amp;L</a:t>
+              <a:t>The whole store's rent, facility and other fixed costs</a:t>
             </a:r>
             <a:endParaRPr lang="en-US" sz="1400" dirty="0"/>
           </a:p>

--- a/day2-deck/decks/Metric Explainers - Review.pptx
+++ b/day2-deck/decks/Metric Explainers - Review.pptx
@@ -871,7 +871,7 @@
             <a:r>
               <a:rPr lang="en-US" dirty="0"/>
               <a:t>Source: Definitions match the data slides: Qlik - Closed Repair Orders (all customer-pay ROs, by close month), Profit &amp; Loss and Productivity apps, Jan-Sep 2026 vs 2025, same-store, 33 stores. Worked example: Service Manager Roundtable, Nov 15, 2024, slide 21.PLACE: Gross section, after Service Is Sales 2.0 and in front of Total Gross Profit - Fixed Ops.
-Source: Qlik Profit &amp; Loss, Total Gross Profit - Service and Total Gross Profit - Parts, same-store, INEOS excluded, GMC Prescott body shop gross excluded (as on the gross slides). Guarantees and bonuses paid off the RO post as unapplied labor, a cost-of-sale adjustment against service gross.</a:t>
+Source: Qlik Profit &amp; Loss, Total Gross Profit - Service and Total Gross Profit - Parts, same-store, INEOS excluded, GMC Prescott body shop gross excluded (as on the gross slides). Hourly technician pay, guarantees and bonuses paid off the RO post as unapplied labor: not charged on any repair order, a cost-of-sale adjustment that reduces service gross (Noah, Oct 23).</a:t>
             </a:r>
             <a:endParaRPr lang="en-US" dirty="0"/>
           </a:p>
@@ -7124,7 +7124,7 @@
         <p:spPr>
           <a:xfrm>
             <a:off x="5138928" y="3410712"/>
-            <a:ext cx="45720" cy="1133856"/>
+            <a:ext cx="45720" cy="1420837"/>
           </a:xfrm>
           <a:prstGeom prst="rect">
             <a:avLst/>
@@ -7144,7 +7144,7 @@
         <p:spPr>
           <a:xfrm>
             <a:off x="5266944" y="3410712"/>
-            <a:ext cx="2962656" cy="1133856"/>
+            <a:ext cx="2962656" cy="1420837"/>
           </a:xfrm>
           <a:prstGeom prst="rect">
             <a:avLst/>
@@ -7200,7 +7200,7 @@
         <p:spPr>
           <a:xfrm>
             <a:off x="8394192" y="3410712"/>
-            <a:ext cx="45720" cy="1133856"/>
+            <a:ext cx="45720" cy="1420837"/>
           </a:xfrm>
           <a:prstGeom prst="rect">
             <a:avLst/>
@@ -7220,7 +7220,7 @@
         <p:spPr>
           <a:xfrm>
             <a:off x="8522208" y="3410712"/>
-            <a:ext cx="2962656" cy="1133856"/>
+            <a:ext cx="2962656" cy="1420837"/>
           </a:xfrm>
           <a:prstGeom prst="rect">
             <a:avLst/>
@@ -7261,7 +7261,7 @@
                 <a:ea typeface="Inter" pitchFamily="34" charset="-122"/>
                 <a:cs typeface="Inter" pitchFamily="34" charset="-120"/>
               </a:rPr>
-              <a:t>Pay on the RO; guarantees and bonuses paid off the RO come out of gross too</a:t>
+              <a:t>Pay on the RO. Hourly pay, guarantees and bonuses paid off the RO are unapplied labor: not on the RO, but they lower gross</a:t>
             </a:r>
             <a:endParaRPr lang="en-US" sz="1400" dirty="0"/>
           </a:p>
@@ -7275,8 +7275,8 @@
         </p:nvSpPr>
         <p:spPr>
           <a:xfrm>
-            <a:off x="5138928" y="4654296"/>
-            <a:ext cx="45720" cy="1133856"/>
+            <a:off x="5138928" y="4941277"/>
+            <a:ext cx="45720" cy="846875"/>
           </a:xfrm>
           <a:prstGeom prst="rect">
             <a:avLst/>
@@ -7295,8 +7295,8 @@
         </p:nvSpPr>
         <p:spPr>
           <a:xfrm>
-            <a:off x="5266944" y="4654296"/>
-            <a:ext cx="2962656" cy="1133856"/>
+            <a:off x="5266944" y="4941277"/>
+            <a:ext cx="2962656" cy="846875"/>
           </a:xfrm>
           <a:prstGeom prst="rect">
             <a:avLst/>
@@ -7351,8 +7351,8 @@
         </p:nvSpPr>
         <p:spPr>
           <a:xfrm>
-            <a:off x="8394192" y="4654296"/>
-            <a:ext cx="45720" cy="1133856"/>
+            <a:off x="8394192" y="4941277"/>
+            <a:ext cx="45720" cy="846875"/>
           </a:xfrm>
           <a:prstGeom prst="rect">
             <a:avLst/>
@@ -7371,8 +7371,8 @@
         </p:nvSpPr>
         <p:spPr>
           <a:xfrm>
-            <a:off x="8522208" y="4654296"/>
-            <a:ext cx="2962656" cy="1133856"/>
+            <a:off x="8522208" y="4941277"/>
+            <a:ext cx="2962656" cy="846875"/>
           </a:xfrm>
           <a:prstGeom prst="rect">
             <a:avLst/>

--- a/day2-deck/decks/Metric Explainers - Review.pptx
+++ b/day2-deck/decks/Metric Explainers - Review.pptx
@@ -960,7 +960,7 @@
             <a:r>
               <a:rPr lang="en-US" dirty="0"/>
               <a:t>Source: Definitions match the data slides: Qlik - Closed Repair Orders (all customer-pay ROs, by close month), Profit &amp; Loss and Productivity apps, Jan-Sep 2026 vs 2025, same-store, 33 stores. Worked example: Service Manager Roundtable, Nov 15, 2024, slide 21.PLACE: CP Engine, in front of CP Hours per RO.
-$4,543,691 = 0.1 x 279,756 CP ROs x $162.42 CP ELR (on the Hours per RO data slide).</a:t>
+$4,543,691 = 0.1 x 279,756 CP ROs (27,976 hours) x $162.42 CP ELR (on the Hours per RO data slide). Slide rounds to $162 and $4.5M so the room can follow it (Noah, Oct 23).</a:t>
             </a:r>
             <a:endParaRPr lang="en-US" dirty="0"/>
           </a:p>
@@ -1138,7 +1138,7 @@
             <a:r>
               <a:rPr lang="en-US" dirty="0"/>
               <a:t>Source: Definitions match the data slides: Qlik - Closed Repair Orders (all customer-pay ROs, by close month), Profit &amp; Loss and Productivity apps, Jan-Sep 2026 vs 2025, same-store, 33 stores. Worked example: Service Manager Roundtable, Nov 15, 2024, slide 21.PLACE: CP Engine, in front of CP Labor $ per RO.
-1.87 x $162.42 = $303.73, which rounds to the $304 on the data slide.</a:t>
+1.87 x $162.42 = $303.73, which rounds to the $304 on the data slide. Parts line (Noah, Oct 23: the parts $ per RO section is out of the deck, so the link lives here): CP parts per RO $228.50 -&gt; $237.96 Jan-Sep 2025 -&gt; 2026 while CP labor per RO rose $286.67 -&gt; $303.72 (Qlik Closed RO, m5.json).</a:t>
             </a:r>
             <a:endParaRPr lang="en-US" dirty="0"/>
           </a:p>
@@ -1315,7 +1315,7 @@
             <a:r>
               <a:rPr lang="en-US" dirty="0"/>
               <a:t>Source: Definitions match the data slides: Qlik - Closed Repair Orders (all customer-pay ROs, by close month), Profit &amp; Loss and Productivity apps, Jan-Sep 2026 vs 2025, same-store, 33 stores. Worked example: Service Manager Roundtable, Nov 15, 2024, slide 21.PLACE: CP Engine, in front of CP Labor Gross Profit %.
-Example: Roundtable slide 21, every job at a $25 tech rate; margins differ because each job's ELR differs.</a:t>
+Example (Noah, Oct 23: replaces the Roundtable table): one CP hour at the group's Jan-Sep 2026 averages, $162.42 ELR, $31.21 tech cost per hour sold, $131.21 kept = 80.8%; rounded on the slide.</a:t>
             </a:r>
             <a:endParaRPr lang="en-US" dirty="0"/>
           </a:p>
@@ -2356,7 +2356,7 @@
                 <a:ea typeface="Inter" pitchFamily="34" charset="-122"/>
                 <a:cs typeface="Inter" pitchFamily="34" charset="-120"/>
               </a:rPr>
-              <a:t>It is the clearest read on retention and on whether the front door is open.</a:t>
+              <a:t>It shows whether the business is expanding or contracting: are customers coming back?</a:t>
             </a:r>
             <a:endParaRPr lang="en-US" sz="1600" dirty="0"/>
           </a:p>
@@ -2605,7 +2605,7 @@
                 <a:ea typeface="Inter" pitchFamily="34" charset="-122"/>
                 <a:cs typeface="Inter" pitchFamily="34" charset="-120"/>
               </a:rPr>
-              <a:t>Work the Close to Losing and Unretained lists; sold-not-serviced vehicles</a:t>
+              <a:t>Call lapsed, inactive and sold-not-serviced customers; lists in the VizAuto retention app</a:t>
             </a:r>
             <a:endParaRPr lang="en-US" sz="1400" dirty="0"/>
           </a:p>
@@ -7863,7 +7863,7 @@
                 <a:ea typeface="Inter" pitchFamily="34" charset="-122"/>
                 <a:cs typeface="Inter" pitchFamily="34" charset="-120"/>
               </a:rPr>
-              <a:t>0.1 hour more per RO  </a:t>
+              <a:t>0.1 hour more on every RO  </a:t>
             </a:r>
             <a:pPr algn="ctr" indent="0" marL="0">
               <a:buNone/>
@@ -7877,7 +7877,7 @@
                 <a:ea typeface="Inter" pitchFamily="34" charset="-122"/>
                 <a:cs typeface="Inter" pitchFamily="34" charset="-120"/>
               </a:rPr>
-              <a:t>= $4,543,691 of labor</a:t>
+              <a:t>= 27,976 more hours</a:t>
             </a:r>
             <a:endParaRPr lang="en-US" sz="1400" dirty="0"/>
           </a:p>
@@ -7943,7 +7943,7 @@
                 <a:ea typeface="Inter" pitchFamily="34" charset="-122"/>
                 <a:cs typeface="Inter" pitchFamily="34" charset="-120"/>
               </a:rPr>
-              <a:t>at a $162.42 ELR on  </a:t>
+              <a:t>× $162 an hour (our ELR)  </a:t>
             </a:r>
             <a:pPr algn="ctr" indent="0" marL="0">
               <a:buNone/>
@@ -7957,7 +7957,7 @@
                 <a:ea typeface="Inter" pitchFamily="34" charset="-122"/>
                 <a:cs typeface="Inter" pitchFamily="34" charset="-120"/>
               </a:rPr>
-              <a:t>279,756 ROs</a:t>
+              <a:t>= $4.5M more labor</a:t>
             </a:r>
             <a:endParaRPr lang="en-US" sz="1400" dirty="0"/>
           </a:p>
@@ -8961,7 +8961,7 @@
                 <a:ea typeface="Inter" pitchFamily="34" charset="-122"/>
                 <a:cs typeface="Inter" pitchFamily="34" charset="-120"/>
               </a:rPr>
-              <a:t>What we collect for each customer-pay labor hour after menus, discounts and mix. Door rate is what we post.</a:t>
+              <a:t>The average amount we collect for each hour of customer-pay labor we sell.</a:t>
             </a:r>
             <a:endParaRPr lang="en-US" sz="1500" dirty="0"/>
           </a:p>
@@ -9603,7 +9603,7 @@
                 <a:ea typeface="Inter" pitchFamily="34" charset="-122"/>
                 <a:cs typeface="Inter" pitchFamily="34" charset="-120"/>
               </a:rPr>
-              <a:t>Hours charged vs sold</a:t>
+              <a:t>Maintenance labor times</a:t>
             </a:r>
             <a:endParaRPr lang="en-US" sz="1400" dirty="0"/>
           </a:p>
@@ -9620,7 +9620,7 @@
                 <a:ea typeface="Inter" pitchFamily="34" charset="-122"/>
                 <a:cs typeface="Inter" pitchFamily="34" charset="-120"/>
               </a:rPr>
-              <a:t>Charging less time than the job pays the tech</a:t>
+              <a:t>The hours we set and pay the tech on menu jobs; repair times come from labor guides</a:t>
             </a:r>
             <a:endParaRPr lang="en-US" sz="1400" dirty="0"/>
           </a:p>
@@ -10346,7 +10346,7 @@
                 <a:ea typeface="Inter" pitchFamily="34" charset="-122"/>
                 <a:cs typeface="Inter" pitchFamily="34" charset="-120"/>
               </a:rPr>
-              <a:t>It measures execution for the store and for each advisor.</a:t>
+              <a:t>Sell more labor and more parts come with it: parts per RO rose $9 to $238 alongside it.</a:t>
             </a:r>
             <a:endParaRPr lang="en-US" sz="1500" dirty="0"/>
           </a:p>
@@ -10367,7 +10367,7 @@
                 <a:ea typeface="Inter" pitchFamily="34" charset="-122"/>
                 <a:cs typeface="Inter" pitchFamily="34" charset="-120"/>
               </a:rPr>
-              <a:t>It is the best number to build advisor pay on.</a:t>
+              <a:t>It is the single best metric to measure a service advisor's performance.</a:t>
             </a:r>
             <a:endParaRPr lang="en-US" sz="1500" dirty="0"/>
           </a:p>
@@ -11896,7 +11896,7 @@
                 <a:ea typeface="Inter" pitchFamily="34" charset="-122"/>
                 <a:cs typeface="Inter" pitchFamily="34" charset="-120"/>
               </a:rPr>
-              <a:t>The share of each labor dollar we keep after paying the technician. The Roundtable target is 78% to 80%.</a:t>
+              <a:t>The share of each labor dollar we keep after paying the technician.</a:t>
             </a:r>
             <a:endParaRPr lang="en-US" sz="1500" dirty="0"/>
           </a:p>
@@ -11935,7 +11935,7 @@
                 <a:ea typeface="Inter" pitchFamily="34" charset="-122"/>
                 <a:cs typeface="Inter" pitchFamily="34" charset="-120"/>
               </a:rPr>
-              <a:t>Roundtable example</a:t>
+              <a:t>ONE HOUR SOLD</a:t>
             </a:r>
             <a:endParaRPr lang="en-US" sz="1400" dirty="0"/>
           </a:p>
@@ -11950,7 +11950,7 @@
         <p:spPr>
           <a:xfrm>
             <a:off x="2286000" y="2340864"/>
-            <a:ext cx="1801368" cy="457200"/>
+            <a:ext cx="2279142" cy="457200"/>
           </a:xfrm>
           <a:prstGeom prst="rect">
             <a:avLst/>
@@ -11975,7 +11975,7 @@
         <p:spPr>
           <a:xfrm>
             <a:off x="2359152" y="2340864"/>
-            <a:ext cx="1655064" cy="457200"/>
+            <a:ext cx="2132838" cy="457200"/>
           </a:xfrm>
           <a:prstGeom prst="rect">
             <a:avLst/>
@@ -12001,7 +12001,7 @@
                 <a:ea typeface="Inter" pitchFamily="34" charset="-122"/>
                 <a:cs typeface="Inter" pitchFamily="34" charset="-120"/>
               </a:rPr>
-              <a:t>Tire rotation  </a:t>
+              <a:t>Sell 1 hour at  </a:t>
             </a:r>
             <a:pPr algn="ctr" indent="0" marL="0">
               <a:buNone/>
@@ -12015,7 +12015,7 @@
                 <a:ea typeface="Inter" pitchFamily="34" charset="-122"/>
                 <a:cs typeface="Inter" pitchFamily="34" charset="-120"/>
               </a:rPr>
-              <a:t>62.4%</a:t>
+              <a:t>$162</a:t>
             </a:r>
             <a:endParaRPr lang="en-US" sz="1400" dirty="0"/>
           </a:p>
@@ -12029,8 +12029,8 @@
         </p:nvSpPr>
         <p:spPr>
           <a:xfrm>
-            <a:off x="4197096" y="2340864"/>
-            <a:ext cx="1801368" cy="457200"/>
+            <a:off x="4674870" y="2340864"/>
+            <a:ext cx="2279142" cy="457200"/>
           </a:xfrm>
           <a:prstGeom prst="rect">
             <a:avLst/>
@@ -12054,8 +12054,8 @@
         </p:nvSpPr>
         <p:spPr>
           <a:xfrm>
-            <a:off x="4270248" y="2340864"/>
-            <a:ext cx="1655064" cy="457200"/>
+            <a:off x="4748022" y="2340864"/>
+            <a:ext cx="2132838" cy="457200"/>
           </a:xfrm>
           <a:prstGeom prst="rect">
             <a:avLst/>
@@ -12081,7 +12081,7 @@
                 <a:ea typeface="Inter" pitchFamily="34" charset="-122"/>
                 <a:cs typeface="Inter" pitchFamily="34" charset="-120"/>
               </a:rPr>
-              <a:t>Oil change  </a:t>
+              <a:t>Pay the tech  </a:t>
             </a:r>
             <a:pPr algn="ctr" indent="0" marL="0">
               <a:buNone/>
@@ -12095,7 +12095,7 @@
                 <a:ea typeface="Inter" pitchFamily="34" charset="-122"/>
                 <a:cs typeface="Inter" pitchFamily="34" charset="-120"/>
               </a:rPr>
-              <a:t>68.8%</a:t>
+              <a:t>$31</a:t>
             </a:r>
             <a:endParaRPr lang="en-US" sz="1400" dirty="0"/>
           </a:p>
@@ -12109,8 +12109,8 @@
         </p:nvSpPr>
         <p:spPr>
           <a:xfrm>
-            <a:off x="6108192" y="2340864"/>
-            <a:ext cx="1801368" cy="457200"/>
+            <a:off x="7063740" y="2340864"/>
+            <a:ext cx="2279142" cy="457200"/>
           </a:xfrm>
           <a:prstGeom prst="rect">
             <a:avLst/>
@@ -12134,8 +12134,8 @@
         </p:nvSpPr>
         <p:spPr>
           <a:xfrm>
-            <a:off x="6181344" y="2340864"/>
-            <a:ext cx="1655064" cy="457200"/>
+            <a:off x="7136892" y="2340864"/>
+            <a:ext cx="2132838" cy="457200"/>
           </a:xfrm>
           <a:prstGeom prst="rect">
             <a:avLst/>
@@ -12161,7 +12161,7 @@
                 <a:ea typeface="Inter" pitchFamily="34" charset="-122"/>
                 <a:cs typeface="Inter" pitchFamily="34" charset="-120"/>
               </a:rPr>
-              <a:t>Alignment  </a:t>
+              <a:t>We keep  </a:t>
             </a:r>
             <a:pPr algn="ctr" indent="0" marL="0">
               <a:buNone/>
@@ -12175,7 +12175,7 @@
                 <a:ea typeface="Inter" pitchFamily="34" charset="-122"/>
                 <a:cs typeface="Inter" pitchFamily="34" charset="-120"/>
               </a:rPr>
-              <a:t>78.7%</a:t>
+              <a:t>$131</a:t>
             </a:r>
             <a:endParaRPr lang="en-US" sz="1400" dirty="0"/>
           </a:p>
@@ -12189,8 +12189,8 @@
         </p:nvSpPr>
         <p:spPr>
           <a:xfrm>
-            <a:off x="8019288" y="2340864"/>
-            <a:ext cx="1801368" cy="457200"/>
+            <a:off x="9452610" y="2340864"/>
+            <a:ext cx="2279142" cy="457200"/>
           </a:xfrm>
           <a:prstGeom prst="rect">
             <a:avLst/>
@@ -12214,8 +12214,8 @@
         </p:nvSpPr>
         <p:spPr>
           <a:xfrm>
-            <a:off x="8092440" y="2340864"/>
-            <a:ext cx="1655064" cy="457200"/>
+            <a:off x="9525762" y="2340864"/>
+            <a:ext cx="2132838" cy="457200"/>
           </a:xfrm>
           <a:prstGeom prst="rect">
             <a:avLst/>
@@ -12241,7 +12241,7 @@
                 <a:ea typeface="Inter" pitchFamily="34" charset="-122"/>
                 <a:cs typeface="Inter" pitchFamily="34" charset="-120"/>
               </a:rPr>
-              <a:t>Steering rack  </a:t>
+              <a:t>$131 ÷ $162  </a:t>
             </a:r>
             <a:pPr algn="ctr" indent="0" marL="0">
               <a:buNone/>
@@ -12255,7 +12255,7 @@
                 <a:ea typeface="Inter" pitchFamily="34" charset="-122"/>
                 <a:cs typeface="Inter" pitchFamily="34" charset="-120"/>
               </a:rPr>
-              <a:t>84.4%</a:t>
+              <a:t>81%</a:t>
             </a:r>
             <a:endParaRPr lang="en-US" sz="1400" dirty="0"/>
           </a:p>
@@ -12269,86 +12269,6 @@
         </p:nvSpPr>
         <p:spPr>
           <a:xfrm>
-            <a:off x="9930384" y="2340864"/>
-            <a:ext cx="1801368" cy="457200"/>
-          </a:xfrm>
-          <a:prstGeom prst="rect">
-            <a:avLst/>
-          </a:prstGeom>
-          <a:solidFill>
-            <a:srgbClr val="FFFFFF"/>
-          </a:solidFill>
-          <a:ln w="9525">
-            <a:solidFill>
-              <a:srgbClr val="D9D9D9"/>
-            </a:solidFill>
-            <a:prstDash val="solid"/>
-          </a:ln>
-        </p:spPr>
-      </p:sp>
-      <p:sp>
-        <p:nvSpPr>
-          <p:cNvPr id="18" name="Text 16"/>
-          <p:cNvSpPr txBox="1"/>
-          <p:nvPr/>
-        </p:nvSpPr>
-        <p:spPr>
-          <a:xfrm>
-            <a:off x="10003536" y="2340864"/>
-            <a:ext cx="1655064" cy="457200"/>
-          </a:xfrm>
-          <a:prstGeom prst="rect">
-            <a:avLst/>
-          </a:prstGeom>
-          <a:noFill/>
-          <a:ln/>
-        </p:spPr>
-        <p:txBody>
-          <a:bodyPr wrap="square" lIns="0" tIns="0" rIns="0" bIns="0" rtlCol="0" anchor="ctr">
-            <a:normAutofit/>
-          </a:bodyPr>
-          <a:lstStyle/>
-          <a:p>
-            <a:pPr algn="ctr" indent="0" marL="0">
-              <a:buNone/>
-            </a:pPr>
-            <a:r>
-              <a:rPr lang="en-US" sz="1400" dirty="0">
-                <a:solidFill>
-                  <a:srgbClr val="1A1A1A"/>
-                </a:solidFill>
-                <a:latin typeface="Inter" pitchFamily="34" charset="0"/>
-                <a:ea typeface="Inter" pitchFamily="34" charset="-122"/>
-                <a:cs typeface="Inter" pitchFamily="34" charset="-120"/>
-              </a:rPr>
-              <a:t>All 7 jobs  </a:t>
-            </a:r>
-            <a:pPr algn="ctr" indent="0" marL="0">
-              <a:buNone/>
-            </a:pPr>
-            <a:r>
-              <a:rPr lang="en-US" sz="1400" b="1" dirty="0">
-                <a:solidFill>
-                  <a:srgbClr val="0B2C4A"/>
-                </a:solidFill>
-                <a:latin typeface="Inter" pitchFamily="34" charset="0"/>
-                <a:ea typeface="Inter" pitchFamily="34" charset="-122"/>
-                <a:cs typeface="Inter" pitchFamily="34" charset="-120"/>
-              </a:rPr>
-              <a:t>80.8%</a:t>
-            </a:r>
-            <a:endParaRPr lang="en-US" sz="1400" dirty="0"/>
-          </a:p>
-        </p:txBody>
-      </p:sp>
-      <p:sp>
-        <p:nvSpPr>
-          <p:cNvPr id="19" name="Shape 17"/>
-          <p:cNvSpPr/>
-          <p:nvPr/>
-        </p:nvSpPr>
-        <p:spPr>
-          <a:xfrm>
             <a:off x="457200" y="2907792"/>
             <a:ext cx="4343400" cy="3081528"/>
           </a:xfrm>
@@ -12363,7 +12283,7 @@
       </p:sp>
       <p:sp>
         <p:nvSpPr>
-          <p:cNvPr id="20" name="Shape 18"/>
+          <p:cNvPr id="18" name="Shape 16"/>
           <p:cNvSpPr/>
           <p:nvPr/>
         </p:nvSpPr>
@@ -12383,7 +12303,7 @@
       </p:sp>
       <p:sp>
         <p:nvSpPr>
-          <p:cNvPr id="21" name="Text 19"/>
+          <p:cNvPr id="19" name="Text 17"/>
           <p:cNvSpPr txBox="1"/>
           <p:nvPr/>
         </p:nvSpPr>
@@ -12422,7 +12342,7 @@
       </p:sp>
       <p:sp>
         <p:nvSpPr>
-          <p:cNvPr id="22" name="Text 20"/>
+          <p:cNvPr id="20" name="Text 18"/>
           <p:cNvSpPr txBox="1"/>
           <p:nvPr/>
         </p:nvSpPr>
@@ -12461,7 +12381,7 @@
       </p:sp>
       <p:sp>
         <p:nvSpPr>
-          <p:cNvPr id="23" name="Text 21"/>
+          <p:cNvPr id="21" name="Text 19"/>
           <p:cNvSpPr txBox="1"/>
           <p:nvPr/>
         </p:nvSpPr>
@@ -12496,7 +12416,7 @@
                 <a:ea typeface="Inter" pitchFamily="34" charset="-122"/>
                 <a:cs typeface="Inter" pitchFamily="34" charset="-120"/>
               </a:rPr>
-              <a:t>Goldilocks: not too high, not too low.</a:t>
+              <a:t>Goldilocks: the Roundtable target is 78% to 80%. Not too high, not too low.</a:t>
             </a:r>
             <a:endParaRPr lang="en-US" sz="1500" dirty="0"/>
           </a:p>
@@ -12546,13 +12466,89 @@
       </p:sp>
       <p:sp>
         <p:nvSpPr>
+          <p:cNvPr id="22" name="Shape 20"/>
+          <p:cNvSpPr/>
+          <p:nvPr/>
+        </p:nvSpPr>
+        <p:spPr>
+          <a:xfrm>
+            <a:off x="5138928" y="3410712"/>
+            <a:ext cx="45720" cy="1133856"/>
+          </a:xfrm>
+          <a:prstGeom prst="rect">
+            <a:avLst/>
+          </a:prstGeom>
+          <a:solidFill>
+            <a:srgbClr val="2587C5"/>
+          </a:solidFill>
+          <a:ln/>
+        </p:spPr>
+      </p:sp>
+      <p:sp>
+        <p:nvSpPr>
+          <p:cNvPr id="23" name="Text 21"/>
+          <p:cNvSpPr txBox="1"/>
+          <p:nvPr/>
+        </p:nvSpPr>
+        <p:spPr>
+          <a:xfrm>
+            <a:off x="5266944" y="3410712"/>
+            <a:ext cx="1877568" cy="1133856"/>
+          </a:xfrm>
+          <a:prstGeom prst="rect">
+            <a:avLst/>
+          </a:prstGeom>
+          <a:noFill/>
+          <a:ln/>
+        </p:spPr>
+        <p:txBody>
+          <a:bodyPr wrap="square" lIns="0" tIns="0" rIns="0" bIns="0" rtlCol="0" anchor="t"/>
+          <a:lstStyle/>
+          <a:p>
+            <a:pPr indent="0" marL="0">
+              <a:buNone/>
+            </a:pPr>
+            <a:r>
+              <a:rPr lang="en-US" sz="1400" b="1" dirty="0">
+                <a:solidFill>
+                  <a:srgbClr val="1A1A1A"/>
+                </a:solidFill>
+                <a:latin typeface="Inter" pitchFamily="34" charset="0"/>
+                <a:ea typeface="Inter" pitchFamily="34" charset="-122"/>
+                <a:cs typeface="Inter" pitchFamily="34" charset="-120"/>
+              </a:rPr>
+              <a:t>Effective labor rate</a:t>
+            </a:r>
+            <a:endParaRPr lang="en-US" sz="1400" dirty="0"/>
+          </a:p>
+          <a:p>
+            <a:pPr indent="0" marL="0">
+              <a:buNone/>
+            </a:pPr>
+            <a:r>
+              <a:rPr lang="en-US" sz="1400" dirty="0">
+                <a:solidFill>
+                  <a:srgbClr val="595959"/>
+                </a:solidFill>
+                <a:latin typeface="Inter" pitchFamily="34" charset="0"/>
+                <a:ea typeface="Inter" pitchFamily="34" charset="-122"/>
+                <a:cs typeface="Inter" pitchFamily="34" charset="-120"/>
+              </a:rPr>
+              <a:t>Same tech cost, higher ELR = higher margin</a:t>
+            </a:r>
+            <a:endParaRPr lang="en-US" sz="1400" dirty="0"/>
+          </a:p>
+        </p:txBody>
+      </p:sp>
+      <p:sp>
+        <p:nvSpPr>
           <p:cNvPr id="24" name="Shape 22"/>
           <p:cNvSpPr/>
           <p:nvPr/>
         </p:nvSpPr>
         <p:spPr>
           <a:xfrm>
-            <a:off x="5138928" y="3410712"/>
+            <a:off x="7309104" y="3410712"/>
             <a:ext cx="45720" cy="1133856"/>
           </a:xfrm>
           <a:prstGeom prst="rect">
@@ -12572,7 +12568,7 @@
         </p:nvSpPr>
         <p:spPr>
           <a:xfrm>
-            <a:off x="5266944" y="3410712"/>
+            <a:off x="7437120" y="3410712"/>
             <a:ext cx="1877568" cy="1133856"/>
           </a:xfrm>
           <a:prstGeom prst="rect">
@@ -12597,7 +12593,7 @@
                 <a:ea typeface="Inter" pitchFamily="34" charset="-122"/>
                 <a:cs typeface="Inter" pitchFamily="34" charset="-120"/>
               </a:rPr>
-              <a:t>Effective labor rate</a:t>
+              <a:t>Tech pay rate</a:t>
             </a:r>
             <a:endParaRPr lang="en-US" sz="1400" dirty="0"/>
           </a:p>
@@ -12614,7 +12610,7 @@
                 <a:ea typeface="Inter" pitchFamily="34" charset="-122"/>
                 <a:cs typeface="Inter" pitchFamily="34" charset="-120"/>
               </a:rPr>
-              <a:t>Same tech cost, higher ELR = higher margin</a:t>
+              <a:t>Flat-rate pay per hour against the rate we sell</a:t>
             </a:r>
             <a:endParaRPr lang="en-US" sz="1400" dirty="0"/>
           </a:p>
@@ -12628,7 +12624,7 @@
         </p:nvSpPr>
         <p:spPr>
           <a:xfrm>
-            <a:off x="7309104" y="3410712"/>
+            <a:off x="9479280" y="3410712"/>
             <a:ext cx="45720" cy="1133856"/>
           </a:xfrm>
           <a:prstGeom prst="rect">
@@ -12648,7 +12644,7 @@
         </p:nvSpPr>
         <p:spPr>
           <a:xfrm>
-            <a:off x="7437120" y="3410712"/>
+            <a:off x="9607296" y="3410712"/>
             <a:ext cx="1877568" cy="1133856"/>
           </a:xfrm>
           <a:prstGeom prst="rect">
@@ -12673,7 +12669,7 @@
                 <a:ea typeface="Inter" pitchFamily="34" charset="-122"/>
                 <a:cs typeface="Inter" pitchFamily="34" charset="-120"/>
               </a:rPr>
-              <a:t>Tech pay rate</a:t>
+              <a:t>Right tech, right job</a:t>
             </a:r>
             <a:endParaRPr lang="en-US" sz="1400" dirty="0"/>
           </a:p>
@@ -12690,7 +12686,7 @@
                 <a:ea typeface="Inter" pitchFamily="34" charset="-122"/>
                 <a:cs typeface="Inter" pitchFamily="34" charset="-120"/>
               </a:rPr>
-              <a:t>Flat-rate pay per hour against the rate we sell</a:t>
+              <a:t>Skill-code costing: don't pay a master-tech rate on an oil change</a:t>
             </a:r>
             <a:endParaRPr lang="en-US" sz="1400" dirty="0"/>
           </a:p>
@@ -12704,7 +12700,7 @@
         </p:nvSpPr>
         <p:spPr>
           <a:xfrm>
-            <a:off x="9479280" y="3410712"/>
+            <a:off x="5138928" y="4654296"/>
             <a:ext cx="45720" cy="1133856"/>
           </a:xfrm>
           <a:prstGeom prst="rect">
@@ -12724,7 +12720,7 @@
         </p:nvSpPr>
         <p:spPr>
           <a:xfrm>
-            <a:off x="9607296" y="3410712"/>
+            <a:off x="5266944" y="4654296"/>
             <a:ext cx="1877568" cy="1133856"/>
           </a:xfrm>
           <a:prstGeom prst="rect">
@@ -12749,7 +12745,7 @@
                 <a:ea typeface="Inter" pitchFamily="34" charset="-122"/>
                 <a:cs typeface="Inter" pitchFamily="34" charset="-120"/>
               </a:rPr>
-              <a:t>Right tech, right job</a:t>
+              <a:t>Work mix</a:t>
             </a:r>
             <a:endParaRPr lang="en-US" sz="1400" dirty="0"/>
           </a:p>
@@ -12766,7 +12762,7 @@
                 <a:ea typeface="Inter" pitchFamily="34" charset="-122"/>
                 <a:cs typeface="Inter" pitchFamily="34" charset="-120"/>
               </a:rPr>
-              <a:t>Skill-code costing: don't pay a master-tech rate on an oil change</a:t>
+              <a:t>Quick maintenance runs lower margin than repair</a:t>
             </a:r>
             <a:endParaRPr lang="en-US" sz="1400" dirty="0"/>
           </a:p>
@@ -12780,7 +12776,7 @@
         </p:nvSpPr>
         <p:spPr>
           <a:xfrm>
-            <a:off x="5138928" y="4654296"/>
+            <a:off x="7309104" y="4654296"/>
             <a:ext cx="45720" cy="1133856"/>
           </a:xfrm>
           <a:prstGeom prst="rect">
@@ -12800,7 +12796,7 @@
         </p:nvSpPr>
         <p:spPr>
           <a:xfrm>
-            <a:off x="5266944" y="4654296"/>
+            <a:off x="7437120" y="4654296"/>
             <a:ext cx="1877568" cy="1133856"/>
           </a:xfrm>
           <a:prstGeom prst="rect">
@@ -12825,7 +12821,7 @@
                 <a:ea typeface="Inter" pitchFamily="34" charset="-122"/>
                 <a:cs typeface="Inter" pitchFamily="34" charset="-120"/>
               </a:rPr>
-              <a:t>Work mix</a:t>
+              <a:t>Comebacks</a:t>
             </a:r>
             <a:endParaRPr lang="en-US" sz="1400" dirty="0"/>
           </a:p>
@@ -12842,7 +12838,7 @@
                 <a:ea typeface="Inter" pitchFamily="34" charset="-122"/>
                 <a:cs typeface="Inter" pitchFamily="34" charset="-120"/>
               </a:rPr>
-              <a:t>Quick maintenance runs lower margin than repair</a:t>
+              <a:t>Paying twice for the same job</a:t>
             </a:r>
             <a:endParaRPr lang="en-US" sz="1400" dirty="0"/>
           </a:p>
@@ -12856,82 +12852,6 @@
         </p:nvSpPr>
         <p:spPr>
           <a:xfrm>
-            <a:off x="7309104" y="4654296"/>
-            <a:ext cx="45720" cy="1133856"/>
-          </a:xfrm>
-          <a:prstGeom prst="rect">
-            <a:avLst/>
-          </a:prstGeom>
-          <a:solidFill>
-            <a:srgbClr val="2587C5"/>
-          </a:solidFill>
-          <a:ln/>
-        </p:spPr>
-      </p:sp>
-      <p:sp>
-        <p:nvSpPr>
-          <p:cNvPr id="33" name="Text 31"/>
-          <p:cNvSpPr txBox="1"/>
-          <p:nvPr/>
-        </p:nvSpPr>
-        <p:spPr>
-          <a:xfrm>
-            <a:off x="7437120" y="4654296"/>
-            <a:ext cx="1877568" cy="1133856"/>
-          </a:xfrm>
-          <a:prstGeom prst="rect">
-            <a:avLst/>
-          </a:prstGeom>
-          <a:noFill/>
-          <a:ln/>
-        </p:spPr>
-        <p:txBody>
-          <a:bodyPr wrap="square" lIns="0" tIns="0" rIns="0" bIns="0" rtlCol="0" anchor="t"/>
-          <a:lstStyle/>
-          <a:p>
-            <a:pPr indent="0" marL="0">
-              <a:buNone/>
-            </a:pPr>
-            <a:r>
-              <a:rPr lang="en-US" sz="1400" b="1" dirty="0">
-                <a:solidFill>
-                  <a:srgbClr val="1A1A1A"/>
-                </a:solidFill>
-                <a:latin typeface="Inter" pitchFamily="34" charset="0"/>
-                <a:ea typeface="Inter" pitchFamily="34" charset="-122"/>
-                <a:cs typeface="Inter" pitchFamily="34" charset="-120"/>
-              </a:rPr>
-              <a:t>Comebacks</a:t>
-            </a:r>
-            <a:endParaRPr lang="en-US" sz="1400" dirty="0"/>
-          </a:p>
-          <a:p>
-            <a:pPr indent="0" marL="0">
-              <a:buNone/>
-            </a:pPr>
-            <a:r>
-              <a:rPr lang="en-US" sz="1400" dirty="0">
-                <a:solidFill>
-                  <a:srgbClr val="595959"/>
-                </a:solidFill>
-                <a:latin typeface="Inter" pitchFamily="34" charset="0"/>
-                <a:ea typeface="Inter" pitchFamily="34" charset="-122"/>
-                <a:cs typeface="Inter" pitchFamily="34" charset="-120"/>
-              </a:rPr>
-              <a:t>Paying twice for the same job</a:t>
-            </a:r>
-            <a:endParaRPr lang="en-US" sz="1400" dirty="0"/>
-          </a:p>
-        </p:txBody>
-      </p:sp>
-      <p:sp>
-        <p:nvSpPr>
-          <p:cNvPr id="34" name="Shape 32"/>
-          <p:cNvSpPr/>
-          <p:nvPr/>
-        </p:nvSpPr>
-        <p:spPr>
-          <a:xfrm>
             <a:off x="457200" y="6126480"/>
             <a:ext cx="11274552" cy="371856"/>
           </a:xfrm>
@@ -12946,7 +12866,7 @@
       </p:sp>
       <p:sp>
         <p:nvSpPr>
-          <p:cNvPr id="35" name="Text 33"/>
+          <p:cNvPr id="33" name="Text 31"/>
           <p:cNvSpPr txBox="1"/>
           <p:nvPr/>
         </p:nvSpPr>
@@ -15194,7 +15114,7 @@
                 <a:ea typeface="Inter" pitchFamily="34" charset="-122"/>
                 <a:cs typeface="Inter" pitchFamily="34" charset="-120"/>
               </a:rPr>
-              <a:t>How much of each gross dollar the department keeps after its own expenses. Shown for service and parts.</a:t>
+              <a:t>How much of each gross dollar the department keeps after its own expenses.</a:t>
             </a:r>
             <a:endParaRPr lang="en-US" sz="1500" dirty="0"/>
           </a:p>
@@ -15347,7 +15267,7 @@
               <a:buChar char="•"/>
             </a:pPr>
             <a:r>
-              <a:rPr lang="en-US" sz="1600" dirty="0">
+              <a:rPr lang="en-US" sz="1500" dirty="0">
                 <a:solidFill>
                   <a:srgbClr val="1A1A1A"/>
                 </a:solidFill>
@@ -15355,9 +15275,9 @@
                 <a:ea typeface="Inter" pitchFamily="34" charset="-122"/>
                 <a:cs typeface="Inter" pitchFamily="34" charset="-120"/>
               </a:rPr>
-              <a:t>Gross is what we make; net is what we keep.</a:t>
-            </a:r>
-            <a:endParaRPr lang="en-US" sz="1600" dirty="0"/>
+              <a:t>It is the true measure of how the department performs.</a:t>
+            </a:r>
+            <a:endParaRPr lang="en-US" sz="1500" dirty="0"/>
           </a:p>
           <a:p>
             <a:pPr marL="203200" indent="-203200">
@@ -15368,7 +15288,7 @@
               <a:buChar char="•"/>
             </a:pPr>
             <a:r>
-              <a:rPr lang="en-US" sz="1600" dirty="0">
+              <a:rPr lang="en-US" sz="1500" dirty="0">
                 <a:solidFill>
                   <a:srgbClr val="1A1A1A"/>
                 </a:solidFill>
@@ -15376,9 +15296,9 @@
                 <a:ea typeface="Inter" pitchFamily="34" charset="-122"/>
                 <a:cs typeface="Inter" pitchFamily="34" charset="-120"/>
               </a:rPr>
-              <a:t>Gross can grow while net falls if expenses grow faster.</a:t>
-            </a:r>
-            <a:endParaRPr lang="en-US" sz="1600" dirty="0"/>
+              <a:t>Gross is what we make; net is what we keep.</a:t>
+            </a:r>
+            <a:endParaRPr lang="en-US" sz="1500" dirty="0"/>
           </a:p>
           <a:p>
             <a:pPr marL="203200" indent="-203200">
@@ -15389,7 +15309,7 @@
               <a:buChar char="•"/>
             </a:pPr>
             <a:r>
-              <a:rPr lang="en-US" sz="1600" dirty="0">
+              <a:rPr lang="en-US" sz="1500" dirty="0">
                 <a:solidFill>
                   <a:srgbClr val="1A1A1A"/>
                 </a:solidFill>
@@ -15397,9 +15317,30 @@
                 <a:ea typeface="Inter" pitchFamily="34" charset="-122"/>
                 <a:cs typeface="Inter" pitchFamily="34" charset="-120"/>
               </a:rPr>
+              <a:t>Gross can grow while net falls if expenses grow faster.</a:t>
+            </a:r>
+            <a:endParaRPr lang="en-US" sz="1500" dirty="0"/>
+          </a:p>
+          <a:p>
+            <a:pPr marL="203200" indent="-203200">
+              <a:spcAft>
+                <a:spcPts val="600"/>
+              </a:spcAft>
+              <a:buSzPct val="100000"/>
+              <a:buChar char="•"/>
+            </a:pPr>
+            <a:r>
+              <a:rPr lang="en-US" sz="1500" dirty="0">
+                <a:solidFill>
+                  <a:srgbClr val="1A1A1A"/>
+                </a:solidFill>
+                <a:latin typeface="Inter" pitchFamily="34" charset="0"/>
+                <a:ea typeface="Inter" pitchFamily="34" charset="-122"/>
+                <a:cs typeface="Inter" pitchFamily="34" charset="-120"/>
+              </a:rPr>
               <a:t>It ties staffing and pay plans to results.</a:t>
             </a:r>
-            <a:endParaRPr lang="en-US" sz="1600" dirty="0"/>
+            <a:endParaRPr lang="en-US" sz="1500" dirty="0"/>
           </a:p>
         </p:txBody>
       </p:sp>

--- a/day2-deck/decks/Metric Explainers - Review.pptx
+++ b/day2-deck/decks/Metric Explainers - Review.pptx
@@ -2392,7 +2392,7 @@
         <p:spPr>
           <a:xfrm>
             <a:off x="5138928" y="2843784"/>
-            <a:ext cx="45720" cy="908304"/>
+            <a:ext cx="45720" cy="801942"/>
           </a:xfrm>
           <a:prstGeom prst="rect">
             <a:avLst/>
@@ -2412,7 +2412,7 @@
         <p:spPr>
           <a:xfrm>
             <a:off x="5266944" y="2843784"/>
-            <a:ext cx="2962656" cy="908304"/>
+            <a:ext cx="2962656" cy="801942"/>
           </a:xfrm>
           <a:prstGeom prst="rect">
             <a:avLst/>
@@ -2468,7 +2468,7 @@
         <p:spPr>
           <a:xfrm>
             <a:off x="8394192" y="2843784"/>
-            <a:ext cx="45720" cy="908304"/>
+            <a:ext cx="45720" cy="801942"/>
           </a:xfrm>
           <a:prstGeom prst="rect">
             <a:avLst/>
@@ -2488,7 +2488,7 @@
         <p:spPr>
           <a:xfrm>
             <a:off x="8522208" y="2843784"/>
-            <a:ext cx="2962656" cy="908304"/>
+            <a:ext cx="2962656" cy="801942"/>
           </a:xfrm>
           <a:prstGeom prst="rect">
             <a:avLst/>
@@ -2543,8 +2543,8 @@
         </p:nvSpPr>
         <p:spPr>
           <a:xfrm>
-            <a:off x="5138928" y="3861816"/>
-            <a:ext cx="45720" cy="908304"/>
+            <a:off x="5138928" y="3755454"/>
+            <a:ext cx="45720" cy="1121027"/>
           </a:xfrm>
           <a:prstGeom prst="rect">
             <a:avLst/>
@@ -2563,8 +2563,8 @@
         </p:nvSpPr>
         <p:spPr>
           <a:xfrm>
-            <a:off x="5266944" y="3861816"/>
-            <a:ext cx="2962656" cy="908304"/>
+            <a:off x="5266944" y="3755454"/>
+            <a:ext cx="2962656" cy="1121027"/>
           </a:xfrm>
           <a:prstGeom prst="rect">
             <a:avLst/>
@@ -2605,7 +2605,7 @@
                 <a:ea typeface="Inter" pitchFamily="34" charset="-122"/>
                 <a:cs typeface="Inter" pitchFamily="34" charset="-120"/>
               </a:rPr>
-              <a:t>Call lapsed, inactive and sold-not-serviced customers; lists in the VizAuto retention app</a:t>
+              <a:t>Proactive outreach and ongoing engagement: lapsed, inactive and sold-not-serviced customers (VizAuto retention app)</a:t>
             </a:r>
             <a:endParaRPr lang="en-US" sz="1400" dirty="0"/>
           </a:p>
@@ -2619,8 +2619,8 @@
         </p:nvSpPr>
         <p:spPr>
           <a:xfrm>
-            <a:off x="8394192" y="3861816"/>
-            <a:ext cx="45720" cy="908304"/>
+            <a:off x="8394192" y="3755454"/>
+            <a:ext cx="45720" cy="1121027"/>
           </a:xfrm>
           <a:prstGeom prst="rect">
             <a:avLst/>
@@ -2639,8 +2639,8 @@
         </p:nvSpPr>
         <p:spPr>
           <a:xfrm>
-            <a:off x="8522208" y="3861816"/>
-            <a:ext cx="2962656" cy="908304"/>
+            <a:off x="8522208" y="3755454"/>
+            <a:ext cx="2962656" cy="1121027"/>
           </a:xfrm>
           <a:prstGeom prst="rect">
             <a:avLst/>
@@ -2695,8 +2695,8 @@
         </p:nvSpPr>
         <p:spPr>
           <a:xfrm>
-            <a:off x="5138928" y="4879848"/>
-            <a:ext cx="45720" cy="908304"/>
+            <a:off x="5138928" y="4986210"/>
+            <a:ext cx="45720" cy="801942"/>
           </a:xfrm>
           <a:prstGeom prst="rect">
             <a:avLst/>
@@ -2715,8 +2715,8 @@
         </p:nvSpPr>
         <p:spPr>
           <a:xfrm>
-            <a:off x="5266944" y="4879848"/>
-            <a:ext cx="2962656" cy="908304"/>
+            <a:off x="5266944" y="4986210"/>
+            <a:ext cx="2962656" cy="801942"/>
           </a:xfrm>
           <a:prstGeom prst="rect">
             <a:avLst/>
@@ -2771,8 +2771,8 @@
         </p:nvSpPr>
         <p:spPr>
           <a:xfrm>
-            <a:off x="8394192" y="4879848"/>
-            <a:ext cx="45720" cy="908304"/>
+            <a:off x="8394192" y="4986210"/>
+            <a:ext cx="45720" cy="801942"/>
           </a:xfrm>
           <a:prstGeom prst="rect">
             <a:avLst/>
@@ -2791,8 +2791,8 @@
         </p:nvSpPr>
         <p:spPr>
           <a:xfrm>
-            <a:off x="8522208" y="4879848"/>
-            <a:ext cx="2962656" cy="908304"/>
+            <a:off x="8522208" y="4986210"/>
+            <a:ext cx="2962656" cy="801942"/>
           </a:xfrm>
           <a:prstGeom prst="rect">
             <a:avLst/>

--- a/day2-deck/decks/Metric Explainers - Review.pptx
+++ b/day2-deck/decks/Metric Explainers - Review.pptx
@@ -1049,7 +1049,8 @@
             <a:r>
               <a:rPr lang="en-US" dirty="0"/>
               <a:t>Source: Definitions match the data slides: Qlik - Closed Repair Orders (all customer-pay ROs, by close month), Profit &amp; Loss and Productivity apps, Jan-Sep 2026 vs 2025, same-store, 33 stores. Worked example: Service Manager Roundtable, Nov 15, 2024, slide 21.PLACE: CP Engine, in front of CP ELR (and ahead of the door-rate slides).
-Roundtable worked example removed from the slide (Noah, Oct 21).</a:t>
+Roundtable worked example removed from the slide (Noah, Oct 21).
+Talk track (Noah, Oct 23): to understand your ELR you have to understand your work mix. A shop that does more repair than maintenance will run a higher ELR, because the repair rate is higher; a shop that is mostly maintenance will run lower. There is nothing wrong with that, but you need to know your mix to know why your ELR is what it is. It matters because raising the repair rate may do less than raising the maintenance rate if most of your work is maintenance. Know your ELR for every labor operation.</a:t>
             </a:r>
             <a:endParaRPr lang="en-US" dirty="0"/>
           </a:p>
@@ -9114,7 +9115,7 @@
               <a:buChar char="•"/>
             </a:pPr>
             <a:r>
-              <a:rPr lang="en-US" sz="1600" dirty="0">
+              <a:rPr lang="en-US" sz="1500" dirty="0">
                 <a:solidFill>
                   <a:srgbClr val="1A1A1A"/>
                 </a:solidFill>
@@ -9122,9 +9123,9 @@
                 <a:ea typeface="Inter" pitchFamily="34" charset="-122"/>
                 <a:cs typeface="Inter" pitchFamily="34" charset="-120"/>
               </a:rPr>
-              <a:t>Every hour sold is worth the ELR, so it sets the value of the whole shop.</a:t>
-            </a:r>
-            <a:endParaRPr lang="en-US" sz="1600" dirty="0"/>
+              <a:t>Know your work mix: repair is priced above maintenance, so repair-heavy shops run a higher ELR, maintenance-heavy shops lower. Neither is wrong.</a:t>
+            </a:r>
+            <a:endParaRPr lang="en-US" sz="1500" dirty="0"/>
           </a:p>
           <a:p>
             <a:pPr marL="203200" indent="-203200">
@@ -9135,7 +9136,7 @@
               <a:buChar char="•"/>
             </a:pPr>
             <a:r>
-              <a:rPr lang="en-US" sz="1600" dirty="0">
+              <a:rPr lang="en-US" sz="1500" dirty="0">
                 <a:solidFill>
                   <a:srgbClr val="1A1A1A"/>
                 </a:solidFill>
@@ -9143,9 +9144,9 @@
                 <a:ea typeface="Inter" pitchFamily="34" charset="-122"/>
                 <a:cs typeface="Inter" pitchFamily="34" charset="-120"/>
               </a:rPr>
-              <a:t>The gap to door rate is money given away. Our benchmark: CP ELR at least 70% of door rate.</a:t>
-            </a:r>
-            <a:endParaRPr lang="en-US" sz="1600" dirty="0"/>
+              <a:t>If most of your work is maintenance, raising the maintenance rate moves ELR more than raising the repair rate.</a:t>
+            </a:r>
+            <a:endParaRPr lang="en-US" sz="1500" dirty="0"/>
           </a:p>
           <a:p>
             <a:pPr marL="203200" indent="-203200">
@@ -9156,7 +9157,7 @@
               <a:buChar char="•"/>
             </a:pPr>
             <a:r>
-              <a:rPr lang="en-US" sz="1600" dirty="0">
+              <a:rPr lang="en-US" sz="1500" dirty="0">
                 <a:solidFill>
                   <a:srgbClr val="1A1A1A"/>
                 </a:solidFill>
@@ -9164,9 +9165,30 @@
                 <a:ea typeface="Inter" pitchFamily="34" charset="-122"/>
                 <a:cs typeface="Inter" pitchFamily="34" charset="-120"/>
               </a:rPr>
-              <a:t>It shows whether pricing, discounting and mix are under control.</a:t>
-            </a:r>
-            <a:endParaRPr lang="en-US" sz="1600" dirty="0"/>
+              <a:t>Know the ELR on every labor operation.</a:t>
+            </a:r>
+            <a:endParaRPr lang="en-US" sz="1500" dirty="0"/>
+          </a:p>
+          <a:p>
+            <a:pPr marL="203200" indent="-203200">
+              <a:spcAft>
+                <a:spcPts val="600"/>
+              </a:spcAft>
+              <a:buSzPct val="100000"/>
+              <a:buChar char="•"/>
+            </a:pPr>
+            <a:r>
+              <a:rPr lang="en-US" sz="1500" dirty="0">
+                <a:solidFill>
+                  <a:srgbClr val="1A1A1A"/>
+                </a:solidFill>
+                <a:latin typeface="Inter" pitchFamily="34" charset="0"/>
+                <a:ea typeface="Inter" pitchFamily="34" charset="-122"/>
+                <a:cs typeface="Inter" pitchFamily="34" charset="-120"/>
+              </a:rPr>
+              <a:t>Benchmark: CP ELR at least 70% of door rate.</a:t>
+            </a:r>
+            <a:endParaRPr lang="en-US" sz="1500" dirty="0"/>
           </a:p>
         </p:txBody>
       </p:sp>

--- a/day2-deck/decks/Metric Explainers - Review.pptx
+++ b/day2-deck/decks/Metric Explainers - Review.pptx
@@ -1048,9 +1048,9 @@
           <a:p>
             <a:r>
               <a:rPr lang="en-US" dirty="0"/>
-              <a:t>Source: Definitions match the data slides: Qlik - Closed Repair Orders (all customer-pay ROs, by close month), Profit &amp; Loss and Productivity apps, Jan-Sep 2026 vs 2025, same-store, 33 stores. Worked example: Service Manager Roundtable, Nov 15, 2024, slide 21.PLACE: CP Engine, in front of CP ELR (and ahead of the door-rate slides).
+              <a:t>Source: Definitions match the data slides: Qlik - Closed Repair Orders (all customer-pay ROs, by close month), Profit &amp; Loss and Productivity apps, Jan-Sep 2026 vs 2025, same-store, 33 stores. Worked example: Service Manager Roundtable, Nov 15, 2024, slide 21.PLACE: Customer Pay, after CP Hours per RO and ahead of Labor Sale by Pay Type and the CP ELR slides.
 Roundtable worked example removed from the slide (Noah, Oct 21).
-Talk track (Noah, Oct 23): to understand your ELR you have to understand your work mix. A shop that does more repair than maintenance will run a higher ELR, because the repair rate is higher; a shop that is mostly maintenance will run lower. There is nothing wrong with that, but you need to know your mix to know why your ELR is what it is. It matters because raising the repair rate may do less than raising the maintenance rate if most of your work is maintenance. Know your ELR for every labor operation.</a:t>
+Talk track (Noah, Oct 23): to understand your ELR you have to understand your work mix. A shop that does more repair than maintenance will run a higher ELR, because the repair rate is higher; a shop that is mostly maintenance will run lower. There is nothing wrong with that, but you need to know your mix to know why your ELR is what it is. Raising the repair rate may do less than raising the maintenance rate if most of your work is maintenance. Know your ELR for every labor operation.</a:t>
             </a:r>
             <a:endParaRPr lang="en-US" dirty="0"/>
           </a:p>
@@ -9115,7 +9115,7 @@
               <a:buChar char="•"/>
             </a:pPr>
             <a:r>
-              <a:rPr lang="en-US" sz="1500" dirty="0">
+              <a:rPr lang="en-US" sz="1600" dirty="0">
                 <a:solidFill>
                   <a:srgbClr val="1A1A1A"/>
                 </a:solidFill>
@@ -9123,9 +9123,9 @@
                 <a:ea typeface="Inter" pitchFamily="34" charset="-122"/>
                 <a:cs typeface="Inter" pitchFamily="34" charset="-120"/>
               </a:rPr>
-              <a:t>Know your work mix: repair is priced above maintenance, so repair-heavy shops run a higher ELR, maintenance-heavy shops lower. Neither is wrong.</a:t>
-            </a:r>
-            <a:endParaRPr lang="en-US" sz="1500" dirty="0"/>
+              <a:t>Every hour sold is worth the ELR, so it sets the value of the whole shop. Know what you are charging.</a:t>
+            </a:r>
+            <a:endParaRPr lang="en-US" sz="1600" dirty="0"/>
           </a:p>
           <a:p>
             <a:pPr marL="203200" indent="-203200">
@@ -9136,7 +9136,7 @@
               <a:buChar char="•"/>
             </a:pPr>
             <a:r>
-              <a:rPr lang="en-US" sz="1500" dirty="0">
+              <a:rPr lang="en-US" sz="1600" dirty="0">
                 <a:solidFill>
                   <a:srgbClr val="1A1A1A"/>
                 </a:solidFill>
@@ -9144,9 +9144,9 @@
                 <a:ea typeface="Inter" pitchFamily="34" charset="-122"/>
                 <a:cs typeface="Inter" pitchFamily="34" charset="-120"/>
               </a:rPr>
-              <a:t>If most of your work is maintenance, raising the maintenance rate moves ELR more than raising the repair rate.</a:t>
-            </a:r>
-            <a:endParaRPr lang="en-US" sz="1500" dirty="0"/>
+              <a:t>It shows whether pricing, discounting and mix are under control.</a:t>
+            </a:r>
+            <a:endParaRPr lang="en-US" sz="1600" dirty="0"/>
           </a:p>
           <a:p>
             <a:pPr marL="203200" indent="-203200">
@@ -9157,7 +9157,7 @@
               <a:buChar char="•"/>
             </a:pPr>
             <a:r>
-              <a:rPr lang="en-US" sz="1500" dirty="0">
+              <a:rPr lang="en-US" sz="1600" dirty="0">
                 <a:solidFill>
                   <a:srgbClr val="1A1A1A"/>
                 </a:solidFill>
@@ -9165,30 +9165,9 @@
                 <a:ea typeface="Inter" pitchFamily="34" charset="-122"/>
                 <a:cs typeface="Inter" pitchFamily="34" charset="-120"/>
               </a:rPr>
-              <a:t>Know the ELR on every labor operation.</a:t>
-            </a:r>
-            <a:endParaRPr lang="en-US" sz="1500" dirty="0"/>
-          </a:p>
-          <a:p>
-            <a:pPr marL="203200" indent="-203200">
-              <a:spcAft>
-                <a:spcPts val="600"/>
-              </a:spcAft>
-              <a:buSzPct val="100000"/>
-              <a:buChar char="•"/>
-            </a:pPr>
-            <a:r>
-              <a:rPr lang="en-US" sz="1500" dirty="0">
-                <a:solidFill>
-                  <a:srgbClr val="1A1A1A"/>
-                </a:solidFill>
-                <a:latin typeface="Inter" pitchFamily="34" charset="0"/>
-                <a:ea typeface="Inter" pitchFamily="34" charset="-122"/>
-                <a:cs typeface="Inter" pitchFamily="34" charset="-120"/>
-              </a:rPr>
               <a:t>Benchmark: CP ELR at least 70% of door rate.</a:t>
             </a:r>
-            <a:endParaRPr lang="en-US" sz="1500" dirty="0"/>
+            <a:endParaRPr lang="en-US" sz="1600" dirty="0"/>
           </a:p>
         </p:txBody>
       </p:sp>
@@ -9201,7 +9180,7 @@
         <p:spPr>
           <a:xfrm>
             <a:off x="5138928" y="2843784"/>
-            <a:ext cx="45720" cy="908304"/>
+            <a:ext cx="45720" cy="1064924"/>
           </a:xfrm>
           <a:prstGeom prst="rect">
             <a:avLst/>
@@ -9221,7 +9200,7 @@
         <p:spPr>
           <a:xfrm>
             <a:off x="5266944" y="2843784"/>
-            <a:ext cx="2962656" cy="908304"/>
+            <a:ext cx="2962656" cy="1064924"/>
           </a:xfrm>
           <a:prstGeom prst="rect">
             <a:avLst/>
@@ -9245,7 +9224,7 @@
                 <a:ea typeface="Inter" pitchFamily="34" charset="-122"/>
                 <a:cs typeface="Inter" pitchFamily="34" charset="-120"/>
               </a:rPr>
-              <a:t>Door rate</a:t>
+              <a:t>Work mix</a:t>
             </a:r>
             <a:endParaRPr lang="en-US" sz="1400" dirty="0"/>
           </a:p>
@@ -9262,7 +9241,7 @@
                 <a:ea typeface="Inter" pitchFamily="34" charset="-122"/>
                 <a:cs typeface="Inter" pitchFamily="34" charset="-120"/>
               </a:rPr>
-              <a:t>The posted rate, set from a market labor study</a:t>
+              <a:t>Repair is priced above maintenance: repair-heavy shops run a higher ELR, maintenance-heavy lower. Neither is wrong.</a:t>
             </a:r>
             <a:endParaRPr lang="en-US" sz="1400" dirty="0"/>
           </a:p>
@@ -9277,7 +9256,7 @@
         <p:spPr>
           <a:xfrm>
             <a:off x="8394192" y="2843784"/>
-            <a:ext cx="45720" cy="908304"/>
+            <a:ext cx="45720" cy="1064924"/>
           </a:xfrm>
           <a:prstGeom prst="rect">
             <a:avLst/>
@@ -9297,7 +9276,7 @@
         <p:spPr>
           <a:xfrm>
             <a:off x="8522208" y="2843784"/>
-            <a:ext cx="2962656" cy="908304"/>
+            <a:ext cx="2962656" cy="1064924"/>
           </a:xfrm>
           <a:prstGeom prst="rect">
             <a:avLst/>
@@ -9338,7 +9317,7 @@
                 <a:ea typeface="Inter" pitchFamily="34" charset="-122"/>
                 <a:cs typeface="Inter" pitchFamily="34" charset="-120"/>
               </a:rPr>
-              <a:t>Menus and loss leaders below door rate pull ELR down</a:t>
+              <a:t>If most of your hours are maintenance, the maintenance rate moves ELR more than the repair rate</a:t>
             </a:r>
             <a:endParaRPr lang="en-US" sz="1400" dirty="0"/>
           </a:p>
@@ -9352,8 +9331,8 @@
         </p:nvSpPr>
         <p:spPr>
           <a:xfrm>
-            <a:off x="5138928" y="3861816"/>
-            <a:ext cx="45720" cy="908304"/>
+            <a:off x="5138928" y="4018436"/>
+            <a:ext cx="45720" cy="829994"/>
           </a:xfrm>
           <a:prstGeom prst="rect">
             <a:avLst/>
@@ -9372,8 +9351,8 @@
         </p:nvSpPr>
         <p:spPr>
           <a:xfrm>
-            <a:off x="5266944" y="3861816"/>
-            <a:ext cx="2962656" cy="908304"/>
+            <a:off x="5266944" y="4018436"/>
+            <a:ext cx="2962656" cy="829994"/>
           </a:xfrm>
           <a:prstGeom prst="rect">
             <a:avLst/>
@@ -9397,7 +9376,7 @@
                 <a:ea typeface="Inter" pitchFamily="34" charset="-122"/>
                 <a:cs typeface="Inter" pitchFamily="34" charset="-120"/>
               </a:rPr>
-              <a:t>Work mix</a:t>
+              <a:t>ELR by labor operation</a:t>
             </a:r>
             <a:endParaRPr lang="en-US" sz="1400" dirty="0"/>
           </a:p>
@@ -9414,7 +9393,7 @@
                 <a:ea typeface="Inter" pitchFamily="34" charset="-122"/>
                 <a:cs typeface="Inter" pitchFamily="34" charset="-120"/>
               </a:rPr>
-              <a:t>Repair work raises ELR; quick maintenance lowers it</a:t>
+              <a:t>Know what every op code collects per hour, not just the store total</a:t>
             </a:r>
             <a:endParaRPr lang="en-US" sz="1400" dirty="0"/>
           </a:p>
@@ -9428,8 +9407,8 @@
         </p:nvSpPr>
         <p:spPr>
           <a:xfrm>
-            <a:off x="8394192" y="3861816"/>
-            <a:ext cx="45720" cy="908304"/>
+            <a:off x="8394192" y="4018436"/>
+            <a:ext cx="45720" cy="829994"/>
           </a:xfrm>
           <a:prstGeom prst="rect">
             <a:avLst/>
@@ -9448,8 +9427,8 @@
         </p:nvSpPr>
         <p:spPr>
           <a:xfrm>
-            <a:off x="8522208" y="3861816"/>
-            <a:ext cx="2962656" cy="908304"/>
+            <a:off x="8522208" y="4018436"/>
+            <a:ext cx="2962656" cy="829994"/>
           </a:xfrm>
           <a:prstGeom prst="rect">
             <a:avLst/>
@@ -9473,7 +9452,7 @@
                 <a:ea typeface="Inter" pitchFamily="34" charset="-122"/>
                 <a:cs typeface="Inter" pitchFamily="34" charset="-120"/>
               </a:rPr>
-              <a:t>Discounts</a:t>
+              <a:t>Door rate and labor grid</a:t>
             </a:r>
             <a:endParaRPr lang="en-US" sz="1400" dirty="0"/>
           </a:p>
@@ -9490,7 +9469,7 @@
                 <a:ea typeface="Inter" pitchFamily="34" charset="-122"/>
                 <a:cs typeface="Inter" pitchFamily="34" charset="-120"/>
               </a:rPr>
-              <a:t>Every discount lowers ELR. Run them through ADC so we can see them.</a:t>
+              <a:t>Posted rate from a market labor study; a grid prices longer repair jobs higher</a:t>
             </a:r>
             <a:endParaRPr lang="en-US" sz="1400" dirty="0"/>
           </a:p>
@@ -9504,8 +9483,8 @@
         </p:nvSpPr>
         <p:spPr>
           <a:xfrm>
-            <a:off x="5138928" y="4879848"/>
-            <a:ext cx="45720" cy="908304"/>
+            <a:off x="5138928" y="4958158"/>
+            <a:ext cx="45720" cy="829994"/>
           </a:xfrm>
           <a:prstGeom prst="rect">
             <a:avLst/>
@@ -9524,8 +9503,8 @@
         </p:nvSpPr>
         <p:spPr>
           <a:xfrm>
-            <a:off x="5266944" y="4879848"/>
-            <a:ext cx="2962656" cy="908304"/>
+            <a:off x="5266944" y="4958158"/>
+            <a:ext cx="2962656" cy="829994"/>
           </a:xfrm>
           <a:prstGeom prst="rect">
             <a:avLst/>
@@ -9549,7 +9528,7 @@
                 <a:ea typeface="Inter" pitchFamily="34" charset="-122"/>
                 <a:cs typeface="Inter" pitchFamily="34" charset="-120"/>
               </a:rPr>
-              <a:t>Labor grid</a:t>
+              <a:t>Discounts</a:t>
             </a:r>
             <a:endParaRPr lang="en-US" sz="1400" dirty="0"/>
           </a:p>
@@ -9566,7 +9545,7 @@
                 <a:ea typeface="Inter" pitchFamily="34" charset="-122"/>
                 <a:cs typeface="Inter" pitchFamily="34" charset="-120"/>
               </a:rPr>
-              <a:t>Prices longer jobs differently; should lift ELR on repair work</a:t>
+              <a:t>Every discount lowers ELR. Run them through ADC so we can see them.</a:t>
             </a:r>
             <a:endParaRPr lang="en-US" sz="1400" dirty="0"/>
           </a:p>
@@ -9580,8 +9559,8 @@
         </p:nvSpPr>
         <p:spPr>
           <a:xfrm>
-            <a:off x="8394192" y="4879848"/>
-            <a:ext cx="45720" cy="908304"/>
+            <a:off x="8394192" y="4958158"/>
+            <a:ext cx="45720" cy="829994"/>
           </a:xfrm>
           <a:prstGeom prst="rect">
             <a:avLst/>
@@ -9600,8 +9579,8 @@
         </p:nvSpPr>
         <p:spPr>
           <a:xfrm>
-            <a:off x="8522208" y="4879848"/>
-            <a:ext cx="2962656" cy="908304"/>
+            <a:off x="8522208" y="4958158"/>
+            <a:ext cx="2962656" cy="829994"/>
           </a:xfrm>
           <a:prstGeom prst="rect">
             <a:avLst/>

--- a/day2-deck/decks/Metric Explainers - Review.pptx
+++ b/day2-deck/decks/Metric Explainers - Review.pptx
@@ -1316,7 +1316,8 @@
             <a:r>
               <a:rPr lang="en-US" dirty="0"/>
               <a:t>Source: Definitions match the data slides: Qlik - Closed Repair Orders (all customer-pay ROs, by close month), Profit &amp; Loss and Productivity apps, Jan-Sep 2026 vs 2025, same-store, 33 stores. Worked example: Service Manager Roundtable, Nov 15, 2024, slide 21.PLACE: CP Engine, in front of CP Labor Gross Profit %.
-Example (Noah, Oct 23: replaces the Roundtable table): one CP hour at the group's Jan-Sep 2026 averages, $162.42 ELR, $31.21 tech cost per hour sold, $131.21 kept = 80.8%; rounded on the slide.</a:t>
+Example (Noah, Oct 23: replaces the Roundtable table): one CP hour at the group's Jan-Sep 2026 averages, $162.42 ELR, $31.21 tech cost per hour sold, $131.21 kept = 80.8%; rounded on the slide.
+Oct 23 (Noah): The Goldilocks Margin talking point is folded into this slide (it repeated it): no Goldilocks or Roundtable wording; its ask (match the tech to the job, not squeeze tech pay) is the first Why It Matters point.</a:t>
             </a:r>
             <a:endParaRPr lang="en-US" dirty="0"/>
           </a:p>
@@ -9452,7 +9453,7 @@
                 <a:ea typeface="Inter" pitchFamily="34" charset="-122"/>
                 <a:cs typeface="Inter" pitchFamily="34" charset="-120"/>
               </a:rPr>
-              <a:t>Door rate and labor grid</a:t>
+              <a:t>Door rate and repair pricing</a:t>
             </a:r>
             <a:endParaRPr lang="en-US" sz="1400" dirty="0"/>
           </a:p>
@@ -9469,7 +9470,7 @@
                 <a:ea typeface="Inter" pitchFamily="34" charset="-122"/>
                 <a:cs typeface="Inter" pitchFamily="34" charset="-120"/>
               </a:rPr>
-              <a:t>Posted rate from a market labor study; a grid prices longer repair jobs higher</a:t>
+              <a:t>Posted rate from a market labor study, and how repair jobs are priced against it</a:t>
             </a:r>
             <a:endParaRPr lang="en-US" sz="1400" dirty="0"/>
           </a:p>
@@ -10347,7 +10348,7 @@
                 <a:ea typeface="Inter" pitchFamily="34" charset="-122"/>
                 <a:cs typeface="Inter" pitchFamily="34" charset="-120"/>
               </a:rPr>
-              <a:t>Sell more labor and more parts come with it: parts per RO rose $9 to $238 alongside it.</a:t>
+              <a:t>With additional labor sales come additional parts sales.</a:t>
             </a:r>
             <a:endParaRPr lang="en-US" sz="1500" dirty="0"/>
           </a:p>
@@ -10503,7 +10504,7 @@
                 <a:ea typeface="Inter" pitchFamily="34" charset="-122"/>
                 <a:cs typeface="Inter" pitchFamily="34" charset="-120"/>
               </a:rPr>
-              <a:t>Effective labor rate</a:t>
+              <a:t>Advisor presentation</a:t>
             </a:r>
             <a:endParaRPr lang="en-US" sz="1400" dirty="0"/>
           </a:p>
@@ -10520,7 +10521,7 @@
                 <a:ea typeface="Inter" pitchFamily="34" charset="-122"/>
                 <a:cs typeface="Inter" pitchFamily="34" charset="-120"/>
               </a:rPr>
-              <a:t>Pricing, discounts and mix</a:t>
+              <a:t>Every customer, every time, from an accurate menu</a:t>
             </a:r>
             <a:endParaRPr lang="en-US" sz="1400" dirty="0"/>
           </a:p>
@@ -10579,7 +10580,7 @@
                 <a:ea typeface="Inter" pitchFamily="34" charset="-122"/>
                 <a:cs typeface="Inter" pitchFamily="34" charset="-120"/>
               </a:rPr>
-              <a:t>Advisor presentation</a:t>
+              <a:t>Pay plans</a:t>
             </a:r>
             <a:endParaRPr lang="en-US" sz="1400" dirty="0"/>
           </a:p>
@@ -10596,7 +10597,7 @@
                 <a:ea typeface="Inter" pitchFamily="34" charset="-122"/>
                 <a:cs typeface="Inter" pitchFamily="34" charset="-120"/>
               </a:rPr>
-              <a:t>Every customer, every time, from an accurate menu</a:t>
+              <a:t>Pay advisors on CP labor or gross per RO</a:t>
             </a:r>
             <a:endParaRPr lang="en-US" sz="1400" dirty="0"/>
           </a:p>
@@ -10655,7 +10656,7 @@
                 <a:ea typeface="Inter" pitchFamily="34" charset="-122"/>
                 <a:cs typeface="Inter" pitchFamily="34" charset="-120"/>
               </a:rPr>
-              <a:t>Pay plans</a:t>
+              <a:t>Tracking and accountability</a:t>
             </a:r>
             <a:endParaRPr lang="en-US" sz="1400" dirty="0"/>
           </a:p>
@@ -10672,7 +10673,7 @@
                 <a:ea typeface="Inter" pitchFamily="34" charset="-122"/>
                 <a:cs typeface="Inter" pitchFamily="34" charset="-120"/>
               </a:rPr>
-              <a:t>Pay advisors on CP labor or gross per RO</a:t>
+              <a:t>What gets tracked gets improved: accountability through visibility</a:t>
             </a:r>
             <a:endParaRPr lang="en-US" sz="1400" dirty="0"/>
           </a:p>
@@ -12417,7 +12418,7 @@
                 <a:ea typeface="Inter" pitchFamily="34" charset="-122"/>
                 <a:cs typeface="Inter" pitchFamily="34" charset="-120"/>
               </a:rPr>
-              <a:t>Goldilocks: the Roundtable target is 78% to 80%. Not too high, not too low.</a:t>
+              <a:t>The target range is 78% to 80%: not too high, not too low. Hold it by matching the tech to the job, not by squeezing tech pay.</a:t>
             </a:r>
             <a:endParaRPr lang="en-US" sz="1500" dirty="0"/>
           </a:p>

--- a/day2-deck/decks/Metric Explainers - Review.pptx
+++ b/day2-deck/decks/Metric Explainers - Review.pptx
@@ -3024,7 +3024,7 @@
                 <a:ea typeface="Inter" pitchFamily="34" charset="-122"/>
                 <a:cs typeface="Inter" pitchFamily="34" charset="-120"/>
               </a:rPr>
-              <a:t>What Is an Op Code Closing %?</a:t>
+              <a:t>Tracked Opcode Closing %</a:t>
             </a:r>
             <a:endParaRPr lang="en-US" sz="2800" dirty="0"/>
           </a:p>
@@ -3700,7 +3700,7 @@
                 <a:ea typeface="Inter" pitchFamily="34" charset="-122"/>
                 <a:cs typeface="Inter" pitchFamily="34" charset="-120"/>
               </a:rPr>
-              <a:t>These are the services every car eventually needs.</a:t>
+              <a:t>These cars are already in our service drives: the rate shows how well we use the opportunities we already have.</a:t>
             </a:r>
             <a:endParaRPr lang="en-US" sz="1500" dirty="0"/>
           </a:p>
@@ -3721,7 +3721,7 @@
                 <a:ea typeface="Inter" pitchFamily="34" charset="-122"/>
                 <a:cs typeface="Inter" pitchFamily="34" charset="-120"/>
               </a:rPr>
-              <a:t>The rate shows whether the inspection and the menu are happening on every car.</a:t>
+              <a:t>Like labor dollars per RO, it is a direct reflection of the job we are doing on every car.</a:t>
             </a:r>
             <a:endParaRPr lang="en-US" sz="1500" dirty="0"/>
           </a:p>
@@ -3742,7 +3742,7 @@
                 <a:ea typeface="Inter" pitchFamily="34" charset="-122"/>
                 <a:cs typeface="Inter" pitchFamily="34" charset="-120"/>
               </a:rPr>
-              <a:t>Each point is worth thousands of jobs across the group.</a:t>
+              <a:t>Each point is worth thousands of services across the group.</a:t>
             </a:r>
             <a:endParaRPr lang="en-US" sz="1500" dirty="0"/>
           </a:p>
@@ -3757,7 +3757,7 @@
         <p:spPr>
           <a:xfrm>
             <a:off x="5138928" y="3410712"/>
-            <a:ext cx="45720" cy="1133856"/>
+            <a:ext cx="45720" cy="948641"/>
           </a:xfrm>
           <a:prstGeom prst="rect">
             <a:avLst/>
@@ -3777,7 +3777,7 @@
         <p:spPr>
           <a:xfrm>
             <a:off x="5266944" y="3410712"/>
-            <a:ext cx="2962656" cy="1133856"/>
+            <a:ext cx="2962656" cy="948641"/>
           </a:xfrm>
           <a:prstGeom prst="rect">
             <a:avLst/>
@@ -3833,7 +3833,7 @@
         <p:spPr>
           <a:xfrm>
             <a:off x="8394192" y="3410712"/>
-            <a:ext cx="45720" cy="1133856"/>
+            <a:ext cx="45720" cy="948641"/>
           </a:xfrm>
           <a:prstGeom prst="rect">
             <a:avLst/>
@@ -3853,7 +3853,7 @@
         <p:spPr>
           <a:xfrm>
             <a:off x="8522208" y="3410712"/>
-            <a:ext cx="2962656" cy="1133856"/>
+            <a:ext cx="2962656" cy="948641"/>
           </a:xfrm>
           <a:prstGeom prst="rect">
             <a:avLst/>
@@ -3908,8 +3908,8 @@
         </p:nvSpPr>
         <p:spPr>
           <a:xfrm>
-            <a:off x="5138928" y="4654296"/>
-            <a:ext cx="45720" cy="1133856"/>
+            <a:off x="5138928" y="4469081"/>
+            <a:ext cx="45720" cy="1319071"/>
           </a:xfrm>
           <a:prstGeom prst="rect">
             <a:avLst/>
@@ -3928,8 +3928,8 @@
         </p:nvSpPr>
         <p:spPr>
           <a:xfrm>
-            <a:off x="5266944" y="4654296"/>
-            <a:ext cx="2962656" cy="1133856"/>
+            <a:off x="5266944" y="4469081"/>
+            <a:ext cx="2962656" cy="1319071"/>
           </a:xfrm>
           <a:prstGeom prst="rect">
             <a:avLst/>
@@ -3953,7 +3953,7 @@
                 <a:ea typeface="Inter" pitchFamily="34" charset="-122"/>
                 <a:cs typeface="Inter" pitchFamily="34" charset="-120"/>
               </a:rPr>
-              <a:t>Advisor presentation</a:t>
+              <a:t>Consistency</a:t>
             </a:r>
             <a:endParaRPr lang="en-US" sz="1400" dirty="0"/>
           </a:p>
@@ -3970,7 +3970,7 @@
                 <a:ea typeface="Inter" pitchFamily="34" charset="-122"/>
                 <a:cs typeface="Inter" pitchFamily="34" charset="-120"/>
               </a:rPr>
-              <a:t>Present it, price it, ask for it</a:t>
+              <a:t>Present it every visit, no exceptions. Say it once and skip it the next time, and we lose credibility</a:t>
             </a:r>
             <a:endParaRPr lang="en-US" sz="1400" dirty="0"/>
           </a:p>
@@ -3984,8 +3984,8 @@
         </p:nvSpPr>
         <p:spPr>
           <a:xfrm>
-            <a:off x="8394192" y="4654296"/>
-            <a:ext cx="45720" cy="1133856"/>
+            <a:off x="8394192" y="4469081"/>
+            <a:ext cx="45720" cy="1319071"/>
           </a:xfrm>
           <a:prstGeom prst="rect">
             <a:avLst/>
@@ -4004,8 +4004,8 @@
         </p:nvSpPr>
         <p:spPr>
           <a:xfrm>
-            <a:off x="8522208" y="4654296"/>
-            <a:ext cx="2962656" cy="1133856"/>
+            <a:off x="8522208" y="4469081"/>
+            <a:ext cx="2962656" cy="1319071"/>
           </a:xfrm>
           <a:prstGeom prst="rect">
             <a:avLst/>
@@ -4831,7 +4831,7 @@
                 <a:ea typeface="Inter" pitchFamily="34" charset="-122"/>
                 <a:cs typeface="Inter" pitchFamily="34" charset="-120"/>
               </a:rPr>
-              <a:t>The tech, bay and lift are already here; an unflagged hour can't be sold tomorrow.</a:t>
+              <a:t>A service department is a production facility. What we produce is hours.</a:t>
             </a:r>
             <a:endParaRPr lang="en-US" sz="1500" dirty="0"/>
           </a:p>
@@ -4852,7 +4852,7 @@
                 <a:ea typeface="Inter" pitchFamily="34" charset="-122"/>
                 <a:cs typeface="Inter" pitchFamily="34" charset="-120"/>
               </a:rPr>
-              <a:t>Flat-rate techs earn more as they produce more.</a:t>
+              <a:t>Any production floor knows what it made today and what each person made. So should we.</a:t>
             </a:r>
             <a:endParaRPr lang="en-US" sz="1500" dirty="0"/>
           </a:p>
@@ -4873,7 +4873,7 @@
                 <a:ea typeface="Inter" pitchFamily="34" charset="-122"/>
                 <a:cs typeface="Inter" pitchFamily="34" charset="-120"/>
               </a:rPr>
-              <a:t>It shows where workflow, not effort, is the problem.</a:t>
+              <a:t>It takes someone actively managing production, every day.</a:t>
             </a:r>
             <a:endParaRPr lang="en-US" sz="1500" dirty="0"/>
           </a:p>
@@ -7090,7 +7090,7 @@
                 <a:ea typeface="Inter" pitchFamily="34" charset="-122"/>
                 <a:cs typeface="Inter" pitchFamily="34" charset="-120"/>
               </a:rPr>
-              <a:t>Parts sold on a service RO are parts gross, not service gross, even when an advisor sells them.</a:t>
+              <a:t>Parts sold on a service RO are parts gross, not service gross.</a:t>
             </a:r>
             <a:endParaRPr lang="en-US" sz="1500" dirty="0"/>
           </a:p>
@@ -7126,7 +7126,7 @@
         <p:spPr>
           <a:xfrm>
             <a:off x="5138928" y="3410712"/>
-            <a:ext cx="45720" cy="1420837"/>
+            <a:ext cx="45720" cy="1262503"/>
           </a:xfrm>
           <a:prstGeom prst="rect">
             <a:avLst/>
@@ -7146,7 +7146,7 @@
         <p:spPr>
           <a:xfrm>
             <a:off x="5266944" y="3410712"/>
-            <a:ext cx="2962656" cy="1420837"/>
+            <a:ext cx="2962656" cy="1262503"/>
           </a:xfrm>
           <a:prstGeom prst="rect">
             <a:avLst/>
@@ -7187,7 +7187,7 @@
                 <a:ea typeface="Inter" pitchFamily="34" charset="-122"/>
                 <a:cs typeface="Inter" pitchFamily="34" charset="-120"/>
               </a:rPr>
-              <a:t>Hours sold times the rate collected (ELR)</a:t>
+              <a:t>A written process, followed on every car, every time, tracked and managed daily</a:t>
             </a:r>
             <a:endParaRPr lang="en-US" sz="1400" dirty="0"/>
           </a:p>
@@ -7202,7 +7202,7 @@
         <p:spPr>
           <a:xfrm>
             <a:off x="8394192" y="3410712"/>
-            <a:ext cx="45720" cy="1420837"/>
+            <a:ext cx="45720" cy="1262503"/>
           </a:xfrm>
           <a:prstGeom prst="rect">
             <a:avLst/>
@@ -7222,7 +7222,7 @@
         <p:spPr>
           <a:xfrm>
             <a:off x="8522208" y="3410712"/>
-            <a:ext cx="2962656" cy="1420837"/>
+            <a:ext cx="2962656" cy="1262503"/>
           </a:xfrm>
           <a:prstGeom prst="rect">
             <a:avLst/>
@@ -7263,7 +7263,7 @@
                 <a:ea typeface="Inter" pitchFamily="34" charset="-122"/>
                 <a:cs typeface="Inter" pitchFamily="34" charset="-120"/>
               </a:rPr>
-              <a:t>Pay on the RO. Hourly pay, guarantees and bonuses paid off the RO are unapplied labor: not on the RO, but they lower gross</a:t>
+              <a:t>Right work, right tech. Hourly pay, guarantees and bonuses paid off the RO are unapplied labor and lower gross</a:t>
             </a:r>
             <a:endParaRPr lang="en-US" sz="1400" dirty="0"/>
           </a:p>
@@ -7277,8 +7277,8 @@
         </p:nvSpPr>
         <p:spPr>
           <a:xfrm>
-            <a:off x="5138928" y="4941277"/>
-            <a:ext cx="45720" cy="846875"/>
+            <a:off x="5138928" y="4782943"/>
+            <a:ext cx="45720" cy="1005209"/>
           </a:xfrm>
           <a:prstGeom prst="rect">
             <a:avLst/>
@@ -7297,8 +7297,8 @@
         </p:nvSpPr>
         <p:spPr>
           <a:xfrm>
-            <a:off x="5266944" y="4941277"/>
-            <a:ext cx="2962656" cy="846875"/>
+            <a:off x="5266944" y="4782943"/>
+            <a:ext cx="2962656" cy="1005209"/>
           </a:xfrm>
           <a:prstGeom prst="rect">
             <a:avLst/>
@@ -7339,7 +7339,7 @@
                 <a:ea typeface="Inter" pitchFamily="34" charset="-122"/>
                 <a:cs typeface="Inter" pitchFamily="34" charset="-120"/>
               </a:rPr>
-              <a:t>Customer pay, warranty and internal parts sold through service</a:t>
+              <a:t>Every dollar of labor sold brings more parts gross with it</a:t>
             </a:r>
             <a:endParaRPr lang="en-US" sz="1400" dirty="0"/>
           </a:p>
@@ -7353,8 +7353,8 @@
         </p:nvSpPr>
         <p:spPr>
           <a:xfrm>
-            <a:off x="8394192" y="4941277"/>
-            <a:ext cx="45720" cy="846875"/>
+            <a:off x="8394192" y="4782943"/>
+            <a:ext cx="45720" cy="1005209"/>
           </a:xfrm>
           <a:prstGeom prst="rect">
             <a:avLst/>
@@ -7373,8 +7373,8 @@
         </p:nvSpPr>
         <p:spPr>
           <a:xfrm>
-            <a:off x="8522208" y="4941277"/>
-            <a:ext cx="2962656" cy="846875"/>
+            <a:off x="8522208" y="4782943"/>
+            <a:ext cx="2962656" cy="1005209"/>
           </a:xfrm>
           <a:prstGeom prst="rect">
             <a:avLst/>
@@ -7415,7 +7415,7 @@
                 <a:ea typeface="Inter" pitchFamily="34" charset="-122"/>
                 <a:cs typeface="Inter" pitchFamily="34" charset="-120"/>
               </a:rPr>
-              <a:t>Counter retail, wholesale, tires and oil</a:t>
+              <a:t>Retail, wholesale, tires and oil. Wholesale has to make sense: its gross must cover what it costs to run</a:t>
             </a:r>
             <a:endParaRPr lang="en-US" sz="1400" dirty="0"/>
           </a:p>
@@ -10327,7 +10327,7 @@
                 <a:ea typeface="Inter" pitchFamily="34" charset="-122"/>
                 <a:cs typeface="Inter" pitchFamily="34" charset="-120"/>
               </a:rPr>
-              <a:t>Total dollars per RO matters more than any single measure. It's what we sell.</a:t>
+              <a:t>Focus on CP labor dollars per RO and every other metric rises with it.</a:t>
             </a:r>
             <a:endParaRPr lang="en-US" sz="1500" dirty="0"/>
           </a:p>
@@ -12418,7 +12418,7 @@
                 <a:ea typeface="Inter" pitchFamily="34" charset="-122"/>
                 <a:cs typeface="Inter" pitchFamily="34" charset="-120"/>
               </a:rPr>
-              <a:t>The target range is 78% to 80%: not too high, not too low. Hold it by matching the tech to the job, not by squeezing tech pay.</a:t>
+              <a:t>The target range is 78% to 82%: luxury stores run toward the top, domestic stores toward the bottom. Hold it by matching the tech to the job, not by squeezing tech pay.</a:t>
             </a:r>
             <a:endParaRPr lang="en-US" sz="1500" dirty="0"/>
           </a:p>
@@ -12899,7 +12899,7 @@
                 <a:ea typeface="Inter" pitchFamily="34" charset="-122"/>
                 <a:cs typeface="Inter" pitchFamily="34" charset="-120"/>
               </a:rPr>
-              <a:t>Group: 80.8% CP labor gross profit, down 0.1 pts and just above the 78-80% target.</a:t>
+              <a:t>Group: 80.8% CP labor gross profit, down 0.1 pts and inside the 78-82% target range.</a:t>
             </a:r>
             <a:endParaRPr lang="en-US" sz="1600" dirty="0"/>
           </a:p>

--- a/day2-deck/decks/Metric Explainers - Review.pptx
+++ b/day2-deck/decks/Metric Explainers - Review.pptx
@@ -1405,7 +1405,8 @@
           <a:p>
             <a:r>
               <a:rPr lang="en-US" dirty="0"/>
-              <a:t>Source: Definitions match the data slides: Qlik - Closed Repair Orders (all customer-pay ROs, by close month), Profit &amp; Loss and Productivity apps, Jan-Sep 2026 vs 2025, same-store, 33 stores. Worked example: Service Manager Roundtable, Nov 15, 2024, slide 21.PLACE: CP Engine, in front of CP Parts Gross Profit %.</a:t>
+              <a:t>Source: Definitions match the data slides: Qlik - Closed Repair Orders (all customer-pay ROs, by close month), Profit &amp; Loss and Productivity apps, Jan-Sep 2026 vs 2025, same-store, 33 stores. Worked example: Service Manager Roundtable, Nov 15, 2024, slide 21.PLACE: CP Engine, in front of CP Parts Gross Profit %.
+Why understand your parts pricing matrix (Noah, Oct 26): (1) Maximize gross profit: price parts to maximize profitability; find gross without more volume. (2) Consistent pricing: every customer charged the same for the same part; no incorrect prices from bad setups or manual overrides. (3) Stay competitive: avoid markups that make repairs too expensive; balance profit with price on higher-cost parts. (4) Check the matrix is applied: parts actually sell at matrix prices; find parts, labor types or transactions that bypass it. (5) Warranty reimbursement: customer-pay parts pricing drives the warranty parts reimbursement rate, so good pricing supports a higher rate and more warranty gross. (6) Control the strategy: know how your matrix is configured and review it against your gross profit goals. Takeaway: the matrix is one of the most effective tools for improving profit without more volume.</a:t>
             </a:r>
             <a:endParaRPr lang="en-US" dirty="0"/>
           </a:p>
@@ -2742,7 +2743,7 @@
                 <a:ea typeface="Inter" pitchFamily="34" charset="-122"/>
                 <a:cs typeface="Inter" pitchFamily="34" charset="-120"/>
               </a:rPr>
-              <a:t>Express service</a:t>
+              <a:t>Quick maintenance</a:t>
             </a:r>
             <a:endParaRPr lang="en-US" sz="1400" dirty="0"/>
           </a:p>
@@ -2759,7 +2760,7 @@
                 <a:ea typeface="Inter" pitchFamily="34" charset="-122"/>
                 <a:cs typeface="Inter" pitchFamily="34" charset="-120"/>
               </a:rPr>
-              <a:t>Fast, easy maintenance keeps customers coming back</a:t>
+              <a:t>Maintenance available on demand, done quickly and efficiently, keeps customers coming back</a:t>
             </a:r>
             <a:endParaRPr lang="en-US" sz="1400" dirty="0"/>
           </a:p>
@@ -8120,7 +8121,7 @@
                 <a:ea typeface="Inter" pitchFamily="34" charset="-122"/>
                 <a:cs typeface="Inter" pitchFamily="34" charset="-120"/>
               </a:rPr>
-              <a:t>It cannot be manipulated: it is work the customer agreed to.</a:t>
+              <a:t>It cannot be manipulated: it is the work we sell.</a:t>
             </a:r>
             <a:endParaRPr lang="en-US" sz="1500" dirty="0"/>
           </a:p>
@@ -8141,7 +8142,7 @@
                 <a:ea typeface="Inter" pitchFamily="34" charset="-122"/>
                 <a:cs typeface="Inter" pitchFamily="34" charset="-120"/>
               </a:rPr>
-              <a:t>It is the main lever while car count is flat.</a:t>
+              <a:t>It shows where the lift came from: labor $ per RO up from $200 to $250 with hours flat is a price increase, not more work.</a:t>
             </a:r>
             <a:endParaRPr lang="en-US" sz="1500" dirty="0"/>
           </a:p>
@@ -9124,7 +9125,7 @@
                 <a:ea typeface="Inter" pitchFamily="34" charset="-122"/>
                 <a:cs typeface="Inter" pitchFamily="34" charset="-120"/>
               </a:rPr>
-              <a:t>Every hour sold is worth the ELR, so it sets the value of the whole shop. Know what you are charging.</a:t>
+              <a:t>It is what the shop actually collects per hour, and it shows whether a pricing change did what it was meant to do.</a:t>
             </a:r>
             <a:endParaRPr lang="en-US" sz="1600" dirty="0"/>
           </a:p>
@@ -9145,7 +9146,7 @@
                 <a:ea typeface="Inter" pitchFamily="34" charset="-122"/>
                 <a:cs typeface="Inter" pitchFamily="34" charset="-120"/>
               </a:rPr>
-              <a:t>It shows whether pricing, discounting and mix are under control.</a:t>
+              <a:t>Look past the total: by work type and by op code there can be room to raise a rate, or a reason to lower one.</a:t>
             </a:r>
             <a:endParaRPr lang="en-US" sz="1600" dirty="0"/>
           </a:p>
@@ -10428,7 +10429,7 @@
                 <a:ea typeface="Inter" pitchFamily="34" charset="-122"/>
                 <a:cs typeface="Inter" pitchFamily="34" charset="-120"/>
               </a:rPr>
-              <a:t>Hours per RO</a:t>
+              <a:t>Written process</a:t>
             </a:r>
             <a:endParaRPr lang="en-US" sz="1400" dirty="0"/>
           </a:p>
@@ -10445,7 +10446,7 @@
                 <a:ea typeface="Inter" pitchFamily="34" charset="-122"/>
                 <a:cs typeface="Inter" pitchFamily="34" charset="-120"/>
               </a:rPr>
-              <a:t>Every lever on the hours slide: MPI, menu, Road to the Sale</a:t>
+              <a:t>Follow it on every car: a multi-point inspection every time</a:t>
             </a:r>
             <a:endParaRPr lang="en-US" sz="1400" dirty="0"/>
           </a:p>
@@ -10504,7 +10505,7 @@
                 <a:ea typeface="Inter" pitchFamily="34" charset="-122"/>
                 <a:cs typeface="Inter" pitchFamily="34" charset="-120"/>
               </a:rPr>
-              <a:t>Advisor presentation</a:t>
+              <a:t>Service menu</a:t>
             </a:r>
             <a:endParaRPr lang="en-US" sz="1400" dirty="0"/>
           </a:p>
@@ -10521,7 +10522,7 @@
                 <a:ea typeface="Inter" pitchFamily="34" charset="-122"/>
                 <a:cs typeface="Inter" pitchFamily="34" charset="-120"/>
               </a:rPr>
-              <a:t>Every customer, every time, from an accurate menu</a:t>
+              <a:t>Present the menu and its recommendations, consistently, every customer</a:t>
             </a:r>
             <a:endParaRPr lang="en-US" sz="1400" dirty="0"/>
           </a:p>
@@ -10597,7 +10598,7 @@
                 <a:ea typeface="Inter" pitchFamily="34" charset="-122"/>
                 <a:cs typeface="Inter" pitchFamily="34" charset="-120"/>
               </a:rPr>
-              <a:t>Pay advisors on CP labor or gross per RO</a:t>
+              <a:t>Reward advisors for CP labor sales and gross: what they control, and a true measure of their performance</a:t>
             </a:r>
             <a:endParaRPr lang="en-US" sz="1400" dirty="0"/>
           </a:p>
@@ -12418,7 +12419,7 @@
                 <a:ea typeface="Inter" pitchFamily="34" charset="-122"/>
                 <a:cs typeface="Inter" pitchFamily="34" charset="-120"/>
               </a:rPr>
-              <a:t>The target range is 78% to 82%: luxury stores run toward the top, domestic stores toward the bottom. Hold it by matching the tech to the job, not by squeezing tech pay.</a:t>
+              <a:t>The target range is 78% to 80%: not too high, not too low. Hold it by matching the tech to the job, not by squeezing tech pay.</a:t>
             </a:r>
             <a:endParaRPr lang="en-US" sz="1500" dirty="0"/>
           </a:p>
@@ -12747,7 +12748,7 @@
                 <a:ea typeface="Inter" pitchFamily="34" charset="-122"/>
                 <a:cs typeface="Inter" pitchFamily="34" charset="-120"/>
               </a:rPr>
-              <a:t>Work mix</a:t>
+              <a:t>Type of work</a:t>
             </a:r>
             <a:endParaRPr lang="en-US" sz="1400" dirty="0"/>
           </a:p>
@@ -12764,7 +12765,7 @@
                 <a:ea typeface="Inter" pitchFamily="34" charset="-122"/>
                 <a:cs typeface="Inter" pitchFamily="34" charset="-120"/>
               </a:rPr>
-              <a:t>Quick maintenance runs lower margin than repair</a:t>
+              <a:t>Maintenance runs a lower margin than repair at full door rate</a:t>
             </a:r>
             <a:endParaRPr lang="en-US" sz="1400" dirty="0"/>
           </a:p>
@@ -12823,7 +12824,7 @@
                 <a:ea typeface="Inter" pitchFamily="34" charset="-122"/>
                 <a:cs typeface="Inter" pitchFamily="34" charset="-120"/>
               </a:rPr>
-              <a:t>Comebacks</a:t>
+              <a:t>Low-rate work</a:t>
             </a:r>
             <a:endParaRPr lang="en-US" sz="1400" dirty="0"/>
           </a:p>
@@ -12840,7 +12841,7 @@
                 <a:ea typeface="Inter" pitchFamily="34" charset="-122"/>
                 <a:cs typeface="Inter" pitchFamily="34" charset="-120"/>
               </a:rPr>
-              <a:t>Paying twice for the same job</a:t>
+              <a:t>Internal detail and other low-dollar-per-hour work pull the margin down</a:t>
             </a:r>
             <a:endParaRPr lang="en-US" sz="1400" dirty="0"/>
           </a:p>
@@ -12854,6 +12855,82 @@
         </p:nvSpPr>
         <p:spPr>
           <a:xfrm>
+            <a:off x="9479280" y="4654296"/>
+            <a:ext cx="45720" cy="1133856"/>
+          </a:xfrm>
+          <a:prstGeom prst="rect">
+            <a:avLst/>
+          </a:prstGeom>
+          <a:solidFill>
+            <a:srgbClr val="2587C5"/>
+          </a:solidFill>
+          <a:ln/>
+        </p:spPr>
+      </p:sp>
+      <p:sp>
+        <p:nvSpPr>
+          <p:cNvPr id="33" name="Text 31"/>
+          <p:cNvSpPr txBox="1"/>
+          <p:nvPr/>
+        </p:nvSpPr>
+        <p:spPr>
+          <a:xfrm>
+            <a:off x="9607296" y="4654296"/>
+            <a:ext cx="1877568" cy="1133856"/>
+          </a:xfrm>
+          <a:prstGeom prst="rect">
+            <a:avLst/>
+          </a:prstGeom>
+          <a:noFill/>
+          <a:ln/>
+        </p:spPr>
+        <p:txBody>
+          <a:bodyPr wrap="square" lIns="0" tIns="0" rIns="0" bIns="0" rtlCol="0" anchor="t"/>
+          <a:lstStyle/>
+          <a:p>
+            <a:pPr indent="0" marL="0">
+              <a:buNone/>
+            </a:pPr>
+            <a:r>
+              <a:rPr lang="en-US" sz="1400" b="1" dirty="0">
+                <a:solidFill>
+                  <a:srgbClr val="1A1A1A"/>
+                </a:solidFill>
+                <a:latin typeface="Inter" pitchFamily="34" charset="0"/>
+                <a:ea typeface="Inter" pitchFamily="34" charset="-122"/>
+                <a:cs typeface="Inter" pitchFamily="34" charset="-120"/>
+              </a:rPr>
+              <a:t>Discounting</a:t>
+            </a:r>
+            <a:endParaRPr lang="en-US" sz="1400" dirty="0"/>
+          </a:p>
+          <a:p>
+            <a:pPr indent="0" marL="0">
+              <a:buNone/>
+            </a:pPr>
+            <a:r>
+              <a:rPr lang="en-US" sz="1400" dirty="0">
+                <a:solidFill>
+                  <a:srgbClr val="595959"/>
+                </a:solidFill>
+                <a:latin typeface="Inter" pitchFamily="34" charset="0"/>
+                <a:ea typeface="Inter" pitchFamily="34" charset="-122"/>
+                <a:cs typeface="Inter" pitchFamily="34" charset="-120"/>
+              </a:rPr>
+              <a:t>Monitor it and keep controls in place</a:t>
+            </a:r>
+            <a:endParaRPr lang="en-US" sz="1400" dirty="0"/>
+          </a:p>
+        </p:txBody>
+      </p:sp>
+      <p:sp>
+        <p:nvSpPr>
+          <p:cNvPr id="34" name="Shape 32"/>
+          <p:cNvSpPr/>
+          <p:nvPr/>
+        </p:nvSpPr>
+        <p:spPr>
+          <a:xfrm>
             <a:off x="457200" y="6126480"/>
             <a:ext cx="11274552" cy="371856"/>
           </a:xfrm>
@@ -12868,7 +12945,7 @@
       </p:sp>
       <p:sp>
         <p:nvSpPr>
-          <p:cNvPr id="33" name="Text 31"/>
+          <p:cNvPr id="35" name="Text 33"/>
           <p:cNvSpPr txBox="1"/>
           <p:nvPr/>
         </p:nvSpPr>
@@ -12899,7 +12976,7 @@
                 <a:ea typeface="Inter" pitchFamily="34" charset="-122"/>
                 <a:cs typeface="Inter" pitchFamily="34" charset="-120"/>
               </a:rPr>
-              <a:t>Group: 80.8% CP labor gross profit, down 0.1 pts and inside the 78-82% target range.</a:t>
+              <a:t>Group: 80.8% CP labor gross profit, down 0.1 pts and just above the 78-80% target range.</a:t>
             </a:r>
             <a:endParaRPr lang="en-US" sz="1600" dirty="0"/>
           </a:p>
@@ -13374,7 +13451,7 @@
                 <a:ea typeface="Inter" pitchFamily="34" charset="-122"/>
                 <a:cs typeface="Inter" pitchFamily="34" charset="-120"/>
               </a:rPr>
-              <a:t>It is the other half of the gross on every RO.</a:t>
+              <a:t>The pricing matrix raises gross without selling one more part.</a:t>
             </a:r>
             <a:endParaRPr lang="en-US" sz="1600" dirty="0"/>
           </a:p>
@@ -13395,7 +13472,7 @@
                 <a:ea typeface="Inter" pitchFamily="34" charset="-122"/>
                 <a:cs typeface="Inter" pitchFamily="34" charset="-120"/>
               </a:rPr>
-              <a:t>Small changes add up across every RO in the group.</a:t>
+              <a:t>Consistent pricing: the same part costs every customer the same.</a:t>
             </a:r>
             <a:endParaRPr lang="en-US" sz="1600" dirty="0"/>
           </a:p>
@@ -13416,7 +13493,7 @@
                 <a:ea typeface="Inter" pitchFamily="34" charset="-122"/>
                 <a:cs typeface="Inter" pitchFamily="34" charset="-120"/>
               </a:rPr>
-              <a:t>It shows whether pricing and discounting are under control.</a:t>
+              <a:t>CP parts pricing supports the warranty parts reimbursement rate.</a:t>
             </a:r>
             <a:endParaRPr lang="en-US" sz="1600" dirty="0"/>
           </a:p>
@@ -13431,7 +13508,7 @@
         <p:spPr>
           <a:xfrm>
             <a:off x="5138928" y="2843784"/>
-            <a:ext cx="45720" cy="1417320"/>
+            <a:ext cx="45720" cy="1121027"/>
           </a:xfrm>
           <a:prstGeom prst="rect">
             <a:avLst/>
@@ -13451,7 +13528,7 @@
         <p:spPr>
           <a:xfrm>
             <a:off x="5266944" y="2843784"/>
-            <a:ext cx="2962656" cy="1417320"/>
+            <a:ext cx="2962656" cy="1121027"/>
           </a:xfrm>
           <a:prstGeom prst="rect">
             <a:avLst/>
@@ -13492,7 +13569,7 @@
                 <a:ea typeface="Inter" pitchFamily="34" charset="-122"/>
                 <a:cs typeface="Inter" pitchFamily="34" charset="-120"/>
               </a:rPr>
-              <a:t>Markup by cost band; set and reviewed</a:t>
+              <a:t>Know how it is set up, check parts actually sell at matrix prices, and review it against your gross goals</a:t>
             </a:r>
             <a:endParaRPr lang="en-US" sz="1400" dirty="0"/>
           </a:p>
@@ -13507,7 +13584,7 @@
         <p:spPr>
           <a:xfrm>
             <a:off x="8394192" y="2843784"/>
-            <a:ext cx="45720" cy="1417320"/>
+            <a:ext cx="45720" cy="1121027"/>
           </a:xfrm>
           <a:prstGeom prst="rect">
             <a:avLst/>
@@ -13527,7 +13604,7 @@
         <p:spPr>
           <a:xfrm>
             <a:off x="8522208" y="2843784"/>
-            <a:ext cx="2962656" cy="1417320"/>
+            <a:ext cx="2962656" cy="1121027"/>
           </a:xfrm>
           <a:prstGeom prst="rect">
             <a:avLst/>
@@ -13551,7 +13628,7 @@
                 <a:ea typeface="Inter" pitchFamily="34" charset="-122"/>
                 <a:cs typeface="Inter" pitchFamily="34" charset="-120"/>
               </a:rPr>
-              <a:t>Discounts</a:t>
+              <a:t>Discounts and overrides</a:t>
             </a:r>
             <a:endParaRPr lang="en-US" sz="1400" dirty="0"/>
           </a:p>
@@ -13568,7 +13645,7 @@
                 <a:ea typeface="Inter" pitchFamily="34" charset="-122"/>
                 <a:cs typeface="Inter" pitchFamily="34" charset="-120"/>
               </a:rPr>
-              <a:t>No direct price changes. ADC-controlled discounting only.</a:t>
+              <a:t>Monitor discounts and manual price changes; keep safeguards in place</a:t>
             </a:r>
             <a:endParaRPr lang="en-US" sz="1400" dirty="0"/>
           </a:p>
@@ -13582,8 +13659,8 @@
         </p:nvSpPr>
         <p:spPr>
           <a:xfrm>
-            <a:off x="5138928" y="4370832"/>
-            <a:ext cx="45720" cy="1417320"/>
+            <a:off x="5138928" y="4074539"/>
+            <a:ext cx="45720" cy="801942"/>
           </a:xfrm>
           <a:prstGeom prst="rect">
             <a:avLst/>
@@ -13602,8 +13679,8 @@
         </p:nvSpPr>
         <p:spPr>
           <a:xfrm>
-            <a:off x="5266944" y="4370832"/>
-            <a:ext cx="2962656" cy="1417320"/>
+            <a:off x="5266944" y="4074539"/>
+            <a:ext cx="2962656" cy="801942"/>
           </a:xfrm>
           <a:prstGeom prst="rect">
             <a:avLst/>
@@ -13627,7 +13704,7 @@
                 <a:ea typeface="Inter" pitchFamily="34" charset="-122"/>
                 <a:cs typeface="Inter" pitchFamily="34" charset="-120"/>
               </a:rPr>
-              <a:t>Mix</a:t>
+              <a:t>Stay competitive</a:t>
             </a:r>
             <a:endParaRPr lang="en-US" sz="1400" dirty="0"/>
           </a:p>
@@ -13644,7 +13721,7 @@
                 <a:ea typeface="Inter" pitchFamily="34" charset="-122"/>
                 <a:cs typeface="Inter" pitchFamily="34" charset="-120"/>
               </a:rPr>
-              <a:t>Tires and competitive items carry thinner margins</a:t>
+              <a:t>Balance margin with price, especially on high-cost parts</a:t>
             </a:r>
             <a:endParaRPr lang="en-US" sz="1400" dirty="0"/>
           </a:p>
@@ -13658,8 +13735,8 @@
         </p:nvSpPr>
         <p:spPr>
           <a:xfrm>
-            <a:off x="8394192" y="4370832"/>
-            <a:ext cx="45720" cy="1417320"/>
+            <a:off x="8394192" y="4074539"/>
+            <a:ext cx="45720" cy="801942"/>
           </a:xfrm>
           <a:prstGeom prst="rect">
             <a:avLst/>
@@ -13678,8 +13755,8 @@
         </p:nvSpPr>
         <p:spPr>
           <a:xfrm>
-            <a:off x="8522208" y="4370832"/>
-            <a:ext cx="2962656" cy="1417320"/>
+            <a:off x="8522208" y="4074539"/>
+            <a:ext cx="2962656" cy="801942"/>
           </a:xfrm>
           <a:prstGeom prst="rect">
             <a:avLst/>
@@ -13703,7 +13780,7 @@
                 <a:ea typeface="Inter" pitchFamily="34" charset="-122"/>
                 <a:cs typeface="Inter" pitchFamily="34" charset="-120"/>
               </a:rPr>
-              <a:t>Menu pricing</a:t>
+              <a:t>Mix</a:t>
             </a:r>
             <a:endParaRPr lang="en-US" sz="1400" dirty="0"/>
           </a:p>
@@ -13720,7 +13797,7 @@
                 <a:ea typeface="Inter" pitchFamily="34" charset="-122"/>
                 <a:cs typeface="Inter" pitchFamily="34" charset="-120"/>
               </a:rPr>
-              <a:t>Bundled maintenance parts priced to protect margin</a:t>
+              <a:t>Tires and competitive items carry thinner margins</a:t>
             </a:r>
             <a:endParaRPr lang="en-US" sz="1400" dirty="0"/>
           </a:p>
@@ -13734,6 +13811,82 @@
         </p:nvSpPr>
         <p:spPr>
           <a:xfrm>
+            <a:off x="5138928" y="4986210"/>
+            <a:ext cx="45720" cy="801942"/>
+          </a:xfrm>
+          <a:prstGeom prst="rect">
+            <a:avLst/>
+          </a:prstGeom>
+          <a:solidFill>
+            <a:srgbClr val="2587C5"/>
+          </a:solidFill>
+          <a:ln/>
+        </p:spPr>
+      </p:sp>
+      <p:sp>
+        <p:nvSpPr>
+          <p:cNvPr id="22" name="Text 20"/>
+          <p:cNvSpPr txBox="1"/>
+          <p:nvPr/>
+        </p:nvSpPr>
+        <p:spPr>
+          <a:xfrm>
+            <a:off x="5266944" y="4986210"/>
+            <a:ext cx="2962656" cy="801942"/>
+          </a:xfrm>
+          <a:prstGeom prst="rect">
+            <a:avLst/>
+          </a:prstGeom>
+          <a:noFill/>
+          <a:ln/>
+        </p:spPr>
+        <p:txBody>
+          <a:bodyPr wrap="square" lIns="0" tIns="0" rIns="0" bIns="0" rtlCol="0" anchor="t"/>
+          <a:lstStyle/>
+          <a:p>
+            <a:pPr indent="0" marL="0">
+              <a:buNone/>
+            </a:pPr>
+            <a:r>
+              <a:rPr lang="en-US" sz="1400" b="1" dirty="0">
+                <a:solidFill>
+                  <a:srgbClr val="1A1A1A"/>
+                </a:solidFill>
+                <a:latin typeface="Inter" pitchFamily="34" charset="0"/>
+                <a:ea typeface="Inter" pitchFamily="34" charset="-122"/>
+                <a:cs typeface="Inter" pitchFamily="34" charset="-120"/>
+              </a:rPr>
+              <a:t>Menu pricing</a:t>
+            </a:r>
+            <a:endParaRPr lang="en-US" sz="1400" dirty="0"/>
+          </a:p>
+          <a:p>
+            <a:pPr indent="0" marL="0">
+              <a:buNone/>
+            </a:pPr>
+            <a:r>
+              <a:rPr lang="en-US" sz="1400" dirty="0">
+                <a:solidFill>
+                  <a:srgbClr val="595959"/>
+                </a:solidFill>
+                <a:latin typeface="Inter" pitchFamily="34" charset="0"/>
+                <a:ea typeface="Inter" pitchFamily="34" charset="-122"/>
+                <a:cs typeface="Inter" pitchFamily="34" charset="-120"/>
+              </a:rPr>
+              <a:t>Bundled maintenance parts priced to protect margin</a:t>
+            </a:r>
+            <a:endParaRPr lang="en-US" sz="1400" dirty="0"/>
+          </a:p>
+        </p:txBody>
+      </p:sp>
+      <p:sp>
+        <p:nvSpPr>
+          <p:cNvPr id="23" name="Shape 21"/>
+          <p:cNvSpPr/>
+          <p:nvPr/>
+        </p:nvSpPr>
+        <p:spPr>
+          <a:xfrm>
             <a:off x="457200" y="6126480"/>
             <a:ext cx="11274552" cy="371856"/>
           </a:xfrm>
@@ -13748,7 +13901,7 @@
       </p:sp>
       <p:sp>
         <p:nvSpPr>
-          <p:cNvPr id="22" name="Text 20"/>
+          <p:cNvPr id="24" name="Text 22"/>
           <p:cNvSpPr txBox="1"/>
           <p:nvPr/>
         </p:nvSpPr>
@@ -15269,7 +15422,7 @@
               <a:buChar char="•"/>
             </a:pPr>
             <a:r>
-              <a:rPr lang="en-US" sz="1500" dirty="0">
+              <a:rPr lang="en-US" sz="1600" dirty="0">
                 <a:solidFill>
                   <a:srgbClr val="1A1A1A"/>
                 </a:solidFill>
@@ -15279,7 +15432,7 @@
               </a:rPr>
               <a:t>It is the true measure of how the department performs.</a:t>
             </a:r>
-            <a:endParaRPr lang="en-US" sz="1500" dirty="0"/>
+            <a:endParaRPr lang="en-US" sz="1600" dirty="0"/>
           </a:p>
           <a:p>
             <a:pPr marL="203200" indent="-203200">
@@ -15290,7 +15443,7 @@
               <a:buChar char="•"/>
             </a:pPr>
             <a:r>
-              <a:rPr lang="en-US" sz="1500" dirty="0">
+              <a:rPr lang="en-US" sz="1600" dirty="0">
                 <a:solidFill>
                   <a:srgbClr val="1A1A1A"/>
                 </a:solidFill>
@@ -15300,7 +15453,7 @@
               </a:rPr>
               <a:t>Gross is what we make; net is what we keep.</a:t>
             </a:r>
-            <a:endParaRPr lang="en-US" sz="1500" dirty="0"/>
+            <a:endParaRPr lang="en-US" sz="1600" dirty="0"/>
           </a:p>
           <a:p>
             <a:pPr marL="203200" indent="-203200">
@@ -15311,7 +15464,7 @@
               <a:buChar char="•"/>
             </a:pPr>
             <a:r>
-              <a:rPr lang="en-US" sz="1500" dirty="0">
+              <a:rPr lang="en-US" sz="1600" dirty="0">
                 <a:solidFill>
                   <a:srgbClr val="1A1A1A"/>
                 </a:solidFill>
@@ -15321,28 +15474,7 @@
               </a:rPr>
               <a:t>Gross can grow while net falls if expenses grow faster.</a:t>
             </a:r>
-            <a:endParaRPr lang="en-US" sz="1500" dirty="0"/>
-          </a:p>
-          <a:p>
-            <a:pPr marL="203200" indent="-203200">
-              <a:spcAft>
-                <a:spcPts val="600"/>
-              </a:spcAft>
-              <a:buSzPct val="100000"/>
-              <a:buChar char="•"/>
-            </a:pPr>
-            <a:r>
-              <a:rPr lang="en-US" sz="1500" dirty="0">
-                <a:solidFill>
-                  <a:srgbClr val="1A1A1A"/>
-                </a:solidFill>
-                <a:latin typeface="Inter" pitchFamily="34" charset="0"/>
-                <a:ea typeface="Inter" pitchFamily="34" charset="-122"/>
-                <a:cs typeface="Inter" pitchFamily="34" charset="-120"/>
-              </a:rPr>
-              <a:t>It ties staffing and pay plans to results.</a:t>
-            </a:r>
-            <a:endParaRPr lang="en-US" sz="1500" dirty="0"/>
+            <a:endParaRPr lang="en-US" sz="1600" dirty="0"/>
           </a:p>
         </p:txBody>
       </p:sp>
@@ -15355,7 +15487,7 @@
         <p:spPr>
           <a:xfrm>
             <a:off x="5138928" y="2843784"/>
-            <a:ext cx="45720" cy="1417320"/>
+            <a:ext cx="45720" cy="1189887"/>
           </a:xfrm>
           <a:prstGeom prst="rect">
             <a:avLst/>
@@ -15375,7 +15507,7 @@
         <p:spPr>
           <a:xfrm>
             <a:off x="5266944" y="2843784"/>
-            <a:ext cx="2962656" cy="1417320"/>
+            <a:ext cx="2962656" cy="1189887"/>
           </a:xfrm>
           <a:prstGeom prst="rect">
             <a:avLst/>
@@ -15431,7 +15563,7 @@
         <p:spPr>
           <a:xfrm>
             <a:off x="8394192" y="2843784"/>
-            <a:ext cx="45720" cy="1417320"/>
+            <a:ext cx="45720" cy="1189887"/>
           </a:xfrm>
           <a:prstGeom prst="rect">
             <a:avLst/>
@@ -15451,7 +15583,7 @@
         <p:spPr>
           <a:xfrm>
             <a:off x="8522208" y="2843784"/>
-            <a:ext cx="2962656" cy="1417320"/>
+            <a:ext cx="2962656" cy="1189887"/>
           </a:xfrm>
           <a:prstGeom prst="rect">
             <a:avLst/>
@@ -15492,7 +15624,7 @@
                 <a:ea typeface="Inter" pitchFamily="34" charset="-122"/>
                 <a:cs typeface="Inter" pitchFamily="34" charset="-120"/>
               </a:rPr>
-              <a:t>Supplies, policy, training, equipment</a:t>
+              <a:t>Supplies, shop tools and equipment, training, advertising, outside services, data processing</a:t>
             </a:r>
             <a:endParaRPr lang="en-US" sz="1400" dirty="0"/>
           </a:p>
@@ -15506,8 +15638,8 @@
         </p:nvSpPr>
         <p:spPr>
           <a:xfrm>
-            <a:off x="5138928" y="4370832"/>
-            <a:ext cx="45720" cy="1417320"/>
+            <a:off x="5138928" y="4143399"/>
+            <a:ext cx="45720" cy="1644753"/>
           </a:xfrm>
           <a:prstGeom prst="rect">
             <a:avLst/>
@@ -15526,8 +15658,8 @@
         </p:nvSpPr>
         <p:spPr>
           <a:xfrm>
-            <a:off x="5266944" y="4370832"/>
-            <a:ext cx="2962656" cy="1417320"/>
+            <a:off x="5266944" y="4143399"/>
+            <a:ext cx="2962656" cy="1644753"/>
           </a:xfrm>
           <a:prstGeom prst="rect">
             <a:avLst/>
@@ -15568,7 +15700,7 @@
                 <a:ea typeface="Inter" pitchFamily="34" charset="-122"/>
                 <a:cs typeface="Inter" pitchFamily="34" charset="-120"/>
               </a:rPr>
-              <a:t>Goodwill and comebacks charged to the department</a:t>
+              <a:t>Service policy (work done at no charge to the customer) and warranty claims the manufacturer won't pay</a:t>
             </a:r>
             <a:endParaRPr lang="en-US" sz="1400" dirty="0"/>
           </a:p>
@@ -15582,8 +15714,8 @@
         </p:nvSpPr>
         <p:spPr>
           <a:xfrm>
-            <a:off x="8394192" y="4370832"/>
-            <a:ext cx="45720" cy="1417320"/>
+            <a:off x="8394192" y="4143399"/>
+            <a:ext cx="45720" cy="1644753"/>
           </a:xfrm>
           <a:prstGeom prst="rect">
             <a:avLst/>
@@ -15602,8 +15734,8 @@
         </p:nvSpPr>
         <p:spPr>
           <a:xfrm>
-            <a:off x="8522208" y="4370832"/>
-            <a:ext cx="2962656" cy="1417320"/>
+            <a:off x="8522208" y="4143399"/>
+            <a:ext cx="2962656" cy="1644753"/>
           </a:xfrm>
           <a:prstGeom prst="rect">
             <a:avLst/>
@@ -15644,7 +15776,7 @@
                 <a:ea typeface="Inter" pitchFamily="34" charset="-122"/>
                 <a:cs typeface="Inter" pitchFamily="34" charset="-120"/>
               </a:rPr>
-              <a:t>Grow gross faster than expense</a:t>
+              <a:t>Outrun your expenses: when net is low, it is either an expense problem or a gross problem</a:t>
             </a:r>
             <a:endParaRPr lang="en-US" sz="1400" dirty="0"/>
           </a:p>

--- a/day2-deck/decks/Metric Explainers - Review.pptx
+++ b/day2-deck/decks/Metric Explainers - Review.pptx
@@ -7761,7 +7761,7 @@
                 <a:ea typeface="Inter" pitchFamily="34" charset="-122"/>
                 <a:cs typeface="Inter" pitchFamily="34" charset="-120"/>
               </a:rPr>
-              <a:t>How much labor time we sell on the average customer-pay visit.</a:t>
+              <a:t>The labor hours we sell, on average, every time a customer-pay car comes through the drive.</a:t>
             </a:r>
             <a:endParaRPr lang="en-US" sz="1500" dirty="0"/>
           </a:p>
@@ -8142,7 +8142,7 @@
                 <a:ea typeface="Inter" pitchFamily="34" charset="-122"/>
                 <a:cs typeface="Inter" pitchFamily="34" charset="-120"/>
               </a:rPr>
-              <a:t>It shows where the lift came from: labor $ per RO up from $200 to $250 with hours flat is a price increase, not more work.</a:t>
+              <a:t>It shows where the lift came from: if labor sales per RO go up but hours per RO stay flat, we are charging more, not selling more.</a:t>
             </a:r>
             <a:endParaRPr lang="en-US" sz="1500" dirty="0"/>
           </a:p>
@@ -12419,7 +12419,7 @@
                 <a:ea typeface="Inter" pitchFamily="34" charset="-122"/>
                 <a:cs typeface="Inter" pitchFamily="34" charset="-120"/>
               </a:rPr>
-              <a:t>The target range is 78% to 80%: not too high, not too low. Hold it by matching the tech to the job, not by squeezing tech pay.</a:t>
+              <a:t>The target range is 78% to 80%: not too high, not too low. Hold it by matching the tech to the work, not by squeezing tech pay.</a:t>
             </a:r>
             <a:endParaRPr lang="en-US" sz="1500" dirty="0"/>
           </a:p>
@@ -12440,7 +12440,7 @@
                 <a:ea typeface="Inter" pitchFamily="34" charset="-122"/>
                 <a:cs typeface="Inter" pitchFamily="34" charset="-120"/>
               </a:rPr>
-              <a:t>Too low means tech cost is out of line with what the job sells for.</a:t>
+              <a:t>Too low means our labor price is too low for what we pay the tech, or tech cost is too high for what we charge.</a:t>
             </a:r>
             <a:endParaRPr lang="en-US" sz="1500" dirty="0"/>
           </a:p>
@@ -12672,7 +12672,7 @@
                 <a:ea typeface="Inter" pitchFamily="34" charset="-122"/>
                 <a:cs typeface="Inter" pitchFamily="34" charset="-120"/>
               </a:rPr>
-              <a:t>Right tech, right job</a:t>
+              <a:t>Right tech, right work</a:t>
             </a:r>
             <a:endParaRPr lang="en-US" sz="1400" dirty="0"/>
           </a:p>
@@ -13569,7 +13569,7 @@
                 <a:ea typeface="Inter" pitchFamily="34" charset="-122"/>
                 <a:cs typeface="Inter" pitchFamily="34" charset="-120"/>
               </a:rPr>
-              <a:t>Know how it is set up, check parts actually sell at matrix prices, and review it against your gross goals</a:t>
+              <a:t>Know how it is set up, make sure pricing follows the matrix setup, and review it against your gross goals</a:t>
             </a:r>
             <a:endParaRPr lang="en-US" sz="1400" dirty="0"/>
           </a:p>

--- a/day2-deck/decks/Metric Explainers - Review.pptx
+++ b/day2-deck/decks/Metric Explainers - Review.pptx
@@ -1406,7 +1406,8 @@
             <a:r>
               <a:rPr lang="en-US" dirty="0"/>
               <a:t>Source: Definitions match the data slides: Qlik - Closed Repair Orders (all customer-pay ROs, by close month), Profit &amp; Loss and Productivity apps, Jan-Sep 2026 vs 2025, same-store, 33 stores. Worked example: Service Manager Roundtable, Nov 15, 2024, slide 21.PLACE: CP Engine, in front of CP Parts Gross Profit %.
-Why understand your parts pricing matrix (Noah, Oct 26): (1) Maximize gross profit: price parts to maximize profitability; find gross without more volume. (2) Consistent pricing: every customer charged the same for the same part; no incorrect prices from bad setups or manual overrides. (3) Stay competitive: avoid markups that make repairs too expensive; balance profit with price on higher-cost parts. (4) Check the matrix is applied: parts actually sell at matrix prices; find parts, labor types or transactions that bypass it. (5) Warranty reimbursement: customer-pay parts pricing drives the warranty parts reimbursement rate, so good pricing supports a higher rate and more warranty gross. (6) Control the strategy: know how your matrix is configured and review it against your gross profit goals. Takeaway: the matrix is one of the most effective tools for improving profit without more volume.</a:t>
+Why understand your parts pricing matrix (Noah, Oct 26): (1) Maximize gross profit: price parts to maximize profitability; find gross without more volume. (2) Consistent pricing: every customer charged the same for the same part; no incorrect prices from bad setups or manual overrides. (3) Stay competitive: avoid markups that make repairs too expensive; balance profit with price on higher-cost parts. (4) Check the matrix is applied: parts actually sell at matrix prices; find parts, labor types or transactions that bypass it. (5) Warranty reimbursement: customer-pay parts pricing drives the warranty parts reimbursement rate, so good pricing supports a higher rate and more warranty gross. (6) Control the strategy: know how your matrix is configured and review it against your gross profit goals. Takeaway: the matrix is one of the most effective tools for improving profit without more volume.
+5 reasons parts gross profit % matters (Noah, Oct 26): (1) Maximizes profitability: higher GP % earns more from the same volume; small improvements add up over a year. (2) Measures pricing effectiveness: are parts sold at the right prices; where to improve matrices, discounts and markups. (3) Controls discounts and cost increases: shows when discounting cuts profit, and when rising parts costs are not reflected in selling prices. (4) Supports dealership profit: parts gross covers department expenses, adds to net profit and helps fixed ops absorb store overhead. (5) Identifies opportunities: compare against targets, history and other stores; find weak categories (customer pay, wholesale, warranty, internal). Takeaway: parts GP % measures how well we turn parts sales into profit; raising it is one of the most direct ways to grow profit without more volume.</a:t>
             </a:r>
             <a:endParaRPr lang="en-US" dirty="0"/>
           </a:p>
@@ -12461,7 +12462,7 @@
                 <a:ea typeface="Inter" pitchFamily="34" charset="-122"/>
                 <a:cs typeface="Inter" pitchFamily="34" charset="-120"/>
               </a:rPr>
-              <a:t>Too high can mean techs are underpaid on the work they do, which costs us techs.</a:t>
+              <a:t>Too high can mean techs are underpaid, which can cost us technicians and hurt retention.</a:t>
             </a:r>
             <a:endParaRPr lang="en-US" sz="1500" dirty="0"/>
           </a:p>
@@ -13443,7 +13444,7 @@
               <a:buChar char="•"/>
             </a:pPr>
             <a:r>
-              <a:rPr lang="en-US" sz="1600" dirty="0">
+              <a:rPr lang="en-US" sz="1500" dirty="0">
                 <a:solidFill>
                   <a:srgbClr val="1A1A1A"/>
                 </a:solidFill>
@@ -13451,9 +13452,9 @@
                 <a:ea typeface="Inter" pitchFamily="34" charset="-122"/>
                 <a:cs typeface="Inter" pitchFamily="34" charset="-120"/>
               </a:rPr>
-              <a:t>The pricing matrix raises gross without selling one more part.</a:t>
-            </a:r>
-            <a:endParaRPr lang="en-US" sz="1600" dirty="0"/>
+              <a:t>More profit from the same parts sales: small gains add up over a year.</a:t>
+            </a:r>
+            <a:endParaRPr lang="en-US" sz="1500" dirty="0"/>
           </a:p>
           <a:p>
             <a:pPr marL="203200" indent="-203200">
@@ -13464,7 +13465,7 @@
               <a:buChar char="•"/>
             </a:pPr>
             <a:r>
-              <a:rPr lang="en-US" sz="1600" dirty="0">
+              <a:rPr lang="en-US" sz="1500" dirty="0">
                 <a:solidFill>
                   <a:srgbClr val="1A1A1A"/>
                 </a:solidFill>
@@ -13472,9 +13473,9 @@
                 <a:ea typeface="Inter" pitchFamily="34" charset="-122"/>
                 <a:cs typeface="Inter" pitchFamily="34" charset="-120"/>
               </a:rPr>
-              <a:t>Consistent pricing: the same part costs every customer the same.</a:t>
-            </a:r>
-            <a:endParaRPr lang="en-US" sz="1600" dirty="0"/>
+              <a:t>It shows whether parts sell at the right price: matrix, markups and discounts.</a:t>
+            </a:r>
+            <a:endParaRPr lang="en-US" sz="1500" dirty="0"/>
           </a:p>
           <a:p>
             <a:pPr marL="203200" indent="-203200">
@@ -13485,7 +13486,7 @@
               <a:buChar char="•"/>
             </a:pPr>
             <a:r>
-              <a:rPr lang="en-US" sz="1600" dirty="0">
+              <a:rPr lang="en-US" sz="1500" dirty="0">
                 <a:solidFill>
                   <a:srgbClr val="1A1A1A"/>
                 </a:solidFill>
@@ -13493,9 +13494,30 @@
                 <a:ea typeface="Inter" pitchFamily="34" charset="-122"/>
                 <a:cs typeface="Inter" pitchFamily="34" charset="-120"/>
               </a:rPr>
+              <a:t>It flags heavy discounting, or cost increases we have not passed on.</a:t>
+            </a:r>
+            <a:endParaRPr lang="en-US" sz="1500" dirty="0"/>
+          </a:p>
+          <a:p>
+            <a:pPr marL="203200" indent="-203200">
+              <a:spcAft>
+                <a:spcPts val="600"/>
+              </a:spcAft>
+              <a:buSzPct val="100000"/>
+              <a:buChar char="•"/>
+            </a:pPr>
+            <a:r>
+              <a:rPr lang="en-US" sz="1500" dirty="0">
+                <a:solidFill>
+                  <a:srgbClr val="1A1A1A"/>
+                </a:solidFill>
+                <a:latin typeface="Inter" pitchFamily="34" charset="0"/>
+                <a:ea typeface="Inter" pitchFamily="34" charset="-122"/>
+                <a:cs typeface="Inter" pitchFamily="34" charset="-120"/>
+              </a:rPr>
               <a:t>CP parts pricing supports the warranty parts reimbursement rate.</a:t>
             </a:r>
-            <a:endParaRPr lang="en-US" sz="1600" dirty="0"/>
+            <a:endParaRPr lang="en-US" sz="1500" dirty="0"/>
           </a:p>
         </p:txBody>
       </p:sp>

--- a/day2-deck/decks/Metric Explainers - Review.pptx
+++ b/day2-deck/decks/Metric Explainers - Review.pptx
@@ -1407,7 +1407,8 @@
               <a:rPr lang="en-US" dirty="0"/>
               <a:t>Source: Definitions match the data slides: Qlik - Closed Repair Orders (all customer-pay ROs, by close month), Profit &amp; Loss and Productivity apps, Jan-Sep 2026 vs 2025, same-store, 33 stores. Worked example: Service Manager Roundtable, Nov 15, 2024, slide 21.PLACE: CP Engine, in front of CP Parts Gross Profit %.
 Why understand your parts pricing matrix (Noah, Oct 26): (1) Maximize gross profit: price parts to maximize profitability; find gross without more volume. (2) Consistent pricing: every customer charged the same for the same part; no incorrect prices from bad setups or manual overrides. (3) Stay competitive: avoid markups that make repairs too expensive; balance profit with price on higher-cost parts. (4) Check the matrix is applied: parts actually sell at matrix prices; find parts, labor types or transactions that bypass it. (5) Warranty reimbursement: customer-pay parts pricing drives the warranty parts reimbursement rate, so good pricing supports a higher rate and more warranty gross. (6) Control the strategy: know how your matrix is configured and review it against your gross profit goals. Takeaway: the matrix is one of the most effective tools for improving profit without more volume.
-5 reasons parts gross profit % matters (Noah, Oct 26): (1) Maximizes profitability: higher GP % earns more from the same volume; small improvements add up over a year. (2) Measures pricing effectiveness: are parts sold at the right prices; where to improve matrices, discounts and markups. (3) Controls discounts and cost increases: shows when discounting cuts profit, and when rising parts costs are not reflected in selling prices. (4) Supports dealership profit: parts gross covers department expenses, adds to net profit and helps fixed ops absorb store overhead. (5) Identifies opportunities: compare against targets, history and other stores; find weak categories (customer pay, wholesale, warranty, internal). Takeaway: parts GP % measures how well we turn parts sales into profit; raising it is one of the most direct ways to grow profit without more volume.</a:t>
+5 reasons parts gross profit % matters (Noah, Oct 26): (1) Maximizes profitability: higher GP % earns more from the same volume; small improvements add up over a year. (2) Measures pricing effectiveness: are parts sold at the right prices; where to improve matrices, discounts and markups. (3) Controls discounts and cost increases: shows when discounting cuts profit, and when rising parts costs are not reflected in selling prices. (4) Supports dealership profit: parts gross covers department expenses, adds to net profit and helps fixed ops absorb store overhead. (5) Identifies opportunities: compare against targets, history and other stores; find weak categories (customer pay, wholesale, warranty, internal). Takeaway: parts GP % measures how well we turn parts sales into profit; raising it is one of the most direct ways to grow profit without more volume.
+37 cents (Oct 26): P&amp;L Detail, Jan-Sep 2026 same-store, parts department profit $22.75M / parts gross $61.93M = 36.7% (2025 37.1%); service 21.8% (2025 18.9%); new and used lose money at the department level; parts beats service in 31 of 33 stores (not Honda Henderson, VW Henderson). F&amp;I income less F&amp;I commissions is higher (about 80%) but F&amp;I is not a P&amp;L department and its other costs sit in new and used, so say 'department'. Department view: about $87M of other income (doc fees, packs, factory money, holdback) is booked outside the departments.</a:t>
             </a:r>
             <a:endParaRPr lang="en-US" dirty="0"/>
           </a:p>
@@ -13452,7 +13453,7 @@
                 <a:ea typeface="Inter" pitchFamily="34" charset="-122"/>
                 <a:cs typeface="Inter" pitchFamily="34" charset="-120"/>
               </a:rPr>
-              <a:t>More profit from the same parts sales: small gains add up over a year.</a:t>
+              <a:t>Parts keeps about 37¢ of every gross dollar after its own expenses, the most of any department (service 22¢): margin goes almost straight to the bottom line.</a:t>
             </a:r>
             <a:endParaRPr lang="en-US" sz="1500" dirty="0"/>
           </a:p>
@@ -13909,6 +13910,82 @@
         </p:nvSpPr>
         <p:spPr>
           <a:xfrm>
+            <a:off x="8394192" y="4986210"/>
+            <a:ext cx="45720" cy="801942"/>
+          </a:xfrm>
+          <a:prstGeom prst="rect">
+            <a:avLst/>
+          </a:prstGeom>
+          <a:solidFill>
+            <a:srgbClr val="2587C5"/>
+          </a:solidFill>
+          <a:ln/>
+        </p:spPr>
+      </p:sp>
+      <p:sp>
+        <p:nvSpPr>
+          <p:cNvPr id="24" name="Text 22"/>
+          <p:cNvSpPr txBox="1"/>
+          <p:nvPr/>
+        </p:nvSpPr>
+        <p:spPr>
+          <a:xfrm>
+            <a:off x="8522208" y="4986210"/>
+            <a:ext cx="2962656" cy="801942"/>
+          </a:xfrm>
+          <a:prstGeom prst="rect">
+            <a:avLst/>
+          </a:prstGeom>
+          <a:noFill/>
+          <a:ln/>
+        </p:spPr>
+        <p:txBody>
+          <a:bodyPr wrap="square" lIns="0" tIns="0" rIns="0" bIns="0" rtlCol="0" anchor="t"/>
+          <a:lstStyle/>
+          <a:p>
+            <a:pPr indent="0" marL="0">
+              <a:buNone/>
+            </a:pPr>
+            <a:r>
+              <a:rPr lang="en-US" sz="1400" b="1" dirty="0">
+                <a:solidFill>
+                  <a:srgbClr val="1A1A1A"/>
+                </a:solidFill>
+                <a:latin typeface="Inter" pitchFamily="34" charset="0"/>
+                <a:ea typeface="Inter" pitchFamily="34" charset="-122"/>
+                <a:cs typeface="Inter" pitchFamily="34" charset="-120"/>
+              </a:rPr>
+              <a:t>Tracking</a:t>
+            </a:r>
+            <a:endParaRPr lang="en-US" sz="1400" dirty="0"/>
+          </a:p>
+          <a:p>
+            <a:pPr indent="0" marL="0">
+              <a:buNone/>
+            </a:pPr>
+            <a:r>
+              <a:rPr lang="en-US" sz="1400" dirty="0">
+                <a:solidFill>
+                  <a:srgbClr val="595959"/>
+                </a:solidFill>
+                <a:latin typeface="Inter" pitchFamily="34" charset="0"/>
+                <a:ea typeface="Inter" pitchFamily="34" charset="-122"/>
+                <a:cs typeface="Inter" pitchFamily="34" charset="-120"/>
+              </a:rPr>
+              <a:t>Know your parts GP % every day, know where you stand, and adjust as needed</a:t>
+            </a:r>
+            <a:endParaRPr lang="en-US" sz="1400" dirty="0"/>
+          </a:p>
+        </p:txBody>
+      </p:sp>
+      <p:sp>
+        <p:nvSpPr>
+          <p:cNvPr id="25" name="Shape 23"/>
+          <p:cNvSpPr/>
+          <p:nvPr/>
+        </p:nvSpPr>
+        <p:spPr>
+          <a:xfrm>
             <a:off x="457200" y="6126480"/>
             <a:ext cx="11274552" cy="371856"/>
           </a:xfrm>
@@ -13923,7 +14000,7 @@
       </p:sp>
       <p:sp>
         <p:nvSpPr>
-          <p:cNvPr id="24" name="Text 22"/>
+          <p:cNvPr id="26" name="Text 24"/>
           <p:cNvSpPr txBox="1"/>
           <p:nvPr/>
         </p:nvSpPr>

--- a/day2-deck/decks/Metric Explainers - Review.pptx
+++ b/day2-deck/decks/Metric Explainers - Review.pptx
@@ -13972,7 +13972,7 @@
                 <a:ea typeface="Inter" pitchFamily="34" charset="-122"/>
                 <a:cs typeface="Inter" pitchFamily="34" charset="-120"/>
               </a:rPr>
-              <a:t>Know your parts GP % every day, know where you stand, and adjust as needed</a:t>
+              <a:t>Monitor and actively manage your parts GP %: know where you stand and adjust as needed</a:t>
             </a:r>
             <a:endParaRPr lang="en-US" sz="1400" dirty="0"/>
           </a:p>

--- a/day2-deck/decks/Metric Explainers - Review.pptx
+++ b/day2-deck/decks/Metric Explainers - Review.pptx
@@ -5810,7 +5810,7 @@
                 <a:ea typeface="Inter" pitchFamily="34" charset="-122"/>
                 <a:cs typeface="Inter" pitchFamily="34" charset="-120"/>
               </a:rPr>
-              <a:t>Service technicians, express technicians, service team leaders and shop foremen: everyone whose job is to flag hours on the line</a:t>
+              <a:t>Service technicians, express technicians, service team leaders and shop foremen: everyone whose job is to produce sold hours</a:t>
             </a:r>
             <a:endParaRPr lang="en-US" sz="1600" dirty="0"/>
           </a:p>
@@ -6118,7 +6118,7 @@
                 <a:ea typeface="Inter" pitchFamily="34" charset="-122"/>
                 <a:cs typeface="Inter" pitchFamily="34" charset="-120"/>
               </a:rPr>
-              <a:t>Keying errors removed</a:t>
+              <a:t>Keying errors</a:t>
             </a:r>
             <a:endParaRPr lang="en-US" sz="1400" dirty="0"/>
           </a:p>
@@ -6135,7 +6135,7 @@
                 <a:ea typeface="Inter" pitchFamily="34" charset="-122"/>
                 <a:cs typeface="Inter" pitchFamily="34" charset="-120"/>
               </a:rPr>
-              <a:t>45 lines, such as 940 hours keyed on one $0 line</a:t>
+              <a:t>Example: 940 hours keyed on a single $0 line</a:t>
             </a:r>
             <a:endParaRPr lang="en-US" sz="1400" dirty="0"/>
           </a:p>
@@ -6194,7 +6194,7 @@
                 <a:ea typeface="Inter" pitchFamily="34" charset="-122"/>
                 <a:cs typeface="Inter" pitchFamily="34" charset="-120"/>
               </a:rPr>
-              <a:t>Shared codes</a:t>
+              <a:t>Shared tech numbers</a:t>
             </a:r>
             <a:endParaRPr lang="en-US" sz="1400" dirty="0"/>
           </a:p>
@@ -6211,7 +6211,7 @@
                 <a:ea typeface="Inter" pitchFamily="34" charset="-122"/>
                 <a:cs typeface="Inter" pitchFamily="34" charset="-120"/>
               </a:rPr>
-              <a:t>Pooled codes (MULT, 999, 77777) aren't credited to anyone</a:t>
+              <a:t>Example: hours flagged to a shop code like 999, not a person</a:t>
             </a:r>
             <a:endParaRPr lang="en-US" sz="1400" dirty="0"/>
           </a:p>

--- a/day2-deck/decks/Metric Explainers - Review.pptx
+++ b/day2-deck/decks/Metric Explainers - Review.pptx
@@ -782,6 +782,7 @@
             <a:r>
               <a:rPr lang="en-US" dirty="0"/>
               <a:t>Source: Definitions match the data slides: Qlik - Closed Repair Orders (all customer-pay ROs, by close month), Profit &amp; Loss and Productivity apps, Jan-Sep 2026 vs 2025, same-store, 33 stores. Worked example: Service Manager Roundtable, Nov 15, 2024, slide 21.PLACE: right after 'What Is Technician Proficiency?'.
+Period: pay periods Dec 25, 2025 to Oct 9, 2026, matched by tech number, all pay types; labelled Jan-Sep 2026 YTD on the slide (Noah, Oct 26: closest the pay periods allow).
 Rules as applied on the proficiency slides (Oct 16 2026). Express techs at stores that pool express hours are mostly excluded by the 10% rule.</a:t>
             </a:r>
             <a:endParaRPr lang="en-US" dirty="0"/>
@@ -5649,7 +5650,7 @@
                 <a:ea typeface="Inter" pitchFamily="34" charset="-122"/>
                 <a:cs typeface="Inter" pitchFamily="34" charset="-120"/>
               </a:rPr>
-              <a:t>Matched by tech number, all pay types, Dec 25, 2025 to Oct 9, 2026. Store = total sold hours / total worked hours.</a:t>
+              <a:t>January through September 2026, year to date. Store = total sold hours / total worked hours.</a:t>
             </a:r>
             <a:endParaRPr lang="en-US" sz="1500" dirty="0"/>
           </a:p>
@@ -5802,7 +5803,7 @@
               <a:buChar char="•"/>
             </a:pPr>
             <a:r>
-              <a:rPr lang="en-US" sz="1600" dirty="0">
+              <a:rPr lang="en-US" sz="1500" dirty="0">
                 <a:solidFill>
                   <a:srgbClr val="1A1A1A"/>
                 </a:solidFill>
@@ -5810,9 +5811,9 @@
                 <a:ea typeface="Inter" pitchFamily="34" charset="-122"/>
                 <a:cs typeface="Inter" pitchFamily="34" charset="-120"/>
               </a:rPr>
-              <a:t>Service technicians, express technicians, service team leaders and shop foremen: everyone whose job is to produce sold hours</a:t>
-            </a:r>
-            <a:endParaRPr lang="en-US" sz="1600" dirty="0"/>
+              <a:t>Service technicians and express technicians</a:t>
+            </a:r>
+            <a:endParaRPr lang="en-US" sz="1500" dirty="0"/>
           </a:p>
           <a:p>
             <a:pPr marL="203200" indent="-203200">
@@ -5823,7 +5824,7 @@
               <a:buChar char="•"/>
             </a:pPr>
             <a:r>
-              <a:rPr lang="en-US" sz="1600" dirty="0">
+              <a:rPr lang="en-US" sz="1500" dirty="0">
                 <a:solidFill>
                   <a:srgbClr val="1A1A1A"/>
                 </a:solidFill>
@@ -5831,9 +5832,51 @@
                 <a:ea typeface="Inter" pitchFamily="34" charset="-122"/>
                 <a:cs typeface="Inter" pitchFamily="34" charset="-120"/>
               </a:rPr>
+              <a:t>Service team leaders and shop foremen</a:t>
+            </a:r>
+            <a:endParaRPr lang="en-US" sz="1500" dirty="0"/>
+          </a:p>
+          <a:p>
+            <a:pPr marL="203200" indent="-203200">
+              <a:spcAft>
+                <a:spcPts val="600"/>
+              </a:spcAft>
+              <a:buSzPct val="100000"/>
+              <a:buChar char="•"/>
+            </a:pPr>
+            <a:r>
+              <a:rPr lang="en-US" sz="1500" dirty="0">
+                <a:solidFill>
+                  <a:srgbClr val="1A1A1A"/>
+                </a:solidFill>
+                <a:latin typeface="Inter" pitchFamily="34" charset="0"/>
+                <a:ea typeface="Inter" pitchFamily="34" charset="-122"/>
+                <a:cs typeface="Inter" pitchFamily="34" charset="-120"/>
+              </a:rPr>
+              <a:t>Everyone whose job is to produce sold hours</a:t>
+            </a:r>
+            <a:endParaRPr lang="en-US" sz="1500" dirty="0"/>
+          </a:p>
+          <a:p>
+            <a:pPr marL="203200" indent="-203200">
+              <a:spcAft>
+                <a:spcPts val="600"/>
+              </a:spcAft>
+              <a:buSzPct val="100000"/>
+              <a:buChar char="•"/>
+            </a:pPr>
+            <a:r>
+              <a:rPr lang="en-US" sz="1500" dirty="0">
+                <a:solidFill>
+                  <a:srgbClr val="1A1A1A"/>
+                </a:solidFill>
+                <a:latin typeface="Inter" pitchFamily="34" charset="0"/>
+                <a:ea typeface="Inter" pitchFamily="34" charset="-122"/>
+                <a:cs typeface="Inter" pitchFamily="34" charset="-120"/>
+              </a:rPr>
               <a:t>Not counted: body shop, detail and tint</a:t>
             </a:r>
-            <a:endParaRPr lang="en-US" sz="1600" dirty="0"/>
+            <a:endParaRPr lang="en-US" sz="1500" dirty="0"/>
           </a:p>
         </p:txBody>
       </p:sp>

--- a/day2-deck/decks/Metric Explainers - Review.pptx
+++ b/day2-deck/decks/Metric Explainers - Review.pptx
@@ -13335,7 +13335,7 @@
                 <a:ea typeface="Inter" pitchFamily="34" charset="-122"/>
                 <a:cs typeface="Inter" pitchFamily="34" charset="-120"/>
               </a:rPr>
-              <a:t>The share of each customer-pay parts dollar we keep after the cost of the part.</a:t>
+              <a:t>The share of each customer-pay parts dollar we keep, less the cost of the part.</a:t>
             </a:r>
             <a:endParaRPr lang="en-US" sz="1500" dirty="0"/>
           </a:p>

--- a/day2-deck/decks/Metric Explainers - Review.pptx
+++ b/day2-deck/decks/Metric Explainers - Review.pptx
@@ -781,7 +781,7 @@
           <a:p>
             <a:r>
               <a:rPr lang="en-US" dirty="0"/>
-              <a:t>Source: Definitions match the data slides: Qlik - Closed Repair Orders (all customer-pay ROs, by close month), Profit &amp; Loss and Productivity apps, Jan-Sep 2026 vs 2025, same-store, 33 stores. Worked example: Service Manager Roundtable, Nov 15, 2024, slide 21.PLACE: right after 'What Is Technician Proficiency?'.
+              <a:t>Source: Definitions match the data slides: Qlik - Closed Repair Orders (all customer-pay ROs, by close month), Profit &amp; Loss and Productivity apps, Jan-Sep 2026 vs 2025, same-store, 33 stores. Worked example: Service Manager Roundtable, Nov 15, 2024, slide 21.PLACE: right after 'Technician Proficiency' (explainer).
 Period: pay periods Dec 25, 2025 to Oct 9, 2026, matched by tech number, all pay types; labelled Jan-Sep 2026 YTD on the slide (Noah, Oct 26: closest the pay periods allow).
 Rules as applied on the proficiency slides (Oct 16 2026). Express techs at stores that pool express hours are mostly excluded by the 10% rule.</a:t>
             </a:r>
@@ -2052,7 +2052,7 @@
                 <a:ea typeface="Inter" pitchFamily="34" charset="-122"/>
                 <a:cs typeface="Inter" pitchFamily="34" charset="-120"/>
               </a:rPr>
-              <a:t>What Is CP RO Count?</a:t>
+              <a:t>CP RO Count</a:t>
             </a:r>
             <a:endParaRPr lang="en-US" sz="2800" dirty="0"/>
           </a:p>
@@ -4239,7 +4239,7 @@
                 <a:ea typeface="Inter" pitchFamily="34" charset="-122"/>
                 <a:cs typeface="Inter" pitchFamily="34" charset="-120"/>
               </a:rPr>
-              <a:t>What Is Technician Proficiency?</a:t>
+              <a:t>Technician Proficiency</a:t>
             </a:r>
             <a:endParaRPr lang="en-US" sz="2800" dirty="0"/>
           </a:p>
@@ -6519,7 +6519,7 @@
                 <a:ea typeface="Inter" pitchFamily="34" charset="-122"/>
                 <a:cs typeface="Inter" pitchFamily="34" charset="-120"/>
               </a:rPr>
-              <a:t>What Is Fixed Ops Gross?</a:t>
+              <a:t>Fixed Ops Gross</a:t>
             </a:r>
             <a:endParaRPr lang="en-US" sz="2800" dirty="0"/>
           </a:p>
@@ -7650,7 +7650,7 @@
                 <a:ea typeface="Inter" pitchFamily="34" charset="-122"/>
                 <a:cs typeface="Inter" pitchFamily="34" charset="-120"/>
               </a:rPr>
-              <a:t>What Is Hours per RO?</a:t>
+              <a:t>Hours per RO</a:t>
             </a:r>
             <a:endParaRPr lang="en-US" sz="2800" dirty="0"/>
           </a:p>
@@ -8853,7 +8853,7 @@
                 <a:ea typeface="Inter" pitchFamily="34" charset="-122"/>
                 <a:cs typeface="Inter" pitchFamily="34" charset="-120"/>
               </a:rPr>
-              <a:t>What Is Effective Labor Rate?</a:t>
+              <a:t>Effective Labor Rate</a:t>
             </a:r>
             <a:endParaRPr lang="en-US" sz="2800" dirty="0"/>
           </a:p>
@@ -9857,7 +9857,7 @@
                 <a:ea typeface="Inter" pitchFamily="34" charset="-122"/>
                 <a:cs typeface="Inter" pitchFamily="34" charset="-120"/>
               </a:rPr>
-              <a:t>What Is CP Labor $ per RO?</a:t>
+              <a:t>CP Labor $ per RO</a:t>
             </a:r>
             <a:endParaRPr lang="en-US" sz="2800" dirty="0"/>
           </a:p>
@@ -10908,7 +10908,7 @@
                 <a:ea typeface="Inter" pitchFamily="34" charset="-122"/>
                 <a:cs typeface="Inter" pitchFamily="34" charset="-120"/>
               </a:rPr>
-              <a:t>What Is CP Parts $ per RO?</a:t>
+              <a:t>CP Parts $ per RO</a:t>
             </a:r>
             <a:endParaRPr lang="en-US" sz="2800" dirty="0"/>
           </a:p>
@@ -11760,7 +11760,7 @@
                 <a:ea typeface="Inter" pitchFamily="34" charset="-122"/>
                 <a:cs typeface="Inter" pitchFamily="34" charset="-120"/>
               </a:rPr>
-              <a:t>What Is Labor Gross Profit %?</a:t>
+              <a:t>Labor Gross Profit %</a:t>
             </a:r>
             <a:endParaRPr lang="en-US" sz="2800" dirty="0"/>
           </a:p>
@@ -13151,7 +13151,7 @@
                 <a:ea typeface="Inter" pitchFamily="34" charset="-122"/>
                 <a:cs typeface="Inter" pitchFamily="34" charset="-120"/>
               </a:rPr>
-              <a:t>What Is Parts Gross Profit %?</a:t>
+              <a:t>Parts Gross Profit %</a:t>
             </a:r>
             <a:endParaRPr lang="en-US" sz="2800" dirty="0"/>
           </a:p>
@@ -14204,7 +14204,7 @@
                 <a:ea typeface="Inter" pitchFamily="34" charset="-122"/>
                 <a:cs typeface="Inter" pitchFamily="34" charset="-120"/>
               </a:rPr>
-              <a:t>What Is Absorption?</a:t>
+              <a:t>Absorption</a:t>
             </a:r>
             <a:endParaRPr lang="en-US" sz="2800" dirty="0"/>
           </a:p>
@@ -15255,7 +15255,7 @@
                 <a:ea typeface="Inter" pitchFamily="34" charset="-122"/>
                 <a:cs typeface="Inter" pitchFamily="34" charset="-120"/>
               </a:rPr>
-              <a:t>What Is Net to Gross?</a:t>
+              <a:t>Net to Gross</a:t>
             </a:r>
             <a:endParaRPr lang="en-US" sz="2800" dirty="0"/>
           </a:p>

--- a/day2-deck/decks/Metric Explainers - Review.pptx
+++ b/day2-deck/decks/Metric Explainers - Review.pptx
@@ -18,9 +18,10 @@
     <p:sldId id="266" r:id="rId12"/>
     <p:sldId id="267" r:id="rId13"/>
     <p:sldId id="268" r:id="rId14"/>
+    <p:sldId id="269" r:id="rId15"/>
   </p:sldIdLst>
   <p:notesMasterIdLst>
-    <p:notesMasterId r:id="rId15"/>
+    <p:notesMasterId r:id="rId16"/>
   </p:notesMasterIdLst>
   <p:sldSz cx="12192000" cy="6858000"/>
   <p:notesSz cx="6858000" cy="12192000"/>
@@ -914,6 +915,95 @@
 </p:notes>
 </file>
 
+<file path=ppt/notesSlides/notesSlide14.xml><?xml version="1.0" encoding="utf-8"?>
+<p:notes xmlns:a="http://schemas.openxmlformats.org/drawingml/2006/main" xmlns:r="http://schemas.openxmlformats.org/officeDocument/2006/relationships" xmlns:p="http://schemas.openxmlformats.org/presentationml/2006/main">
+  <p:cSld>
+    <p:spTree>
+      <p:nvGrpSpPr>
+        <p:cNvPr id="1" name=""/>
+        <p:cNvGrpSpPr/>
+        <p:nvPr/>
+      </p:nvGrpSpPr>
+      <p:grpSpPr>
+        <a:xfrm>
+          <a:off x="0" y="0"/>
+          <a:ext cx="0" cy="0"/>
+          <a:chOff x="0" y="0"/>
+          <a:chExt cx="0" cy="0"/>
+        </a:xfrm>
+      </p:grpSpPr>
+      <p:sp>
+        <p:nvSpPr>
+          <p:cNvPr id="2" name="Slide Image Placeholder 1"/>
+          <p:cNvSpPr>
+            <a:spLocks noGrp="1" noRot="1" noChangeAspect="1"/>
+          </p:cNvSpPr>
+          <p:nvPr>
+            <p:ph type="sldImg"/>
+          </p:nvPr>
+        </p:nvSpPr>
+        <p:spPr/>
+      </p:sp>
+      <p:sp>
+        <p:nvSpPr>
+          <p:cNvPr id="3" name="Notes Placeholder 2"/>
+          <p:cNvSpPr>
+            <a:spLocks noGrp="1"/>
+          </p:cNvSpPr>
+          <p:nvPr>
+            <p:ph type="body" idx="1"/>
+          </p:nvPr>
+        </p:nvSpPr>
+        <p:spPr/>
+        <p:txBody>
+          <a:bodyPr/>
+          <a:lstStyle/>
+          <a:p>
+            <a:r>
+              <a:rPr lang="en-US" dirty="0"/>
+              <a:t>Source: Standard service-department definitions. Proficiency on the store slides = Qlik sold hours ÷ ADP regular + overtime hours. Efficiency and productivity need DMS time clocked on ROs, which this data does not include, so they are defined here but not measured.PLACE: right after the Technician Proficiency explainer, before How We Measured It (Noah, Oct 27).
+Talk track: proficiency is the one we measure; efficiency and productivity explain why it is low. High efficiency with low proficiency means the tech is waiting. 'Productivity' here is the technician measure, not the Fixed Ops Productivity section (gross and ROs per employee).</a:t>
+            </a:r>
+            <a:endParaRPr lang="en-US" dirty="0"/>
+          </a:p>
+        </p:txBody>
+      </p:sp>
+      <p:sp>
+        <p:nvSpPr>
+          <p:cNvPr id="4" name="Slide Number Placeholder 3"/>
+          <p:cNvSpPr>
+            <a:spLocks noGrp="1"/>
+          </p:cNvSpPr>
+          <p:nvPr>
+            <p:ph type="sldNum" sz="quarter" idx="10"/>
+          </p:nvPr>
+        </p:nvSpPr>
+        <p:spPr/>
+        <p:txBody>
+          <a:bodyPr/>
+          <a:lstStyle/>
+          <a:p>
+            <a:fld id="{F7021451-1387-4CA6-816F-3879F97B5CBC}" type="slidenum">
+              <a:rPr lang="en-US"/>
+              <a:t>14</a:t>
+            </a:fld>
+            <a:endParaRPr lang="en-US"/>
+          </a:p>
+        </p:txBody>
+      </p:sp>
+    </p:spTree>
+    <p:extLst>
+      <p:ext uri="{BB962C8B-B14F-4D97-AF65-F5344CB8AC3E}">
+        <p14:creationId xmlns:p14="http://schemas.microsoft.com/office/powerpoint/2010/main" val="1024086991"/>
+      </p:ext>
+    </p:extLst>
+  </p:cSld>
+  <p:clrMapOvr>
+    <a:masterClrMapping/>
+  </p:clrMapOvr>
+</p:notes>
+</file>
+
 <file path=ppt/notesSlides/notesSlide2.xml><?xml version="1.0" encoding="utf-8"?>
 <p:notes xmlns:a="http://schemas.openxmlformats.org/drawingml/2006/main" xmlns:r="http://schemas.openxmlformats.org/officeDocument/2006/relationships" xmlns:p="http://schemas.openxmlformats.org/presentationml/2006/main">
   <p:cSld>
@@ -7523,6 +7613,672 @@
               <a:t>Group: $188.80M fixed ops gross Jan–Sep 2026, up $7.47M (4.1%): service +$6.30M, parts +$1.17M.</a:t>
             </a:r>
             <a:endParaRPr lang="en-US" sz="1600" dirty="0"/>
+          </a:p>
+        </p:txBody>
+      </p:sp>
+    </p:spTree>
+  </p:cSld>
+  <p:clrMapOvr>
+    <a:masterClrMapping/>
+  </p:clrMapOvr>
+</p:sld>
+</file>
+
+<file path=ppt/slides/slide14.xml><?xml version="1.0" encoding="utf-8"?>
+<p:sld xmlns:a="http://schemas.openxmlformats.org/drawingml/2006/main" xmlns:r="http://schemas.openxmlformats.org/officeDocument/2006/relationships" xmlns:p="http://schemas.openxmlformats.org/presentationml/2006/main">
+  <p:cSld name="Slide 14">
+    <p:bg>
+      <p:bgPr>
+        <a:solidFill>
+          <a:srgbClr val="EDEDED"/>
+        </a:solidFill>
+      </p:bgPr>
+    </p:bg>
+    <p:spTree>
+      <p:nvGrpSpPr>
+        <p:cNvPr id="1" name=""/>
+        <p:cNvGrpSpPr/>
+        <p:nvPr/>
+      </p:nvGrpSpPr>
+      <p:grpSpPr>
+        <a:xfrm>
+          <a:off x="0" y="0"/>
+          <a:ext cx="0" cy="0"/>
+          <a:chOff x="0" y="0"/>
+          <a:chExt cx="0" cy="0"/>
+        </a:xfrm>
+      </p:grpSpPr>
+      <p:sp>
+        <p:nvSpPr>
+          <p:cNvPr id="2" name="Shape 0"/>
+          <p:cNvSpPr/>
+          <p:nvPr/>
+        </p:nvSpPr>
+        <p:spPr>
+          <a:xfrm>
+            <a:off x="457200" y="402336"/>
+            <a:ext cx="50292" cy="192024"/>
+          </a:xfrm>
+          <a:prstGeom prst="rect">
+            <a:avLst/>
+          </a:prstGeom>
+          <a:solidFill>
+            <a:srgbClr val="2587C5"/>
+          </a:solidFill>
+          <a:ln/>
+        </p:spPr>
+      </p:sp>
+      <p:sp>
+        <p:nvSpPr>
+          <p:cNvPr id="3" name="Text 1"/>
+          <p:cNvSpPr txBox="1"/>
+          <p:nvPr/>
+        </p:nvSpPr>
+        <p:spPr>
+          <a:xfrm>
+            <a:off x="621792" y="338328"/>
+            <a:ext cx="8229600" cy="274320"/>
+          </a:xfrm>
+          <a:prstGeom prst="rect">
+            <a:avLst/>
+          </a:prstGeom>
+          <a:noFill/>
+          <a:ln/>
+        </p:spPr>
+        <p:txBody>
+          <a:bodyPr wrap="square" lIns="0" tIns="0" rIns="0" bIns="0" rtlCol="0" anchor="ctr"/>
+          <a:lstStyle/>
+          <a:p>
+            <a:pPr indent="0" marL="0">
+              <a:buNone/>
+            </a:pPr>
+            <a:r>
+              <a:rPr lang="en-US" sz="1400" b="1" spc="110" kern="0" dirty="0">
+                <a:solidFill>
+                  <a:srgbClr val="595959"/>
+                </a:solidFill>
+                <a:latin typeface="Inter" pitchFamily="34" charset="0"/>
+                <a:ea typeface="Inter" pitchFamily="34" charset="-122"/>
+                <a:cs typeface="Inter" pitchFamily="34" charset="-120"/>
+              </a:rPr>
+              <a:t>TECHNICIAN PROFICIENCY</a:t>
+            </a:r>
+            <a:endParaRPr lang="en-US" sz="1400" dirty="0"/>
+          </a:p>
+        </p:txBody>
+      </p:sp>
+      <p:sp>
+        <p:nvSpPr>
+          <p:cNvPr id="4" name="Text 2"/>
+          <p:cNvSpPr txBox="1"/>
+          <p:nvPr/>
+        </p:nvSpPr>
+        <p:spPr>
+          <a:xfrm>
+            <a:off x="457200" y="640080"/>
+            <a:ext cx="11338560" cy="502920"/>
+          </a:xfrm>
+          <a:prstGeom prst="rect">
+            <a:avLst/>
+          </a:prstGeom>
+          <a:noFill/>
+          <a:ln/>
+        </p:spPr>
+        <p:txBody>
+          <a:bodyPr wrap="square" lIns="0" tIns="0" rIns="0" bIns="0" rtlCol="0" anchor="ctr"/>
+          <a:lstStyle/>
+          <a:p>
+            <a:pPr indent="0" marL="0">
+              <a:buNone/>
+            </a:pPr>
+            <a:r>
+              <a:rPr lang="en-US" sz="2800" dirty="0">
+                <a:solidFill>
+                  <a:srgbClr val="1A1A1A"/>
+                </a:solidFill>
+                <a:latin typeface="Inter" pitchFamily="34" charset="0"/>
+                <a:ea typeface="Inter" pitchFamily="34" charset="-122"/>
+                <a:cs typeface="Inter" pitchFamily="34" charset="-120"/>
+              </a:rPr>
+              <a:t>Proficiency, Efficiency and Productivity</a:t>
+            </a:r>
+            <a:endParaRPr lang="en-US" sz="2800" dirty="0"/>
+          </a:p>
+        </p:txBody>
+      </p:sp>
+      <p:sp>
+        <p:nvSpPr>
+          <p:cNvPr id="5" name="Shape 3"/>
+          <p:cNvSpPr/>
+          <p:nvPr/>
+        </p:nvSpPr>
+        <p:spPr>
+          <a:xfrm>
+            <a:off x="457200" y="1207008"/>
+            <a:ext cx="11274552" cy="5148072"/>
+          </a:xfrm>
+          <a:prstGeom prst="rect">
+            <a:avLst/>
+          </a:prstGeom>
+          <a:solidFill>
+            <a:srgbClr val="FFFFFF"/>
+          </a:solidFill>
+          <a:ln/>
+        </p:spPr>
+      </p:sp>
+      <p:sp>
+        <p:nvSpPr>
+          <p:cNvPr id="6" name="Shape 4"/>
+          <p:cNvSpPr/>
+          <p:nvPr/>
+        </p:nvSpPr>
+        <p:spPr>
+          <a:xfrm>
+            <a:off x="713232" y="1481328"/>
+            <a:ext cx="3453384" cy="3017520"/>
+          </a:xfrm>
+          <a:prstGeom prst="rect">
+            <a:avLst/>
+          </a:prstGeom>
+          <a:solidFill>
+            <a:srgbClr val="F7F7F7"/>
+          </a:solidFill>
+          <a:ln/>
+        </p:spPr>
+      </p:sp>
+      <p:sp>
+        <p:nvSpPr>
+          <p:cNvPr id="7" name="Shape 5"/>
+          <p:cNvSpPr/>
+          <p:nvPr/>
+        </p:nvSpPr>
+        <p:spPr>
+          <a:xfrm>
+            <a:off x="713232" y="1481328"/>
+            <a:ext cx="3453384" cy="64008"/>
+          </a:xfrm>
+          <a:prstGeom prst="rect">
+            <a:avLst/>
+          </a:prstGeom>
+          <a:solidFill>
+            <a:srgbClr val="2587C5"/>
+          </a:solidFill>
+          <a:ln/>
+        </p:spPr>
+      </p:sp>
+      <p:sp>
+        <p:nvSpPr>
+          <p:cNvPr id="8" name="Text 6"/>
+          <p:cNvSpPr txBox="1"/>
+          <p:nvPr/>
+        </p:nvSpPr>
+        <p:spPr>
+          <a:xfrm>
+            <a:off x="896112" y="1691640"/>
+            <a:ext cx="3087624" cy="566928"/>
+          </a:xfrm>
+          <a:prstGeom prst="rect">
+            <a:avLst/>
+          </a:prstGeom>
+          <a:noFill/>
+          <a:ln/>
+        </p:spPr>
+        <p:txBody>
+          <a:bodyPr wrap="square" lIns="0" tIns="0" rIns="0" bIns="0" rtlCol="0" anchor="t"/>
+          <a:lstStyle/>
+          <a:p>
+            <a:pPr indent="0" marL="0">
+              <a:buNone/>
+            </a:pPr>
+            <a:r>
+              <a:rPr lang="en-US" sz="1400" b="1" spc="80" kern="0" dirty="0">
+                <a:solidFill>
+                  <a:srgbClr val="595959"/>
+                </a:solidFill>
+                <a:latin typeface="Inter" pitchFamily="34" charset="0"/>
+                <a:ea typeface="Inter" pitchFamily="34" charset="-122"/>
+                <a:cs typeface="Inter" pitchFamily="34" charset="-120"/>
+              </a:rPr>
+              <a:t>PROFICIENCY</a:t>
+            </a:r>
+            <a:endParaRPr lang="en-US" sz="1400" dirty="0"/>
+          </a:p>
+        </p:txBody>
+      </p:sp>
+      <p:sp>
+        <p:nvSpPr>
+          <p:cNvPr id="9" name="Text 7"/>
+          <p:cNvSpPr txBox="1"/>
+          <p:nvPr/>
+        </p:nvSpPr>
+        <p:spPr>
+          <a:xfrm>
+            <a:off x="896112" y="2286000"/>
+            <a:ext cx="3087624" cy="868680"/>
+          </a:xfrm>
+          <a:prstGeom prst="rect">
+            <a:avLst/>
+          </a:prstGeom>
+          <a:noFill/>
+          <a:ln/>
+        </p:spPr>
+        <p:txBody>
+          <a:bodyPr wrap="square" lIns="0" tIns="0" rIns="0" bIns="0" rtlCol="0" anchor="ctr">
+            <a:normAutofit/>
+          </a:bodyPr>
+          <a:lstStyle/>
+          <a:p>
+            <a:pPr indent="0" marL="0">
+              <a:buNone/>
+            </a:pPr>
+            <a:r>
+              <a:rPr lang="en-US" sz="2600" b="1" dirty="0">
+                <a:solidFill>
+                  <a:srgbClr val="0B2C4A"/>
+                </a:solidFill>
+                <a:latin typeface="Inter" pitchFamily="34" charset="0"/>
+                <a:ea typeface="Inter" pitchFamily="34" charset="-122"/>
+                <a:cs typeface="Inter" pitchFamily="34" charset="-120"/>
+              </a:rPr>
+              <a:t>Sold hours ÷ hours worked</a:t>
+            </a:r>
+            <a:endParaRPr lang="en-US" sz="2600" dirty="0"/>
+          </a:p>
+        </p:txBody>
+      </p:sp>
+      <p:sp>
+        <p:nvSpPr>
+          <p:cNvPr id="10" name="Text 8"/>
+          <p:cNvSpPr txBox="1"/>
+          <p:nvPr/>
+        </p:nvSpPr>
+        <p:spPr>
+          <a:xfrm>
+            <a:off x="896112" y="3200400"/>
+            <a:ext cx="3087624" cy="1188720"/>
+          </a:xfrm>
+          <a:prstGeom prst="rect">
+            <a:avLst/>
+          </a:prstGeom>
+          <a:noFill/>
+          <a:ln/>
+        </p:spPr>
+        <p:txBody>
+          <a:bodyPr wrap="square" lIns="0" tIns="0" rIns="0" bIns="0" rtlCol="0" anchor="t"/>
+          <a:lstStyle/>
+          <a:p>
+            <a:pPr indent="0" marL="0">
+              <a:buNone/>
+            </a:pPr>
+            <a:r>
+              <a:rPr lang="en-US" sz="1500" dirty="0">
+                <a:solidFill>
+                  <a:srgbClr val="1A1A1A"/>
+                </a:solidFill>
+                <a:latin typeface="Inter" pitchFamily="34" charset="0"/>
+                <a:ea typeface="Inter" pitchFamily="34" charset="-122"/>
+                <a:cs typeface="Inter" pitchFamily="34" charset="-120"/>
+              </a:rPr>
+              <a:t>How many hours a tech flags for every hour they are at work. The measure on these slides: 85% target, group 94.7%.</a:t>
+            </a:r>
+            <a:endParaRPr lang="en-US" sz="1500" dirty="0"/>
+          </a:p>
+        </p:txBody>
+      </p:sp>
+      <p:sp>
+        <p:nvSpPr>
+          <p:cNvPr id="11" name="Shape 9"/>
+          <p:cNvSpPr/>
+          <p:nvPr/>
+        </p:nvSpPr>
+        <p:spPr>
+          <a:xfrm>
+            <a:off x="4367784" y="1481328"/>
+            <a:ext cx="3453384" cy="3017520"/>
+          </a:xfrm>
+          <a:prstGeom prst="rect">
+            <a:avLst/>
+          </a:prstGeom>
+          <a:solidFill>
+            <a:srgbClr val="F7F7F7"/>
+          </a:solidFill>
+          <a:ln/>
+        </p:spPr>
+      </p:sp>
+      <p:sp>
+        <p:nvSpPr>
+          <p:cNvPr id="12" name="Shape 10"/>
+          <p:cNvSpPr/>
+          <p:nvPr/>
+        </p:nvSpPr>
+        <p:spPr>
+          <a:xfrm>
+            <a:off x="4367784" y="1481328"/>
+            <a:ext cx="3453384" cy="64008"/>
+          </a:xfrm>
+          <a:prstGeom prst="rect">
+            <a:avLst/>
+          </a:prstGeom>
+          <a:solidFill>
+            <a:srgbClr val="2587C5"/>
+          </a:solidFill>
+          <a:ln/>
+        </p:spPr>
+      </p:sp>
+      <p:sp>
+        <p:nvSpPr>
+          <p:cNvPr id="13" name="Text 11"/>
+          <p:cNvSpPr txBox="1"/>
+          <p:nvPr/>
+        </p:nvSpPr>
+        <p:spPr>
+          <a:xfrm>
+            <a:off x="4550664" y="1691640"/>
+            <a:ext cx="3087624" cy="566928"/>
+          </a:xfrm>
+          <a:prstGeom prst="rect">
+            <a:avLst/>
+          </a:prstGeom>
+          <a:noFill/>
+          <a:ln/>
+        </p:spPr>
+        <p:txBody>
+          <a:bodyPr wrap="square" lIns="0" tIns="0" rIns="0" bIns="0" rtlCol="0" anchor="t"/>
+          <a:lstStyle/>
+          <a:p>
+            <a:pPr indent="0" marL="0">
+              <a:buNone/>
+            </a:pPr>
+            <a:r>
+              <a:rPr lang="en-US" sz="1400" b="1" spc="80" kern="0" dirty="0">
+                <a:solidFill>
+                  <a:srgbClr val="595959"/>
+                </a:solidFill>
+                <a:latin typeface="Inter" pitchFamily="34" charset="0"/>
+                <a:ea typeface="Inter" pitchFamily="34" charset="-122"/>
+                <a:cs typeface="Inter" pitchFamily="34" charset="-120"/>
+              </a:rPr>
+              <a:t>EFFICIENCY</a:t>
+            </a:r>
+            <a:endParaRPr lang="en-US" sz="1400" dirty="0"/>
+          </a:p>
+        </p:txBody>
+      </p:sp>
+      <p:sp>
+        <p:nvSpPr>
+          <p:cNvPr id="14" name="Text 12"/>
+          <p:cNvSpPr txBox="1"/>
+          <p:nvPr/>
+        </p:nvSpPr>
+        <p:spPr>
+          <a:xfrm>
+            <a:off x="4550664" y="2286000"/>
+            <a:ext cx="3087624" cy="868680"/>
+          </a:xfrm>
+          <a:prstGeom prst="rect">
+            <a:avLst/>
+          </a:prstGeom>
+          <a:noFill/>
+          <a:ln/>
+        </p:spPr>
+        <p:txBody>
+          <a:bodyPr wrap="square" lIns="0" tIns="0" rIns="0" bIns="0" rtlCol="0" anchor="ctr">
+            <a:normAutofit/>
+          </a:bodyPr>
+          <a:lstStyle/>
+          <a:p>
+            <a:pPr indent="0" marL="0">
+              <a:buNone/>
+            </a:pPr>
+            <a:r>
+              <a:rPr lang="en-US" sz="2600" b="1" dirty="0">
+                <a:solidFill>
+                  <a:srgbClr val="0B2C4A"/>
+                </a:solidFill>
+                <a:latin typeface="Inter" pitchFamily="34" charset="0"/>
+                <a:ea typeface="Inter" pitchFamily="34" charset="-122"/>
+                <a:cs typeface="Inter" pitchFamily="34" charset="-120"/>
+              </a:rPr>
+              <a:t>Sold hours ÷ hours on ROs</a:t>
+            </a:r>
+            <a:endParaRPr lang="en-US" sz="2600" dirty="0"/>
+          </a:p>
+        </p:txBody>
+      </p:sp>
+      <p:sp>
+        <p:nvSpPr>
+          <p:cNvPr id="15" name="Text 13"/>
+          <p:cNvSpPr txBox="1"/>
+          <p:nvPr/>
+        </p:nvSpPr>
+        <p:spPr>
+          <a:xfrm>
+            <a:off x="4550664" y="3200400"/>
+            <a:ext cx="3087624" cy="1188720"/>
+          </a:xfrm>
+          <a:prstGeom prst="rect">
+            <a:avLst/>
+          </a:prstGeom>
+          <a:noFill/>
+          <a:ln/>
+        </p:spPr>
+        <p:txBody>
+          <a:bodyPr wrap="square" lIns="0" tIns="0" rIns="0" bIns="0" rtlCol="0" anchor="t"/>
+          <a:lstStyle/>
+          <a:p>
+            <a:pPr indent="0" marL="0">
+              <a:buNone/>
+            </a:pPr>
+            <a:r>
+              <a:rPr lang="en-US" sz="1500" dirty="0">
+                <a:solidFill>
+                  <a:srgbClr val="1A1A1A"/>
+                </a:solidFill>
+                <a:latin typeface="Inter" pitchFamily="34" charset="0"/>
+                <a:ea typeface="Inter" pitchFamily="34" charset="-122"/>
+                <a:cs typeface="Inter" pitchFamily="34" charset="-120"/>
+              </a:rPr>
+              <a:t>How fast a tech does the work: hours flagged against the time actually clocked on repair orders. Over 100% beats book time.</a:t>
+            </a:r>
+            <a:endParaRPr lang="en-US" sz="1500" dirty="0"/>
+          </a:p>
+        </p:txBody>
+      </p:sp>
+      <p:sp>
+        <p:nvSpPr>
+          <p:cNvPr id="16" name="Shape 14"/>
+          <p:cNvSpPr/>
+          <p:nvPr/>
+        </p:nvSpPr>
+        <p:spPr>
+          <a:xfrm>
+            <a:off x="8022336" y="1481328"/>
+            <a:ext cx="3453384" cy="3017520"/>
+          </a:xfrm>
+          <a:prstGeom prst="rect">
+            <a:avLst/>
+          </a:prstGeom>
+          <a:solidFill>
+            <a:srgbClr val="F7F7F7"/>
+          </a:solidFill>
+          <a:ln/>
+        </p:spPr>
+      </p:sp>
+      <p:sp>
+        <p:nvSpPr>
+          <p:cNvPr id="17" name="Shape 15"/>
+          <p:cNvSpPr/>
+          <p:nvPr/>
+        </p:nvSpPr>
+        <p:spPr>
+          <a:xfrm>
+            <a:off x="8022336" y="1481328"/>
+            <a:ext cx="3453384" cy="64008"/>
+          </a:xfrm>
+          <a:prstGeom prst="rect">
+            <a:avLst/>
+          </a:prstGeom>
+          <a:solidFill>
+            <a:srgbClr val="2587C5"/>
+          </a:solidFill>
+          <a:ln/>
+        </p:spPr>
+      </p:sp>
+      <p:sp>
+        <p:nvSpPr>
+          <p:cNvPr id="18" name="Text 16"/>
+          <p:cNvSpPr txBox="1"/>
+          <p:nvPr/>
+        </p:nvSpPr>
+        <p:spPr>
+          <a:xfrm>
+            <a:off x="8205216" y="1691640"/>
+            <a:ext cx="3087624" cy="566928"/>
+          </a:xfrm>
+          <a:prstGeom prst="rect">
+            <a:avLst/>
+          </a:prstGeom>
+          <a:noFill/>
+          <a:ln/>
+        </p:spPr>
+        <p:txBody>
+          <a:bodyPr wrap="square" lIns="0" tIns="0" rIns="0" bIns="0" rtlCol="0" anchor="t"/>
+          <a:lstStyle/>
+          <a:p>
+            <a:pPr indent="0" marL="0">
+              <a:buNone/>
+            </a:pPr>
+            <a:r>
+              <a:rPr lang="en-US" sz="1400" b="1" spc="80" kern="0" dirty="0">
+                <a:solidFill>
+                  <a:srgbClr val="595959"/>
+                </a:solidFill>
+                <a:latin typeface="Inter" pitchFamily="34" charset="0"/>
+                <a:ea typeface="Inter" pitchFamily="34" charset="-122"/>
+                <a:cs typeface="Inter" pitchFamily="34" charset="-120"/>
+              </a:rPr>
+              <a:t>PRODUCTIVITY</a:t>
+            </a:r>
+            <a:endParaRPr lang="en-US" sz="1400" dirty="0"/>
+          </a:p>
+        </p:txBody>
+      </p:sp>
+      <p:sp>
+        <p:nvSpPr>
+          <p:cNvPr id="19" name="Text 17"/>
+          <p:cNvSpPr txBox="1"/>
+          <p:nvPr/>
+        </p:nvSpPr>
+        <p:spPr>
+          <a:xfrm>
+            <a:off x="8205216" y="2286000"/>
+            <a:ext cx="3087624" cy="868680"/>
+          </a:xfrm>
+          <a:prstGeom prst="rect">
+            <a:avLst/>
+          </a:prstGeom>
+          <a:noFill/>
+          <a:ln/>
+        </p:spPr>
+        <p:txBody>
+          <a:bodyPr wrap="square" lIns="0" tIns="0" rIns="0" bIns="0" rtlCol="0" anchor="ctr">
+            <a:normAutofit/>
+          </a:bodyPr>
+          <a:lstStyle/>
+          <a:p>
+            <a:pPr indent="0" marL="0">
+              <a:buNone/>
+            </a:pPr>
+            <a:r>
+              <a:rPr lang="en-US" sz="2600" b="1" dirty="0">
+                <a:solidFill>
+                  <a:srgbClr val="0B2C4A"/>
+                </a:solidFill>
+                <a:latin typeface="Inter" pitchFamily="34" charset="0"/>
+                <a:ea typeface="Inter" pitchFamily="34" charset="-122"/>
+                <a:cs typeface="Inter" pitchFamily="34" charset="-120"/>
+              </a:rPr>
+              <a:t>Hours on ROs ÷ hours worked</a:t>
+            </a:r>
+            <a:endParaRPr lang="en-US" sz="2600" dirty="0"/>
+          </a:p>
+        </p:txBody>
+      </p:sp>
+      <p:sp>
+        <p:nvSpPr>
+          <p:cNvPr id="20" name="Text 18"/>
+          <p:cNvSpPr txBox="1"/>
+          <p:nvPr/>
+        </p:nvSpPr>
+        <p:spPr>
+          <a:xfrm>
+            <a:off x="8205216" y="3200400"/>
+            <a:ext cx="3087624" cy="1188720"/>
+          </a:xfrm>
+          <a:prstGeom prst="rect">
+            <a:avLst/>
+          </a:prstGeom>
+          <a:noFill/>
+          <a:ln/>
+        </p:spPr>
+        <p:txBody>
+          <a:bodyPr wrap="square" lIns="0" tIns="0" rIns="0" bIns="0" rtlCol="0" anchor="t"/>
+          <a:lstStyle/>
+          <a:p>
+            <a:pPr indent="0" marL="0">
+              <a:buNone/>
+            </a:pPr>
+            <a:r>
+              <a:rPr lang="en-US" sz="1500" dirty="0">
+                <a:solidFill>
+                  <a:srgbClr val="1A1A1A"/>
+                </a:solidFill>
+                <a:latin typeface="Inter" pitchFamily="34" charset="0"/>
+                <a:ea typeface="Inter" pitchFamily="34" charset="-122"/>
+                <a:cs typeface="Inter" pitchFamily="34" charset="-120"/>
+              </a:rPr>
+              <a:t>How much of the day a tech spends on customer work instead of waiting on parts, dispatch or approvals.</a:t>
+            </a:r>
+            <a:endParaRPr lang="en-US" sz="1500" dirty="0"/>
+          </a:p>
+        </p:txBody>
+      </p:sp>
+      <p:sp>
+        <p:nvSpPr>
+          <p:cNvPr id="21" name="Text 19"/>
+          <p:cNvSpPr txBox="1"/>
+          <p:nvPr/>
+        </p:nvSpPr>
+        <p:spPr>
+          <a:xfrm>
+            <a:off x="713232" y="4709160"/>
+            <a:ext cx="10762488" cy="914400"/>
+          </a:xfrm>
+          <a:prstGeom prst="rect">
+            <a:avLst/>
+          </a:prstGeom>
+          <a:noFill/>
+          <a:ln/>
+        </p:spPr>
+        <p:txBody>
+          <a:bodyPr wrap="square" lIns="0" tIns="0" rIns="0" bIns="0" rtlCol="0" anchor="ctr"/>
+          <a:lstStyle/>
+          <a:p>
+            <a:pPr indent="0" marL="0">
+              <a:buNone/>
+            </a:pPr>
+            <a:r>
+              <a:rPr lang="en-US" sz="1700" dirty="0">
+                <a:solidFill>
+                  <a:srgbClr val="1A1A1A"/>
+                </a:solidFill>
+                <a:latin typeface="Inter" pitchFamily="34" charset="0"/>
+                <a:ea typeface="Inter" pitchFamily="34" charset="-122"/>
+                <a:cs typeface="Inter" pitchFamily="34" charset="-120"/>
+              </a:rPr>
+              <a:t>Proficiency = efficiency × productivity. A fast tech with nothing to work on is efficient but not proficient: the fix is dispatch, parts and approvals, not the tech.</a:t>
+            </a:r>
+            <a:endParaRPr lang="en-US" sz="1700" dirty="0"/>
           </a:p>
         </p:txBody>
       </p:sp>

--- a/day2-deck/decks/Metric Explainers - Review.pptx
+++ b/day2-deck/decks/Metric Explainers - Review.pptx
@@ -961,8 +961,8 @@
           <a:p>
             <a:r>
               <a:rPr lang="en-US" dirty="0"/>
-              <a:t>Source: Standard service-department definitions. Proficiency on the store slides = Qlik sold hours ÷ ADP regular + overtime hours. Efficiency and productivity need DMS time clocked on ROs, which this data does not include, so they are defined here but not measured.PLACE: right after the Technician Proficiency explainer, before How We Measured It (Noah, Oct 27).
-Talk track: proficiency is the one we measure; efficiency and productivity explain why it is low. High efficiency with low proficiency means the tech is waiting. 'Productivity' here is the technician measure, not the Fixed Ops Productivity section (gross and ROs per employee).</a:t>
+              <a:t>Source: Standard service-department definitions. On the store slides, proficiency = Qlik hours flagged (sold hours) ÷ ADP regular + overtime hours, which stand in for available hours. Efficiency and productivity need DMS time clocked to repair orders, which this data does not include, so they are defined here but not measured. The example is illustrative, not a store or technician.PLACE: right after the Technician Proficiency explainer, before How We Measured It (Noah, Oct 27).
+Talk track: walk the example left to right. The tech was on repair orders 6 of 8 hours (75% productive) and flagged 7.5 hours in those 6 (125% efficient), so 7.5 flagged hours for 8 available (93.75% proficient). Proficiency is the one we measure: 85% target, group 94.7%. 'Productivity' here is the technician measure, not the Fixed Ops Productivity section (gross and ROs per employee).</a:t>
             </a:r>
             <a:endParaRPr lang="en-US" dirty="0"/>
           </a:p>
@@ -7755,7 +7755,7 @@
         <p:spPr>
           <a:xfrm>
             <a:off x="457200" y="1207008"/>
-            <a:ext cx="11274552" cy="5148072"/>
+            <a:ext cx="11274552" cy="4782312"/>
           </a:xfrm>
           <a:prstGeom prst="rect">
             <a:avLst/>
@@ -7774,8 +7774,8 @@
         </p:nvSpPr>
         <p:spPr>
           <a:xfrm>
-            <a:off x="713232" y="1481328"/>
-            <a:ext cx="3453384" cy="3017520"/>
+            <a:off x="713232" y="1417320"/>
+            <a:ext cx="3453384" cy="2926080"/>
           </a:xfrm>
           <a:prstGeom prst="rect">
             <a:avLst/>
@@ -7794,7 +7794,7 @@
         </p:nvSpPr>
         <p:spPr>
           <a:xfrm>
-            <a:off x="713232" y="1481328"/>
+            <a:off x="713232" y="1417320"/>
             <a:ext cx="3453384" cy="64008"/>
           </a:xfrm>
           <a:prstGeom prst="rect">
@@ -7814,8 +7814,47 @@
         </p:nvSpPr>
         <p:spPr>
           <a:xfrm>
-            <a:off x="896112" y="1691640"/>
-            <a:ext cx="3087624" cy="566928"/>
+            <a:off x="896112" y="1600200"/>
+            <a:ext cx="3087624" cy="274320"/>
+          </a:xfrm>
+          <a:prstGeom prst="rect">
+            <a:avLst/>
+          </a:prstGeom>
+          <a:noFill/>
+          <a:ln/>
+        </p:spPr>
+        <p:txBody>
+          <a:bodyPr wrap="square" lIns="0" tIns="0" rIns="0" bIns="0" rtlCol="0" anchor="ctr"/>
+          <a:lstStyle/>
+          <a:p>
+            <a:pPr indent="0" marL="0">
+              <a:buNone/>
+            </a:pPr>
+            <a:r>
+              <a:rPr lang="en-US" sz="1400" b="1" spc="80" kern="0" dirty="0">
+                <a:solidFill>
+                  <a:srgbClr val="595959"/>
+                </a:solidFill>
+                <a:latin typeface="Inter" pitchFamily="34" charset="0"/>
+                <a:ea typeface="Inter" pitchFamily="34" charset="-122"/>
+                <a:cs typeface="Inter" pitchFamily="34" charset="-120"/>
+              </a:rPr>
+              <a:t>PRODUCTIVITY</a:t>
+            </a:r>
+            <a:endParaRPr lang="en-US" sz="1400" dirty="0"/>
+          </a:p>
+        </p:txBody>
+      </p:sp>
+      <p:sp>
+        <p:nvSpPr>
+          <p:cNvPr id="9" name="Text 7"/>
+          <p:cNvSpPr txBox="1"/>
+          <p:nvPr/>
+        </p:nvSpPr>
+        <p:spPr>
+          <a:xfrm>
+            <a:off x="896112" y="1920240"/>
+            <a:ext cx="3087624" cy="685800"/>
           </a:xfrm>
           <a:prstGeom prst="rect">
             <a:avLst/>
@@ -7831,29 +7870,29 @@
               <a:buNone/>
             </a:pPr>
             <a:r>
-              <a:rPr lang="en-US" sz="1400" b="1" spc="80" kern="0" dirty="0">
-                <a:solidFill>
-                  <a:srgbClr val="595959"/>
-                </a:solidFill>
-                <a:latin typeface="Inter" pitchFamily="34" charset="0"/>
-                <a:ea typeface="Inter" pitchFamily="34" charset="-122"/>
-                <a:cs typeface="Inter" pitchFamily="34" charset="-120"/>
-              </a:rPr>
-              <a:t>PROFICIENCY</a:t>
-            </a:r>
-            <a:endParaRPr lang="en-US" sz="1400" dirty="0"/>
-          </a:p>
-        </p:txBody>
-      </p:sp>
-      <p:sp>
-        <p:nvSpPr>
-          <p:cNvPr id="9" name="Text 7"/>
-          <p:cNvSpPr txBox="1"/>
-          <p:nvPr/>
-        </p:nvSpPr>
-        <p:spPr>
-          <a:xfrm>
-            <a:off x="896112" y="2286000"/>
+              <a:rPr lang="en-US" sz="1800" b="1" dirty="0">
+                <a:solidFill>
+                  <a:srgbClr val="0B2C4A"/>
+                </a:solidFill>
+                <a:latin typeface="Inter" pitchFamily="34" charset="0"/>
+                <a:ea typeface="Inter" pitchFamily="34" charset="-122"/>
+                <a:cs typeface="Inter" pitchFamily="34" charset="-120"/>
+              </a:rPr>
+              <a:t>Hours clocked to repair orders ÷ available hours</a:t>
+            </a:r>
+            <a:endParaRPr lang="en-US" sz="1800" dirty="0"/>
+          </a:p>
+        </p:txBody>
+      </p:sp>
+      <p:sp>
+        <p:nvSpPr>
+          <p:cNvPr id="10" name="Text 8"/>
+          <p:cNvSpPr txBox="1"/>
+          <p:nvPr/>
+        </p:nvSpPr>
+        <p:spPr>
+          <a:xfrm>
+            <a:off x="896112" y="2679192"/>
             <a:ext cx="3087624" cy="868680"/>
           </a:xfrm>
           <a:prstGeom prst="rect">
@@ -7863,47 +7902,6 @@
           <a:ln/>
         </p:spPr>
         <p:txBody>
-          <a:bodyPr wrap="square" lIns="0" tIns="0" rIns="0" bIns="0" rtlCol="0" anchor="ctr">
-            <a:normAutofit/>
-          </a:bodyPr>
-          <a:lstStyle/>
-          <a:p>
-            <a:pPr indent="0" marL="0">
-              <a:buNone/>
-            </a:pPr>
-            <a:r>
-              <a:rPr lang="en-US" sz="2600" b="1" dirty="0">
-                <a:solidFill>
-                  <a:srgbClr val="0B2C4A"/>
-                </a:solidFill>
-                <a:latin typeface="Inter" pitchFamily="34" charset="0"/>
-                <a:ea typeface="Inter" pitchFamily="34" charset="-122"/>
-                <a:cs typeface="Inter" pitchFamily="34" charset="-120"/>
-              </a:rPr>
-              <a:t>Sold hours ÷ hours worked</a:t>
-            </a:r>
-            <a:endParaRPr lang="en-US" sz="2600" dirty="0"/>
-          </a:p>
-        </p:txBody>
-      </p:sp>
-      <p:sp>
-        <p:nvSpPr>
-          <p:cNvPr id="10" name="Text 8"/>
-          <p:cNvSpPr txBox="1"/>
-          <p:nvPr/>
-        </p:nvSpPr>
-        <p:spPr>
-          <a:xfrm>
-            <a:off x="896112" y="3200400"/>
-            <a:ext cx="3087624" cy="1188720"/>
-          </a:xfrm>
-          <a:prstGeom prst="rect">
-            <a:avLst/>
-          </a:prstGeom>
-          <a:noFill/>
-          <a:ln/>
-        </p:spPr>
-        <p:txBody>
           <a:bodyPr wrap="square" lIns="0" tIns="0" rIns="0" bIns="0" rtlCol="0" anchor="t"/>
           <a:lstStyle/>
           <a:p>
@@ -7919,7 +7917,7 @@
                 <a:ea typeface="Inter" pitchFamily="34" charset="-122"/>
                 <a:cs typeface="Inter" pitchFamily="34" charset="-120"/>
               </a:rPr>
-              <a:t>How many hours a tech flags for every hour they are at work. The measure on these slides: 85% target, group 94.7%.</a:t>
+              <a:t>How much of the technician's available time was spent on repair orders?</a:t>
             </a:r>
             <a:endParaRPr lang="en-US" sz="1500" dirty="0"/>
           </a:p>
@@ -7933,8 +7931,106 @@
         </p:nvSpPr>
         <p:spPr>
           <a:xfrm>
-            <a:off x="4367784" y="1481328"/>
-            <a:ext cx="3453384" cy="3017520"/>
+            <a:off x="896112" y="3584448"/>
+            <a:ext cx="3087624" cy="10973"/>
+          </a:xfrm>
+          <a:prstGeom prst="rect">
+            <a:avLst/>
+          </a:prstGeom>
+          <a:solidFill>
+            <a:srgbClr val="D9D9D9"/>
+          </a:solidFill>
+          <a:ln/>
+        </p:spPr>
+      </p:sp>
+      <p:sp>
+        <p:nvSpPr>
+          <p:cNvPr id="12" name="Text 10"/>
+          <p:cNvSpPr txBox="1"/>
+          <p:nvPr/>
+        </p:nvSpPr>
+        <p:spPr>
+          <a:xfrm>
+            <a:off x="896112" y="3657600"/>
+            <a:ext cx="3087624" cy="310896"/>
+          </a:xfrm>
+          <a:prstGeom prst="rect">
+            <a:avLst/>
+          </a:prstGeom>
+          <a:noFill/>
+          <a:ln/>
+        </p:spPr>
+        <p:txBody>
+          <a:bodyPr wrap="square" lIns="0" tIns="0" rIns="0" bIns="0" rtlCol="0" anchor="ctr"/>
+          <a:lstStyle/>
+          <a:p>
+            <a:pPr indent="0" marL="0">
+              <a:buNone/>
+            </a:pPr>
+            <a:r>
+              <a:rPr lang="en-US" sz="1600" b="1" dirty="0">
+                <a:solidFill>
+                  <a:srgbClr val="0B2C4A"/>
+                </a:solidFill>
+                <a:latin typeface="Inter" pitchFamily="34" charset="0"/>
+                <a:ea typeface="Inter" pitchFamily="34" charset="-122"/>
+                <a:cs typeface="Inter" pitchFamily="34" charset="-120"/>
+              </a:rPr>
+              <a:t>Example: 6 ÷ 8 = 75%</a:t>
+            </a:r>
+            <a:endParaRPr lang="en-US" sz="1600" dirty="0"/>
+          </a:p>
+        </p:txBody>
+      </p:sp>
+      <p:sp>
+        <p:nvSpPr>
+          <p:cNvPr id="13" name="Text 11"/>
+          <p:cNvSpPr txBox="1"/>
+          <p:nvPr/>
+        </p:nvSpPr>
+        <p:spPr>
+          <a:xfrm>
+            <a:off x="896112" y="3977640"/>
+            <a:ext cx="3087624" cy="274320"/>
+          </a:xfrm>
+          <a:prstGeom prst="rect">
+            <a:avLst/>
+          </a:prstGeom>
+          <a:noFill/>
+          <a:ln/>
+        </p:spPr>
+        <p:txBody>
+          <a:bodyPr wrap="square" lIns="0" tIns="0" rIns="0" bIns="0" rtlCol="0" anchor="ctr"/>
+          <a:lstStyle/>
+          <a:p>
+            <a:pPr indent="0" marL="0">
+              <a:buNone/>
+            </a:pPr>
+            <a:r>
+              <a:rPr lang="en-US" sz="1400" dirty="0">
+                <a:solidFill>
+                  <a:srgbClr val="595959"/>
+                </a:solidFill>
+                <a:latin typeface="Inter" pitchFamily="34" charset="0"/>
+                <a:ea typeface="Inter" pitchFamily="34" charset="-122"/>
+                <a:cs typeface="Inter" pitchFamily="34" charset="-120"/>
+              </a:rPr>
+              <a:t>Not measured in our data</a:t>
+            </a:r>
+            <a:endParaRPr lang="en-US" sz="1400" dirty="0"/>
+          </a:p>
+        </p:txBody>
+      </p:sp>
+      <p:sp>
+        <p:nvSpPr>
+          <p:cNvPr id="14" name="Shape 12"/>
+          <p:cNvSpPr/>
+          <p:nvPr/>
+        </p:nvSpPr>
+        <p:spPr>
+          <a:xfrm>
+            <a:off x="4367784" y="1417320"/>
+            <a:ext cx="3453384" cy="2926080"/>
           </a:xfrm>
           <a:prstGeom prst="rect">
             <a:avLst/>
@@ -7947,13 +8043,13 @@
       </p:sp>
       <p:sp>
         <p:nvSpPr>
-          <p:cNvPr id="12" name="Shape 10"/>
+          <p:cNvPr id="15" name="Shape 13"/>
           <p:cNvSpPr/>
           <p:nvPr/>
         </p:nvSpPr>
         <p:spPr>
           <a:xfrm>
-            <a:off x="4367784" y="1481328"/>
+            <a:off x="4367784" y="1417320"/>
             <a:ext cx="3453384" cy="64008"/>
           </a:xfrm>
           <a:prstGeom prst="rect">
@@ -7967,14 +8063,53 @@
       </p:sp>
       <p:sp>
         <p:nvSpPr>
-          <p:cNvPr id="13" name="Text 11"/>
-          <p:cNvSpPr txBox="1"/>
-          <p:nvPr/>
-        </p:nvSpPr>
-        <p:spPr>
-          <a:xfrm>
-            <a:off x="4550664" y="1691640"/>
-            <a:ext cx="3087624" cy="566928"/>
+          <p:cNvPr id="16" name="Text 14"/>
+          <p:cNvSpPr txBox="1"/>
+          <p:nvPr/>
+        </p:nvSpPr>
+        <p:spPr>
+          <a:xfrm>
+            <a:off x="4550664" y="1600200"/>
+            <a:ext cx="3087624" cy="274320"/>
+          </a:xfrm>
+          <a:prstGeom prst="rect">
+            <a:avLst/>
+          </a:prstGeom>
+          <a:noFill/>
+          <a:ln/>
+        </p:spPr>
+        <p:txBody>
+          <a:bodyPr wrap="square" lIns="0" tIns="0" rIns="0" bIns="0" rtlCol="0" anchor="ctr"/>
+          <a:lstStyle/>
+          <a:p>
+            <a:pPr indent="0" marL="0">
+              <a:buNone/>
+            </a:pPr>
+            <a:r>
+              <a:rPr lang="en-US" sz="1400" b="1" spc="80" kern="0" dirty="0">
+                <a:solidFill>
+                  <a:srgbClr val="595959"/>
+                </a:solidFill>
+                <a:latin typeface="Inter" pitchFamily="34" charset="0"/>
+                <a:ea typeface="Inter" pitchFamily="34" charset="-122"/>
+                <a:cs typeface="Inter" pitchFamily="34" charset="-120"/>
+              </a:rPr>
+              <a:t>EFFICIENCY</a:t>
+            </a:r>
+            <a:endParaRPr lang="en-US" sz="1400" dirty="0"/>
+          </a:p>
+        </p:txBody>
+      </p:sp>
+      <p:sp>
+        <p:nvSpPr>
+          <p:cNvPr id="17" name="Text 15"/>
+          <p:cNvSpPr txBox="1"/>
+          <p:nvPr/>
+        </p:nvSpPr>
+        <p:spPr>
+          <a:xfrm>
+            <a:off x="4550664" y="1920240"/>
+            <a:ext cx="3087624" cy="685800"/>
           </a:xfrm>
           <a:prstGeom prst="rect">
             <a:avLst/>
@@ -7990,6 +8125,222 @@
               <a:buNone/>
             </a:pPr>
             <a:r>
+              <a:rPr lang="en-US" sz="1800" b="1" dirty="0">
+                <a:solidFill>
+                  <a:srgbClr val="0B2C4A"/>
+                </a:solidFill>
+                <a:latin typeface="Inter" pitchFamily="34" charset="0"/>
+                <a:ea typeface="Inter" pitchFamily="34" charset="-122"/>
+                <a:cs typeface="Inter" pitchFamily="34" charset="-120"/>
+              </a:rPr>
+              <a:t>Hours flagged ÷ hours clocked to repair orders</a:t>
+            </a:r>
+            <a:endParaRPr lang="en-US" sz="1800" dirty="0"/>
+          </a:p>
+        </p:txBody>
+      </p:sp>
+      <p:sp>
+        <p:nvSpPr>
+          <p:cNvPr id="18" name="Text 16"/>
+          <p:cNvSpPr txBox="1"/>
+          <p:nvPr/>
+        </p:nvSpPr>
+        <p:spPr>
+          <a:xfrm>
+            <a:off x="4550664" y="2679192"/>
+            <a:ext cx="3087624" cy="868680"/>
+          </a:xfrm>
+          <a:prstGeom prst="rect">
+            <a:avLst/>
+          </a:prstGeom>
+          <a:noFill/>
+          <a:ln/>
+        </p:spPr>
+        <p:txBody>
+          <a:bodyPr wrap="square" lIns="0" tIns="0" rIns="0" bIns="0" rtlCol="0" anchor="t"/>
+          <a:lstStyle/>
+          <a:p>
+            <a:pPr indent="0" marL="0">
+              <a:buNone/>
+            </a:pPr>
+            <a:r>
+              <a:rPr lang="en-US" sz="1500" dirty="0">
+                <a:solidFill>
+                  <a:srgbClr val="1A1A1A"/>
+                </a:solidFill>
+                <a:latin typeface="Inter" pitchFamily="34" charset="0"/>
+                <a:ea typeface="Inter" pitchFamily="34" charset="-122"/>
+                <a:cs typeface="Inter" pitchFamily="34" charset="-120"/>
+              </a:rPr>
+              <a:t>How many labor hours did the technician produce for each hour clocked to repair orders?</a:t>
+            </a:r>
+            <a:endParaRPr lang="en-US" sz="1500" dirty="0"/>
+          </a:p>
+        </p:txBody>
+      </p:sp>
+      <p:sp>
+        <p:nvSpPr>
+          <p:cNvPr id="19" name="Shape 17"/>
+          <p:cNvSpPr/>
+          <p:nvPr/>
+        </p:nvSpPr>
+        <p:spPr>
+          <a:xfrm>
+            <a:off x="4550664" y="3584448"/>
+            <a:ext cx="3087624" cy="10973"/>
+          </a:xfrm>
+          <a:prstGeom prst="rect">
+            <a:avLst/>
+          </a:prstGeom>
+          <a:solidFill>
+            <a:srgbClr val="D9D9D9"/>
+          </a:solidFill>
+          <a:ln/>
+        </p:spPr>
+      </p:sp>
+      <p:sp>
+        <p:nvSpPr>
+          <p:cNvPr id="20" name="Text 18"/>
+          <p:cNvSpPr txBox="1"/>
+          <p:nvPr/>
+        </p:nvSpPr>
+        <p:spPr>
+          <a:xfrm>
+            <a:off x="4550664" y="3657600"/>
+            <a:ext cx="3087624" cy="310896"/>
+          </a:xfrm>
+          <a:prstGeom prst="rect">
+            <a:avLst/>
+          </a:prstGeom>
+          <a:noFill/>
+          <a:ln/>
+        </p:spPr>
+        <p:txBody>
+          <a:bodyPr wrap="square" lIns="0" tIns="0" rIns="0" bIns="0" rtlCol="0" anchor="ctr"/>
+          <a:lstStyle/>
+          <a:p>
+            <a:pPr indent="0" marL="0">
+              <a:buNone/>
+            </a:pPr>
+            <a:r>
+              <a:rPr lang="en-US" sz="1600" b="1" dirty="0">
+                <a:solidFill>
+                  <a:srgbClr val="0B2C4A"/>
+                </a:solidFill>
+                <a:latin typeface="Inter" pitchFamily="34" charset="0"/>
+                <a:ea typeface="Inter" pitchFamily="34" charset="-122"/>
+                <a:cs typeface="Inter" pitchFamily="34" charset="-120"/>
+              </a:rPr>
+              <a:t>Example: 7.5 ÷ 6 = 125%</a:t>
+            </a:r>
+            <a:endParaRPr lang="en-US" sz="1600" dirty="0"/>
+          </a:p>
+        </p:txBody>
+      </p:sp>
+      <p:sp>
+        <p:nvSpPr>
+          <p:cNvPr id="21" name="Text 19"/>
+          <p:cNvSpPr txBox="1"/>
+          <p:nvPr/>
+        </p:nvSpPr>
+        <p:spPr>
+          <a:xfrm>
+            <a:off x="4550664" y="3977640"/>
+            <a:ext cx="3087624" cy="274320"/>
+          </a:xfrm>
+          <a:prstGeom prst="rect">
+            <a:avLst/>
+          </a:prstGeom>
+          <a:noFill/>
+          <a:ln/>
+        </p:spPr>
+        <p:txBody>
+          <a:bodyPr wrap="square" lIns="0" tIns="0" rIns="0" bIns="0" rtlCol="0" anchor="ctr"/>
+          <a:lstStyle/>
+          <a:p>
+            <a:pPr indent="0" marL="0">
+              <a:buNone/>
+            </a:pPr>
+            <a:r>
+              <a:rPr lang="en-US" sz="1400" dirty="0">
+                <a:solidFill>
+                  <a:srgbClr val="595959"/>
+                </a:solidFill>
+                <a:latin typeface="Inter" pitchFamily="34" charset="0"/>
+                <a:ea typeface="Inter" pitchFamily="34" charset="-122"/>
+                <a:cs typeface="Inter" pitchFamily="34" charset="-120"/>
+              </a:rPr>
+              <a:t>Not measured in our data</a:t>
+            </a:r>
+            <a:endParaRPr lang="en-US" sz="1400" dirty="0"/>
+          </a:p>
+        </p:txBody>
+      </p:sp>
+      <p:sp>
+        <p:nvSpPr>
+          <p:cNvPr id="22" name="Shape 20"/>
+          <p:cNvSpPr/>
+          <p:nvPr/>
+        </p:nvSpPr>
+        <p:spPr>
+          <a:xfrm>
+            <a:off x="8022336" y="1417320"/>
+            <a:ext cx="3453384" cy="2926080"/>
+          </a:xfrm>
+          <a:prstGeom prst="rect">
+            <a:avLst/>
+          </a:prstGeom>
+          <a:solidFill>
+            <a:srgbClr val="F7F7F7"/>
+          </a:solidFill>
+          <a:ln/>
+        </p:spPr>
+      </p:sp>
+      <p:sp>
+        <p:nvSpPr>
+          <p:cNvPr id="23" name="Shape 21"/>
+          <p:cNvSpPr/>
+          <p:nvPr/>
+        </p:nvSpPr>
+        <p:spPr>
+          <a:xfrm>
+            <a:off x="8022336" y="1417320"/>
+            <a:ext cx="3453384" cy="64008"/>
+          </a:xfrm>
+          <a:prstGeom prst="rect">
+            <a:avLst/>
+          </a:prstGeom>
+          <a:solidFill>
+            <a:srgbClr val="2587C5"/>
+          </a:solidFill>
+          <a:ln/>
+        </p:spPr>
+      </p:sp>
+      <p:sp>
+        <p:nvSpPr>
+          <p:cNvPr id="24" name="Text 22"/>
+          <p:cNvSpPr txBox="1"/>
+          <p:nvPr/>
+        </p:nvSpPr>
+        <p:spPr>
+          <a:xfrm>
+            <a:off x="8205216" y="1600200"/>
+            <a:ext cx="3087624" cy="274320"/>
+          </a:xfrm>
+          <a:prstGeom prst="rect">
+            <a:avLst/>
+          </a:prstGeom>
+          <a:noFill/>
+          <a:ln/>
+        </p:spPr>
+        <p:txBody>
+          <a:bodyPr wrap="square" lIns="0" tIns="0" rIns="0" bIns="0" rtlCol="0" anchor="ctr"/>
+          <a:lstStyle/>
+          <a:p>
+            <a:pPr indent="0" marL="0">
+              <a:buNone/>
+            </a:pPr>
+            <a:r>
               <a:rPr lang="en-US" sz="1400" b="1" spc="80" kern="0" dirty="0">
                 <a:solidFill>
                   <a:srgbClr val="595959"/>
@@ -7998,21 +8349,60 @@
                 <a:ea typeface="Inter" pitchFamily="34" charset="-122"/>
                 <a:cs typeface="Inter" pitchFamily="34" charset="-120"/>
               </a:rPr>
-              <a:t>EFFICIENCY</a:t>
-            </a:r>
-            <a:endParaRPr lang="en-US" sz="1400" dirty="0"/>
-          </a:p>
-        </p:txBody>
-      </p:sp>
-      <p:sp>
-        <p:nvSpPr>
-          <p:cNvPr id="14" name="Text 12"/>
-          <p:cNvSpPr txBox="1"/>
-          <p:nvPr/>
-        </p:nvSpPr>
-        <p:spPr>
-          <a:xfrm>
-            <a:off x="4550664" y="2286000"/>
+              <a:t>PROFICIENCY</a:t>
+            </a:r>
+            <a:endParaRPr lang="en-US" sz="1400" dirty="0"/>
+          </a:p>
+        </p:txBody>
+      </p:sp>
+      <p:sp>
+        <p:nvSpPr>
+          <p:cNvPr id="25" name="Text 23"/>
+          <p:cNvSpPr txBox="1"/>
+          <p:nvPr/>
+        </p:nvSpPr>
+        <p:spPr>
+          <a:xfrm>
+            <a:off x="8205216" y="1920240"/>
+            <a:ext cx="3087624" cy="685800"/>
+          </a:xfrm>
+          <a:prstGeom prst="rect">
+            <a:avLst/>
+          </a:prstGeom>
+          <a:noFill/>
+          <a:ln/>
+        </p:spPr>
+        <p:txBody>
+          <a:bodyPr wrap="square" lIns="0" tIns="0" rIns="0" bIns="0" rtlCol="0" anchor="t"/>
+          <a:lstStyle/>
+          <a:p>
+            <a:pPr indent="0" marL="0">
+              <a:buNone/>
+            </a:pPr>
+            <a:r>
+              <a:rPr lang="en-US" sz="1800" b="1" dirty="0">
+                <a:solidFill>
+                  <a:srgbClr val="0B2C4A"/>
+                </a:solidFill>
+                <a:latin typeface="Inter" pitchFamily="34" charset="0"/>
+                <a:ea typeface="Inter" pitchFamily="34" charset="-122"/>
+                <a:cs typeface="Inter" pitchFamily="34" charset="-120"/>
+              </a:rPr>
+              <a:t>Hours flagged ÷ available hours</a:t>
+            </a:r>
+            <a:endParaRPr lang="en-US" sz="1800" dirty="0"/>
+          </a:p>
+        </p:txBody>
+      </p:sp>
+      <p:sp>
+        <p:nvSpPr>
+          <p:cNvPr id="26" name="Text 24"/>
+          <p:cNvSpPr txBox="1"/>
+          <p:nvPr/>
+        </p:nvSpPr>
+        <p:spPr>
+          <a:xfrm>
+            <a:off x="8205216" y="2679192"/>
             <a:ext cx="3087624" cy="868680"/>
           </a:xfrm>
           <a:prstGeom prst="rect">
@@ -8022,16 +8412,73 @@
           <a:ln/>
         </p:spPr>
         <p:txBody>
-          <a:bodyPr wrap="square" lIns="0" tIns="0" rIns="0" bIns="0" rtlCol="0" anchor="ctr">
-            <a:normAutofit/>
-          </a:bodyPr>
-          <a:lstStyle/>
-          <a:p>
-            <a:pPr indent="0" marL="0">
-              <a:buNone/>
-            </a:pPr>
-            <a:r>
-              <a:rPr lang="en-US" sz="2600" b="1" dirty="0">
+          <a:bodyPr wrap="square" lIns="0" tIns="0" rIns="0" bIns="0" rtlCol="0" anchor="t"/>
+          <a:lstStyle/>
+          <a:p>
+            <a:pPr indent="0" marL="0">
+              <a:buNone/>
+            </a:pPr>
+            <a:r>
+              <a:rPr lang="en-US" sz="1500" dirty="0">
+                <a:solidFill>
+                  <a:srgbClr val="1A1A1A"/>
+                </a:solidFill>
+                <a:latin typeface="Inter" pitchFamily="34" charset="0"/>
+                <a:ea typeface="Inter" pitchFamily="34" charset="-122"/>
+                <a:cs typeface="Inter" pitchFamily="34" charset="-120"/>
+              </a:rPr>
+              <a:t>How many labor hours did the technician produce compared with their total available time?</a:t>
+            </a:r>
+            <a:endParaRPr lang="en-US" sz="1500" dirty="0"/>
+          </a:p>
+        </p:txBody>
+      </p:sp>
+      <p:sp>
+        <p:nvSpPr>
+          <p:cNvPr id="27" name="Shape 25"/>
+          <p:cNvSpPr/>
+          <p:nvPr/>
+        </p:nvSpPr>
+        <p:spPr>
+          <a:xfrm>
+            <a:off x="8205216" y="3584448"/>
+            <a:ext cx="3087624" cy="10973"/>
+          </a:xfrm>
+          <a:prstGeom prst="rect">
+            <a:avLst/>
+          </a:prstGeom>
+          <a:solidFill>
+            <a:srgbClr val="D9D9D9"/>
+          </a:solidFill>
+          <a:ln/>
+        </p:spPr>
+      </p:sp>
+      <p:sp>
+        <p:nvSpPr>
+          <p:cNvPr id="28" name="Text 26"/>
+          <p:cNvSpPr txBox="1"/>
+          <p:nvPr/>
+        </p:nvSpPr>
+        <p:spPr>
+          <a:xfrm>
+            <a:off x="8205216" y="3657600"/>
+            <a:ext cx="3087624" cy="310896"/>
+          </a:xfrm>
+          <a:prstGeom prst="rect">
+            <a:avLst/>
+          </a:prstGeom>
+          <a:noFill/>
+          <a:ln/>
+        </p:spPr>
+        <p:txBody>
+          <a:bodyPr wrap="square" lIns="0" tIns="0" rIns="0" bIns="0" rtlCol="0" anchor="ctr"/>
+          <a:lstStyle/>
+          <a:p>
+            <a:pPr indent="0" marL="0">
+              <a:buNone/>
+            </a:pPr>
+            <a:r>
+              <a:rPr lang="en-US" sz="1600" b="1" dirty="0">
                 <a:solidFill>
                   <a:srgbClr val="0B2C4A"/>
                 </a:solidFill>
@@ -8039,38 +8486,38 @@
                 <a:ea typeface="Inter" pitchFamily="34" charset="-122"/>
                 <a:cs typeface="Inter" pitchFamily="34" charset="-120"/>
               </a:rPr>
-              <a:t>Sold hours ÷ hours on ROs</a:t>
-            </a:r>
-            <a:endParaRPr lang="en-US" sz="2600" dirty="0"/>
-          </a:p>
-        </p:txBody>
-      </p:sp>
-      <p:sp>
-        <p:nvSpPr>
-          <p:cNvPr id="15" name="Text 13"/>
-          <p:cNvSpPr txBox="1"/>
-          <p:nvPr/>
-        </p:nvSpPr>
-        <p:spPr>
-          <a:xfrm>
-            <a:off x="4550664" y="3200400"/>
-            <a:ext cx="3087624" cy="1188720"/>
-          </a:xfrm>
-          <a:prstGeom prst="rect">
-            <a:avLst/>
-          </a:prstGeom>
-          <a:noFill/>
-          <a:ln/>
-        </p:spPr>
-        <p:txBody>
-          <a:bodyPr wrap="square" lIns="0" tIns="0" rIns="0" bIns="0" rtlCol="0" anchor="t"/>
-          <a:lstStyle/>
-          <a:p>
-            <a:pPr indent="0" marL="0">
-              <a:buNone/>
-            </a:pPr>
-            <a:r>
-              <a:rPr lang="en-US" sz="1500" dirty="0">
+              <a:t>Example: 7.5 ÷ 8 = 93.75%</a:t>
+            </a:r>
+            <a:endParaRPr lang="en-US" sz="1600" dirty="0"/>
+          </a:p>
+        </p:txBody>
+      </p:sp>
+      <p:sp>
+        <p:nvSpPr>
+          <p:cNvPr id="29" name="Text 27"/>
+          <p:cNvSpPr txBox="1"/>
+          <p:nvPr/>
+        </p:nvSpPr>
+        <p:spPr>
+          <a:xfrm>
+            <a:off x="8205216" y="3977640"/>
+            <a:ext cx="3087624" cy="274320"/>
+          </a:xfrm>
+          <a:prstGeom prst="rect">
+            <a:avLst/>
+          </a:prstGeom>
+          <a:noFill/>
+          <a:ln/>
+        </p:spPr>
+        <p:txBody>
+          <a:bodyPr wrap="square" lIns="0" tIns="0" rIns="0" bIns="0" rtlCol="0" anchor="ctr"/>
+          <a:lstStyle/>
+          <a:p>
+            <a:pPr indent="0" marL="0">
+              <a:buNone/>
+            </a:pPr>
+            <a:r>
+              <a:rPr lang="en-US" sz="1400" b="1" dirty="0">
                 <a:solidFill>
                   <a:srgbClr val="1A1A1A"/>
                 </a:solidFill>
@@ -8078,119 +8525,195 @@
                 <a:ea typeface="Inter" pitchFamily="34" charset="-122"/>
                 <a:cs typeface="Inter" pitchFamily="34" charset="-120"/>
               </a:rPr>
-              <a:t>How fast a tech does the work: hours flagged against the time actually clocked on repair orders. Over 100% beats book time.</a:t>
-            </a:r>
-            <a:endParaRPr lang="en-US" sz="1500" dirty="0"/>
-          </a:p>
-        </p:txBody>
-      </p:sp>
-      <p:sp>
-        <p:nvSpPr>
-          <p:cNvPr id="16" name="Shape 14"/>
+              <a:t>Target 85% · group 94.7%</a:t>
+            </a:r>
+            <a:endParaRPr lang="en-US" sz="1400" dirty="0"/>
+          </a:p>
+        </p:txBody>
+      </p:sp>
+      <p:sp>
+        <p:nvSpPr>
+          <p:cNvPr id="30" name="Shape 28"/>
           <p:cNvSpPr/>
           <p:nvPr/>
         </p:nvSpPr>
         <p:spPr>
           <a:xfrm>
-            <a:off x="8022336" y="1481328"/>
-            <a:ext cx="3453384" cy="3017520"/>
-          </a:xfrm>
-          <a:prstGeom prst="rect">
-            <a:avLst/>
-          </a:prstGeom>
-          <a:solidFill>
-            <a:srgbClr val="F7F7F7"/>
-          </a:solidFill>
-          <a:ln/>
-        </p:spPr>
-      </p:sp>
-      <p:sp>
-        <p:nvSpPr>
-          <p:cNvPr id="17" name="Shape 15"/>
+            <a:off x="713232" y="4526280"/>
+            <a:ext cx="10762488" cy="1097280"/>
+          </a:xfrm>
+          <a:prstGeom prst="rect">
+            <a:avLst/>
+          </a:prstGeom>
+          <a:solidFill>
+            <a:srgbClr val="EDF4FA"/>
+          </a:solidFill>
+          <a:ln/>
+        </p:spPr>
+      </p:sp>
+      <p:sp>
+        <p:nvSpPr>
+          <p:cNvPr id="31" name="Text 29"/>
+          <p:cNvSpPr txBox="1"/>
+          <p:nvPr/>
+        </p:nvSpPr>
+        <p:spPr>
+          <a:xfrm>
+            <a:off x="896112" y="4654296"/>
+            <a:ext cx="10396728" cy="256032"/>
+          </a:xfrm>
+          <a:prstGeom prst="rect">
+            <a:avLst/>
+          </a:prstGeom>
+          <a:noFill/>
+          <a:ln/>
+        </p:spPr>
+        <p:txBody>
+          <a:bodyPr wrap="square" lIns="0" tIns="0" rIns="0" bIns="0" rtlCol="0" anchor="ctr"/>
+          <a:lstStyle/>
+          <a:p>
+            <a:pPr indent="0" marL="0">
+              <a:buNone/>
+            </a:pPr>
+            <a:r>
+              <a:rPr lang="en-US" sz="1400" b="1" spc="80" kern="0" dirty="0">
+                <a:solidFill>
+                  <a:srgbClr val="595959"/>
+                </a:solidFill>
+                <a:latin typeface="Inter" pitchFamily="34" charset="0"/>
+                <a:ea typeface="Inter" pitchFamily="34" charset="-122"/>
+                <a:cs typeface="Inter" pitchFamily="34" charset="-120"/>
+              </a:rPr>
+              <a:t>ILLUSTRATIVE EXAMPLE</a:t>
+            </a:r>
+            <a:endParaRPr lang="en-US" sz="1400" dirty="0"/>
+          </a:p>
+        </p:txBody>
+      </p:sp>
+      <p:sp>
+        <p:nvSpPr>
+          <p:cNvPr id="32" name="Text 30"/>
+          <p:cNvSpPr txBox="1"/>
+          <p:nvPr/>
+        </p:nvSpPr>
+        <p:spPr>
+          <a:xfrm>
+            <a:off x="896112" y="4946904"/>
+            <a:ext cx="10396728" cy="292608"/>
+          </a:xfrm>
+          <a:prstGeom prst="rect">
+            <a:avLst/>
+          </a:prstGeom>
+          <a:noFill/>
+          <a:ln/>
+        </p:spPr>
+        <p:txBody>
+          <a:bodyPr wrap="square" lIns="0" tIns="0" rIns="0" bIns="0" rtlCol="0" anchor="ctr"/>
+          <a:lstStyle/>
+          <a:p>
+            <a:pPr indent="0" marL="0">
+              <a:buNone/>
+            </a:pPr>
+            <a:r>
+              <a:rPr lang="en-US" sz="1600" dirty="0">
+                <a:solidFill>
+                  <a:srgbClr val="1A1A1A"/>
+                </a:solidFill>
+                <a:latin typeface="Inter" pitchFamily="34" charset="0"/>
+                <a:ea typeface="Inter" pitchFamily="34" charset="-122"/>
+                <a:cs typeface="Inter" pitchFamily="34" charset="-120"/>
+              </a:rPr>
+              <a:t>A technician has 8 available hours, clocks 6 hours to repair orders and flags 7.5 hours.</a:t>
+            </a:r>
+            <a:endParaRPr lang="en-US" sz="1600" dirty="0"/>
+          </a:p>
+        </p:txBody>
+      </p:sp>
+      <p:sp>
+        <p:nvSpPr>
+          <p:cNvPr id="33" name="Text 31"/>
+          <p:cNvSpPr txBox="1"/>
+          <p:nvPr/>
+        </p:nvSpPr>
+        <p:spPr>
+          <a:xfrm>
+            <a:off x="896112" y="5257800"/>
+            <a:ext cx="10396728" cy="292608"/>
+          </a:xfrm>
+          <a:prstGeom prst="rect">
+            <a:avLst/>
+          </a:prstGeom>
+          <a:noFill/>
+          <a:ln/>
+        </p:spPr>
+        <p:txBody>
+          <a:bodyPr wrap="square" lIns="0" tIns="0" rIns="0" bIns="0" rtlCol="0" anchor="ctr"/>
+          <a:lstStyle/>
+          <a:p>
+            <a:pPr indent="0" marL="0">
+              <a:buNone/>
+            </a:pPr>
+            <a:r>
+              <a:rPr lang="en-US" sz="1600" b="1" dirty="0">
+                <a:solidFill>
+                  <a:srgbClr val="0B2C4A"/>
+                </a:solidFill>
+                <a:latin typeface="Inter" pitchFamily="34" charset="0"/>
+                <a:ea typeface="Inter" pitchFamily="34" charset="-122"/>
+                <a:cs typeface="Inter" pitchFamily="34" charset="-120"/>
+              </a:rPr>
+              <a:t>Productivity × efficiency = proficiency:  75% × 125% = 93.75%</a:t>
+            </a:r>
+            <a:endParaRPr lang="en-US" sz="1600" dirty="0"/>
+          </a:p>
+        </p:txBody>
+      </p:sp>
+      <p:sp>
+        <p:nvSpPr>
+          <p:cNvPr id="34" name="Shape 32"/>
           <p:cNvSpPr/>
           <p:nvPr/>
         </p:nvSpPr>
         <p:spPr>
           <a:xfrm>
-            <a:off x="8022336" y="1481328"/>
-            <a:ext cx="3453384" cy="64008"/>
-          </a:xfrm>
-          <a:prstGeom prst="rect">
-            <a:avLst/>
-          </a:prstGeom>
-          <a:solidFill>
-            <a:srgbClr val="2587C5"/>
-          </a:solidFill>
-          <a:ln/>
-        </p:spPr>
-      </p:sp>
-      <p:sp>
-        <p:nvSpPr>
-          <p:cNvPr id="18" name="Text 16"/>
-          <p:cNvSpPr txBox="1"/>
-          <p:nvPr/>
-        </p:nvSpPr>
-        <p:spPr>
-          <a:xfrm>
-            <a:off x="8205216" y="1691640"/>
-            <a:ext cx="3087624" cy="566928"/>
-          </a:xfrm>
-          <a:prstGeom prst="rect">
-            <a:avLst/>
-          </a:prstGeom>
-          <a:noFill/>
-          <a:ln/>
-        </p:spPr>
-        <p:txBody>
-          <a:bodyPr wrap="square" lIns="0" tIns="0" rIns="0" bIns="0" rtlCol="0" anchor="t"/>
-          <a:lstStyle/>
-          <a:p>
-            <a:pPr indent="0" marL="0">
-              <a:buNone/>
-            </a:pPr>
-            <a:r>
-              <a:rPr lang="en-US" sz="1400" b="1" spc="80" kern="0" dirty="0">
-                <a:solidFill>
-                  <a:srgbClr val="595959"/>
-                </a:solidFill>
-                <a:latin typeface="Inter" pitchFamily="34" charset="0"/>
-                <a:ea typeface="Inter" pitchFamily="34" charset="-122"/>
-                <a:cs typeface="Inter" pitchFamily="34" charset="-120"/>
-              </a:rPr>
-              <a:t>PRODUCTIVITY</a:t>
-            </a:r>
-            <a:endParaRPr lang="en-US" sz="1400" dirty="0"/>
-          </a:p>
-        </p:txBody>
-      </p:sp>
-      <p:sp>
-        <p:nvSpPr>
-          <p:cNvPr id="19" name="Text 17"/>
-          <p:cNvSpPr txBox="1"/>
-          <p:nvPr/>
-        </p:nvSpPr>
-        <p:spPr>
-          <a:xfrm>
-            <a:off x="8205216" y="2286000"/>
-            <a:ext cx="3087624" cy="868680"/>
-          </a:xfrm>
-          <a:prstGeom prst="rect">
-            <a:avLst/>
-          </a:prstGeom>
-          <a:noFill/>
-          <a:ln/>
-        </p:spPr>
-        <p:txBody>
-          <a:bodyPr wrap="square" lIns="0" tIns="0" rIns="0" bIns="0" rtlCol="0" anchor="ctr">
-            <a:normAutofit/>
-          </a:bodyPr>
-          <a:lstStyle/>
-          <a:p>
-            <a:pPr indent="0" marL="0">
-              <a:buNone/>
-            </a:pPr>
-            <a:r>
-              <a:rPr lang="en-US" sz="2600" b="1" dirty="0">
+            <a:off x="457200" y="6126480"/>
+            <a:ext cx="11274552" cy="615696"/>
+          </a:xfrm>
+          <a:prstGeom prst="rect">
+            <a:avLst/>
+          </a:prstGeom>
+          <a:solidFill>
+            <a:srgbClr val="EDF4FA"/>
+          </a:solidFill>
+          <a:ln/>
+        </p:spPr>
+      </p:sp>
+      <p:sp>
+        <p:nvSpPr>
+          <p:cNvPr id="35" name="Text 33"/>
+          <p:cNvSpPr txBox="1"/>
+          <p:nvPr/>
+        </p:nvSpPr>
+        <p:spPr>
+          <a:xfrm>
+            <a:off x="658368" y="6144768"/>
+            <a:ext cx="10927080" cy="579120"/>
+          </a:xfrm>
+          <a:prstGeom prst="rect">
+            <a:avLst/>
+          </a:prstGeom>
+          <a:noFill/>
+          <a:ln/>
+        </p:spPr>
+        <p:txBody>
+          <a:bodyPr wrap="square" lIns="0" tIns="0" rIns="0" bIns="0" rtlCol="0" anchor="ctr"/>
+          <a:lstStyle/>
+          <a:p>
+            <a:pPr indent="0" marL="0">
+              <a:buNone/>
+            </a:pPr>
+            <a:r>
+              <a:rPr lang="en-US" sz="1600" b="1" dirty="0">
                 <a:solidFill>
                   <a:srgbClr val="0B2C4A"/>
                 </a:solidFill>
@@ -8198,87 +8721,9 @@
                 <a:ea typeface="Inter" pitchFamily="34" charset="-122"/>
                 <a:cs typeface="Inter" pitchFamily="34" charset="-120"/>
               </a:rPr>
-              <a:t>Hours on ROs ÷ hours worked</a:t>
-            </a:r>
-            <a:endParaRPr lang="en-US" sz="2600" dirty="0"/>
-          </a:p>
-        </p:txBody>
-      </p:sp>
-      <p:sp>
-        <p:nvSpPr>
-          <p:cNvPr id="20" name="Text 18"/>
-          <p:cNvSpPr txBox="1"/>
-          <p:nvPr/>
-        </p:nvSpPr>
-        <p:spPr>
-          <a:xfrm>
-            <a:off x="8205216" y="3200400"/>
-            <a:ext cx="3087624" cy="1188720"/>
-          </a:xfrm>
-          <a:prstGeom prst="rect">
-            <a:avLst/>
-          </a:prstGeom>
-          <a:noFill/>
-          <a:ln/>
-        </p:spPr>
-        <p:txBody>
-          <a:bodyPr wrap="square" lIns="0" tIns="0" rIns="0" bIns="0" rtlCol="0" anchor="t"/>
-          <a:lstStyle/>
-          <a:p>
-            <a:pPr indent="0" marL="0">
-              <a:buNone/>
-            </a:pPr>
-            <a:r>
-              <a:rPr lang="en-US" sz="1500" dirty="0">
-                <a:solidFill>
-                  <a:srgbClr val="1A1A1A"/>
-                </a:solidFill>
-                <a:latin typeface="Inter" pitchFamily="34" charset="0"/>
-                <a:ea typeface="Inter" pitchFamily="34" charset="-122"/>
-                <a:cs typeface="Inter" pitchFamily="34" charset="-120"/>
-              </a:rPr>
-              <a:t>How much of the day a tech spends on customer work instead of waiting on parts, dispatch or approvals.</a:t>
-            </a:r>
-            <a:endParaRPr lang="en-US" sz="1500" dirty="0"/>
-          </a:p>
-        </p:txBody>
-      </p:sp>
-      <p:sp>
-        <p:nvSpPr>
-          <p:cNvPr id="21" name="Text 19"/>
-          <p:cNvSpPr txBox="1"/>
-          <p:nvPr/>
-        </p:nvSpPr>
-        <p:spPr>
-          <a:xfrm>
-            <a:off x="713232" y="4709160"/>
-            <a:ext cx="10762488" cy="914400"/>
-          </a:xfrm>
-          <a:prstGeom prst="rect">
-            <a:avLst/>
-          </a:prstGeom>
-          <a:noFill/>
-          <a:ln/>
-        </p:spPr>
-        <p:txBody>
-          <a:bodyPr wrap="square" lIns="0" tIns="0" rIns="0" bIns="0" rtlCol="0" anchor="ctr"/>
-          <a:lstStyle/>
-          <a:p>
-            <a:pPr indent="0" marL="0">
-              <a:buNone/>
-            </a:pPr>
-            <a:r>
-              <a:rPr lang="en-US" sz="1700" dirty="0">
-                <a:solidFill>
-                  <a:srgbClr val="1A1A1A"/>
-                </a:solidFill>
-                <a:latin typeface="Inter" pitchFamily="34" charset="0"/>
-                <a:ea typeface="Inter" pitchFamily="34" charset="-122"/>
-                <a:cs typeface="Inter" pitchFamily="34" charset="-120"/>
-              </a:rPr>
-              <a:t>Proficiency = efficiency × productivity. A fast tech with nothing to work on is efficient but not proficient: the fix is dispatch, parts and approvals, not the tech.</a:t>
-            </a:r>
-            <a:endParaRPr lang="en-US" sz="1700" dirty="0"/>
+              <a:t>Productivity measures time spent on repair orders; efficiency measures hours flagged against time on repair orders; proficiency measures total hours flagged against available time.</a:t>
+            </a:r>
+            <a:endParaRPr lang="en-US" sz="1600" dirty="0"/>
           </a:p>
         </p:txBody>
       </p:sp>

--- a/day2-deck/decks/Metric Explainers - Review.pptx
+++ b/day2-deck/decks/Metric Explainers - Review.pptx
@@ -7755,7 +7755,7 @@
         <p:spPr>
           <a:xfrm>
             <a:off x="457200" y="1207008"/>
-            <a:ext cx="11274552" cy="4782312"/>
+            <a:ext cx="11274552" cy="5148072"/>
           </a:xfrm>
           <a:prstGeom prst="rect">
             <a:avLst/>
@@ -7774,8 +7774,8 @@
         </p:nvSpPr>
         <p:spPr>
           <a:xfrm>
-            <a:off x="713232" y="1417320"/>
-            <a:ext cx="3453384" cy="2926080"/>
+            <a:off x="713232" y="1463040"/>
+            <a:ext cx="3453384" cy="3063240"/>
           </a:xfrm>
           <a:prstGeom prst="rect">
             <a:avLst/>
@@ -7794,7 +7794,7 @@
         </p:nvSpPr>
         <p:spPr>
           <a:xfrm>
-            <a:off x="713232" y="1417320"/>
+            <a:off x="713232" y="1463040"/>
             <a:ext cx="3453384" cy="64008"/>
           </a:xfrm>
           <a:prstGeom prst="rect">
@@ -7814,7 +7814,7 @@
         </p:nvSpPr>
         <p:spPr>
           <a:xfrm>
-            <a:off x="896112" y="1600200"/>
+            <a:off x="896112" y="1645920"/>
             <a:ext cx="3087624" cy="274320"/>
           </a:xfrm>
           <a:prstGeom prst="rect">
@@ -7853,8 +7853,8 @@
         </p:nvSpPr>
         <p:spPr>
           <a:xfrm>
-            <a:off x="896112" y="1920240"/>
-            <a:ext cx="3087624" cy="685800"/>
+            <a:off x="896112" y="1965960"/>
+            <a:ext cx="3087624" cy="749808"/>
           </a:xfrm>
           <a:prstGeom prst="rect">
             <a:avLst/>
@@ -7870,7 +7870,7 @@
               <a:buNone/>
             </a:pPr>
             <a:r>
-              <a:rPr lang="en-US" sz="1800" b="1" dirty="0">
+              <a:rPr lang="en-US" sz="2000" b="1" dirty="0">
                 <a:solidFill>
                   <a:srgbClr val="0B2C4A"/>
                 </a:solidFill>
@@ -7880,7 +7880,7 @@
               </a:rPr>
               <a:t>Hours clocked to repair orders ÷ available hours</a:t>
             </a:r>
-            <a:endParaRPr lang="en-US" sz="1800" dirty="0"/>
+            <a:endParaRPr lang="en-US" sz="2000" dirty="0"/>
           </a:p>
         </p:txBody>
       </p:sp>
@@ -7892,8 +7892,8 @@
         </p:nvSpPr>
         <p:spPr>
           <a:xfrm>
-            <a:off x="896112" y="2679192"/>
-            <a:ext cx="3087624" cy="868680"/>
+            <a:off x="896112" y="2807208"/>
+            <a:ext cx="3087624" cy="960120"/>
           </a:xfrm>
           <a:prstGeom prst="rect">
             <a:avLst/>
@@ -7909,7 +7909,7 @@
               <a:buNone/>
             </a:pPr>
             <a:r>
-              <a:rPr lang="en-US" sz="1500" dirty="0">
+              <a:rPr lang="en-US" sz="1600" dirty="0">
                 <a:solidFill>
                   <a:srgbClr val="1A1A1A"/>
                 </a:solidFill>
@@ -7919,7 +7919,7 @@
               </a:rPr>
               <a:t>How much of the technician's available time was spent on repair orders?</a:t>
             </a:r>
-            <a:endParaRPr lang="en-US" sz="1500" dirty="0"/>
+            <a:endParaRPr lang="en-US" sz="1600" dirty="0"/>
           </a:p>
         </p:txBody>
       </p:sp>
@@ -7931,7 +7931,7 @@
         </p:nvSpPr>
         <p:spPr>
           <a:xfrm>
-            <a:off x="896112" y="3584448"/>
+            <a:off x="896112" y="3858768"/>
             <a:ext cx="3087624" cy="10973"/>
           </a:xfrm>
           <a:prstGeom prst="rect">
@@ -7951,8 +7951,8 @@
         </p:nvSpPr>
         <p:spPr>
           <a:xfrm>
-            <a:off x="896112" y="3657600"/>
-            <a:ext cx="3087624" cy="310896"/>
+            <a:off x="896112" y="3950208"/>
+            <a:ext cx="3087624" cy="411480"/>
           </a:xfrm>
           <a:prstGeom prst="rect">
             <a:avLst/>
@@ -7968,7 +7968,7 @@
               <a:buNone/>
             </a:pPr>
             <a:r>
-              <a:rPr lang="en-US" sz="1600" b="1" dirty="0">
+              <a:rPr lang="en-US" sz="1800" b="1" dirty="0">
                 <a:solidFill>
                   <a:srgbClr val="0B2C4A"/>
                 </a:solidFill>
@@ -7978,48 +7978,29 @@
               </a:rPr>
               <a:t>Example: 6 ÷ 8 = 75%</a:t>
             </a:r>
-            <a:endParaRPr lang="en-US" sz="1600" dirty="0"/>
-          </a:p>
-        </p:txBody>
-      </p:sp>
-      <p:sp>
-        <p:nvSpPr>
-          <p:cNvPr id="13" name="Text 11"/>
-          <p:cNvSpPr txBox="1"/>
-          <p:nvPr/>
-        </p:nvSpPr>
-        <p:spPr>
-          <a:xfrm>
-            <a:off x="896112" y="3977640"/>
-            <a:ext cx="3087624" cy="274320"/>
-          </a:xfrm>
-          <a:prstGeom prst="rect">
-            <a:avLst/>
-          </a:prstGeom>
-          <a:noFill/>
-          <a:ln/>
-        </p:spPr>
-        <p:txBody>
-          <a:bodyPr wrap="square" lIns="0" tIns="0" rIns="0" bIns="0" rtlCol="0" anchor="ctr"/>
-          <a:lstStyle/>
-          <a:p>
-            <a:pPr indent="0" marL="0">
-              <a:buNone/>
-            </a:pPr>
-            <a:r>
-              <a:rPr lang="en-US" sz="1400" dirty="0">
-                <a:solidFill>
-                  <a:srgbClr val="595959"/>
-                </a:solidFill>
-                <a:latin typeface="Inter" pitchFamily="34" charset="0"/>
-                <a:ea typeface="Inter" pitchFamily="34" charset="-122"/>
-                <a:cs typeface="Inter" pitchFamily="34" charset="-120"/>
-              </a:rPr>
-              <a:t>Not measured in our data</a:t>
-            </a:r>
-            <a:endParaRPr lang="en-US" sz="1400" dirty="0"/>
-          </a:p>
-        </p:txBody>
+            <a:endParaRPr lang="en-US" sz="1800" dirty="0"/>
+          </a:p>
+        </p:txBody>
+      </p:sp>
+      <p:sp>
+        <p:nvSpPr>
+          <p:cNvPr id="13" name="Shape 11"/>
+          <p:cNvSpPr/>
+          <p:nvPr/>
+        </p:nvSpPr>
+        <p:spPr>
+          <a:xfrm>
+            <a:off x="4367784" y="1463040"/>
+            <a:ext cx="3453384" cy="3063240"/>
+          </a:xfrm>
+          <a:prstGeom prst="rect">
+            <a:avLst/>
+          </a:prstGeom>
+          <a:solidFill>
+            <a:srgbClr val="F7F7F7"/>
+          </a:solidFill>
+          <a:ln/>
+        </p:spPr>
       </p:sp>
       <p:sp>
         <p:nvSpPr>
@@ -8029,8 +8010,204 @@
         </p:nvSpPr>
         <p:spPr>
           <a:xfrm>
-            <a:off x="4367784" y="1417320"/>
-            <a:ext cx="3453384" cy="2926080"/>
+            <a:off x="4367784" y="1463040"/>
+            <a:ext cx="3453384" cy="64008"/>
+          </a:xfrm>
+          <a:prstGeom prst="rect">
+            <a:avLst/>
+          </a:prstGeom>
+          <a:solidFill>
+            <a:srgbClr val="2587C5"/>
+          </a:solidFill>
+          <a:ln/>
+        </p:spPr>
+      </p:sp>
+      <p:sp>
+        <p:nvSpPr>
+          <p:cNvPr id="15" name="Text 13"/>
+          <p:cNvSpPr txBox="1"/>
+          <p:nvPr/>
+        </p:nvSpPr>
+        <p:spPr>
+          <a:xfrm>
+            <a:off x="4550664" y="1645920"/>
+            <a:ext cx="3087624" cy="274320"/>
+          </a:xfrm>
+          <a:prstGeom prst="rect">
+            <a:avLst/>
+          </a:prstGeom>
+          <a:noFill/>
+          <a:ln/>
+        </p:spPr>
+        <p:txBody>
+          <a:bodyPr wrap="square" lIns="0" tIns="0" rIns="0" bIns="0" rtlCol="0" anchor="ctr"/>
+          <a:lstStyle/>
+          <a:p>
+            <a:pPr indent="0" marL="0">
+              <a:buNone/>
+            </a:pPr>
+            <a:r>
+              <a:rPr lang="en-US" sz="1400" b="1" spc="80" kern="0" dirty="0">
+                <a:solidFill>
+                  <a:srgbClr val="595959"/>
+                </a:solidFill>
+                <a:latin typeface="Inter" pitchFamily="34" charset="0"/>
+                <a:ea typeface="Inter" pitchFamily="34" charset="-122"/>
+                <a:cs typeface="Inter" pitchFamily="34" charset="-120"/>
+              </a:rPr>
+              <a:t>EFFICIENCY</a:t>
+            </a:r>
+            <a:endParaRPr lang="en-US" sz="1400" dirty="0"/>
+          </a:p>
+        </p:txBody>
+      </p:sp>
+      <p:sp>
+        <p:nvSpPr>
+          <p:cNvPr id="16" name="Text 14"/>
+          <p:cNvSpPr txBox="1"/>
+          <p:nvPr/>
+        </p:nvSpPr>
+        <p:spPr>
+          <a:xfrm>
+            <a:off x="4550664" y="1965960"/>
+            <a:ext cx="3087624" cy="749808"/>
+          </a:xfrm>
+          <a:prstGeom prst="rect">
+            <a:avLst/>
+          </a:prstGeom>
+          <a:noFill/>
+          <a:ln/>
+        </p:spPr>
+        <p:txBody>
+          <a:bodyPr wrap="square" lIns="0" tIns="0" rIns="0" bIns="0" rtlCol="0" anchor="t"/>
+          <a:lstStyle/>
+          <a:p>
+            <a:pPr indent="0" marL="0">
+              <a:buNone/>
+            </a:pPr>
+            <a:r>
+              <a:rPr lang="en-US" sz="2000" b="1" dirty="0">
+                <a:solidFill>
+                  <a:srgbClr val="0B2C4A"/>
+                </a:solidFill>
+                <a:latin typeface="Inter" pitchFamily="34" charset="0"/>
+                <a:ea typeface="Inter" pitchFamily="34" charset="-122"/>
+                <a:cs typeface="Inter" pitchFamily="34" charset="-120"/>
+              </a:rPr>
+              <a:t>Hours flagged ÷ hours clocked to repair orders</a:t>
+            </a:r>
+            <a:endParaRPr lang="en-US" sz="2000" dirty="0"/>
+          </a:p>
+        </p:txBody>
+      </p:sp>
+      <p:sp>
+        <p:nvSpPr>
+          <p:cNvPr id="17" name="Text 15"/>
+          <p:cNvSpPr txBox="1"/>
+          <p:nvPr/>
+        </p:nvSpPr>
+        <p:spPr>
+          <a:xfrm>
+            <a:off x="4550664" y="2807208"/>
+            <a:ext cx="3087624" cy="960120"/>
+          </a:xfrm>
+          <a:prstGeom prst="rect">
+            <a:avLst/>
+          </a:prstGeom>
+          <a:noFill/>
+          <a:ln/>
+        </p:spPr>
+        <p:txBody>
+          <a:bodyPr wrap="square" lIns="0" tIns="0" rIns="0" bIns="0" rtlCol="0" anchor="t"/>
+          <a:lstStyle/>
+          <a:p>
+            <a:pPr indent="0" marL="0">
+              <a:buNone/>
+            </a:pPr>
+            <a:r>
+              <a:rPr lang="en-US" sz="1600" dirty="0">
+                <a:solidFill>
+                  <a:srgbClr val="1A1A1A"/>
+                </a:solidFill>
+                <a:latin typeface="Inter" pitchFamily="34" charset="0"/>
+                <a:ea typeface="Inter" pitchFamily="34" charset="-122"/>
+                <a:cs typeface="Inter" pitchFamily="34" charset="-120"/>
+              </a:rPr>
+              <a:t>How many labor hours did the technician produce for each hour clocked to repair orders?</a:t>
+            </a:r>
+            <a:endParaRPr lang="en-US" sz="1600" dirty="0"/>
+          </a:p>
+        </p:txBody>
+      </p:sp>
+      <p:sp>
+        <p:nvSpPr>
+          <p:cNvPr id="18" name="Shape 16"/>
+          <p:cNvSpPr/>
+          <p:nvPr/>
+        </p:nvSpPr>
+        <p:spPr>
+          <a:xfrm>
+            <a:off x="4550664" y="3858768"/>
+            <a:ext cx="3087624" cy="10973"/>
+          </a:xfrm>
+          <a:prstGeom prst="rect">
+            <a:avLst/>
+          </a:prstGeom>
+          <a:solidFill>
+            <a:srgbClr val="D9D9D9"/>
+          </a:solidFill>
+          <a:ln/>
+        </p:spPr>
+      </p:sp>
+      <p:sp>
+        <p:nvSpPr>
+          <p:cNvPr id="19" name="Text 17"/>
+          <p:cNvSpPr txBox="1"/>
+          <p:nvPr/>
+        </p:nvSpPr>
+        <p:spPr>
+          <a:xfrm>
+            <a:off x="4550664" y="3950208"/>
+            <a:ext cx="3087624" cy="411480"/>
+          </a:xfrm>
+          <a:prstGeom prst="rect">
+            <a:avLst/>
+          </a:prstGeom>
+          <a:noFill/>
+          <a:ln/>
+        </p:spPr>
+        <p:txBody>
+          <a:bodyPr wrap="square" lIns="0" tIns="0" rIns="0" bIns="0" rtlCol="0" anchor="ctr"/>
+          <a:lstStyle/>
+          <a:p>
+            <a:pPr indent="0" marL="0">
+              <a:buNone/>
+            </a:pPr>
+            <a:r>
+              <a:rPr lang="en-US" sz="1800" b="1" dirty="0">
+                <a:solidFill>
+                  <a:srgbClr val="0B2C4A"/>
+                </a:solidFill>
+                <a:latin typeface="Inter" pitchFamily="34" charset="0"/>
+                <a:ea typeface="Inter" pitchFamily="34" charset="-122"/>
+                <a:cs typeface="Inter" pitchFamily="34" charset="-120"/>
+              </a:rPr>
+              <a:t>Example: 7.5 ÷ 6 = 125%</a:t>
+            </a:r>
+            <a:endParaRPr lang="en-US" sz="1800" dirty="0"/>
+          </a:p>
+        </p:txBody>
+      </p:sp>
+      <p:sp>
+        <p:nvSpPr>
+          <p:cNvPr id="20" name="Shape 18"/>
+          <p:cNvSpPr/>
+          <p:nvPr/>
+        </p:nvSpPr>
+        <p:spPr>
+          <a:xfrm>
+            <a:off x="8022336" y="1463040"/>
+            <a:ext cx="3453384" cy="3063240"/>
           </a:xfrm>
           <a:prstGeom prst="rect">
             <a:avLst/>
@@ -8043,13 +8220,13 @@
       </p:sp>
       <p:sp>
         <p:nvSpPr>
-          <p:cNvPr id="15" name="Shape 13"/>
+          <p:cNvPr id="21" name="Shape 19"/>
           <p:cNvSpPr/>
           <p:nvPr/>
         </p:nvSpPr>
         <p:spPr>
           <a:xfrm>
-            <a:off x="4367784" y="1417320"/>
+            <a:off x="8022336" y="1463040"/>
             <a:ext cx="3453384" cy="64008"/>
           </a:xfrm>
           <a:prstGeom prst="rect">
@@ -8063,13 +8240,13 @@
       </p:sp>
       <p:sp>
         <p:nvSpPr>
-          <p:cNvPr id="16" name="Text 14"/>
-          <p:cNvSpPr txBox="1"/>
-          <p:nvPr/>
-        </p:nvSpPr>
-        <p:spPr>
-          <a:xfrm>
-            <a:off x="4550664" y="1600200"/>
+          <p:cNvPr id="22" name="Text 20"/>
+          <p:cNvSpPr txBox="1"/>
+          <p:nvPr/>
+        </p:nvSpPr>
+        <p:spPr>
+          <a:xfrm>
+            <a:off x="8205216" y="1645920"/>
             <a:ext cx="3087624" cy="274320"/>
           </a:xfrm>
           <a:prstGeom prst="rect">
@@ -8094,22 +8271,22 @@
                 <a:ea typeface="Inter" pitchFamily="34" charset="-122"/>
                 <a:cs typeface="Inter" pitchFamily="34" charset="-120"/>
               </a:rPr>
-              <a:t>EFFICIENCY</a:t>
-            </a:r>
-            <a:endParaRPr lang="en-US" sz="1400" dirty="0"/>
-          </a:p>
-        </p:txBody>
-      </p:sp>
-      <p:sp>
-        <p:nvSpPr>
-          <p:cNvPr id="17" name="Text 15"/>
-          <p:cNvSpPr txBox="1"/>
-          <p:nvPr/>
-        </p:nvSpPr>
-        <p:spPr>
-          <a:xfrm>
-            <a:off x="4550664" y="1920240"/>
-            <a:ext cx="3087624" cy="685800"/>
+              <a:t>PROFICIENCY</a:t>
+            </a:r>
+            <a:endParaRPr lang="en-US" sz="1400" dirty="0"/>
+          </a:p>
+        </p:txBody>
+      </p:sp>
+      <p:sp>
+        <p:nvSpPr>
+          <p:cNvPr id="23" name="Text 21"/>
+          <p:cNvSpPr txBox="1"/>
+          <p:nvPr/>
+        </p:nvSpPr>
+        <p:spPr>
+          <a:xfrm>
+            <a:off x="8205216" y="1965960"/>
+            <a:ext cx="3087624" cy="749808"/>
           </a:xfrm>
           <a:prstGeom prst="rect">
             <a:avLst/>
@@ -8125,6 +8302,104 @@
               <a:buNone/>
             </a:pPr>
             <a:r>
+              <a:rPr lang="en-US" sz="2000" b="1" dirty="0">
+                <a:solidFill>
+                  <a:srgbClr val="0B2C4A"/>
+                </a:solidFill>
+                <a:latin typeface="Inter" pitchFamily="34" charset="0"/>
+                <a:ea typeface="Inter" pitchFamily="34" charset="-122"/>
+                <a:cs typeface="Inter" pitchFamily="34" charset="-120"/>
+              </a:rPr>
+              <a:t>Hours flagged ÷ available hours</a:t>
+            </a:r>
+            <a:endParaRPr lang="en-US" sz="2000" dirty="0"/>
+          </a:p>
+        </p:txBody>
+      </p:sp>
+      <p:sp>
+        <p:nvSpPr>
+          <p:cNvPr id="24" name="Text 22"/>
+          <p:cNvSpPr txBox="1"/>
+          <p:nvPr/>
+        </p:nvSpPr>
+        <p:spPr>
+          <a:xfrm>
+            <a:off x="8205216" y="2807208"/>
+            <a:ext cx="3087624" cy="960120"/>
+          </a:xfrm>
+          <a:prstGeom prst="rect">
+            <a:avLst/>
+          </a:prstGeom>
+          <a:noFill/>
+          <a:ln/>
+        </p:spPr>
+        <p:txBody>
+          <a:bodyPr wrap="square" lIns="0" tIns="0" rIns="0" bIns="0" rtlCol="0" anchor="t"/>
+          <a:lstStyle/>
+          <a:p>
+            <a:pPr indent="0" marL="0">
+              <a:buNone/>
+            </a:pPr>
+            <a:r>
+              <a:rPr lang="en-US" sz="1600" dirty="0">
+                <a:solidFill>
+                  <a:srgbClr val="1A1A1A"/>
+                </a:solidFill>
+                <a:latin typeface="Inter" pitchFamily="34" charset="0"/>
+                <a:ea typeface="Inter" pitchFamily="34" charset="-122"/>
+                <a:cs typeface="Inter" pitchFamily="34" charset="-120"/>
+              </a:rPr>
+              <a:t>How many labor hours did the technician produce compared with their total available time?</a:t>
+            </a:r>
+            <a:endParaRPr lang="en-US" sz="1600" dirty="0"/>
+          </a:p>
+        </p:txBody>
+      </p:sp>
+      <p:sp>
+        <p:nvSpPr>
+          <p:cNvPr id="25" name="Shape 23"/>
+          <p:cNvSpPr/>
+          <p:nvPr/>
+        </p:nvSpPr>
+        <p:spPr>
+          <a:xfrm>
+            <a:off x="8205216" y="3858768"/>
+            <a:ext cx="3087624" cy="10973"/>
+          </a:xfrm>
+          <a:prstGeom prst="rect">
+            <a:avLst/>
+          </a:prstGeom>
+          <a:solidFill>
+            <a:srgbClr val="D9D9D9"/>
+          </a:solidFill>
+          <a:ln/>
+        </p:spPr>
+      </p:sp>
+      <p:sp>
+        <p:nvSpPr>
+          <p:cNvPr id="26" name="Text 24"/>
+          <p:cNvSpPr txBox="1"/>
+          <p:nvPr/>
+        </p:nvSpPr>
+        <p:spPr>
+          <a:xfrm>
+            <a:off x="8205216" y="3950208"/>
+            <a:ext cx="3087624" cy="411480"/>
+          </a:xfrm>
+          <a:prstGeom prst="rect">
+            <a:avLst/>
+          </a:prstGeom>
+          <a:noFill/>
+          <a:ln/>
+        </p:spPr>
+        <p:txBody>
+          <a:bodyPr wrap="square" lIns="0" tIns="0" rIns="0" bIns="0" rtlCol="0" anchor="ctr"/>
+          <a:lstStyle/>
+          <a:p>
+            <a:pPr indent="0" marL="0">
+              <a:buNone/>
+            </a:pPr>
+            <a:r>
               <a:rPr lang="en-US" sz="1800" b="1" dirty="0">
                 <a:solidFill>
                   <a:srgbClr val="0B2C4A"/>
@@ -8133,303 +8408,9 @@
                 <a:ea typeface="Inter" pitchFamily="34" charset="-122"/>
                 <a:cs typeface="Inter" pitchFamily="34" charset="-120"/>
               </a:rPr>
-              <a:t>Hours flagged ÷ hours clocked to repair orders</a:t>
+              <a:t>Example: 7.5 ÷ 8 = 93.75%</a:t>
             </a:r>
             <a:endParaRPr lang="en-US" sz="1800" dirty="0"/>
-          </a:p>
-        </p:txBody>
-      </p:sp>
-      <p:sp>
-        <p:nvSpPr>
-          <p:cNvPr id="18" name="Text 16"/>
-          <p:cNvSpPr txBox="1"/>
-          <p:nvPr/>
-        </p:nvSpPr>
-        <p:spPr>
-          <a:xfrm>
-            <a:off x="4550664" y="2679192"/>
-            <a:ext cx="3087624" cy="868680"/>
-          </a:xfrm>
-          <a:prstGeom prst="rect">
-            <a:avLst/>
-          </a:prstGeom>
-          <a:noFill/>
-          <a:ln/>
-        </p:spPr>
-        <p:txBody>
-          <a:bodyPr wrap="square" lIns="0" tIns="0" rIns="0" bIns="0" rtlCol="0" anchor="t"/>
-          <a:lstStyle/>
-          <a:p>
-            <a:pPr indent="0" marL="0">
-              <a:buNone/>
-            </a:pPr>
-            <a:r>
-              <a:rPr lang="en-US" sz="1500" dirty="0">
-                <a:solidFill>
-                  <a:srgbClr val="1A1A1A"/>
-                </a:solidFill>
-                <a:latin typeface="Inter" pitchFamily="34" charset="0"/>
-                <a:ea typeface="Inter" pitchFamily="34" charset="-122"/>
-                <a:cs typeface="Inter" pitchFamily="34" charset="-120"/>
-              </a:rPr>
-              <a:t>How many labor hours did the technician produce for each hour clocked to repair orders?</a:t>
-            </a:r>
-            <a:endParaRPr lang="en-US" sz="1500" dirty="0"/>
-          </a:p>
-        </p:txBody>
-      </p:sp>
-      <p:sp>
-        <p:nvSpPr>
-          <p:cNvPr id="19" name="Shape 17"/>
-          <p:cNvSpPr/>
-          <p:nvPr/>
-        </p:nvSpPr>
-        <p:spPr>
-          <a:xfrm>
-            <a:off x="4550664" y="3584448"/>
-            <a:ext cx="3087624" cy="10973"/>
-          </a:xfrm>
-          <a:prstGeom prst="rect">
-            <a:avLst/>
-          </a:prstGeom>
-          <a:solidFill>
-            <a:srgbClr val="D9D9D9"/>
-          </a:solidFill>
-          <a:ln/>
-        </p:spPr>
-      </p:sp>
-      <p:sp>
-        <p:nvSpPr>
-          <p:cNvPr id="20" name="Text 18"/>
-          <p:cNvSpPr txBox="1"/>
-          <p:nvPr/>
-        </p:nvSpPr>
-        <p:spPr>
-          <a:xfrm>
-            <a:off x="4550664" y="3657600"/>
-            <a:ext cx="3087624" cy="310896"/>
-          </a:xfrm>
-          <a:prstGeom prst="rect">
-            <a:avLst/>
-          </a:prstGeom>
-          <a:noFill/>
-          <a:ln/>
-        </p:spPr>
-        <p:txBody>
-          <a:bodyPr wrap="square" lIns="0" tIns="0" rIns="0" bIns="0" rtlCol="0" anchor="ctr"/>
-          <a:lstStyle/>
-          <a:p>
-            <a:pPr indent="0" marL="0">
-              <a:buNone/>
-            </a:pPr>
-            <a:r>
-              <a:rPr lang="en-US" sz="1600" b="1" dirty="0">
-                <a:solidFill>
-                  <a:srgbClr val="0B2C4A"/>
-                </a:solidFill>
-                <a:latin typeface="Inter" pitchFamily="34" charset="0"/>
-                <a:ea typeface="Inter" pitchFamily="34" charset="-122"/>
-                <a:cs typeface="Inter" pitchFamily="34" charset="-120"/>
-              </a:rPr>
-              <a:t>Example: 7.5 ÷ 6 = 125%</a:t>
-            </a:r>
-            <a:endParaRPr lang="en-US" sz="1600" dirty="0"/>
-          </a:p>
-        </p:txBody>
-      </p:sp>
-      <p:sp>
-        <p:nvSpPr>
-          <p:cNvPr id="21" name="Text 19"/>
-          <p:cNvSpPr txBox="1"/>
-          <p:nvPr/>
-        </p:nvSpPr>
-        <p:spPr>
-          <a:xfrm>
-            <a:off x="4550664" y="3977640"/>
-            <a:ext cx="3087624" cy="274320"/>
-          </a:xfrm>
-          <a:prstGeom prst="rect">
-            <a:avLst/>
-          </a:prstGeom>
-          <a:noFill/>
-          <a:ln/>
-        </p:spPr>
-        <p:txBody>
-          <a:bodyPr wrap="square" lIns="0" tIns="0" rIns="0" bIns="0" rtlCol="0" anchor="ctr"/>
-          <a:lstStyle/>
-          <a:p>
-            <a:pPr indent="0" marL="0">
-              <a:buNone/>
-            </a:pPr>
-            <a:r>
-              <a:rPr lang="en-US" sz="1400" dirty="0">
-                <a:solidFill>
-                  <a:srgbClr val="595959"/>
-                </a:solidFill>
-                <a:latin typeface="Inter" pitchFamily="34" charset="0"/>
-                <a:ea typeface="Inter" pitchFamily="34" charset="-122"/>
-                <a:cs typeface="Inter" pitchFamily="34" charset="-120"/>
-              </a:rPr>
-              <a:t>Not measured in our data</a:t>
-            </a:r>
-            <a:endParaRPr lang="en-US" sz="1400" dirty="0"/>
-          </a:p>
-        </p:txBody>
-      </p:sp>
-      <p:sp>
-        <p:nvSpPr>
-          <p:cNvPr id="22" name="Shape 20"/>
-          <p:cNvSpPr/>
-          <p:nvPr/>
-        </p:nvSpPr>
-        <p:spPr>
-          <a:xfrm>
-            <a:off x="8022336" y="1417320"/>
-            <a:ext cx="3453384" cy="2926080"/>
-          </a:xfrm>
-          <a:prstGeom prst="rect">
-            <a:avLst/>
-          </a:prstGeom>
-          <a:solidFill>
-            <a:srgbClr val="F7F7F7"/>
-          </a:solidFill>
-          <a:ln/>
-        </p:spPr>
-      </p:sp>
-      <p:sp>
-        <p:nvSpPr>
-          <p:cNvPr id="23" name="Shape 21"/>
-          <p:cNvSpPr/>
-          <p:nvPr/>
-        </p:nvSpPr>
-        <p:spPr>
-          <a:xfrm>
-            <a:off x="8022336" y="1417320"/>
-            <a:ext cx="3453384" cy="64008"/>
-          </a:xfrm>
-          <a:prstGeom prst="rect">
-            <a:avLst/>
-          </a:prstGeom>
-          <a:solidFill>
-            <a:srgbClr val="2587C5"/>
-          </a:solidFill>
-          <a:ln/>
-        </p:spPr>
-      </p:sp>
-      <p:sp>
-        <p:nvSpPr>
-          <p:cNvPr id="24" name="Text 22"/>
-          <p:cNvSpPr txBox="1"/>
-          <p:nvPr/>
-        </p:nvSpPr>
-        <p:spPr>
-          <a:xfrm>
-            <a:off x="8205216" y="1600200"/>
-            <a:ext cx="3087624" cy="274320"/>
-          </a:xfrm>
-          <a:prstGeom prst="rect">
-            <a:avLst/>
-          </a:prstGeom>
-          <a:noFill/>
-          <a:ln/>
-        </p:spPr>
-        <p:txBody>
-          <a:bodyPr wrap="square" lIns="0" tIns="0" rIns="0" bIns="0" rtlCol="0" anchor="ctr"/>
-          <a:lstStyle/>
-          <a:p>
-            <a:pPr indent="0" marL="0">
-              <a:buNone/>
-            </a:pPr>
-            <a:r>
-              <a:rPr lang="en-US" sz="1400" b="1" spc="80" kern="0" dirty="0">
-                <a:solidFill>
-                  <a:srgbClr val="595959"/>
-                </a:solidFill>
-                <a:latin typeface="Inter" pitchFamily="34" charset="0"/>
-                <a:ea typeface="Inter" pitchFamily="34" charset="-122"/>
-                <a:cs typeface="Inter" pitchFamily="34" charset="-120"/>
-              </a:rPr>
-              <a:t>PROFICIENCY</a:t>
-            </a:r>
-            <a:endParaRPr lang="en-US" sz="1400" dirty="0"/>
-          </a:p>
-        </p:txBody>
-      </p:sp>
-      <p:sp>
-        <p:nvSpPr>
-          <p:cNvPr id="25" name="Text 23"/>
-          <p:cNvSpPr txBox="1"/>
-          <p:nvPr/>
-        </p:nvSpPr>
-        <p:spPr>
-          <a:xfrm>
-            <a:off x="8205216" y="1920240"/>
-            <a:ext cx="3087624" cy="685800"/>
-          </a:xfrm>
-          <a:prstGeom prst="rect">
-            <a:avLst/>
-          </a:prstGeom>
-          <a:noFill/>
-          <a:ln/>
-        </p:spPr>
-        <p:txBody>
-          <a:bodyPr wrap="square" lIns="0" tIns="0" rIns="0" bIns="0" rtlCol="0" anchor="t"/>
-          <a:lstStyle/>
-          <a:p>
-            <a:pPr indent="0" marL="0">
-              <a:buNone/>
-            </a:pPr>
-            <a:r>
-              <a:rPr lang="en-US" sz="1800" b="1" dirty="0">
-                <a:solidFill>
-                  <a:srgbClr val="0B2C4A"/>
-                </a:solidFill>
-                <a:latin typeface="Inter" pitchFamily="34" charset="0"/>
-                <a:ea typeface="Inter" pitchFamily="34" charset="-122"/>
-                <a:cs typeface="Inter" pitchFamily="34" charset="-120"/>
-              </a:rPr>
-              <a:t>Hours flagged ÷ available hours</a:t>
-            </a:r>
-            <a:endParaRPr lang="en-US" sz="1800" dirty="0"/>
-          </a:p>
-        </p:txBody>
-      </p:sp>
-      <p:sp>
-        <p:nvSpPr>
-          <p:cNvPr id="26" name="Text 24"/>
-          <p:cNvSpPr txBox="1"/>
-          <p:nvPr/>
-        </p:nvSpPr>
-        <p:spPr>
-          <a:xfrm>
-            <a:off x="8205216" y="2679192"/>
-            <a:ext cx="3087624" cy="868680"/>
-          </a:xfrm>
-          <a:prstGeom prst="rect">
-            <a:avLst/>
-          </a:prstGeom>
-          <a:noFill/>
-          <a:ln/>
-        </p:spPr>
-        <p:txBody>
-          <a:bodyPr wrap="square" lIns="0" tIns="0" rIns="0" bIns="0" rtlCol="0" anchor="t"/>
-          <a:lstStyle/>
-          <a:p>
-            <a:pPr indent="0" marL="0">
-              <a:buNone/>
-            </a:pPr>
-            <a:r>
-              <a:rPr lang="en-US" sz="1500" dirty="0">
-                <a:solidFill>
-                  <a:srgbClr val="1A1A1A"/>
-                </a:solidFill>
-                <a:latin typeface="Inter" pitchFamily="34" charset="0"/>
-                <a:ea typeface="Inter" pitchFamily="34" charset="-122"/>
-                <a:cs typeface="Inter" pitchFamily="34" charset="-120"/>
-              </a:rPr>
-              <a:t>How many labor hours did the technician produce compared with their total available time?</a:t>
-            </a:r>
-            <a:endParaRPr lang="en-US" sz="1500" dirty="0"/>
           </a:p>
         </p:txBody>
       </p:sp>
@@ -8441,14 +8422,14 @@
         </p:nvSpPr>
         <p:spPr>
           <a:xfrm>
-            <a:off x="8205216" y="3584448"/>
-            <a:ext cx="3087624" cy="10973"/>
-          </a:xfrm>
-          <a:prstGeom prst="rect">
-            <a:avLst/>
-          </a:prstGeom>
-          <a:solidFill>
-            <a:srgbClr val="D9D9D9"/>
+            <a:off x="713232" y="4754880"/>
+            <a:ext cx="10762488" cy="1261872"/>
+          </a:xfrm>
+          <a:prstGeom prst="rect">
+            <a:avLst/>
+          </a:prstGeom>
+          <a:solidFill>
+            <a:srgbClr val="EDF4FA"/>
           </a:solidFill>
           <a:ln/>
         </p:spPr>
@@ -8461,8 +8442,8 @@
         </p:nvSpPr>
         <p:spPr>
           <a:xfrm>
-            <a:off x="8205216" y="3657600"/>
-            <a:ext cx="3087624" cy="310896"/>
+            <a:off x="896112" y="4901184"/>
+            <a:ext cx="10396728" cy="256032"/>
           </a:xfrm>
           <a:prstGeom prst="rect">
             <a:avLst/>
@@ -8478,7 +8459,85 @@
               <a:buNone/>
             </a:pPr>
             <a:r>
-              <a:rPr lang="en-US" sz="1600" b="1" dirty="0">
+              <a:rPr lang="en-US" sz="1400" b="1" spc="80" kern="0" dirty="0">
+                <a:solidFill>
+                  <a:srgbClr val="595959"/>
+                </a:solidFill>
+                <a:latin typeface="Inter" pitchFamily="34" charset="0"/>
+                <a:ea typeface="Inter" pitchFamily="34" charset="-122"/>
+                <a:cs typeface="Inter" pitchFamily="34" charset="-120"/>
+              </a:rPr>
+              <a:t>PUTTING IT TOGETHER: ONE TECHNICIAN, ONE DAY</a:t>
+            </a:r>
+            <a:endParaRPr lang="en-US" sz="1400" dirty="0"/>
+          </a:p>
+        </p:txBody>
+      </p:sp>
+      <p:sp>
+        <p:nvSpPr>
+          <p:cNvPr id="29" name="Text 27"/>
+          <p:cNvSpPr txBox="1"/>
+          <p:nvPr/>
+        </p:nvSpPr>
+        <p:spPr>
+          <a:xfrm>
+            <a:off x="896112" y="5212080"/>
+            <a:ext cx="10396728" cy="329184"/>
+          </a:xfrm>
+          <a:prstGeom prst="rect">
+            <a:avLst/>
+          </a:prstGeom>
+          <a:noFill/>
+          <a:ln/>
+        </p:spPr>
+        <p:txBody>
+          <a:bodyPr wrap="square" lIns="0" tIns="0" rIns="0" bIns="0" rtlCol="0" anchor="ctr"/>
+          <a:lstStyle/>
+          <a:p>
+            <a:pPr indent="0" marL="0">
+              <a:buNone/>
+            </a:pPr>
+            <a:r>
+              <a:rPr lang="en-US" sz="1800" dirty="0">
+                <a:solidFill>
+                  <a:srgbClr val="1A1A1A"/>
+                </a:solidFill>
+                <a:latin typeface="Inter" pitchFamily="34" charset="0"/>
+                <a:ea typeface="Inter" pitchFamily="34" charset="-122"/>
+                <a:cs typeface="Inter" pitchFamily="34" charset="-120"/>
+              </a:rPr>
+              <a:t>A technician has 8 available hours, clocks 6 hours to repair orders and flags 7.5 hours.</a:t>
+            </a:r>
+            <a:endParaRPr lang="en-US" sz="1800" dirty="0"/>
+          </a:p>
+        </p:txBody>
+      </p:sp>
+      <p:sp>
+        <p:nvSpPr>
+          <p:cNvPr id="30" name="Text 28"/>
+          <p:cNvSpPr txBox="1"/>
+          <p:nvPr/>
+        </p:nvSpPr>
+        <p:spPr>
+          <a:xfrm>
+            <a:off x="896112" y="5577840"/>
+            <a:ext cx="10396728" cy="329184"/>
+          </a:xfrm>
+          <a:prstGeom prst="rect">
+            <a:avLst/>
+          </a:prstGeom>
+          <a:noFill/>
+          <a:ln/>
+        </p:spPr>
+        <p:txBody>
+          <a:bodyPr wrap="square" lIns="0" tIns="0" rIns="0" bIns="0" rtlCol="0" anchor="ctr"/>
+          <a:lstStyle/>
+          <a:p>
+            <a:pPr indent="0" marL="0">
+              <a:buNone/>
+            </a:pPr>
+            <a:r>
+              <a:rPr lang="en-US" sz="1800" b="1" dirty="0">
                 <a:solidFill>
                   <a:srgbClr val="0B2C4A"/>
                 </a:solidFill>
@@ -8486,244 +8545,9 @@
                 <a:ea typeface="Inter" pitchFamily="34" charset="-122"/>
                 <a:cs typeface="Inter" pitchFamily="34" charset="-120"/>
               </a:rPr>
-              <a:t>Example: 7.5 ÷ 8 = 93.75%</a:t>
-            </a:r>
-            <a:endParaRPr lang="en-US" sz="1600" dirty="0"/>
-          </a:p>
-        </p:txBody>
-      </p:sp>
-      <p:sp>
-        <p:nvSpPr>
-          <p:cNvPr id="29" name="Text 27"/>
-          <p:cNvSpPr txBox="1"/>
-          <p:nvPr/>
-        </p:nvSpPr>
-        <p:spPr>
-          <a:xfrm>
-            <a:off x="8205216" y="3977640"/>
-            <a:ext cx="3087624" cy="274320"/>
-          </a:xfrm>
-          <a:prstGeom prst="rect">
-            <a:avLst/>
-          </a:prstGeom>
-          <a:noFill/>
-          <a:ln/>
-        </p:spPr>
-        <p:txBody>
-          <a:bodyPr wrap="square" lIns="0" tIns="0" rIns="0" bIns="0" rtlCol="0" anchor="ctr"/>
-          <a:lstStyle/>
-          <a:p>
-            <a:pPr indent="0" marL="0">
-              <a:buNone/>
-            </a:pPr>
-            <a:r>
-              <a:rPr lang="en-US" sz="1400" b="1" dirty="0">
-                <a:solidFill>
-                  <a:srgbClr val="1A1A1A"/>
-                </a:solidFill>
-                <a:latin typeface="Inter" pitchFamily="34" charset="0"/>
-                <a:ea typeface="Inter" pitchFamily="34" charset="-122"/>
-                <a:cs typeface="Inter" pitchFamily="34" charset="-120"/>
-              </a:rPr>
-              <a:t>Target 85% · group 94.7%</a:t>
-            </a:r>
-            <a:endParaRPr lang="en-US" sz="1400" dirty="0"/>
-          </a:p>
-        </p:txBody>
-      </p:sp>
-      <p:sp>
-        <p:nvSpPr>
-          <p:cNvPr id="30" name="Shape 28"/>
-          <p:cNvSpPr/>
-          <p:nvPr/>
-        </p:nvSpPr>
-        <p:spPr>
-          <a:xfrm>
-            <a:off x="713232" y="4526280"/>
-            <a:ext cx="10762488" cy="1097280"/>
-          </a:xfrm>
-          <a:prstGeom prst="rect">
-            <a:avLst/>
-          </a:prstGeom>
-          <a:solidFill>
-            <a:srgbClr val="EDF4FA"/>
-          </a:solidFill>
-          <a:ln/>
-        </p:spPr>
-      </p:sp>
-      <p:sp>
-        <p:nvSpPr>
-          <p:cNvPr id="31" name="Text 29"/>
-          <p:cNvSpPr txBox="1"/>
-          <p:nvPr/>
-        </p:nvSpPr>
-        <p:spPr>
-          <a:xfrm>
-            <a:off x="896112" y="4654296"/>
-            <a:ext cx="10396728" cy="256032"/>
-          </a:xfrm>
-          <a:prstGeom prst="rect">
-            <a:avLst/>
-          </a:prstGeom>
-          <a:noFill/>
-          <a:ln/>
-        </p:spPr>
-        <p:txBody>
-          <a:bodyPr wrap="square" lIns="0" tIns="0" rIns="0" bIns="0" rtlCol="0" anchor="ctr"/>
-          <a:lstStyle/>
-          <a:p>
-            <a:pPr indent="0" marL="0">
-              <a:buNone/>
-            </a:pPr>
-            <a:r>
-              <a:rPr lang="en-US" sz="1400" b="1" spc="80" kern="0" dirty="0">
-                <a:solidFill>
-                  <a:srgbClr val="595959"/>
-                </a:solidFill>
-                <a:latin typeface="Inter" pitchFamily="34" charset="0"/>
-                <a:ea typeface="Inter" pitchFamily="34" charset="-122"/>
-                <a:cs typeface="Inter" pitchFamily="34" charset="-120"/>
-              </a:rPr>
-              <a:t>ILLUSTRATIVE EXAMPLE</a:t>
-            </a:r>
-            <a:endParaRPr lang="en-US" sz="1400" dirty="0"/>
-          </a:p>
-        </p:txBody>
-      </p:sp>
-      <p:sp>
-        <p:nvSpPr>
-          <p:cNvPr id="32" name="Text 30"/>
-          <p:cNvSpPr txBox="1"/>
-          <p:nvPr/>
-        </p:nvSpPr>
-        <p:spPr>
-          <a:xfrm>
-            <a:off x="896112" y="4946904"/>
-            <a:ext cx="10396728" cy="292608"/>
-          </a:xfrm>
-          <a:prstGeom prst="rect">
-            <a:avLst/>
-          </a:prstGeom>
-          <a:noFill/>
-          <a:ln/>
-        </p:spPr>
-        <p:txBody>
-          <a:bodyPr wrap="square" lIns="0" tIns="0" rIns="0" bIns="0" rtlCol="0" anchor="ctr"/>
-          <a:lstStyle/>
-          <a:p>
-            <a:pPr indent="0" marL="0">
-              <a:buNone/>
-            </a:pPr>
-            <a:r>
-              <a:rPr lang="en-US" sz="1600" dirty="0">
-                <a:solidFill>
-                  <a:srgbClr val="1A1A1A"/>
-                </a:solidFill>
-                <a:latin typeface="Inter" pitchFamily="34" charset="0"/>
-                <a:ea typeface="Inter" pitchFamily="34" charset="-122"/>
-                <a:cs typeface="Inter" pitchFamily="34" charset="-120"/>
-              </a:rPr>
-              <a:t>A technician has 8 available hours, clocks 6 hours to repair orders and flags 7.5 hours.</a:t>
-            </a:r>
-            <a:endParaRPr lang="en-US" sz="1600" dirty="0"/>
-          </a:p>
-        </p:txBody>
-      </p:sp>
-      <p:sp>
-        <p:nvSpPr>
-          <p:cNvPr id="33" name="Text 31"/>
-          <p:cNvSpPr txBox="1"/>
-          <p:nvPr/>
-        </p:nvSpPr>
-        <p:spPr>
-          <a:xfrm>
-            <a:off x="896112" y="5257800"/>
-            <a:ext cx="10396728" cy="292608"/>
-          </a:xfrm>
-          <a:prstGeom prst="rect">
-            <a:avLst/>
-          </a:prstGeom>
-          <a:noFill/>
-          <a:ln/>
-        </p:spPr>
-        <p:txBody>
-          <a:bodyPr wrap="square" lIns="0" tIns="0" rIns="0" bIns="0" rtlCol="0" anchor="ctr"/>
-          <a:lstStyle/>
-          <a:p>
-            <a:pPr indent="0" marL="0">
-              <a:buNone/>
-            </a:pPr>
-            <a:r>
-              <a:rPr lang="en-US" sz="1600" b="1" dirty="0">
-                <a:solidFill>
-                  <a:srgbClr val="0B2C4A"/>
-                </a:solidFill>
-                <a:latin typeface="Inter" pitchFamily="34" charset="0"/>
-                <a:ea typeface="Inter" pitchFamily="34" charset="-122"/>
-                <a:cs typeface="Inter" pitchFamily="34" charset="-120"/>
-              </a:rPr>
               <a:t>Productivity × efficiency = proficiency:  75% × 125% = 93.75%</a:t>
             </a:r>
-            <a:endParaRPr lang="en-US" sz="1600" dirty="0"/>
-          </a:p>
-        </p:txBody>
-      </p:sp>
-      <p:sp>
-        <p:nvSpPr>
-          <p:cNvPr id="34" name="Shape 32"/>
-          <p:cNvSpPr/>
-          <p:nvPr/>
-        </p:nvSpPr>
-        <p:spPr>
-          <a:xfrm>
-            <a:off x="457200" y="6126480"/>
-            <a:ext cx="11274552" cy="615696"/>
-          </a:xfrm>
-          <a:prstGeom prst="rect">
-            <a:avLst/>
-          </a:prstGeom>
-          <a:solidFill>
-            <a:srgbClr val="EDF4FA"/>
-          </a:solidFill>
-          <a:ln/>
-        </p:spPr>
-      </p:sp>
-      <p:sp>
-        <p:nvSpPr>
-          <p:cNvPr id="35" name="Text 33"/>
-          <p:cNvSpPr txBox="1"/>
-          <p:nvPr/>
-        </p:nvSpPr>
-        <p:spPr>
-          <a:xfrm>
-            <a:off x="658368" y="6144768"/>
-            <a:ext cx="10927080" cy="579120"/>
-          </a:xfrm>
-          <a:prstGeom prst="rect">
-            <a:avLst/>
-          </a:prstGeom>
-          <a:noFill/>
-          <a:ln/>
-        </p:spPr>
-        <p:txBody>
-          <a:bodyPr wrap="square" lIns="0" tIns="0" rIns="0" bIns="0" rtlCol="0" anchor="ctr"/>
-          <a:lstStyle/>
-          <a:p>
-            <a:pPr indent="0" marL="0">
-              <a:buNone/>
-            </a:pPr>
-            <a:r>
-              <a:rPr lang="en-US" sz="1600" b="1" dirty="0">
-                <a:solidFill>
-                  <a:srgbClr val="0B2C4A"/>
-                </a:solidFill>
-                <a:latin typeface="Inter" pitchFamily="34" charset="0"/>
-                <a:ea typeface="Inter" pitchFamily="34" charset="-122"/>
-                <a:cs typeface="Inter" pitchFamily="34" charset="-120"/>
-              </a:rPr>
-              <a:t>Productivity measures time spent on repair orders; efficiency measures hours flagged against time on repair orders; proficiency measures total hours flagged against available time.</a:t>
-            </a:r>
-            <a:endParaRPr lang="en-US" sz="1600" dirty="0"/>
+            <a:endParaRPr lang="en-US" sz="1800" dirty="0"/>
           </a:p>
         </p:txBody>
       </p:sp>

--- a/day2-deck/decks/Metric Explainers - Review.pptx
+++ b/day2-deck/decks/Metric Explainers - Review.pptx
@@ -961,8 +961,8 @@
           <a:p>
             <a:r>
               <a:rPr lang="en-US" dirty="0"/>
-              <a:t>Source: Standard service-department definitions. On the store slides, proficiency = Qlik hours flagged (sold hours) ÷ ADP regular + overtime hours, which stand in for available hours. Efficiency and productivity need DMS time clocked to repair orders, which this data does not include, so they are defined here but not measured. The example is illustrative, not a store or technician.PLACE: right after the Technician Proficiency explainer, before How We Measured It (Noah, Oct 27).
-Talk track: walk the example left to right. The tech was on repair orders 6 of 8 hours (75% productive) and flagged 7.5 hours in those 6 (125% efficient), so 7.5 flagged hours for 8 available (93.75% proficient). Proficiency is the one we measure: 85% target, group 94.7%. 'Productivity' here is the technician measure, not the Fixed Ops Productivity section (gross and ROs per employee).</a:t>
+              <a:t>Source: Standard service-department definitions. On the store slides, proficiency = Qlik hours flagged (sold hours) ÷ ADP regular + overtime hours, = clocked hours (vacation, PTO and holiday pay excluded). Efficiency and productivity need DMS time clocked to repair orders, which this data does not include, so they are defined here but not measured. The example is illustrative, not a store or technician.PLACE: right after the Technician Proficiency explainer, before How We Measured It (Noah, Oct 27).
+Talk track: walk the example left to right. The tech was on repair orders 6 of 8 hours (75% productive) and flagged 7.5 hours in those 6 (125% efficient), so 7.5 flagged hours for 8 clocked (93.75% proficient). Proficiency is the one we measure: 85% target, group 94.7%. 'Productivity' here is the technician measure, not the Fixed Ops Productivity section (gross and ROs per employee).</a:t>
             </a:r>
             <a:endParaRPr lang="en-US" dirty="0"/>
           </a:p>
@@ -4418,7 +4418,7 @@
                 <a:ea typeface="Inter" pitchFamily="34" charset="-122"/>
                 <a:cs typeface="Inter" pitchFamily="34" charset="-120"/>
               </a:rPr>
-              <a:t>hours sold (flagged)  </a:t>
+              <a:t>hours flagged  </a:t>
             </a:r>
             <a:pPr indent="0" marL="0">
               <a:buNone/>
@@ -4446,7 +4446,7 @@
                 <a:ea typeface="Inter" pitchFamily="34" charset="-122"/>
                 <a:cs typeface="Inter" pitchFamily="34" charset="-120"/>
               </a:rPr>
-              <a:t>hours worked (clocked)</a:t>
+              <a:t>clocked hours</a:t>
             </a:r>
             <a:endParaRPr lang="en-US" sz="2400" dirty="0"/>
           </a:p>
@@ -4590,7 +4590,7 @@
                 <a:ea typeface="Inter" pitchFamily="34" charset="-122"/>
                 <a:cs typeface="Inter" pitchFamily="34" charset="-120"/>
               </a:rPr>
-              <a:t>Works 40 hours  </a:t>
+              <a:t>Clocks 40 hours  </a:t>
             </a:r>
             <a:pPr algn="ctr" indent="0" marL="0">
               <a:buNone/>
@@ -4604,7 +4604,7 @@
                 <a:ea typeface="Inter" pitchFamily="34" charset="-122"/>
                 <a:cs typeface="Inter" pitchFamily="34" charset="-120"/>
               </a:rPr>
-              <a:t>sells 34</a:t>
+              <a:t>flags 34</a:t>
             </a:r>
             <a:endParaRPr lang="en-US" sz="1400" dirty="0"/>
           </a:p>
@@ -4750,7 +4750,7 @@
                 <a:ea typeface="Inter" pitchFamily="34" charset="-122"/>
                 <a:cs typeface="Inter" pitchFamily="34" charset="-120"/>
               </a:rPr>
-              <a:t>Sells 40  </a:t>
+              <a:t>Flags 40  </a:t>
             </a:r>
             <a:pPr algn="ctr" indent="0" marL="0">
               <a:buNone/>
@@ -5423,7 +5423,7 @@
                 <a:ea typeface="Inter" pitchFamily="34" charset="-122"/>
                 <a:cs typeface="Inter" pitchFamily="34" charset="-120"/>
               </a:rPr>
-              <a:t>Efficiency divides by time clocked on ROs, not all hours worked</a:t>
+              <a:t>Efficiency divides by time clocked to ROs, not all clocked hours</a:t>
             </a:r>
             <a:endParaRPr lang="en-US" sz="1400" dirty="0"/>
           </a:p>
@@ -5673,7 +5673,7 @@
                 <a:ea typeface="Inter" pitchFamily="34" charset="-122"/>
                 <a:cs typeface="Inter" pitchFamily="34" charset="-120"/>
               </a:rPr>
-              <a:t>Sold hours (Qlik)  </a:t>
+              <a:t>Hours flagged (Qlik)  </a:t>
             </a:r>
             <a:pPr indent="0" marL="0">
               <a:buNone/>
@@ -5701,7 +5701,7 @@
                 <a:ea typeface="Inter" pitchFamily="34" charset="-122"/>
                 <a:cs typeface="Inter" pitchFamily="34" charset="-120"/>
               </a:rPr>
-              <a:t>worked hours (ADP, regular + overtime)</a:t>
+              <a:t>clocked hours (ADP, regular + overtime)</a:t>
             </a:r>
             <a:endParaRPr lang="en-US" sz="2200" dirty="0"/>
           </a:p>
@@ -5732,7 +5732,7 @@
               <a:buNone/>
             </a:pPr>
             <a:r>
-              <a:rPr lang="en-US" sz="1500" dirty="0">
+              <a:rPr lang="en-US" sz="1400" dirty="0">
                 <a:solidFill>
                   <a:srgbClr val="595959"/>
                 </a:solidFill>
@@ -5740,9 +5740,9 @@
                 <a:ea typeface="Inter" pitchFamily="34" charset="-122"/>
                 <a:cs typeface="Inter" pitchFamily="34" charset="-120"/>
               </a:rPr>
-              <a:t>January through September 2026, year to date. Store = total sold hours / total worked hours.</a:t>
-            </a:r>
-            <a:endParaRPr lang="en-US" sz="1500" dirty="0"/>
+              <a:t>January through September 2026, year to date. Vacation, paid time off and holiday pay are excluded from clocked hours. Store = total hours flagged ÷ total clocked hours.</a:t>
+            </a:r>
+            <a:endParaRPr lang="en-US" sz="1400" dirty="0"/>
           </a:p>
         </p:txBody>
       </p:sp>
@@ -5943,7 +5943,7 @@
                 <a:ea typeface="Inter" pitchFamily="34" charset="-122"/>
                 <a:cs typeface="Inter" pitchFamily="34" charset="-120"/>
               </a:rPr>
-              <a:t>Everyone whose job is to produce sold hours</a:t>
+              <a:t>Everyone whose job is to produce flagged hours</a:t>
             </a:r>
             <a:endParaRPr lang="en-US" sz="1500" dirty="0"/>
           </a:p>
@@ -6192,7 +6192,7 @@
                 <a:ea typeface="Inter" pitchFamily="34" charset="-122"/>
                 <a:cs typeface="Inter" pitchFamily="34" charset="-120"/>
               </a:rPr>
-              <a:t>Worked hours trimmed to the months a tech actually flagged</a:t>
+              <a:t>Clocked hours trimmed to the months a tech actually flagged</a:t>
             </a:r>
             <a:endParaRPr lang="en-US" sz="1400" dirty="0"/>
           </a:p>
@@ -6420,7 +6420,7 @@
                 <a:ea typeface="Inter" pitchFamily="34" charset="-122"/>
                 <a:cs typeface="Inter" pitchFamily="34" charset="-120"/>
               </a:rPr>
-              <a:t>Each tech under 85% raised to 85% of their own worked hours</a:t>
+              <a:t>Each tech under 85% raised to 85% of their own clocked hours</a:t>
             </a:r>
             <a:endParaRPr lang="en-US" sz="1400" dirty="0"/>
           </a:p>
@@ -7878,7 +7878,7 @@
                 <a:ea typeface="Inter" pitchFamily="34" charset="-122"/>
                 <a:cs typeface="Inter" pitchFamily="34" charset="-120"/>
               </a:rPr>
-              <a:t>Hours clocked to repair orders ÷ available hours</a:t>
+              <a:t>Hours clocked to repair orders ÷ clocked hours</a:t>
             </a:r>
             <a:endParaRPr lang="en-US" sz="2000" dirty="0"/>
           </a:p>
@@ -7917,7 +7917,7 @@
                 <a:ea typeface="Inter" pitchFamily="34" charset="-122"/>
                 <a:cs typeface="Inter" pitchFamily="34" charset="-120"/>
               </a:rPr>
-              <a:t>How much of the technician's available time was spent on repair orders?</a:t>
+              <a:t>How much of the technician's clocked time was spent on repair orders?</a:t>
             </a:r>
             <a:endParaRPr lang="en-US" sz="1600" dirty="0"/>
           </a:p>
@@ -8310,7 +8310,7 @@
                 <a:ea typeface="Inter" pitchFamily="34" charset="-122"/>
                 <a:cs typeface="Inter" pitchFamily="34" charset="-120"/>
               </a:rPr>
-              <a:t>Hours flagged ÷ available hours</a:t>
+              <a:t>Hours flagged ÷ clocked hours</a:t>
             </a:r>
             <a:endParaRPr lang="en-US" sz="2000" dirty="0"/>
           </a:p>
@@ -8349,7 +8349,7 @@
                 <a:ea typeface="Inter" pitchFamily="34" charset="-122"/>
                 <a:cs typeface="Inter" pitchFamily="34" charset="-120"/>
               </a:rPr>
-              <a:t>How many labor hours did the technician produce compared with their total available time?</a:t>
+              <a:t>How many labor hours did the technician produce compared with their total clocked time?</a:t>
             </a:r>
             <a:endParaRPr lang="en-US" sz="1600" dirty="0"/>
           </a:p>
@@ -8422,8 +8422,8 @@
         </p:nvSpPr>
         <p:spPr>
           <a:xfrm>
-            <a:off x="713232" y="4754880"/>
-            <a:ext cx="10762488" cy="1261872"/>
+            <a:off x="713232" y="4709160"/>
+            <a:ext cx="10762488" cy="1572768"/>
           </a:xfrm>
           <a:prstGeom prst="rect">
             <a:avLst/>
@@ -8442,7 +8442,7 @@
         </p:nvSpPr>
         <p:spPr>
           <a:xfrm>
-            <a:off x="896112" y="4901184"/>
+            <a:off x="896112" y="4855464"/>
             <a:ext cx="10396728" cy="256032"/>
           </a:xfrm>
           <a:prstGeom prst="rect">
@@ -8481,7 +8481,7 @@
         </p:nvSpPr>
         <p:spPr>
           <a:xfrm>
-            <a:off x="896112" y="5212080"/>
+            <a:off x="896112" y="5166360"/>
             <a:ext cx="10396728" cy="329184"/>
           </a:xfrm>
           <a:prstGeom prst="rect">
@@ -8506,7 +8506,7 @@
                 <a:ea typeface="Inter" pitchFamily="34" charset="-122"/>
                 <a:cs typeface="Inter" pitchFamily="34" charset="-120"/>
               </a:rPr>
-              <a:t>A technician has 8 available hours, clocks 6 hours to repair orders and flags 7.5 hours.</a:t>
+              <a:t>A technician clocks in for 8 hours, clocks 6 of them to repair orders and flags 7.5 hours.</a:t>
             </a:r>
             <a:endParaRPr lang="en-US" sz="1800" dirty="0"/>
           </a:p>
@@ -8520,7 +8520,7 @@
         </p:nvSpPr>
         <p:spPr>
           <a:xfrm>
-            <a:off x="896112" y="5577840"/>
+            <a:off x="896112" y="5532120"/>
             <a:ext cx="10396728" cy="329184"/>
           </a:xfrm>
           <a:prstGeom prst="rect">
@@ -8548,6 +8548,45 @@
               <a:t>Productivity × efficiency = proficiency:  75% × 125% = 93.75%</a:t>
             </a:r>
             <a:endParaRPr lang="en-US" sz="1800" dirty="0"/>
+          </a:p>
+        </p:txBody>
+      </p:sp>
+      <p:sp>
+        <p:nvSpPr>
+          <p:cNvPr id="31" name="Text 29"/>
+          <p:cNvSpPr txBox="1"/>
+          <p:nvPr/>
+        </p:nvSpPr>
+        <p:spPr>
+          <a:xfrm>
+            <a:off x="896112" y="5897880"/>
+            <a:ext cx="10396728" cy="292608"/>
+          </a:xfrm>
+          <a:prstGeom prst="rect">
+            <a:avLst/>
+          </a:prstGeom>
+          <a:noFill/>
+          <a:ln/>
+        </p:spPr>
+        <p:txBody>
+          <a:bodyPr wrap="square" lIns="0" tIns="0" rIns="0" bIns="0" rtlCol="0" anchor="ctr"/>
+          <a:lstStyle/>
+          <a:p>
+            <a:pPr indent="0" marL="0">
+              <a:buNone/>
+            </a:pPr>
+            <a:r>
+              <a:rPr lang="en-US" sz="1500" dirty="0">
+                <a:solidFill>
+                  <a:srgbClr val="595959"/>
+                </a:solidFill>
+                <a:latin typeface="Inter" pitchFamily="34" charset="0"/>
+                <a:ea typeface="Inter" pitchFamily="34" charset="-122"/>
+                <a:cs typeface="Inter" pitchFamily="34" charset="-120"/>
+              </a:rPr>
+              <a:t>Clocked hours exclude vacation, paid time off and holiday pay.</a:t>
+            </a:r>
+            <a:endParaRPr lang="en-US" sz="1500" dirty="0"/>
           </a:p>
         </p:txBody>
       </p:sp>

--- a/day2-deck/decks/Metric Explainers - Review.pptx
+++ b/day2-deck/decks/Metric Explainers - Review.pptx
@@ -2285,7 +2285,7 @@
         <p:spPr>
           <a:xfrm>
             <a:off x="457200" y="2340864"/>
-            <a:ext cx="4343400" cy="3648456"/>
+            <a:ext cx="4343400" cy="4014216"/>
           </a:xfrm>
           <a:prstGeom prst="rect">
             <a:avLst/>
@@ -2305,7 +2305,7 @@
         <p:spPr>
           <a:xfrm>
             <a:off x="4937760" y="2340864"/>
-            <a:ext cx="6793992" cy="3648456"/>
+            <a:ext cx="6793992" cy="4014216"/>
           </a:xfrm>
           <a:prstGeom prst="rect">
             <a:avLst/>
@@ -2403,7 +2403,7 @@
         <p:spPr>
           <a:xfrm>
             <a:off x="658368" y="2843784"/>
-            <a:ext cx="3977640" cy="3008376"/>
+            <a:ext cx="3977640" cy="3374136"/>
           </a:xfrm>
           <a:prstGeom prst="rect">
             <a:avLst/>
@@ -2488,7 +2488,7 @@
         <p:spPr>
           <a:xfrm>
             <a:off x="5138928" y="2843784"/>
-            <a:ext cx="45720" cy="801942"/>
+            <a:ext cx="45720" cy="911125"/>
           </a:xfrm>
           <a:prstGeom prst="rect">
             <a:avLst/>
@@ -2508,7 +2508,7 @@
         <p:spPr>
           <a:xfrm>
             <a:off x="5266944" y="2843784"/>
-            <a:ext cx="2962656" cy="801942"/>
+            <a:ext cx="2962656" cy="911125"/>
           </a:xfrm>
           <a:prstGeom prst="rect">
             <a:avLst/>
@@ -2564,7 +2564,7 @@
         <p:spPr>
           <a:xfrm>
             <a:off x="8394192" y="2843784"/>
-            <a:ext cx="45720" cy="801942"/>
+            <a:ext cx="45720" cy="911125"/>
           </a:xfrm>
           <a:prstGeom prst="rect">
             <a:avLst/>
@@ -2584,7 +2584,7 @@
         <p:spPr>
           <a:xfrm>
             <a:off x="8522208" y="2843784"/>
-            <a:ext cx="2962656" cy="801942"/>
+            <a:ext cx="2962656" cy="911125"/>
           </a:xfrm>
           <a:prstGeom prst="rect">
             <a:avLst/>
@@ -2639,8 +2639,8 @@
         </p:nvSpPr>
         <p:spPr>
           <a:xfrm>
-            <a:off x="5138928" y="3755454"/>
-            <a:ext cx="45720" cy="1121027"/>
+            <a:off x="5138928" y="3864637"/>
+            <a:ext cx="45720" cy="1268423"/>
           </a:xfrm>
           <a:prstGeom prst="rect">
             <a:avLst/>
@@ -2659,8 +2659,8 @@
         </p:nvSpPr>
         <p:spPr>
           <a:xfrm>
-            <a:off x="5266944" y="3755454"/>
-            <a:ext cx="2962656" cy="1121027"/>
+            <a:off x="5266944" y="3864637"/>
+            <a:ext cx="2962656" cy="1268423"/>
           </a:xfrm>
           <a:prstGeom prst="rect">
             <a:avLst/>
@@ -2715,8 +2715,8 @@
         </p:nvSpPr>
         <p:spPr>
           <a:xfrm>
-            <a:off x="8394192" y="3755454"/>
-            <a:ext cx="45720" cy="1121027"/>
+            <a:off x="8394192" y="3864637"/>
+            <a:ext cx="45720" cy="1268423"/>
           </a:xfrm>
           <a:prstGeom prst="rect">
             <a:avLst/>
@@ -2735,8 +2735,8 @@
         </p:nvSpPr>
         <p:spPr>
           <a:xfrm>
-            <a:off x="8522208" y="3755454"/>
-            <a:ext cx="2962656" cy="1121027"/>
+            <a:off x="8522208" y="3864637"/>
+            <a:ext cx="2962656" cy="1268423"/>
           </a:xfrm>
           <a:prstGeom prst="rect">
             <a:avLst/>
@@ -2791,8 +2791,8 @@
         </p:nvSpPr>
         <p:spPr>
           <a:xfrm>
-            <a:off x="5138928" y="4986210"/>
-            <a:ext cx="45720" cy="801942"/>
+            <a:off x="5138928" y="5242787"/>
+            <a:ext cx="45720" cy="911125"/>
           </a:xfrm>
           <a:prstGeom prst="rect">
             <a:avLst/>
@@ -2811,8 +2811,8 @@
         </p:nvSpPr>
         <p:spPr>
           <a:xfrm>
-            <a:off x="5266944" y="4986210"/>
-            <a:ext cx="2962656" cy="801942"/>
+            <a:off x="5266944" y="5242787"/>
+            <a:ext cx="2962656" cy="911125"/>
           </a:xfrm>
           <a:prstGeom prst="rect">
             <a:avLst/>
@@ -2867,8 +2867,8 @@
         </p:nvSpPr>
         <p:spPr>
           <a:xfrm>
-            <a:off x="8394192" y="4986210"/>
-            <a:ext cx="45720" cy="801942"/>
+            <a:off x="8394192" y="5242787"/>
+            <a:ext cx="45720" cy="911125"/>
           </a:xfrm>
           <a:prstGeom prst="rect">
             <a:avLst/>
@@ -2887,8 +2887,8 @@
         </p:nvSpPr>
         <p:spPr>
           <a:xfrm>
-            <a:off x="8522208" y="4986210"/>
-            <a:ext cx="2962656" cy="801942"/>
+            <a:off x="8522208" y="5242787"/>
+            <a:ext cx="2962656" cy="911125"/>
           </a:xfrm>
           <a:prstGeom prst="rect">
             <a:avLst/>
@@ -2932,65 +2932,6 @@
               <a:t>Fixed ops budget, keyword search, OEM and third-party reminders</a:t>
             </a:r>
             <a:endParaRPr lang="en-US" sz="1400" dirty="0"/>
-          </a:p>
-        </p:txBody>
-      </p:sp>
-      <p:sp>
-        <p:nvSpPr>
-          <p:cNvPr id="25" name="Shape 23"/>
-          <p:cNvSpPr/>
-          <p:nvPr/>
-        </p:nvSpPr>
-        <p:spPr>
-          <a:xfrm>
-            <a:off x="457200" y="6126480"/>
-            <a:ext cx="11274552" cy="371856"/>
-          </a:xfrm>
-          <a:prstGeom prst="rect">
-            <a:avLst/>
-          </a:prstGeom>
-          <a:solidFill>
-            <a:srgbClr val="EDF4FA"/>
-          </a:solidFill>
-          <a:ln/>
-        </p:spPr>
-      </p:sp>
-      <p:sp>
-        <p:nvSpPr>
-          <p:cNvPr id="26" name="Text 24"/>
-          <p:cNvSpPr txBox="1"/>
-          <p:nvPr/>
-        </p:nvSpPr>
-        <p:spPr>
-          <a:xfrm>
-            <a:off x="658368" y="6144768"/>
-            <a:ext cx="10927080" cy="335280"/>
-          </a:xfrm>
-          <a:prstGeom prst="rect">
-            <a:avLst/>
-          </a:prstGeom>
-          <a:noFill/>
-          <a:ln/>
-        </p:spPr>
-        <p:txBody>
-          <a:bodyPr wrap="square" lIns="0" tIns="0" rIns="0" bIns="0" rtlCol="0" anchor="ctr"/>
-          <a:lstStyle/>
-          <a:p>
-            <a:pPr indent="0" marL="0">
-              <a:buNone/>
-            </a:pPr>
-            <a:r>
-              <a:rPr lang="en-US" sz="1600" b="1" dirty="0">
-                <a:solidFill>
-                  <a:srgbClr val="0B2C4A"/>
-                </a:solidFill>
-                <a:latin typeface="Inter" pitchFamily="34" charset="0"/>
-                <a:ea typeface="Inter" pitchFamily="34" charset="-122"/>
-                <a:cs typeface="Inter" pitchFamily="34" charset="-120"/>
-              </a:rPr>
-              <a:t>Group: 279,756 CP ROs, up 456 from 2025. Volume is flat.</a:t>
-            </a:r>
-            <a:endParaRPr lang="en-US" sz="1600" dirty="0"/>
           </a:p>
         </p:txBody>
       </p:sp>
@@ -9084,7 +9025,7 @@
         <p:spPr>
           <a:xfrm>
             <a:off x="457200" y="2907792"/>
-            <a:ext cx="4343400" cy="3081528"/>
+            <a:ext cx="4343400" cy="3447288"/>
           </a:xfrm>
           <a:prstGeom prst="rect">
             <a:avLst/>
@@ -9104,7 +9045,7 @@
         <p:spPr>
           <a:xfrm>
             <a:off x="4937760" y="2907792"/>
-            <a:ext cx="6793992" cy="3081528"/>
+            <a:ext cx="6793992" cy="3447288"/>
           </a:xfrm>
           <a:prstGeom prst="rect">
             <a:avLst/>
@@ -9202,7 +9143,7 @@
         <p:spPr>
           <a:xfrm>
             <a:off x="658368" y="3410712"/>
-            <a:ext cx="3977640" cy="2441448"/>
+            <a:ext cx="3977640" cy="2807208"/>
           </a:xfrm>
           <a:prstGeom prst="rect">
             <a:avLst/>
@@ -9222,7 +9163,7 @@
               <a:buChar char="•"/>
             </a:pPr>
             <a:r>
-              <a:rPr lang="en-US" sz="1500" dirty="0">
+              <a:rPr lang="en-US" sz="1600" dirty="0">
                 <a:solidFill>
                   <a:srgbClr val="1A1A1A"/>
                 </a:solidFill>
@@ -9232,7 +9173,7 @@
               </a:rPr>
               <a:t>It cannot be manipulated: it is the work we sell.</a:t>
             </a:r>
-            <a:endParaRPr lang="en-US" sz="1500" dirty="0"/>
+            <a:endParaRPr lang="en-US" sz="1600" dirty="0"/>
           </a:p>
           <a:p>
             <a:pPr marL="203200" indent="-203200">
@@ -9243,7 +9184,7 @@
               <a:buChar char="•"/>
             </a:pPr>
             <a:r>
-              <a:rPr lang="en-US" sz="1500" dirty="0">
+              <a:rPr lang="en-US" sz="1600" dirty="0">
                 <a:solidFill>
                   <a:srgbClr val="1A1A1A"/>
                 </a:solidFill>
@@ -9253,7 +9194,7 @@
               </a:rPr>
               <a:t>It shows where the lift came from: if labor sales per RO go up but hours per RO stay flat, we are charging more, not selling more.</a:t>
             </a:r>
-            <a:endParaRPr lang="en-US" sz="1500" dirty="0"/>
+            <a:endParaRPr lang="en-US" sz="1600" dirty="0"/>
           </a:p>
           <a:p>
             <a:pPr marL="203200" indent="-203200">
@@ -9264,7 +9205,7 @@
               <a:buChar char="•"/>
             </a:pPr>
             <a:r>
-              <a:rPr lang="en-US" sz="1500" dirty="0">
+              <a:rPr lang="en-US" sz="1600" dirty="0">
                 <a:solidFill>
                   <a:srgbClr val="1A1A1A"/>
                 </a:solidFill>
@@ -9274,7 +9215,7 @@
               </a:rPr>
               <a:t>Selling more hours also sells parts.</a:t>
             </a:r>
-            <a:endParaRPr lang="en-US" sz="1500" dirty="0"/>
+            <a:endParaRPr lang="en-US" sz="1600" dirty="0"/>
           </a:p>
         </p:txBody>
       </p:sp>
@@ -9287,7 +9228,7 @@
         <p:spPr>
           <a:xfrm>
             <a:off x="5138928" y="3410712"/>
-            <a:ext cx="45720" cy="1133856"/>
+            <a:ext cx="45720" cy="841248"/>
           </a:xfrm>
           <a:prstGeom prst="rect">
             <a:avLst/>
@@ -9307,7 +9248,7 @@
         <p:spPr>
           <a:xfrm>
             <a:off x="5266944" y="3410712"/>
-            <a:ext cx="1877568" cy="1133856"/>
+            <a:ext cx="2962656" cy="841248"/>
           </a:xfrm>
           <a:prstGeom prst="rect">
             <a:avLst/>
@@ -9362,8 +9303,8 @@
         </p:nvSpPr>
         <p:spPr>
           <a:xfrm>
-            <a:off x="7309104" y="3410712"/>
-            <a:ext cx="45720" cy="1133856"/>
+            <a:off x="8394192" y="3410712"/>
+            <a:ext cx="45720" cy="841248"/>
           </a:xfrm>
           <a:prstGeom prst="rect">
             <a:avLst/>
@@ -9382,8 +9323,8 @@
         </p:nvSpPr>
         <p:spPr>
           <a:xfrm>
-            <a:off x="7437120" y="3410712"/>
-            <a:ext cx="1877568" cy="1133856"/>
+            <a:off x="8522208" y="3410712"/>
+            <a:ext cx="2962656" cy="841248"/>
           </a:xfrm>
           <a:prstGeom prst="rect">
             <a:avLst/>
@@ -9438,8 +9379,8 @@
         </p:nvSpPr>
         <p:spPr>
           <a:xfrm>
-            <a:off x="9479280" y="3410712"/>
-            <a:ext cx="45720" cy="1133856"/>
+            <a:off x="5138928" y="4361688"/>
+            <a:ext cx="45720" cy="841248"/>
           </a:xfrm>
           <a:prstGeom prst="rect">
             <a:avLst/>
@@ -9458,8 +9399,8 @@
         </p:nvSpPr>
         <p:spPr>
           <a:xfrm>
-            <a:off x="9607296" y="3410712"/>
-            <a:ext cx="1877568" cy="1133856"/>
+            <a:off x="5266944" y="4361688"/>
+            <a:ext cx="2962656" cy="841248"/>
           </a:xfrm>
           <a:prstGeom prst="rect">
             <a:avLst/>
@@ -9514,8 +9455,8 @@
         </p:nvSpPr>
         <p:spPr>
           <a:xfrm>
-            <a:off x="5138928" y="4654296"/>
-            <a:ext cx="45720" cy="1133856"/>
+            <a:off x="8394192" y="4361688"/>
+            <a:ext cx="45720" cy="841248"/>
           </a:xfrm>
           <a:prstGeom prst="rect">
             <a:avLst/>
@@ -9534,8 +9475,8 @@
         </p:nvSpPr>
         <p:spPr>
           <a:xfrm>
-            <a:off x="5266944" y="4654296"/>
-            <a:ext cx="1877568" cy="1133856"/>
+            <a:off x="8522208" y="4361688"/>
+            <a:ext cx="2962656" cy="841248"/>
           </a:xfrm>
           <a:prstGeom prst="rect">
             <a:avLst/>
@@ -9590,8 +9531,8 @@
         </p:nvSpPr>
         <p:spPr>
           <a:xfrm>
-            <a:off x="7309104" y="4654296"/>
-            <a:ext cx="45720" cy="1133856"/>
+            <a:off x="5138928" y="5312664"/>
+            <a:ext cx="45720" cy="841248"/>
           </a:xfrm>
           <a:prstGeom prst="rect">
             <a:avLst/>
@@ -9610,8 +9551,8 @@
         </p:nvSpPr>
         <p:spPr>
           <a:xfrm>
-            <a:off x="7437120" y="4654296"/>
-            <a:ext cx="1877568" cy="1133856"/>
+            <a:off x="5266944" y="5312664"/>
+            <a:ext cx="2962656" cy="841248"/>
           </a:xfrm>
           <a:prstGeom prst="rect">
             <a:avLst/>
@@ -9666,8 +9607,8 @@
         </p:nvSpPr>
         <p:spPr>
           <a:xfrm>
-            <a:off x="9479280" y="4654296"/>
-            <a:ext cx="45720" cy="1133856"/>
+            <a:off x="8394192" y="5312664"/>
+            <a:ext cx="45720" cy="841248"/>
           </a:xfrm>
           <a:prstGeom prst="rect">
             <a:avLst/>
@@ -9686,8 +9627,8 @@
         </p:nvSpPr>
         <p:spPr>
           <a:xfrm>
-            <a:off x="9607296" y="4654296"/>
-            <a:ext cx="1877568" cy="1133856"/>
+            <a:off x="8522208" y="5312664"/>
+            <a:ext cx="2962656" cy="841248"/>
           </a:xfrm>
           <a:prstGeom prst="rect">
             <a:avLst/>
@@ -9731,65 +9672,6 @@
               <a:t>High-mileage and repair work to the techs who find it</a:t>
             </a:r>
             <a:endParaRPr lang="en-US" sz="1400" dirty="0"/>
-          </a:p>
-        </p:txBody>
-      </p:sp>
-      <p:sp>
-        <p:nvSpPr>
-          <p:cNvPr id="30" name="Shape 28"/>
-          <p:cNvSpPr/>
-          <p:nvPr/>
-        </p:nvSpPr>
-        <p:spPr>
-          <a:xfrm>
-            <a:off x="457200" y="6126480"/>
-            <a:ext cx="11274552" cy="371856"/>
-          </a:xfrm>
-          <a:prstGeom prst="rect">
-            <a:avLst/>
-          </a:prstGeom>
-          <a:solidFill>
-            <a:srgbClr val="E6F6EE"/>
-          </a:solidFill>
-          <a:ln/>
-        </p:spPr>
-      </p:sp>
-      <p:sp>
-        <p:nvSpPr>
-          <p:cNvPr id="31" name="Text 29"/>
-          <p:cNvSpPr txBox="1"/>
-          <p:nvPr/>
-        </p:nvSpPr>
-        <p:spPr>
-          <a:xfrm>
-            <a:off x="658368" y="6144768"/>
-            <a:ext cx="10927080" cy="335280"/>
-          </a:xfrm>
-          <a:prstGeom prst="rect">
-            <a:avLst/>
-          </a:prstGeom>
-          <a:noFill/>
-          <a:ln/>
-        </p:spPr>
-        <p:txBody>
-          <a:bodyPr wrap="square" lIns="0" tIns="0" rIns="0" bIns="0" rtlCol="0" anchor="ctr"/>
-          <a:lstStyle/>
-          <a:p>
-            <a:pPr indent="0" marL="0">
-              <a:buNone/>
-            </a:pPr>
-            <a:r>
-              <a:rPr lang="en-US" sz="1600" b="1" dirty="0">
-                <a:solidFill>
-                  <a:srgbClr val="0B7A4A"/>
-                </a:solidFill>
-                <a:latin typeface="Inter" pitchFamily="34" charset="0"/>
-                <a:ea typeface="Inter" pitchFamily="34" charset="-122"/>
-                <a:cs typeface="Inter" pitchFamily="34" charset="-120"/>
-              </a:rPr>
-              <a:t>Group: 1.87 CP hours per RO, up 0.07 and ahead of 2025 in all nine months.</a:t>
-            </a:r>
-            <a:endParaRPr lang="en-US" sz="1600" dirty="0"/>
           </a:p>
         </p:txBody>
       </p:sp>
@@ -10088,7 +9970,7 @@
         <p:spPr>
           <a:xfrm>
             <a:off x="457200" y="2340864"/>
-            <a:ext cx="4343400" cy="3648456"/>
+            <a:ext cx="4343400" cy="4014216"/>
           </a:xfrm>
           <a:prstGeom prst="rect">
             <a:avLst/>
@@ -10108,7 +9990,7 @@
         <p:spPr>
           <a:xfrm>
             <a:off x="4937760" y="2340864"/>
-            <a:ext cx="6793992" cy="3648456"/>
+            <a:ext cx="6793992" cy="4014216"/>
           </a:xfrm>
           <a:prstGeom prst="rect">
             <a:avLst/>
@@ -10206,7 +10088,7 @@
         <p:spPr>
           <a:xfrm>
             <a:off x="658368" y="2843784"/>
-            <a:ext cx="3977640" cy="3008376"/>
+            <a:ext cx="3977640" cy="3374136"/>
           </a:xfrm>
           <a:prstGeom prst="rect">
             <a:avLst/>
@@ -10291,7 +10173,7 @@
         <p:spPr>
           <a:xfrm>
             <a:off x="5138928" y="2843784"/>
-            <a:ext cx="45720" cy="1064924"/>
+            <a:ext cx="45720" cy="1205601"/>
           </a:xfrm>
           <a:prstGeom prst="rect">
             <a:avLst/>
@@ -10311,7 +10193,7 @@
         <p:spPr>
           <a:xfrm>
             <a:off x="5266944" y="2843784"/>
-            <a:ext cx="2962656" cy="1064924"/>
+            <a:ext cx="2962656" cy="1205601"/>
           </a:xfrm>
           <a:prstGeom prst="rect">
             <a:avLst/>
@@ -10367,7 +10249,7 @@
         <p:spPr>
           <a:xfrm>
             <a:off x="8394192" y="2843784"/>
-            <a:ext cx="45720" cy="1064924"/>
+            <a:ext cx="45720" cy="1205601"/>
           </a:xfrm>
           <a:prstGeom prst="rect">
             <a:avLst/>
@@ -10387,7 +10269,7 @@
         <p:spPr>
           <a:xfrm>
             <a:off x="8522208" y="2843784"/>
-            <a:ext cx="2962656" cy="1064924"/>
+            <a:ext cx="2962656" cy="1205601"/>
           </a:xfrm>
           <a:prstGeom prst="rect">
             <a:avLst/>
@@ -10442,8 +10324,8 @@
         </p:nvSpPr>
         <p:spPr>
           <a:xfrm>
-            <a:off x="5138928" y="4018436"/>
-            <a:ext cx="45720" cy="829994"/>
+            <a:off x="5138928" y="4159113"/>
+            <a:ext cx="45720" cy="942535"/>
           </a:xfrm>
           <a:prstGeom prst="rect">
             <a:avLst/>
@@ -10462,8 +10344,8 @@
         </p:nvSpPr>
         <p:spPr>
           <a:xfrm>
-            <a:off x="5266944" y="4018436"/>
-            <a:ext cx="2962656" cy="829994"/>
+            <a:off x="5266944" y="4159113"/>
+            <a:ext cx="2962656" cy="942535"/>
           </a:xfrm>
           <a:prstGeom prst="rect">
             <a:avLst/>
@@ -10518,8 +10400,8 @@
         </p:nvSpPr>
         <p:spPr>
           <a:xfrm>
-            <a:off x="8394192" y="4018436"/>
-            <a:ext cx="45720" cy="829994"/>
+            <a:off x="8394192" y="4159113"/>
+            <a:ext cx="45720" cy="942535"/>
           </a:xfrm>
           <a:prstGeom prst="rect">
             <a:avLst/>
@@ -10538,8 +10420,8 @@
         </p:nvSpPr>
         <p:spPr>
           <a:xfrm>
-            <a:off x="8522208" y="4018436"/>
-            <a:ext cx="2962656" cy="829994"/>
+            <a:off x="8522208" y="4159113"/>
+            <a:ext cx="2962656" cy="942535"/>
           </a:xfrm>
           <a:prstGeom prst="rect">
             <a:avLst/>
@@ -10594,8 +10476,8 @@
         </p:nvSpPr>
         <p:spPr>
           <a:xfrm>
-            <a:off x="5138928" y="4958158"/>
-            <a:ext cx="45720" cy="829994"/>
+            <a:off x="5138928" y="5211377"/>
+            <a:ext cx="45720" cy="942535"/>
           </a:xfrm>
           <a:prstGeom prst="rect">
             <a:avLst/>
@@ -10614,8 +10496,8 @@
         </p:nvSpPr>
         <p:spPr>
           <a:xfrm>
-            <a:off x="5266944" y="4958158"/>
-            <a:ext cx="2962656" cy="829994"/>
+            <a:off x="5266944" y="5211377"/>
+            <a:ext cx="2962656" cy="942535"/>
           </a:xfrm>
           <a:prstGeom prst="rect">
             <a:avLst/>
@@ -10670,8 +10552,8 @@
         </p:nvSpPr>
         <p:spPr>
           <a:xfrm>
-            <a:off x="8394192" y="4958158"/>
-            <a:ext cx="45720" cy="829994"/>
+            <a:off x="8394192" y="5211377"/>
+            <a:ext cx="45720" cy="942535"/>
           </a:xfrm>
           <a:prstGeom prst="rect">
             <a:avLst/>
@@ -10690,8 +10572,8 @@
         </p:nvSpPr>
         <p:spPr>
           <a:xfrm>
-            <a:off x="8522208" y="4958158"/>
-            <a:ext cx="2962656" cy="829994"/>
+            <a:off x="8522208" y="5211377"/>
+            <a:ext cx="2962656" cy="942535"/>
           </a:xfrm>
           <a:prstGeom prst="rect">
             <a:avLst/>
@@ -10735,65 +10617,6 @@
               <a:t>The hours we set and pay the tech on menu jobs; repair times come from labor guides</a:t>
             </a:r>
             <a:endParaRPr lang="en-US" sz="1400" dirty="0"/>
-          </a:p>
-        </p:txBody>
-      </p:sp>
-      <p:sp>
-        <p:nvSpPr>
-          <p:cNvPr id="25" name="Shape 23"/>
-          <p:cNvSpPr/>
-          <p:nvPr/>
-        </p:nvSpPr>
-        <p:spPr>
-          <a:xfrm>
-            <a:off x="457200" y="6126480"/>
-            <a:ext cx="11274552" cy="364236"/>
-          </a:xfrm>
-          <a:prstGeom prst="rect">
-            <a:avLst/>
-          </a:prstGeom>
-          <a:solidFill>
-            <a:srgbClr val="E6F6EE"/>
-          </a:solidFill>
-          <a:ln/>
-        </p:spPr>
-      </p:sp>
-      <p:sp>
-        <p:nvSpPr>
-          <p:cNvPr id="26" name="Text 24"/>
-          <p:cNvSpPr txBox="1"/>
-          <p:nvPr/>
-        </p:nvSpPr>
-        <p:spPr>
-          <a:xfrm>
-            <a:off x="658368" y="6144768"/>
-            <a:ext cx="10927080" cy="327660"/>
-          </a:xfrm>
-          <a:prstGeom prst="rect">
-            <a:avLst/>
-          </a:prstGeom>
-          <a:noFill/>
-          <a:ln/>
-        </p:spPr>
-        <p:txBody>
-          <a:bodyPr wrap="square" lIns="0" tIns="0" rIns="0" bIns="0" rtlCol="0" anchor="ctr"/>
-          <a:lstStyle/>
-          <a:p>
-            <a:pPr indent="0" marL="0">
-              <a:buNone/>
-            </a:pPr>
-            <a:r>
-              <a:rPr lang="en-US" sz="1550" b="1" dirty="0">
-                <a:solidFill>
-                  <a:srgbClr val="0B7A4A"/>
-                </a:solidFill>
-                <a:latin typeface="Inter" pitchFamily="34" charset="0"/>
-                <a:ea typeface="Inter" pitchFamily="34" charset="-122"/>
-                <a:cs typeface="Inter" pitchFamily="34" charset="-120"/>
-              </a:rPr>
-              <a:t>Group: $162.42 CP ELR, up $3.56. Jul-Sep it ran 74.7% of door rate; 25 of 33 stores at or above 70%.</a:t>
-            </a:r>
-            <a:endParaRPr lang="en-US" sz="1550" dirty="0"/>
           </a:p>
         </p:txBody>
       </p:sp>

--- a/day2-deck/decks/Metric Explainers - Review.pptx
+++ b/day2-deck/decks/Metric Explainers - Review.pptx
@@ -1051,7 +1051,7 @@
             <a:r>
               <a:rPr lang="en-US" dirty="0"/>
               <a:t>Source: Definitions match the data slides: Qlik - Closed Repair Orders (all customer-pay ROs, by close month), Profit &amp; Loss and Productivity apps, Jan-Sep 2026 vs 2025, same-store, 33 stores. Worked example: Service Manager Roundtable, Nov 15, 2024, slide 21.PLACE: CP Engine, in front of CP Hours per RO.
-$4,543,691 = 0.1 x 279,756 CP ROs (27,976 hours) x $162.42 CP ELR (on the Hours per RO data slide). Slide rounds to $162 and $4.5M so the room can follow it (Noah, Oct 23).</a:t>
+$6,602,564 a year = 0.1 x each store's CP RO count x its own CP labor + parts gross per sold hour, Jan-Sep x 12/9 (279,756 CP ROs: 27,976 hours Jan-Sep, 37,301 a year; about $177 an hour on that mix). Same figure as What 0.1 Hour per RO Is Worth and Where the Money Is (Oct 28 audit; was $4,543,691 Jan-Sep labor sale).</a:t>
             </a:r>
             <a:endParaRPr lang="en-US" dirty="0"/>
           </a:p>
@@ -1588,7 +1588,7 @@
             <a:r>
               <a:rPr lang="en-US" dirty="0"/>
               <a:t>Source: Definitions match the data slides: Qlik - Closed Repair Orders (all customer-pay ROs, by close month), Profit &amp; Loss and Productivity apps, Jan-Sep 2026 vs 2025, same-store, 33 stores. Worked example: Service Manager Roundtable, Nov 15, 2024, slide 21.PLACE: Profitability, in front of Fixed Ops Absorption %.
-P&amp;L definition: line 254 Total Gross Profit - Fixed Ops / line 258 Fixed Expenses (the stored line 257 returns a dollar value, so the slide derives it). GMC Prescott includes its body shop, as on the P&amp;L.</a:t>
+P&amp;L definition: line 254 Total Gross Profit - Fixed Ops / line 258 Fixed Expenses (the stored line 257 returns a dollar value, so the slide derives it). GMC Prescott body shop taken out (its gross and its body shop fixed expenses), as everywhere in the deck (Noah, Oct 28).</a:t>
             </a:r>
             <a:endParaRPr lang="en-US" dirty="0"/>
           </a:p>
@@ -8930,7 +8930,7 @@
                 <a:ea typeface="Inter" pitchFamily="34" charset="-122"/>
                 <a:cs typeface="Inter" pitchFamily="34" charset="-120"/>
               </a:rPr>
-              <a:t>= 27,976 more hours</a:t>
+              <a:t>= 37,301 hours a year</a:t>
             </a:r>
             <a:endParaRPr lang="en-US" sz="1400" dirty="0"/>
           </a:p>
@@ -8996,7 +8996,7 @@
                 <a:ea typeface="Inter" pitchFamily="34" charset="-122"/>
                 <a:cs typeface="Inter" pitchFamily="34" charset="-120"/>
               </a:rPr>
-              <a:t>× $162 an hour (our ELR)  </a:t>
+              <a:t>× each store's gross per hour  </a:t>
             </a:r>
             <a:pPr algn="ctr" indent="0" marL="0">
               <a:buNone/>
@@ -9010,7 +9010,7 @@
                 <a:ea typeface="Inter" pitchFamily="34" charset="-122"/>
                 <a:cs typeface="Inter" pitchFamily="34" charset="-120"/>
               </a:rPr>
-              <a:t>= $4.5M more labor</a:t>
+              <a:t>= $6.6M a year</a:t>
             </a:r>
             <a:endParaRPr lang="en-US" sz="1400" dirty="0"/>
           </a:p>
@@ -15446,7 +15446,7 @@
                 <a:ea typeface="Inter" pitchFamily="34" charset="-122"/>
                 <a:cs typeface="Inter" pitchFamily="34" charset="-120"/>
               </a:rPr>
-              <a:t>78.1%</a:t>
+              <a:t>77.9%</a:t>
             </a:r>
             <a:endParaRPr lang="en-US" sz="1400" dirty="0"/>
           </a:p>
@@ -16012,7 +16012,7 @@
                 <a:ea typeface="Inter" pitchFamily="34" charset="-122"/>
                 <a:cs typeface="Inter" pitchFamily="34" charset="-120"/>
               </a:rPr>
-              <a:t>Group: 78.1% absorption, up 2.1 pts. Fixed gross grew 4.1%; fixed expenses 1.3%.</a:t>
+              <a:t>Group: 77.9% absorption, up 2.1 pts. Fixed gross grew 4.1%; fixed expenses 1.4%.</a:t>
             </a:r>
             <a:endParaRPr lang="en-US" sz="1600" dirty="0"/>
           </a:p>

--- a/day2-deck/decks/Metric Explainers - Review.pptx
+++ b/day2-deck/decks/Metric Explainers - Review.pptx
@@ -872,7 +872,7 @@
           <a:p>
             <a:r>
               <a:rPr lang="en-US" dirty="0"/>
-              <a:t>Source: Definitions match the data slides: Qlik - Closed Repair Orders (all customer-pay ROs, by close month), Profit &amp; Loss and Productivity apps, Jan-Sep 2026 vs 2025, same-store, 33 stores. Worked example: Service Manager Roundtable, Nov 15, 2024, slide 21.PLACE: Gross section, after Service Is Sales 2.0 and in front of Total Gross Profit - Fixed Ops.
+              <a:t>Source: Definitions match the data slides: Qlik - Profit &amp; Loss (GM and Detail statements), Jan-Sep 2026 vs 2025, same-store, 33 stores, GMC Prescott body shop out.PLACE: Gross section, after Service Is Sales 2.0 and in front of Total Gross Profit - Fixed Ops.
 Source: Qlik Profit &amp; Loss, Total Gross Profit - Service and Total Gross Profit - Parts, same-store, INEOS excluded, GMC Prescott body shop gross excluded (as on the gross slides). Hourly technician pay, guarantees and bonuses paid off the RO post as unapplied labor: not charged on any repair order, a cost-of-sale adjustment that reduces service gross (Noah, Oct 23).</a:t>
             </a:r>
             <a:endParaRPr lang="en-US" dirty="0"/>
@@ -1587,7 +1587,7 @@
           <a:p>
             <a:r>
               <a:rPr lang="en-US" dirty="0"/>
-              <a:t>Source: Definitions match the data slides: Qlik - Closed Repair Orders (all customer-pay ROs, by close month), Profit &amp; Loss and Productivity apps, Jan-Sep 2026 vs 2025, same-store, 33 stores. Worked example: Service Manager Roundtable, Nov 15, 2024, slide 21.PLACE: Profitability, in front of Fixed Ops Absorption %.
+              <a:t>Source: Definitions match the data slides: Qlik - Profit &amp; Loss (GM and Detail statements), Jan-Sep 2026 vs 2025, same-store, 33 stores, GMC Prescott body shop out.PLACE: Profitability, in front of Fixed Ops Absorption %.
 P&amp;L definition: line 254 Total Gross Profit - Fixed Ops / line 258 Fixed Expenses (the stored line 257 returns a dollar value, so the slide derives it). GMC Prescott body shop taken out (its gross and its body shop fixed expenses), as everywhere in the deck (Noah, Oct 28).</a:t>
             </a:r>
             <a:endParaRPr lang="en-US" dirty="0"/>
@@ -1676,7 +1676,7 @@
           <a:p>
             <a:r>
               <a:rPr lang="en-US" dirty="0"/>
-              <a:t>Source: Definitions match the data slides: Qlik - Closed Repair Orders (all customer-pay ROs, by close month), Profit &amp; Loss and Productivity apps, Jan-Sep 2026 vs 2025, same-store, 33 stores. Worked example: Service Manager Roundtable, Nov 15, 2024, slide 21.PLACE: Profitability, in front of Service Net to Gross %.
+              <a:t>Source: Definitions match the data slides: Qlik - Profit &amp; Loss (GM and Detail statements), Jan-Sep 2026 vs 2025, same-store, 33 stores, GMC Prescott body shop out.PLACE: Profitability, in front of Service Net to Gross %.
 P&amp;L Detail statement: DEPARTMENT PROFIT OR LOSS / GROSS PROFIT / INCOME, Mechanical Dept (service) and P&amp;A Dept (parts).</a:t>
             </a:r>
             <a:endParaRPr lang="en-US" dirty="0"/>

--- a/day2-deck/decks/Metric Explainers - Review.pptx
+++ b/day2-deck/decks/Metric Explainers - Review.pptx
@@ -872,7 +872,7 @@
           <a:p>
             <a:r>
               <a:rPr lang="en-US" dirty="0"/>
-              <a:t>Source: Definitions match the data slides: Qlik - Profit &amp; Loss (GM and Detail statements), Jan-Sep 2026 vs 2025, same-store, 33 stores, GMC Prescott body shop out.PLACE: Gross section, after Service Is Sales 2.0 and in front of Total Gross Profit - Fixed Ops.
+              <a:t>Source: Definitions match the data slides: Qlik - Profit &amp; Loss (GM and Detail statements), Jan-Sep 2026 vs 2025, same-store, 33 stores. Absorption includes the GMC Prescott body shop, as on the P&amp;L; gross and net to gross exclude it.PLACE: Gross section, after Service Is Sales 2.0 and in front of Total Gross Profit - Fixed Ops.
 Source: Qlik Profit &amp; Loss, Total Gross Profit - Service and Total Gross Profit - Parts, same-store, INEOS excluded, GMC Prescott body shop gross excluded (as on the gross slides). Hourly technician pay, guarantees and bonuses paid off the RO post as unapplied labor: not charged on any repair order, a cost-of-sale adjustment that reduces service gross (Noah, Oct 23).</a:t>
             </a:r>
             <a:endParaRPr lang="en-US" dirty="0"/>
@@ -1587,8 +1587,8 @@
           <a:p>
             <a:r>
               <a:rPr lang="en-US" dirty="0"/>
-              <a:t>Source: Definitions match the data slides: Qlik - Profit &amp; Loss (GM and Detail statements), Jan-Sep 2026 vs 2025, same-store, 33 stores, GMC Prescott body shop out.PLACE: Profitability, in front of Fixed Ops Absorption %.
-P&amp;L definition: line 254 Total Gross Profit - Fixed Ops / line 258 Fixed Expenses (the stored line 257 returns a dollar value, so the slide derives it). GMC Prescott body shop taken out (its gross and its body shop fixed expenses), as everywhere in the deck (Noah, Oct 28).</a:t>
+              <a:t>Source: Definitions match the data slides: Qlik - Profit &amp; Loss (GM and Detail statements), Jan-Sep 2026 vs 2025, same-store, 33 stores. Absorption includes the GMC Prescott body shop, as on the P&amp;L; gross and net to gross exclude it.PLACE: Profitability, in front of Fixed Ops Absorption %.
+P&amp;L definition: line 254 Total Gross Profit - Fixed Ops / line 258 Fixed Expenses (the stored line 257 returns a dollar value, so the slide derives it). GMC Prescott includes its body shop, as on the P&amp;L (Noah, Oct 28).</a:t>
             </a:r>
             <a:endParaRPr lang="en-US" dirty="0"/>
           </a:p>
@@ -1676,7 +1676,7 @@
           <a:p>
             <a:r>
               <a:rPr lang="en-US" dirty="0"/>
-              <a:t>Source: Definitions match the data slides: Qlik - Profit &amp; Loss (GM and Detail statements), Jan-Sep 2026 vs 2025, same-store, 33 stores, GMC Prescott body shop out.PLACE: Profitability, in front of Service Net to Gross %.
+              <a:t>Source: Definitions match the data slides: Qlik - Profit &amp; Loss (GM and Detail statements), Jan-Sep 2026 vs 2025, same-store, 33 stores. Absorption includes the GMC Prescott body shop, as on the P&amp;L; gross and net to gross exclude it.PLACE: Profitability, in front of Service Net to Gross %.
 P&amp;L Detail statement: DEPARTMENT PROFIT OR LOSS / GROSS PROFIT / INCOME, Mechanical Dept (service) and P&amp;A Dept (parts).</a:t>
             </a:r>
             <a:endParaRPr lang="en-US" dirty="0"/>
@@ -15446,7 +15446,7 @@
                 <a:ea typeface="Inter" pitchFamily="34" charset="-122"/>
                 <a:cs typeface="Inter" pitchFamily="34" charset="-120"/>
               </a:rPr>
-              <a:t>77.9%</a:t>
+              <a:t>78.1%</a:t>
             </a:r>
             <a:endParaRPr lang="en-US" sz="1400" dirty="0"/>
           </a:p>
@@ -16012,7 +16012,7 @@
                 <a:ea typeface="Inter" pitchFamily="34" charset="-122"/>
                 <a:cs typeface="Inter" pitchFamily="34" charset="-120"/>
               </a:rPr>
-              <a:t>Group: 77.9% absorption, up 2.1 pts. Fixed gross grew 4.1%; fixed expenses 1.4%.</a:t>
+              <a:t>Group: 78.1% absorption, up 2.1 pts. Fixed gross grew 4.1%; fixed expenses 1.3%.</a:t>
             </a:r>
             <a:endParaRPr lang="en-US" sz="1600" dirty="0"/>
           </a:p>

--- a/day2-deck/decks/Metric Explainers - Review.pptx
+++ b/day2-deck/decks/Metric Explainers - Review.pptx
@@ -5681,7 +5681,7 @@
                 <a:ea typeface="Inter" pitchFamily="34" charset="-122"/>
                 <a:cs typeface="Inter" pitchFamily="34" charset="-120"/>
               </a:rPr>
-              <a:t>January through September 2026, year to date. Vacation, paid time off and holiday pay are excluded from clocked hours. Store = total hours flagged ÷ total clocked hours.</a:t>
+              <a:t>January through September 2026, year to date. Clocked hours exclude vacation, paid time off and holiday pay. Store = total hours flagged ÷ total clocked hours.</a:t>
             </a:r>
             <a:endParaRPr lang="en-US" sz="1400" dirty="0"/>
           </a:p>
@@ -8364,7 +8364,7 @@
         <p:spPr>
           <a:xfrm>
             <a:off x="713232" y="4709160"/>
-            <a:ext cx="10762488" cy="1572768"/>
+            <a:ext cx="10762488" cy="1261872"/>
           </a:xfrm>
           <a:prstGeom prst="rect">
             <a:avLst/>
@@ -8489,45 +8489,6 @@
               <a:t>Productivity × efficiency = proficiency:  75% × 125% = 93.75%</a:t>
             </a:r>
             <a:endParaRPr lang="en-US" sz="1800" dirty="0"/>
-          </a:p>
-        </p:txBody>
-      </p:sp>
-      <p:sp>
-        <p:nvSpPr>
-          <p:cNvPr id="31" name="Text 29"/>
-          <p:cNvSpPr txBox="1"/>
-          <p:nvPr/>
-        </p:nvSpPr>
-        <p:spPr>
-          <a:xfrm>
-            <a:off x="896112" y="5897880"/>
-            <a:ext cx="10396728" cy="292608"/>
-          </a:xfrm>
-          <a:prstGeom prst="rect">
-            <a:avLst/>
-          </a:prstGeom>
-          <a:noFill/>
-          <a:ln/>
-        </p:spPr>
-        <p:txBody>
-          <a:bodyPr wrap="square" lIns="0" tIns="0" rIns="0" bIns="0" rtlCol="0" anchor="ctr"/>
-          <a:lstStyle/>
-          <a:p>
-            <a:pPr indent="0" marL="0">
-              <a:buNone/>
-            </a:pPr>
-            <a:r>
-              <a:rPr lang="en-US" sz="1500" dirty="0">
-                <a:solidFill>
-                  <a:srgbClr val="595959"/>
-                </a:solidFill>
-                <a:latin typeface="Inter" pitchFamily="34" charset="0"/>
-                <a:ea typeface="Inter" pitchFamily="34" charset="-122"/>
-                <a:cs typeface="Inter" pitchFamily="34" charset="-120"/>
-              </a:rPr>
-              <a:t>Clocked hours exclude vacation, paid time off and holiday pay.</a:t>
-            </a:r>
-            <a:endParaRPr lang="en-US" sz="1500" dirty="0"/>
           </a:p>
         </p:txBody>
       </p:sp>

--- a/day2-deck/decks/Metric Explainers - Review.pptx
+++ b/day2-deck/decks/Metric Explainers - Review.pptx
@@ -4140,7 +4140,7 @@
                 <a:ea typeface="Inter" pitchFamily="34" charset="-122"/>
                 <a:cs typeface="Inter" pitchFamily="34" charset="-120"/>
               </a:rPr>
-              <a:t>All four rose 1.2-1.4 pts and beat 2025 every month. Balance is furthest off, at 8.3%: 18,493 short of 15%.</a:t>
+              <a:t>All four rose 1.3-1.4 pts and beat 2025 every month. Balance is furthest off, at 8.3%: 18,493 short of 15%.</a:t>
             </a:r>
             <a:endParaRPr lang="en-US" sz="1450" dirty="0"/>
           </a:p>
